--- a/SIH26036-presentation.pptx
+++ b/SIH26036-presentation.pptx
@@ -1,20 +1,20 @@
 
 <file path=ppt/presentation.xml><?xml version="1.0" encoding="utf-8"?>
-<p:presentation xmlns:a="http://schemas.openxmlformats.org/drawingml/2006/main" xmlns:r="http://schemas.openxmlformats.org/officeDocument/2006/relationships" xmlns:p="http://schemas.openxmlformats.org/presentationml/2006/main" showSpecialPlsOnTitleSld="0" saveSubsetFonts="1" autoCompressPictures="0">
+<p:presentation xmlns:a="http://schemas.openxmlformats.org/drawingml/2006/main" xmlns:r="http://schemas.openxmlformats.org/officeDocument/2006/relationships" xmlns:p="http://schemas.openxmlformats.org/presentationml/2006/main" showSpecialPlsOnTitleSld="0" autoCompressPictures="0">
   <p:sldMasterIdLst>
     <p:sldMasterId id="2147483648" r:id="rId1"/>
   </p:sldMasterIdLst>
   <p:notesMasterIdLst>
-    <p:notesMasterId r:id="rId9"/>
+    <p:notesMasterId r:id="rId5"/>
   </p:notesMasterIdLst>
   <p:sldIdLst>
-    <p:sldId id="291" r:id="rId2"/>
-    <p:sldId id="281" r:id="rId3"/>
-    <p:sldId id="290" r:id="rId4"/>
-    <p:sldId id="293" r:id="rId5"/>
-    <p:sldId id="294" r:id="rId6"/>
-    <p:sldId id="296" r:id="rId7"/>
-    <p:sldId id="297" r:id="rId8"/>
+    <p:sldId id="291" r:id="rId3"/>
+    <p:sldId id="281" r:id="rId4"/>
+    <p:sldId id="290" r:id="rId6"/>
+    <p:sldId id="293" r:id="rId7"/>
+    <p:sldId id="294" r:id="rId8"/>
+    <p:sldId id="296" r:id="rId9"/>
+    <p:sldId id="297" r:id="rId10"/>
   </p:sldIdLst>
   <p:sldSz cx="12192000" cy="6858000"/>
   <p:notesSz cx="6858000" cy="9144000"/>
@@ -33,8 +33,8 @@
         <a:solidFill>
           <a:schemeClr val="tx1"/>
         </a:solidFill>
-        <a:latin typeface="Calibri" pitchFamily="34" charset="0"/>
-        <a:ea typeface="ＭＳ Ｐゴシック" pitchFamily="1" charset="-128"/>
+        <a:latin typeface="Calibri" panose="020F0502020204030204" pitchFamily="34" charset="0"/>
+        <a:ea typeface="MS PGothic" panose="020B0600070205080204" pitchFamily="1" charset="-128"/>
         <a:cs typeface="+mn-cs"/>
       </a:defRPr>
     </a:lvl1pPr>
@@ -49,8 +49,8 @@
         <a:solidFill>
           <a:schemeClr val="tx1"/>
         </a:solidFill>
-        <a:latin typeface="Calibri" pitchFamily="34" charset="0"/>
-        <a:ea typeface="ＭＳ Ｐゴシック" pitchFamily="1" charset="-128"/>
+        <a:latin typeface="Calibri" panose="020F0502020204030204" pitchFamily="34" charset="0"/>
+        <a:ea typeface="MS PGothic" panose="020B0600070205080204" pitchFamily="1" charset="-128"/>
         <a:cs typeface="+mn-cs"/>
       </a:defRPr>
     </a:lvl2pPr>
@@ -65,8 +65,8 @@
         <a:solidFill>
           <a:schemeClr val="tx1"/>
         </a:solidFill>
-        <a:latin typeface="Calibri" pitchFamily="34" charset="0"/>
-        <a:ea typeface="ＭＳ Ｐゴシック" pitchFamily="1" charset="-128"/>
+        <a:latin typeface="Calibri" panose="020F0502020204030204" pitchFamily="34" charset="0"/>
+        <a:ea typeface="MS PGothic" panose="020B0600070205080204" pitchFamily="1" charset="-128"/>
         <a:cs typeface="+mn-cs"/>
       </a:defRPr>
     </a:lvl3pPr>
@@ -81,8 +81,8 @@
         <a:solidFill>
           <a:schemeClr val="tx1"/>
         </a:solidFill>
-        <a:latin typeface="Calibri" pitchFamily="34" charset="0"/>
-        <a:ea typeface="ＭＳ Ｐゴシック" pitchFamily="1" charset="-128"/>
+        <a:latin typeface="Calibri" panose="020F0502020204030204" pitchFamily="34" charset="0"/>
+        <a:ea typeface="MS PGothic" panose="020B0600070205080204" pitchFamily="1" charset="-128"/>
         <a:cs typeface="+mn-cs"/>
       </a:defRPr>
     </a:lvl4pPr>
@@ -97,8 +97,8 @@
         <a:solidFill>
           <a:schemeClr val="tx1"/>
         </a:solidFill>
-        <a:latin typeface="Calibri" pitchFamily="34" charset="0"/>
-        <a:ea typeface="ＭＳ Ｐゴシック" pitchFamily="1" charset="-128"/>
+        <a:latin typeface="Calibri" panose="020F0502020204030204" pitchFamily="34" charset="0"/>
+        <a:ea typeface="MS PGothic" panose="020B0600070205080204" pitchFamily="1" charset="-128"/>
         <a:cs typeface="+mn-cs"/>
       </a:defRPr>
     </a:lvl5pPr>
@@ -107,8 +107,8 @@
         <a:solidFill>
           <a:schemeClr val="tx1"/>
         </a:solidFill>
-        <a:latin typeface="Calibri" pitchFamily="34" charset="0"/>
-        <a:ea typeface="ＭＳ Ｐゴシック" pitchFamily="1" charset="-128"/>
+        <a:latin typeface="Calibri" panose="020F0502020204030204" pitchFamily="34" charset="0"/>
+        <a:ea typeface="MS PGothic" panose="020B0600070205080204" pitchFamily="1" charset="-128"/>
         <a:cs typeface="+mn-cs"/>
       </a:defRPr>
     </a:lvl6pPr>
@@ -117,8 +117,8 @@
         <a:solidFill>
           <a:schemeClr val="tx1"/>
         </a:solidFill>
-        <a:latin typeface="Calibri" pitchFamily="34" charset="0"/>
-        <a:ea typeface="ＭＳ Ｐゴシック" pitchFamily="1" charset="-128"/>
+        <a:latin typeface="Calibri" panose="020F0502020204030204" pitchFamily="34" charset="0"/>
+        <a:ea typeface="MS PGothic" panose="020B0600070205080204" pitchFamily="1" charset="-128"/>
         <a:cs typeface="+mn-cs"/>
       </a:defRPr>
     </a:lvl7pPr>
@@ -127,8 +127,8 @@
         <a:solidFill>
           <a:schemeClr val="tx1"/>
         </a:solidFill>
-        <a:latin typeface="Calibri" pitchFamily="34" charset="0"/>
-        <a:ea typeface="ＭＳ Ｐゴシック" pitchFamily="1" charset="-128"/>
+        <a:latin typeface="Calibri" panose="020F0502020204030204" pitchFamily="34" charset="0"/>
+        <a:ea typeface="MS PGothic" panose="020B0600070205080204" pitchFamily="1" charset="-128"/>
         <a:cs typeface="+mn-cs"/>
       </a:defRPr>
     </a:lvl8pPr>
@@ -137,8 +137,8 @@
         <a:solidFill>
           <a:schemeClr val="tx1"/>
         </a:solidFill>
-        <a:latin typeface="Calibri" pitchFamily="34" charset="0"/>
-        <a:ea typeface="ＭＳ Ｐゴシック" pitchFamily="1" charset="-128"/>
+        <a:latin typeface="Calibri" panose="020F0502020204030204" pitchFamily="34" charset="0"/>
+        <a:ea typeface="MS PGothic" panose="020B0600070205080204" pitchFamily="1" charset="-128"/>
         <a:cs typeface="+mn-cs"/>
       </a:defRPr>
     </a:lvl9pPr>
@@ -248,11 +248,7 @@
           </a:prstGeom>
         </p:spPr>
         <p:txBody>
-          <a:bodyPr vert="horz" wrap="square" lIns="91440" tIns="45720" rIns="91440" bIns="45720" numCol="1" anchor="t" anchorCtr="0" compatLnSpc="1">
-            <a:prstTxWarp prst="textNoShape">
-              <a:avLst/>
-            </a:prstTxWarp>
-          </a:bodyPr>
+          <a:bodyPr vert="horz" wrap="square" lIns="91440" tIns="45720" rIns="91440" bIns="45720" numCol="1" anchor="t" anchorCtr="0" compatLnSpc="1"/>
           <a:lstStyle>
             <a:lvl1pPr algn="r">
               <a:defRPr sz="1200"/>
@@ -261,8 +257,6 @@
           <a:p>
             <a:fld id="{C4D5ADD5-2BBC-4A94-8F86-D9013941F742}" type="datetimeFigureOut">
               <a:rPr lang="en-US"/>
-              <a:pPr/>
-              <a:t>6/2/2026</a:t>
             </a:fld>
             <a:endParaRPr lang="en-US"/>
           </a:p>
@@ -332,6 +326,7 @@
               <a:rPr lang="en-US" noProof="0"/>
               <a:t>Click to edit Master text styles</a:t>
             </a:r>
+            <a:endParaRPr lang="en-US" noProof="0"/>
           </a:p>
           <a:p>
             <a:pPr lvl="1"/>
@@ -339,6 +334,7 @@
               <a:rPr lang="en-US" noProof="0"/>
               <a:t>Second level</a:t>
             </a:r>
+            <a:endParaRPr lang="en-US" noProof="0"/>
           </a:p>
           <a:p>
             <a:pPr lvl="2"/>
@@ -346,6 +342,7 @@
               <a:rPr lang="en-US" noProof="0"/>
               <a:t>Third level</a:t>
             </a:r>
+            <a:endParaRPr lang="en-US" noProof="0"/>
           </a:p>
           <a:p>
             <a:pPr lvl="3"/>
@@ -353,6 +350,7 @@
               <a:rPr lang="en-US" noProof="0"/>
               <a:t>Fourth level</a:t>
             </a:r>
+            <a:endParaRPr lang="en-US" noProof="0"/>
           </a:p>
           <a:p>
             <a:pPr lvl="4"/>
@@ -360,6 +358,7 @@
               <a:rPr lang="en-US" noProof="0"/>
               <a:t>Fifth level</a:t>
             </a:r>
+            <a:endParaRPr lang="en-US" noProof="0"/>
           </a:p>
         </p:txBody>
       </p:sp>
@@ -427,11 +426,7 @@
           </a:prstGeom>
         </p:spPr>
         <p:txBody>
-          <a:bodyPr vert="horz" wrap="square" lIns="91440" tIns="45720" rIns="91440" bIns="45720" numCol="1" anchor="b" anchorCtr="0" compatLnSpc="1">
-            <a:prstTxWarp prst="textNoShape">
-              <a:avLst/>
-            </a:prstTxWarp>
-          </a:bodyPr>
+          <a:bodyPr vert="horz" wrap="square" lIns="91440" tIns="45720" rIns="91440" bIns="45720" numCol="1" anchor="b" anchorCtr="0" compatLnSpc="1"/>
           <a:lstStyle>
             <a:lvl1pPr algn="r">
               <a:defRPr sz="1200"/>
@@ -440,19 +435,12 @@
           <a:p>
             <a:fld id="{EC790738-CFC9-4A5E-8424-6B42AA5706F7}" type="slidenum">
               <a:rPr lang="en-US"/>
-              <a:pPr/>
-              <a:t>‹#›</a:t>
             </a:fld>
             <a:endParaRPr lang="en-US"/>
           </a:p>
         </p:txBody>
       </p:sp>
     </p:spTree>
-    <p:extLst>
-      <p:ext uri="{BB962C8B-B14F-4D97-AF65-F5344CB8AC3E}">
-        <p14:creationId xmlns:p14="http://schemas.microsoft.com/office/powerpoint/2010/main" val="235749454"/>
-      </p:ext>
-    </p:extLst>
   </p:cSld>
   <p:clrMap bg1="lt1" tx1="dk1" bg2="lt2" tx2="dk2" accent1="accent1" accent2="accent2" accent3="accent3" accent4="accent4" accent5="accent5" accent6="accent6" hlink="hlink" folHlink="folHlink"/>
   <p:notesStyle>
@@ -468,8 +456,8 @@
           <a:schemeClr val="tx1"/>
         </a:solidFill>
         <a:latin typeface="+mn-lt"/>
-        <a:ea typeface="ＭＳ Ｐゴシック" charset="0"/>
-        <a:cs typeface="ＭＳ Ｐゴシック" charset="0"/>
+        <a:ea typeface="MS PGothic" panose="020B0600070205080204" pitchFamily="1" charset="-128"/>
+        <a:cs typeface="MS PGothic" panose="020B0600070205080204" pitchFamily="1" charset="-128"/>
       </a:defRPr>
     </a:lvl1pPr>
     <a:lvl2pPr marL="457200" algn="l" defTabSz="457200" rtl="0" eaLnBrk="0" fontAlgn="base" hangingPunct="0">
@@ -484,7 +472,7 @@
           <a:schemeClr val="tx1"/>
         </a:solidFill>
         <a:latin typeface="+mn-lt"/>
-        <a:ea typeface="ＭＳ Ｐゴシック" charset="0"/>
+        <a:ea typeface="MS PGothic" panose="020B0600070205080204" pitchFamily="1" charset="-128"/>
         <a:cs typeface="+mn-cs"/>
       </a:defRPr>
     </a:lvl2pPr>
@@ -500,7 +488,7 @@
           <a:schemeClr val="tx1"/>
         </a:solidFill>
         <a:latin typeface="+mn-lt"/>
-        <a:ea typeface="ＭＳ Ｐゴシック" charset="0"/>
+        <a:ea typeface="MS PGothic" panose="020B0600070205080204" pitchFamily="1" charset="-128"/>
         <a:cs typeface="+mn-cs"/>
       </a:defRPr>
     </a:lvl3pPr>
@@ -516,7 +504,7 @@
           <a:schemeClr val="tx1"/>
         </a:solidFill>
         <a:latin typeface="+mn-lt"/>
-        <a:ea typeface="ＭＳ Ｐゴシック" charset="0"/>
+        <a:ea typeface="MS PGothic" panose="020B0600070205080204" pitchFamily="1" charset="-128"/>
         <a:cs typeface="+mn-cs"/>
       </a:defRPr>
     </a:lvl4pPr>
@@ -532,7 +520,7 @@
           <a:schemeClr val="tx1"/>
         </a:solidFill>
         <a:latin typeface="+mn-lt"/>
-        <a:ea typeface="ＭＳ Ｐゴシック" charset="0"/>
+        <a:ea typeface="MS PGothic" panose="020B0600070205080204" pitchFamily="1" charset="-128"/>
         <a:cs typeface="+mn-cs"/>
       </a:defRPr>
     </a:lvl5pPr>
@@ -618,8 +606,6 @@
               <a:srgbClr val="000000"/>
             </a:solidFill>
             <a:miter lim="800000"/>
-            <a:headEnd/>
-            <a:tailEnd/>
           </a:ln>
         </p:spPr>
       </p:sp>
@@ -637,11 +623,7 @@
           <a:noFill/>
         </p:spPr>
         <p:txBody>
-          <a:bodyPr wrap="square" numCol="1" anchor="t" anchorCtr="0" compatLnSpc="1">
-            <a:prstTxWarp prst="textNoShape">
-              <a:avLst/>
-            </a:prstTxWarp>
-          </a:bodyPr>
+          <a:bodyPr wrap="square" numCol="1" anchor="t" anchorCtr="0" compatLnSpc="1"/>
           <a:lstStyle/>
           <a:p>
             <a:pPr eaLnBrk="1" hangingPunct="1">
@@ -650,7 +632,7 @@
               </a:spcBef>
             </a:pPr>
             <a:endParaRPr lang="en-US">
-              <a:ea typeface="ＭＳ Ｐゴシック" pitchFamily="1" charset="-128"/>
+              <a:ea typeface="MS PGothic" panose="020B0600070205080204" pitchFamily="1" charset="-128"/>
             </a:endParaRPr>
           </a:p>
         </p:txBody>
@@ -669,8 +651,6 @@
           <a:noFill/>
           <a:ln>
             <a:miter lim="800000"/>
-            <a:headEnd/>
-            <a:tailEnd/>
           </a:ln>
         </p:spPr>
         <p:txBody>
@@ -679,19 +659,12 @@
           <a:p>
             <a:fld id="{65F62A7E-A2F8-438F-9CF8-47DE63F471B4}" type="slidenum">
               <a:rPr lang="en-US"/>
-              <a:pPr/>
-              <a:t>2</a:t>
             </a:fld>
             <a:endParaRPr lang="en-US"/>
           </a:p>
         </p:txBody>
       </p:sp>
     </p:spTree>
-    <p:extLst>
-      <p:ext uri="{BB962C8B-B14F-4D97-AF65-F5344CB8AC3E}">
-        <p14:creationId xmlns:p14="http://schemas.microsoft.com/office/powerpoint/2010/main" val="2904073229"/>
-      </p:ext>
-    </p:extLst>
   </p:cSld>
   <p:clrMapOvr>
     <a:masterClrMapping/>
@@ -737,8 +710,6 @@
               <a:srgbClr val="000000"/>
             </a:solidFill>
             <a:miter lim="800000"/>
-            <a:headEnd/>
-            <a:tailEnd/>
           </a:ln>
         </p:spPr>
       </p:sp>
@@ -756,11 +727,7 @@
           <a:noFill/>
         </p:spPr>
         <p:txBody>
-          <a:bodyPr wrap="square" numCol="1" anchor="t" anchorCtr="0" compatLnSpc="1">
-            <a:prstTxWarp prst="textNoShape">
-              <a:avLst/>
-            </a:prstTxWarp>
-          </a:bodyPr>
+          <a:bodyPr wrap="square" numCol="1" anchor="t" anchorCtr="0" compatLnSpc="1"/>
           <a:lstStyle/>
           <a:p>
             <a:pPr eaLnBrk="1" hangingPunct="1">
@@ -769,7 +736,7 @@
               </a:spcBef>
             </a:pPr>
             <a:endParaRPr lang="en-US">
-              <a:ea typeface="ＭＳ Ｐゴシック" pitchFamily="1" charset="-128"/>
+              <a:ea typeface="MS PGothic" panose="020B0600070205080204" pitchFamily="1" charset="-128"/>
             </a:endParaRPr>
           </a:p>
         </p:txBody>
@@ -788,8 +755,6 @@
           <a:noFill/>
           <a:ln>
             <a:miter lim="800000"/>
-            <a:headEnd/>
-            <a:tailEnd/>
           </a:ln>
         </p:spPr>
         <p:txBody>
@@ -798,19 +763,12 @@
           <a:p>
             <a:fld id="{0CA7B74D-3791-4AC6-8451-F10DBCCCDD9A}" type="slidenum">
               <a:rPr lang="en-US"/>
-              <a:pPr/>
-              <a:t>3</a:t>
             </a:fld>
             <a:endParaRPr lang="en-US"/>
           </a:p>
         </p:txBody>
       </p:sp>
     </p:spTree>
-    <p:extLst>
-      <p:ext uri="{BB962C8B-B14F-4D97-AF65-F5344CB8AC3E}">
-        <p14:creationId xmlns:p14="http://schemas.microsoft.com/office/powerpoint/2010/main" val="2335206292"/>
-      </p:ext>
-    </p:extLst>
   </p:cSld>
   <p:clrMapOvr>
     <a:masterClrMapping/>
@@ -856,8 +814,6 @@
               <a:srgbClr val="000000"/>
             </a:solidFill>
             <a:miter lim="800000"/>
-            <a:headEnd/>
-            <a:tailEnd/>
           </a:ln>
         </p:spPr>
       </p:sp>
@@ -875,11 +831,7 @@
           <a:noFill/>
         </p:spPr>
         <p:txBody>
-          <a:bodyPr wrap="square" numCol="1" anchor="t" anchorCtr="0" compatLnSpc="1">
-            <a:prstTxWarp prst="textNoShape">
-              <a:avLst/>
-            </a:prstTxWarp>
-          </a:bodyPr>
+          <a:bodyPr wrap="square" numCol="1" anchor="t" anchorCtr="0" compatLnSpc="1"/>
           <a:lstStyle/>
           <a:p>
             <a:pPr eaLnBrk="1" hangingPunct="1">
@@ -888,7 +840,7 @@
               </a:spcBef>
             </a:pPr>
             <a:endParaRPr lang="en-US">
-              <a:ea typeface="ＭＳ Ｐゴシック" pitchFamily="1" charset="-128"/>
+              <a:ea typeface="MS PGothic" panose="020B0600070205080204" pitchFamily="1" charset="-128"/>
             </a:endParaRPr>
           </a:p>
         </p:txBody>
@@ -907,8 +859,6 @@
           <a:noFill/>
           <a:ln>
             <a:miter lim="800000"/>
-            <a:headEnd/>
-            <a:tailEnd/>
           </a:ln>
         </p:spPr>
         <p:txBody>
@@ -929,7 +879,6 @@
               <a:buSzTx/>
               <a:buFontTx/>
               <a:buNone/>
-              <a:tabLst/>
               <a:defRPr/>
             </a:pPr>
             <a:fld id="{0CA7B74D-3791-4AC6-8451-F10DBCCCDD9A}" type="slidenum">
@@ -943,28 +892,10 @@
                 <a:effectLst/>
                 <a:uLnTx/>
                 <a:uFillTx/>
-                <a:latin typeface="Calibri" pitchFamily="34" charset="0"/>
-                <a:ea typeface="ＭＳ Ｐゴシック" pitchFamily="1" charset="-128"/>
+                <a:latin typeface="Calibri" panose="020F0502020204030204" pitchFamily="34" charset="0"/>
+                <a:ea typeface="MS PGothic" panose="020B0600070205080204" pitchFamily="1" charset="-128"/>
                 <a:cs typeface="+mn-cs"/>
               </a:rPr>
-              <a:pPr marL="0" marR="0" lvl="0" indent="0" algn="r" defTabSz="457200" rtl="0" eaLnBrk="1" fontAlgn="base" latinLnBrk="0" hangingPunct="1">
-                <a:lnSpc>
-                  <a:spcPct val="100000"/>
-                </a:lnSpc>
-                <a:spcBef>
-                  <a:spcPct val="0"/>
-                </a:spcBef>
-                <a:spcAft>
-                  <a:spcPct val="0"/>
-                </a:spcAft>
-                <a:buClrTx/>
-                <a:buSzTx/>
-                <a:buFontTx/>
-                <a:buNone/>
-                <a:tabLst/>
-                <a:defRPr/>
-              </a:pPr>
-              <a:t>4</a:t>
             </a:fld>
             <a:endParaRPr kumimoji="0" lang="en-US" sz="1200" b="0" i="0" u="none" strike="noStrike" kern="1200" cap="none" spc="0" normalizeH="0" baseline="0" noProof="0">
               <a:ln>
@@ -976,19 +907,14 @@
               <a:effectLst/>
               <a:uLnTx/>
               <a:uFillTx/>
-              <a:latin typeface="Calibri" pitchFamily="34" charset="0"/>
-              <a:ea typeface="ＭＳ Ｐゴシック" pitchFamily="1" charset="-128"/>
+              <a:latin typeface="Calibri" panose="020F0502020204030204" pitchFamily="34" charset="0"/>
+              <a:ea typeface="MS PGothic" panose="020B0600070205080204" pitchFamily="1" charset="-128"/>
               <a:cs typeface="+mn-cs"/>
             </a:endParaRPr>
           </a:p>
         </p:txBody>
       </p:sp>
     </p:spTree>
-    <p:extLst>
-      <p:ext uri="{BB962C8B-B14F-4D97-AF65-F5344CB8AC3E}">
-        <p14:creationId xmlns:p14="http://schemas.microsoft.com/office/powerpoint/2010/main" val="3773505461"/>
-      </p:ext>
-    </p:extLst>
   </p:cSld>
   <p:clrMapOvr>
     <a:masterClrMapping/>
@@ -1034,8 +960,6 @@
               <a:srgbClr val="000000"/>
             </a:solidFill>
             <a:miter lim="800000"/>
-            <a:headEnd/>
-            <a:tailEnd/>
           </a:ln>
         </p:spPr>
       </p:sp>
@@ -1053,11 +977,7 @@
           <a:noFill/>
         </p:spPr>
         <p:txBody>
-          <a:bodyPr wrap="square" numCol="1" anchor="t" anchorCtr="0" compatLnSpc="1">
-            <a:prstTxWarp prst="textNoShape">
-              <a:avLst/>
-            </a:prstTxWarp>
-          </a:bodyPr>
+          <a:bodyPr wrap="square" numCol="1" anchor="t" anchorCtr="0" compatLnSpc="1"/>
           <a:lstStyle/>
           <a:p>
             <a:pPr eaLnBrk="1" hangingPunct="1">
@@ -1066,7 +986,7 @@
               </a:spcBef>
             </a:pPr>
             <a:endParaRPr lang="en-US">
-              <a:ea typeface="ＭＳ Ｐゴシック" pitchFamily="1" charset="-128"/>
+              <a:ea typeface="MS PGothic" panose="020B0600070205080204" pitchFamily="1" charset="-128"/>
             </a:endParaRPr>
           </a:p>
         </p:txBody>
@@ -1085,8 +1005,6 @@
           <a:noFill/>
           <a:ln>
             <a:miter lim="800000"/>
-            <a:headEnd/>
-            <a:tailEnd/>
           </a:ln>
         </p:spPr>
         <p:txBody>
@@ -1107,7 +1025,6 @@
               <a:buSzTx/>
               <a:buFontTx/>
               <a:buNone/>
-              <a:tabLst/>
               <a:defRPr/>
             </a:pPr>
             <a:fld id="{0CA7B74D-3791-4AC6-8451-F10DBCCCDD9A}" type="slidenum">
@@ -1121,28 +1038,10 @@
                 <a:effectLst/>
                 <a:uLnTx/>
                 <a:uFillTx/>
-                <a:latin typeface="Calibri" pitchFamily="34" charset="0"/>
-                <a:ea typeface="ＭＳ Ｐゴシック" pitchFamily="1" charset="-128"/>
+                <a:latin typeface="Calibri" panose="020F0502020204030204" pitchFamily="34" charset="0"/>
+                <a:ea typeface="MS PGothic" panose="020B0600070205080204" pitchFamily="1" charset="-128"/>
                 <a:cs typeface="+mn-cs"/>
               </a:rPr>
-              <a:pPr marL="0" marR="0" lvl="0" indent="0" algn="r" defTabSz="457200" rtl="0" eaLnBrk="1" fontAlgn="base" latinLnBrk="0" hangingPunct="1">
-                <a:lnSpc>
-                  <a:spcPct val="100000"/>
-                </a:lnSpc>
-                <a:spcBef>
-                  <a:spcPct val="0"/>
-                </a:spcBef>
-                <a:spcAft>
-                  <a:spcPct val="0"/>
-                </a:spcAft>
-                <a:buClrTx/>
-                <a:buSzTx/>
-                <a:buFontTx/>
-                <a:buNone/>
-                <a:tabLst/>
-                <a:defRPr/>
-              </a:pPr>
-              <a:t>5</a:t>
             </a:fld>
             <a:endParaRPr kumimoji="0" lang="en-US" sz="1200" b="0" i="0" u="none" strike="noStrike" kern="1200" cap="none" spc="0" normalizeH="0" baseline="0" noProof="0">
               <a:ln>
@@ -1154,19 +1053,14 @@
               <a:effectLst/>
               <a:uLnTx/>
               <a:uFillTx/>
-              <a:latin typeface="Calibri" pitchFamily="34" charset="0"/>
-              <a:ea typeface="ＭＳ Ｐゴシック" pitchFamily="1" charset="-128"/>
+              <a:latin typeface="Calibri" panose="020F0502020204030204" pitchFamily="34" charset="0"/>
+              <a:ea typeface="MS PGothic" panose="020B0600070205080204" pitchFamily="1" charset="-128"/>
               <a:cs typeface="+mn-cs"/>
             </a:endParaRPr>
           </a:p>
         </p:txBody>
       </p:sp>
     </p:spTree>
-    <p:extLst>
-      <p:ext uri="{BB962C8B-B14F-4D97-AF65-F5344CB8AC3E}">
-        <p14:creationId xmlns:p14="http://schemas.microsoft.com/office/powerpoint/2010/main" val="2641722845"/>
-      </p:ext>
-    </p:extLst>
   </p:cSld>
   <p:clrMapOvr>
     <a:masterClrMapping/>
@@ -1212,8 +1106,6 @@
               <a:srgbClr val="000000"/>
             </a:solidFill>
             <a:miter lim="800000"/>
-            <a:headEnd/>
-            <a:tailEnd/>
           </a:ln>
         </p:spPr>
       </p:sp>
@@ -1231,11 +1123,7 @@
           <a:noFill/>
         </p:spPr>
         <p:txBody>
-          <a:bodyPr wrap="square" numCol="1" anchor="t" anchorCtr="0" compatLnSpc="1">
-            <a:prstTxWarp prst="textNoShape">
-              <a:avLst/>
-            </a:prstTxWarp>
-          </a:bodyPr>
+          <a:bodyPr wrap="square" numCol="1" anchor="t" anchorCtr="0" compatLnSpc="1"/>
           <a:lstStyle/>
           <a:p>
             <a:pPr eaLnBrk="1" hangingPunct="1">
@@ -1244,7 +1132,7 @@
               </a:spcBef>
             </a:pPr>
             <a:endParaRPr lang="en-US">
-              <a:ea typeface="ＭＳ Ｐゴシック" pitchFamily="1" charset="-128"/>
+              <a:ea typeface="MS PGothic" panose="020B0600070205080204" pitchFamily="1" charset="-128"/>
             </a:endParaRPr>
           </a:p>
         </p:txBody>
@@ -1263,8 +1151,6 @@
           <a:noFill/>
           <a:ln>
             <a:miter lim="800000"/>
-            <a:headEnd/>
-            <a:tailEnd/>
           </a:ln>
         </p:spPr>
         <p:txBody>
@@ -1285,7 +1171,6 @@
               <a:buSzTx/>
               <a:buFontTx/>
               <a:buNone/>
-              <a:tabLst/>
               <a:defRPr/>
             </a:pPr>
             <a:fld id="{0CA7B74D-3791-4AC6-8451-F10DBCCCDD9A}" type="slidenum">
@@ -1299,28 +1184,10 @@
                 <a:effectLst/>
                 <a:uLnTx/>
                 <a:uFillTx/>
-                <a:latin typeface="Calibri" pitchFamily="34" charset="0"/>
-                <a:ea typeface="ＭＳ Ｐゴシック" pitchFamily="1" charset="-128"/>
+                <a:latin typeface="Calibri" panose="020F0502020204030204" pitchFamily="34" charset="0"/>
+                <a:ea typeface="MS PGothic" panose="020B0600070205080204" pitchFamily="1" charset="-128"/>
                 <a:cs typeface="+mn-cs"/>
               </a:rPr>
-              <a:pPr marL="0" marR="0" lvl="0" indent="0" algn="r" defTabSz="457200" rtl="0" eaLnBrk="1" fontAlgn="base" latinLnBrk="0" hangingPunct="1">
-                <a:lnSpc>
-                  <a:spcPct val="100000"/>
-                </a:lnSpc>
-                <a:spcBef>
-                  <a:spcPct val="0"/>
-                </a:spcBef>
-                <a:spcAft>
-                  <a:spcPct val="0"/>
-                </a:spcAft>
-                <a:buClrTx/>
-                <a:buSzTx/>
-                <a:buFontTx/>
-                <a:buNone/>
-                <a:tabLst/>
-                <a:defRPr/>
-              </a:pPr>
-              <a:t>6</a:t>
             </a:fld>
             <a:endParaRPr kumimoji="0" lang="en-US" sz="1200" b="0" i="0" u="none" strike="noStrike" kern="1200" cap="none" spc="0" normalizeH="0" baseline="0" noProof="0">
               <a:ln>
@@ -1332,19 +1199,14 @@
               <a:effectLst/>
               <a:uLnTx/>
               <a:uFillTx/>
-              <a:latin typeface="Calibri" pitchFamily="34" charset="0"/>
-              <a:ea typeface="ＭＳ Ｐゴシック" pitchFamily="1" charset="-128"/>
+              <a:latin typeface="Calibri" panose="020F0502020204030204" pitchFamily="34" charset="0"/>
+              <a:ea typeface="MS PGothic" panose="020B0600070205080204" pitchFamily="1" charset="-128"/>
               <a:cs typeface="+mn-cs"/>
             </a:endParaRPr>
           </a:p>
         </p:txBody>
       </p:sp>
     </p:spTree>
-    <p:extLst>
-      <p:ext uri="{BB962C8B-B14F-4D97-AF65-F5344CB8AC3E}">
-        <p14:creationId xmlns:p14="http://schemas.microsoft.com/office/powerpoint/2010/main" val="1908672725"/>
-      </p:ext>
-    </p:extLst>
   </p:cSld>
   <p:clrMapOvr>
     <a:masterClrMapping/>
@@ -1390,8 +1252,6 @@
               <a:srgbClr val="000000"/>
             </a:solidFill>
             <a:miter lim="800000"/>
-            <a:headEnd/>
-            <a:tailEnd/>
           </a:ln>
         </p:spPr>
       </p:sp>
@@ -1409,11 +1269,7 @@
           <a:noFill/>
         </p:spPr>
         <p:txBody>
-          <a:bodyPr wrap="square" numCol="1" anchor="t" anchorCtr="0" compatLnSpc="1">
-            <a:prstTxWarp prst="textNoShape">
-              <a:avLst/>
-            </a:prstTxWarp>
-          </a:bodyPr>
+          <a:bodyPr wrap="square" numCol="1" anchor="t" anchorCtr="0" compatLnSpc="1"/>
           <a:lstStyle/>
           <a:p>
             <a:pPr eaLnBrk="1" hangingPunct="1">
@@ -1422,7 +1278,7 @@
               </a:spcBef>
             </a:pPr>
             <a:endParaRPr lang="en-US">
-              <a:ea typeface="ＭＳ Ｐゴシック" pitchFamily="1" charset="-128"/>
+              <a:ea typeface="MS PGothic" panose="020B0600070205080204" pitchFamily="1" charset="-128"/>
             </a:endParaRPr>
           </a:p>
         </p:txBody>
@@ -1441,8 +1297,6 @@
           <a:noFill/>
           <a:ln>
             <a:miter lim="800000"/>
-            <a:headEnd/>
-            <a:tailEnd/>
           </a:ln>
         </p:spPr>
         <p:txBody>
@@ -1463,7 +1317,6 @@
               <a:buSzTx/>
               <a:buFontTx/>
               <a:buNone/>
-              <a:tabLst/>
               <a:defRPr/>
             </a:pPr>
             <a:fld id="{0CA7B74D-3791-4AC6-8451-F10DBCCCDD9A}" type="slidenum">
@@ -1477,28 +1330,10 @@
                 <a:effectLst/>
                 <a:uLnTx/>
                 <a:uFillTx/>
-                <a:latin typeface="Calibri" pitchFamily="34" charset="0"/>
-                <a:ea typeface="ＭＳ Ｐゴシック" pitchFamily="1" charset="-128"/>
+                <a:latin typeface="Calibri" panose="020F0502020204030204" pitchFamily="34" charset="0"/>
+                <a:ea typeface="MS PGothic" panose="020B0600070205080204" pitchFamily="1" charset="-128"/>
                 <a:cs typeface="+mn-cs"/>
               </a:rPr>
-              <a:pPr marL="0" marR="0" lvl="0" indent="0" algn="r" defTabSz="457200" rtl="0" eaLnBrk="1" fontAlgn="base" latinLnBrk="0" hangingPunct="1">
-                <a:lnSpc>
-                  <a:spcPct val="100000"/>
-                </a:lnSpc>
-                <a:spcBef>
-                  <a:spcPct val="0"/>
-                </a:spcBef>
-                <a:spcAft>
-                  <a:spcPct val="0"/>
-                </a:spcAft>
-                <a:buClrTx/>
-                <a:buSzTx/>
-                <a:buFontTx/>
-                <a:buNone/>
-                <a:tabLst/>
-                <a:defRPr/>
-              </a:pPr>
-              <a:t>7</a:t>
             </a:fld>
             <a:endParaRPr kumimoji="0" lang="en-US" sz="1200" b="0" i="0" u="none" strike="noStrike" kern="1200" cap="none" spc="0" normalizeH="0" baseline="0" noProof="0">
               <a:ln>
@@ -1510,19 +1345,14 @@
               <a:effectLst/>
               <a:uLnTx/>
               <a:uFillTx/>
-              <a:latin typeface="Calibri" pitchFamily="34" charset="0"/>
-              <a:ea typeface="ＭＳ Ｐゴシック" pitchFamily="1" charset="-128"/>
+              <a:latin typeface="Calibri" panose="020F0502020204030204" pitchFamily="34" charset="0"/>
+              <a:ea typeface="MS PGothic" panose="020B0600070205080204" pitchFamily="1" charset="-128"/>
               <a:cs typeface="+mn-cs"/>
             </a:endParaRPr>
           </a:p>
         </p:txBody>
       </p:sp>
     </p:spTree>
-    <p:extLst>
-      <p:ext uri="{BB962C8B-B14F-4D97-AF65-F5344CB8AC3E}">
-        <p14:creationId xmlns:p14="http://schemas.microsoft.com/office/powerpoint/2010/main" val="3783576877"/>
-      </p:ext>
-    </p:extLst>
   </p:cSld>
   <p:clrMapOvr>
     <a:masterClrMapping/>
@@ -1571,6 +1401,7 @@
               <a:rPr lang="en-US"/>
               <a:t>Click to edit Master title style</a:t>
             </a:r>
+            <a:endParaRPr lang="en-US"/>
           </a:p>
         </p:txBody>
       </p:sp>
@@ -1689,6 +1520,7 @@
               <a:rPr lang="en-US"/>
               <a:t>Click to edit Master subtitle style</a:t>
             </a:r>
+            <a:endParaRPr lang="en-US"/>
           </a:p>
         </p:txBody>
       </p:sp>
@@ -1713,7 +1545,6 @@
           <a:p>
             <a:fld id="{E60792E3-D524-454C-8AFD-A91972900BCB}" type="datetime1">
               <a:rPr lang="en-US" smtClean="0"/>
-              <a:t>6/2/2026</a:t>
             </a:fld>
             <a:endParaRPr lang="en-US"/>
           </a:p>
@@ -1745,6 +1576,7 @@
               <a:rPr lang="en-US"/>
               <a:t>@SIH Idea submission- Template</a:t>
             </a:r>
+            <a:endParaRPr lang="en-US"/>
           </a:p>
         </p:txBody>
       </p:sp>
@@ -1769,8 +1601,6 @@
           <a:p>
             <a:fld id="{5B7E1BAA-A38D-40DE-B22C-DF9BD7D82058}" type="slidenum">
               <a:rPr lang="en-US"/>
-              <a:pPr/>
-              <a:t>‹#›</a:t>
             </a:fld>
             <a:endParaRPr lang="en-US"/>
           </a:p>
@@ -1820,6 +1650,7 @@
               <a:rPr lang="en-US"/>
               <a:t>Click to edit Master title style</a:t>
             </a:r>
+            <a:endParaRPr lang="en-US"/>
           </a:p>
         </p:txBody>
       </p:sp>
@@ -1843,6 +1674,7 @@
               <a:rPr lang="en-US"/>
               <a:t>Click to edit Master text styles</a:t>
             </a:r>
+            <a:endParaRPr lang="en-US"/>
           </a:p>
           <a:p>
             <a:pPr lvl="1"/>
@@ -1850,6 +1682,7 @@
               <a:rPr lang="en-US"/>
               <a:t>Second level</a:t>
             </a:r>
+            <a:endParaRPr lang="en-US"/>
           </a:p>
           <a:p>
             <a:pPr lvl="2"/>
@@ -1857,6 +1690,7 @@
               <a:rPr lang="en-US"/>
               <a:t>Third level</a:t>
             </a:r>
+            <a:endParaRPr lang="en-US"/>
           </a:p>
           <a:p>
             <a:pPr lvl="3"/>
@@ -1864,6 +1698,7 @@
               <a:rPr lang="en-US"/>
               <a:t>Fourth level</a:t>
             </a:r>
+            <a:endParaRPr lang="en-US"/>
           </a:p>
           <a:p>
             <a:pPr lvl="4"/>
@@ -1871,6 +1706,7 @@
               <a:rPr lang="en-US"/>
               <a:t>Fifth level</a:t>
             </a:r>
+            <a:endParaRPr lang="en-US"/>
           </a:p>
         </p:txBody>
       </p:sp>
@@ -1895,7 +1731,6 @@
           <a:p>
             <a:fld id="{053C3A68-6922-42D3-8905-ECC2D82A3469}" type="datetime1">
               <a:rPr lang="en-US" smtClean="0"/>
-              <a:t>6/2/2026</a:t>
             </a:fld>
             <a:endParaRPr lang="en-US"/>
           </a:p>
@@ -1927,6 +1762,7 @@
               <a:rPr lang="en-US"/>
               <a:t>@SIH Idea submission- Template</a:t>
             </a:r>
+            <a:endParaRPr lang="en-US"/>
           </a:p>
         </p:txBody>
       </p:sp>
@@ -1951,8 +1787,6 @@
           <a:p>
             <a:fld id="{94FDD027-5576-4F27-AAB6-1D994836EE78}" type="slidenum">
               <a:rPr lang="en-US"/>
-              <a:pPr/>
-              <a:t>‹#›</a:t>
             </a:fld>
             <a:endParaRPr lang="en-US"/>
           </a:p>
@@ -2007,6 +1841,7 @@
               <a:rPr lang="en-US"/>
               <a:t>Click to edit Master title style</a:t>
             </a:r>
+            <a:endParaRPr lang="en-US"/>
           </a:p>
         </p:txBody>
       </p:sp>
@@ -2035,6 +1870,7 @@
               <a:rPr lang="en-US"/>
               <a:t>Click to edit Master text styles</a:t>
             </a:r>
+            <a:endParaRPr lang="en-US"/>
           </a:p>
           <a:p>
             <a:pPr lvl="1"/>
@@ -2042,6 +1878,7 @@
               <a:rPr lang="en-US"/>
               <a:t>Second level</a:t>
             </a:r>
+            <a:endParaRPr lang="en-US"/>
           </a:p>
           <a:p>
             <a:pPr lvl="2"/>
@@ -2049,6 +1886,7 @@
               <a:rPr lang="en-US"/>
               <a:t>Third level</a:t>
             </a:r>
+            <a:endParaRPr lang="en-US"/>
           </a:p>
           <a:p>
             <a:pPr lvl="3"/>
@@ -2056,6 +1894,7 @@
               <a:rPr lang="en-US"/>
               <a:t>Fourth level</a:t>
             </a:r>
+            <a:endParaRPr lang="en-US"/>
           </a:p>
           <a:p>
             <a:pPr lvl="4"/>
@@ -2063,6 +1902,7 @@
               <a:rPr lang="en-US"/>
               <a:t>Fifth level</a:t>
             </a:r>
+            <a:endParaRPr lang="en-US"/>
           </a:p>
         </p:txBody>
       </p:sp>
@@ -2087,7 +1927,6 @@
           <a:p>
             <a:fld id="{CB69E9F4-7604-4950-A8B2-8ACDEDB1506E}" type="datetime1">
               <a:rPr lang="en-US" smtClean="0"/>
-              <a:t>6/2/2026</a:t>
             </a:fld>
             <a:endParaRPr lang="en-US"/>
           </a:p>
@@ -2119,6 +1958,7 @@
               <a:rPr lang="en-US"/>
               <a:t>@SIH Idea submission- Template</a:t>
             </a:r>
+            <a:endParaRPr lang="en-US"/>
           </a:p>
         </p:txBody>
       </p:sp>
@@ -2143,8 +1983,6 @@
           <a:p>
             <a:fld id="{2957CE61-8714-431B-A40A-01B1C5541AB7}" type="slidenum">
               <a:rPr lang="en-US"/>
-              <a:pPr/>
-              <a:t>‹#›</a:t>
             </a:fld>
             <a:endParaRPr lang="en-US"/>
           </a:p>
@@ -2194,6 +2032,7 @@
               <a:rPr lang="en-US"/>
               <a:t>Click to edit Master title style</a:t>
             </a:r>
+            <a:endParaRPr lang="en-US"/>
           </a:p>
         </p:txBody>
       </p:sp>
@@ -2217,6 +2056,7 @@
               <a:rPr lang="en-US"/>
               <a:t>Click to edit Master text styles</a:t>
             </a:r>
+            <a:endParaRPr lang="en-US"/>
           </a:p>
           <a:p>
             <a:pPr lvl="1"/>
@@ -2224,6 +2064,7 @@
               <a:rPr lang="en-US"/>
               <a:t>Second level</a:t>
             </a:r>
+            <a:endParaRPr lang="en-US"/>
           </a:p>
           <a:p>
             <a:pPr lvl="2"/>
@@ -2231,6 +2072,7 @@
               <a:rPr lang="en-US"/>
               <a:t>Third level</a:t>
             </a:r>
+            <a:endParaRPr lang="en-US"/>
           </a:p>
           <a:p>
             <a:pPr lvl="3"/>
@@ -2238,6 +2080,7 @@
               <a:rPr lang="en-US"/>
               <a:t>Fourth level</a:t>
             </a:r>
+            <a:endParaRPr lang="en-US"/>
           </a:p>
           <a:p>
             <a:pPr lvl="4"/>
@@ -2245,6 +2088,7 @@
               <a:rPr lang="en-US"/>
               <a:t>Fifth level</a:t>
             </a:r>
+            <a:endParaRPr lang="en-US"/>
           </a:p>
         </p:txBody>
       </p:sp>
@@ -2269,7 +2113,6 @@
           <a:p>
             <a:fld id="{708B7524-32A2-4C20-A58C-BC3BAA1042FC}" type="datetime1">
               <a:rPr lang="en-US" smtClean="0"/>
-              <a:t>6/2/2026</a:t>
             </a:fld>
             <a:endParaRPr lang="en-US"/>
           </a:p>
@@ -2301,6 +2144,7 @@
               <a:rPr lang="en-US"/>
               <a:t>@SIH Idea submission- Template</a:t>
             </a:r>
+            <a:endParaRPr lang="en-US"/>
           </a:p>
         </p:txBody>
       </p:sp>
@@ -2325,8 +2169,6 @@
           <a:p>
             <a:fld id="{677C3CE7-23F7-4828-823C-E0205DF2CF97}" type="slidenum">
               <a:rPr lang="en-US"/>
-              <a:pPr/>
-              <a:t>‹#›</a:t>
             </a:fld>
             <a:endParaRPr lang="en-US"/>
           </a:p>
@@ -2385,6 +2227,7 @@
               <a:rPr lang="en-US"/>
               <a:t>Click to edit Master title style</a:t>
             </a:r>
+            <a:endParaRPr lang="en-US"/>
           </a:p>
         </p:txBody>
       </p:sp>
@@ -2504,6 +2347,7 @@
               <a:rPr lang="en-US"/>
               <a:t>Click to edit Master text styles</a:t>
             </a:r>
+            <a:endParaRPr lang="en-US"/>
           </a:p>
         </p:txBody>
       </p:sp>
@@ -2528,7 +2372,6 @@
           <a:p>
             <a:fld id="{1E994447-D6B2-43BB-A877-57F1A267B999}" type="datetime1">
               <a:rPr lang="en-US" smtClean="0"/>
-              <a:t>6/2/2026</a:t>
             </a:fld>
             <a:endParaRPr lang="en-US"/>
           </a:p>
@@ -2560,6 +2403,7 @@
               <a:rPr lang="en-US"/>
               <a:t>@SIH Idea submission- Template</a:t>
             </a:r>
+            <a:endParaRPr lang="en-US"/>
           </a:p>
         </p:txBody>
       </p:sp>
@@ -2584,8 +2428,6 @@
           <a:p>
             <a:fld id="{41DB31D2-2A87-4F4C-A9AD-05C6CC2B321D}" type="slidenum">
               <a:rPr lang="en-US"/>
-              <a:pPr/>
-              <a:t>‹#›</a:t>
             </a:fld>
             <a:endParaRPr lang="en-US"/>
           </a:p>
@@ -2635,6 +2477,7 @@
               <a:rPr lang="en-US"/>
               <a:t>Click to edit Master title style</a:t>
             </a:r>
+            <a:endParaRPr lang="en-US"/>
           </a:p>
         </p:txBody>
       </p:sp>
@@ -2691,6 +2534,7 @@
               <a:rPr lang="en-US"/>
               <a:t>Click to edit Master text styles</a:t>
             </a:r>
+            <a:endParaRPr lang="en-US"/>
           </a:p>
           <a:p>
             <a:pPr lvl="1"/>
@@ -2698,6 +2542,7 @@
               <a:rPr lang="en-US"/>
               <a:t>Second level</a:t>
             </a:r>
+            <a:endParaRPr lang="en-US"/>
           </a:p>
           <a:p>
             <a:pPr lvl="2"/>
@@ -2705,6 +2550,7 @@
               <a:rPr lang="en-US"/>
               <a:t>Third level</a:t>
             </a:r>
+            <a:endParaRPr lang="en-US"/>
           </a:p>
           <a:p>
             <a:pPr lvl="3"/>
@@ -2712,6 +2558,7 @@
               <a:rPr lang="en-US"/>
               <a:t>Fourth level</a:t>
             </a:r>
+            <a:endParaRPr lang="en-US"/>
           </a:p>
           <a:p>
             <a:pPr lvl="4"/>
@@ -2719,6 +2566,7 @@
               <a:rPr lang="en-US"/>
               <a:t>Fifth level</a:t>
             </a:r>
+            <a:endParaRPr lang="en-US"/>
           </a:p>
         </p:txBody>
       </p:sp>
@@ -2775,6 +2623,7 @@
               <a:rPr lang="en-US"/>
               <a:t>Click to edit Master text styles</a:t>
             </a:r>
+            <a:endParaRPr lang="en-US"/>
           </a:p>
           <a:p>
             <a:pPr lvl="1"/>
@@ -2782,6 +2631,7 @@
               <a:rPr lang="en-US"/>
               <a:t>Second level</a:t>
             </a:r>
+            <a:endParaRPr lang="en-US"/>
           </a:p>
           <a:p>
             <a:pPr lvl="2"/>
@@ -2789,6 +2639,7 @@
               <a:rPr lang="en-US"/>
               <a:t>Third level</a:t>
             </a:r>
+            <a:endParaRPr lang="en-US"/>
           </a:p>
           <a:p>
             <a:pPr lvl="3"/>
@@ -2796,6 +2647,7 @@
               <a:rPr lang="en-US"/>
               <a:t>Fourth level</a:t>
             </a:r>
+            <a:endParaRPr lang="en-US"/>
           </a:p>
           <a:p>
             <a:pPr lvl="4"/>
@@ -2803,6 +2655,7 @@
               <a:rPr lang="en-US"/>
               <a:t>Fifth level</a:t>
             </a:r>
+            <a:endParaRPr lang="en-US"/>
           </a:p>
         </p:txBody>
       </p:sp>
@@ -2827,7 +2680,6 @@
           <a:p>
             <a:fld id="{68920E16-BD35-483C-AA6B-346FC7E46DEA}" type="datetime1">
               <a:rPr lang="en-US" smtClean="0"/>
-              <a:t>6/2/2026</a:t>
             </a:fld>
             <a:endParaRPr lang="en-US"/>
           </a:p>
@@ -2859,6 +2711,7 @@
               <a:rPr lang="en-US"/>
               <a:t>@SIH Idea submission- Template</a:t>
             </a:r>
+            <a:endParaRPr lang="en-US"/>
           </a:p>
         </p:txBody>
       </p:sp>
@@ -2883,8 +2736,6 @@
           <a:p>
             <a:fld id="{E1FC16D9-1635-4844-816A-0A8A2160FADA}" type="slidenum">
               <a:rPr lang="en-US"/>
-              <a:pPr/>
-              <a:t>‹#›</a:t>
             </a:fld>
             <a:endParaRPr lang="en-US"/>
           </a:p>
@@ -2938,6 +2789,7 @@
               <a:rPr lang="en-US"/>
               <a:t>Click to edit Master title style</a:t>
             </a:r>
+            <a:endParaRPr lang="en-US"/>
           </a:p>
         </p:txBody>
       </p:sp>
@@ -3003,6 +2855,7 @@
               <a:rPr lang="en-US"/>
               <a:t>Click to edit Master text styles</a:t>
             </a:r>
+            <a:endParaRPr lang="en-US"/>
           </a:p>
         </p:txBody>
       </p:sp>
@@ -3059,6 +2912,7 @@
               <a:rPr lang="en-US"/>
               <a:t>Click to edit Master text styles</a:t>
             </a:r>
+            <a:endParaRPr lang="en-US"/>
           </a:p>
           <a:p>
             <a:pPr lvl="1"/>
@@ -3066,6 +2920,7 @@
               <a:rPr lang="en-US"/>
               <a:t>Second level</a:t>
             </a:r>
+            <a:endParaRPr lang="en-US"/>
           </a:p>
           <a:p>
             <a:pPr lvl="2"/>
@@ -3073,6 +2928,7 @@
               <a:rPr lang="en-US"/>
               <a:t>Third level</a:t>
             </a:r>
+            <a:endParaRPr lang="en-US"/>
           </a:p>
           <a:p>
             <a:pPr lvl="3"/>
@@ -3080,6 +2936,7 @@
               <a:rPr lang="en-US"/>
               <a:t>Fourth level</a:t>
             </a:r>
+            <a:endParaRPr lang="en-US"/>
           </a:p>
           <a:p>
             <a:pPr lvl="4"/>
@@ -3087,6 +2944,7 @@
               <a:rPr lang="en-US"/>
               <a:t>Fifth level</a:t>
             </a:r>
+            <a:endParaRPr lang="en-US"/>
           </a:p>
         </p:txBody>
       </p:sp>
@@ -3152,6 +3010,7 @@
               <a:rPr lang="en-US"/>
               <a:t>Click to edit Master text styles</a:t>
             </a:r>
+            <a:endParaRPr lang="en-US"/>
           </a:p>
         </p:txBody>
       </p:sp>
@@ -3208,6 +3067,7 @@
               <a:rPr lang="en-US"/>
               <a:t>Click to edit Master text styles</a:t>
             </a:r>
+            <a:endParaRPr lang="en-US"/>
           </a:p>
           <a:p>
             <a:pPr lvl="1"/>
@@ -3215,6 +3075,7 @@
               <a:rPr lang="en-US"/>
               <a:t>Second level</a:t>
             </a:r>
+            <a:endParaRPr lang="en-US"/>
           </a:p>
           <a:p>
             <a:pPr lvl="2"/>
@@ -3222,6 +3083,7 @@
               <a:rPr lang="en-US"/>
               <a:t>Third level</a:t>
             </a:r>
+            <a:endParaRPr lang="en-US"/>
           </a:p>
           <a:p>
             <a:pPr lvl="3"/>
@@ -3229,6 +3091,7 @@
               <a:rPr lang="en-US"/>
               <a:t>Fourth level</a:t>
             </a:r>
+            <a:endParaRPr lang="en-US"/>
           </a:p>
           <a:p>
             <a:pPr lvl="4"/>
@@ -3236,6 +3099,7 @@
               <a:rPr lang="en-US"/>
               <a:t>Fifth level</a:t>
             </a:r>
+            <a:endParaRPr lang="en-US"/>
           </a:p>
         </p:txBody>
       </p:sp>
@@ -3260,7 +3124,6 @@
           <a:p>
             <a:fld id="{2FEAC6F8-5103-4FC0-A69E-5C6AE6469DA8}" type="datetime1">
               <a:rPr lang="en-US" smtClean="0"/>
-              <a:t>6/2/2026</a:t>
             </a:fld>
             <a:endParaRPr lang="en-US"/>
           </a:p>
@@ -3292,6 +3155,7 @@
               <a:rPr lang="en-US"/>
               <a:t>@SIH Idea submission- Template</a:t>
             </a:r>
+            <a:endParaRPr lang="en-US"/>
           </a:p>
         </p:txBody>
       </p:sp>
@@ -3316,8 +3180,6 @@
           <a:p>
             <a:fld id="{71C4100A-98DE-4944-910A-A93F5CA9F724}" type="slidenum">
               <a:rPr lang="en-US"/>
-              <a:pPr/>
-              <a:t>‹#›</a:t>
             </a:fld>
             <a:endParaRPr lang="en-US"/>
           </a:p>
@@ -3367,6 +3229,7 @@
               <a:rPr lang="en-US"/>
               <a:t>Click to edit Master title style</a:t>
             </a:r>
+            <a:endParaRPr lang="en-US"/>
           </a:p>
         </p:txBody>
       </p:sp>
@@ -3391,7 +3254,6 @@
           <a:p>
             <a:fld id="{C60C6921-0627-4C8F-83D5-0CF936D2FFDD}" type="datetime1">
               <a:rPr lang="en-US" smtClean="0"/>
-              <a:t>6/2/2026</a:t>
             </a:fld>
             <a:endParaRPr lang="en-US"/>
           </a:p>
@@ -3423,6 +3285,7 @@
               <a:rPr lang="en-US"/>
               <a:t>@SIH Idea submission- Template</a:t>
             </a:r>
+            <a:endParaRPr lang="en-US"/>
           </a:p>
         </p:txBody>
       </p:sp>
@@ -3447,8 +3310,6 @@
           <a:p>
             <a:fld id="{6A63342B-5A73-45DC-864D-086DE78037EF}" type="slidenum">
               <a:rPr lang="en-US"/>
-              <a:pPr/>
-              <a:t>‹#›</a:t>
             </a:fld>
             <a:endParaRPr lang="en-US"/>
           </a:p>
@@ -3500,7 +3361,6 @@
           <a:p>
             <a:fld id="{2FF08AD7-8103-40F8-983C-E2BA6BB9CBE0}" type="datetime1">
               <a:rPr lang="en-US" smtClean="0"/>
-              <a:t>6/2/2026</a:t>
             </a:fld>
             <a:endParaRPr lang="en-US"/>
           </a:p>
@@ -3532,6 +3392,7 @@
               <a:rPr lang="en-US"/>
               <a:t>@SIH Idea submission- Template</a:t>
             </a:r>
+            <a:endParaRPr lang="en-US"/>
           </a:p>
         </p:txBody>
       </p:sp>
@@ -3556,8 +3417,6 @@
           <a:p>
             <a:fld id="{B635AFB3-1ACD-44AC-8702-86B1729DF035}" type="slidenum">
               <a:rPr lang="en-US"/>
-              <a:pPr/>
-              <a:t>‹#›</a:t>
             </a:fld>
             <a:endParaRPr lang="en-US"/>
           </a:p>
@@ -3616,6 +3475,7 @@
               <a:rPr lang="en-US"/>
               <a:t>Click to edit Master title style</a:t>
             </a:r>
+            <a:endParaRPr lang="en-US"/>
           </a:p>
         </p:txBody>
       </p:sp>
@@ -3672,6 +3532,7 @@
               <a:rPr lang="en-US"/>
               <a:t>Click to edit Master text styles</a:t>
             </a:r>
+            <a:endParaRPr lang="en-US"/>
           </a:p>
           <a:p>
             <a:pPr lvl="1"/>
@@ -3679,6 +3540,7 @@
               <a:rPr lang="en-US"/>
               <a:t>Second level</a:t>
             </a:r>
+            <a:endParaRPr lang="en-US"/>
           </a:p>
           <a:p>
             <a:pPr lvl="2"/>
@@ -3686,6 +3548,7 @@
               <a:rPr lang="en-US"/>
               <a:t>Third level</a:t>
             </a:r>
+            <a:endParaRPr lang="en-US"/>
           </a:p>
           <a:p>
             <a:pPr lvl="3"/>
@@ -3693,6 +3556,7 @@
               <a:rPr lang="en-US"/>
               <a:t>Fourth level</a:t>
             </a:r>
+            <a:endParaRPr lang="en-US"/>
           </a:p>
           <a:p>
             <a:pPr lvl="4"/>
@@ -3700,6 +3564,7 @@
               <a:rPr lang="en-US"/>
               <a:t>Fifth level</a:t>
             </a:r>
+            <a:endParaRPr lang="en-US"/>
           </a:p>
         </p:txBody>
       </p:sp>
@@ -3765,6 +3630,7 @@
               <a:rPr lang="en-US"/>
               <a:t>Click to edit Master text styles</a:t>
             </a:r>
+            <a:endParaRPr lang="en-US"/>
           </a:p>
         </p:txBody>
       </p:sp>
@@ -3789,7 +3655,6 @@
           <a:p>
             <a:fld id="{DF8C06B4-9380-4A4D-AF49-A3596E17DAF5}" type="datetime1">
               <a:rPr lang="en-US" smtClean="0"/>
-              <a:t>6/2/2026</a:t>
             </a:fld>
             <a:endParaRPr lang="en-US"/>
           </a:p>
@@ -3821,6 +3686,7 @@
               <a:rPr lang="en-US"/>
               <a:t>@SIH Idea submission- Template</a:t>
             </a:r>
+            <a:endParaRPr lang="en-US"/>
           </a:p>
         </p:txBody>
       </p:sp>
@@ -3845,8 +3711,6 @@
           <a:p>
             <a:fld id="{05CF15F3-5E77-4C57-9E21-50D6D1D6C022}" type="slidenum">
               <a:rPr lang="en-US"/>
-              <a:pPr/>
-              <a:t>‹#›</a:t>
             </a:fld>
             <a:endParaRPr lang="en-US"/>
           </a:p>
@@ -3905,6 +3769,7 @@
               <a:rPr lang="en-US"/>
               <a:t>Click to edit Master title style</a:t>
             </a:r>
+            <a:endParaRPr lang="en-US"/>
           </a:p>
         </p:txBody>
       </p:sp>
@@ -4034,6 +3899,7 @@
               <a:rPr lang="en-US"/>
               <a:t>Click to edit Master text styles</a:t>
             </a:r>
+            <a:endParaRPr lang="en-US"/>
           </a:p>
         </p:txBody>
       </p:sp>
@@ -4058,7 +3924,6 @@
           <a:p>
             <a:fld id="{EF7FDEF1-C582-4E22-9E77-D68326471F28}" type="datetime1">
               <a:rPr lang="en-US" smtClean="0"/>
-              <a:t>6/2/2026</a:t>
             </a:fld>
             <a:endParaRPr lang="en-US"/>
           </a:p>
@@ -4090,6 +3955,7 @@
               <a:rPr lang="en-US"/>
               <a:t>@SIH Idea submission- Template</a:t>
             </a:r>
+            <a:endParaRPr lang="en-US"/>
           </a:p>
         </p:txBody>
       </p:sp>
@@ -4114,8 +3980,6 @@
           <a:p>
             <a:fld id="{1242169A-B3C7-4FB6-967F-AF95F4EB3315}" type="slidenum">
               <a:rPr lang="en-US"/>
-              <a:pPr/>
-              <a:t>‹#›</a:t>
             </a:fld>
             <a:endParaRPr lang="en-US"/>
           </a:p>
@@ -4173,16 +4037,10 @@
           <a:ln w="9525">
             <a:noFill/>
             <a:miter lim="800000"/>
-            <a:headEnd/>
-            <a:tailEnd/>
           </a:ln>
         </p:spPr>
         <p:txBody>
-          <a:bodyPr vert="horz" wrap="square" lIns="91440" tIns="45720" rIns="91440" bIns="45720" numCol="1" anchor="ctr" anchorCtr="0" compatLnSpc="1">
-            <a:prstTxWarp prst="textNoShape">
-              <a:avLst/>
-            </a:prstTxWarp>
-          </a:bodyPr>
+          <a:bodyPr vert="horz" wrap="square" lIns="91440" tIns="45720" rIns="91440" bIns="45720" numCol="1" anchor="ctr" anchorCtr="0" compatLnSpc="1"/>
           <a:lstStyle/>
           <a:p>
             <a:pPr lvl="0"/>
@@ -4190,6 +4048,7 @@
               <a:rPr lang="en-US"/>
               <a:t>Click to edit Master title style</a:t>
             </a:r>
+            <a:endParaRPr lang="en-US"/>
           </a:p>
         </p:txBody>
       </p:sp>
@@ -4215,16 +4074,10 @@
           <a:ln w="9525">
             <a:noFill/>
             <a:miter lim="800000"/>
-            <a:headEnd/>
-            <a:tailEnd/>
           </a:ln>
         </p:spPr>
         <p:txBody>
-          <a:bodyPr vert="horz" wrap="square" lIns="91440" tIns="45720" rIns="91440" bIns="45720" numCol="1" anchor="t" anchorCtr="0" compatLnSpc="1">
-            <a:prstTxWarp prst="textNoShape">
-              <a:avLst/>
-            </a:prstTxWarp>
-          </a:bodyPr>
+          <a:bodyPr vert="horz" wrap="square" lIns="91440" tIns="45720" rIns="91440" bIns="45720" numCol="1" anchor="t" anchorCtr="0" compatLnSpc="1"/>
           <a:lstStyle/>
           <a:p>
             <a:pPr lvl="0"/>
@@ -4232,6 +4085,7 @@
               <a:rPr lang="en-US"/>
               <a:t>Click to edit Master text styles</a:t>
             </a:r>
+            <a:endParaRPr lang="en-US"/>
           </a:p>
           <a:p>
             <a:pPr lvl="1"/>
@@ -4239,6 +4093,7 @@
               <a:rPr lang="en-US"/>
               <a:t>Second level</a:t>
             </a:r>
+            <a:endParaRPr lang="en-US"/>
           </a:p>
           <a:p>
             <a:pPr lvl="2"/>
@@ -4246,6 +4101,7 @@
               <a:rPr lang="en-US"/>
               <a:t>Third level</a:t>
             </a:r>
+            <a:endParaRPr lang="en-US"/>
           </a:p>
           <a:p>
             <a:pPr lvl="3"/>
@@ -4253,6 +4109,7 @@
               <a:rPr lang="en-US"/>
               <a:t>Fourth level</a:t>
             </a:r>
+            <a:endParaRPr lang="en-US"/>
           </a:p>
           <a:p>
             <a:pPr lvl="4"/>
@@ -4260,6 +4117,7 @@
               <a:rPr lang="en-US"/>
               <a:t>Fifth level</a:t>
             </a:r>
+            <a:endParaRPr lang="en-US"/>
           </a:p>
         </p:txBody>
       </p:sp>
@@ -4283,11 +4141,7 @@
           </a:prstGeom>
         </p:spPr>
         <p:txBody>
-          <a:bodyPr vert="horz" wrap="square" lIns="91440" tIns="45720" rIns="91440" bIns="45720" numCol="1" anchor="ctr" anchorCtr="0" compatLnSpc="1">
-            <a:prstTxWarp prst="textNoShape">
-              <a:avLst/>
-            </a:prstTxWarp>
-          </a:bodyPr>
+          <a:bodyPr vert="horz" wrap="square" lIns="91440" tIns="45720" rIns="91440" bIns="45720" numCol="1" anchor="ctr" anchorCtr="0" compatLnSpc="1"/>
           <a:lstStyle>
             <a:lvl1pPr>
               <a:defRPr sz="1200">
@@ -4301,7 +4155,6 @@
           <a:p>
             <a:fld id="{780A9602-A9A9-453F-AEF1-37B5837E02CD}" type="datetime1">
               <a:rPr lang="en-US" smtClean="0"/>
-              <a:t>6/2/2026</a:t>
             </a:fld>
             <a:endParaRPr lang="en-US"/>
           </a:p>
@@ -4356,6 +4209,7 @@
               <a:rPr lang="en-US"/>
               <a:t>@SIH Idea submission- Template</a:t>
             </a:r>
+            <a:endParaRPr lang="en-US"/>
           </a:p>
         </p:txBody>
       </p:sp>
@@ -4379,11 +4233,7 @@
           </a:prstGeom>
         </p:spPr>
         <p:txBody>
-          <a:bodyPr vert="horz" wrap="square" lIns="91440" tIns="45720" rIns="91440" bIns="45720" numCol="1" anchor="ctr" anchorCtr="0" compatLnSpc="1">
-            <a:prstTxWarp prst="textNoShape">
-              <a:avLst/>
-            </a:prstTxWarp>
-          </a:bodyPr>
+          <a:bodyPr vert="horz" wrap="square" lIns="91440" tIns="45720" rIns="91440" bIns="45720" numCol="1" anchor="ctr" anchorCtr="0" compatLnSpc="1"/>
           <a:lstStyle>
             <a:lvl1pPr algn="r">
               <a:defRPr sz="1200">
@@ -4397,8 +4247,6 @@
           <a:p>
             <a:fld id="{1411BA53-830D-4830-BB65-E58DBE17D0B7}" type="slidenum">
               <a:rPr lang="en-US"/>
-              <a:pPr/>
-              <a:t>‹#›</a:t>
             </a:fld>
             <a:endParaRPr lang="en-US"/>
           </a:p>
@@ -4435,8 +4283,8 @@
             <a:schemeClr val="tx1"/>
           </a:solidFill>
           <a:latin typeface="TradeGothic"/>
-          <a:ea typeface="ＭＳ Ｐゴシック" charset="0"/>
-          <a:cs typeface="ＭＳ Ｐゴシック" charset="0"/>
+          <a:ea typeface="MS PGothic" panose="020B0600070205080204" pitchFamily="1" charset="-128"/>
+          <a:cs typeface="MS PGothic" panose="020B0600070205080204" pitchFamily="1" charset="-128"/>
         </a:defRPr>
       </a:lvl1pPr>
       <a:lvl2pPr algn="ctr" defTabSz="457200" rtl="0" eaLnBrk="0" fontAlgn="base" hangingPunct="0">
@@ -4450,9 +4298,9 @@
           <a:solidFill>
             <a:schemeClr val="tx1"/>
           </a:solidFill>
-          <a:latin typeface="TradeGothic" charset="0"/>
-          <a:ea typeface="ＭＳ Ｐゴシック" charset="0"/>
-          <a:cs typeface="ＭＳ Ｐゴシック" charset="0"/>
+          <a:latin typeface="TradeGothic" pitchFamily="1" charset="0"/>
+          <a:ea typeface="MS PGothic" panose="020B0600070205080204" pitchFamily="1" charset="-128"/>
+          <a:cs typeface="MS PGothic" panose="020B0600070205080204" pitchFamily="1" charset="-128"/>
         </a:defRPr>
       </a:lvl2pPr>
       <a:lvl3pPr algn="ctr" defTabSz="457200" rtl="0" eaLnBrk="0" fontAlgn="base" hangingPunct="0">
@@ -4466,9 +4314,9 @@
           <a:solidFill>
             <a:schemeClr val="tx1"/>
           </a:solidFill>
-          <a:latin typeface="TradeGothic" charset="0"/>
-          <a:ea typeface="ＭＳ Ｐゴシック" charset="0"/>
-          <a:cs typeface="ＭＳ Ｐゴシック" charset="0"/>
+          <a:latin typeface="TradeGothic" pitchFamily="1" charset="0"/>
+          <a:ea typeface="MS PGothic" panose="020B0600070205080204" pitchFamily="1" charset="-128"/>
+          <a:cs typeface="MS PGothic" panose="020B0600070205080204" pitchFamily="1" charset="-128"/>
         </a:defRPr>
       </a:lvl3pPr>
       <a:lvl4pPr algn="ctr" defTabSz="457200" rtl="0" eaLnBrk="0" fontAlgn="base" hangingPunct="0">
@@ -4482,9 +4330,9 @@
           <a:solidFill>
             <a:schemeClr val="tx1"/>
           </a:solidFill>
-          <a:latin typeface="TradeGothic" charset="0"/>
-          <a:ea typeface="ＭＳ Ｐゴシック" charset="0"/>
-          <a:cs typeface="ＭＳ Ｐゴシック" charset="0"/>
+          <a:latin typeface="TradeGothic" pitchFamily="1" charset="0"/>
+          <a:ea typeface="MS PGothic" panose="020B0600070205080204" pitchFamily="1" charset="-128"/>
+          <a:cs typeface="MS PGothic" panose="020B0600070205080204" pitchFamily="1" charset="-128"/>
         </a:defRPr>
       </a:lvl4pPr>
       <a:lvl5pPr algn="ctr" defTabSz="457200" rtl="0" eaLnBrk="0" fontAlgn="base" hangingPunct="0">
@@ -4498,9 +4346,9 @@
           <a:solidFill>
             <a:schemeClr val="tx1"/>
           </a:solidFill>
-          <a:latin typeface="TradeGothic" charset="0"/>
-          <a:ea typeface="ＭＳ Ｐゴシック" charset="0"/>
-          <a:cs typeface="ＭＳ Ｐゴシック" charset="0"/>
+          <a:latin typeface="TradeGothic" pitchFamily="1" charset="0"/>
+          <a:ea typeface="MS PGothic" panose="020B0600070205080204" pitchFamily="1" charset="-128"/>
+          <a:cs typeface="MS PGothic" panose="020B0600070205080204" pitchFamily="1" charset="-128"/>
         </a:defRPr>
       </a:lvl5pPr>
       <a:lvl6pPr marL="457200" algn="ctr" defTabSz="457200" rtl="0" fontAlgn="base">
@@ -4514,9 +4362,9 @@
           <a:solidFill>
             <a:schemeClr val="tx1"/>
           </a:solidFill>
-          <a:latin typeface="TradeGothic" charset="0"/>
-          <a:ea typeface="ＭＳ Ｐゴシック" charset="0"/>
-          <a:cs typeface="ＭＳ Ｐゴシック" charset="0"/>
+          <a:latin typeface="TradeGothic" pitchFamily="1" charset="0"/>
+          <a:ea typeface="MS PGothic" panose="020B0600070205080204" pitchFamily="1" charset="-128"/>
+          <a:cs typeface="MS PGothic" panose="020B0600070205080204" pitchFamily="1" charset="-128"/>
         </a:defRPr>
       </a:lvl6pPr>
       <a:lvl7pPr marL="914400" algn="ctr" defTabSz="457200" rtl="0" fontAlgn="base">
@@ -4530,9 +4378,9 @@
           <a:solidFill>
             <a:schemeClr val="tx1"/>
           </a:solidFill>
-          <a:latin typeface="TradeGothic" charset="0"/>
-          <a:ea typeface="ＭＳ Ｐゴシック" charset="0"/>
-          <a:cs typeface="ＭＳ Ｐゴシック" charset="0"/>
+          <a:latin typeface="TradeGothic" pitchFamily="1" charset="0"/>
+          <a:ea typeface="MS PGothic" panose="020B0600070205080204" pitchFamily="1" charset="-128"/>
+          <a:cs typeface="MS PGothic" panose="020B0600070205080204" pitchFamily="1" charset="-128"/>
         </a:defRPr>
       </a:lvl7pPr>
       <a:lvl8pPr marL="1371600" algn="ctr" defTabSz="457200" rtl="0" fontAlgn="base">
@@ -4546,9 +4394,9 @@
           <a:solidFill>
             <a:schemeClr val="tx1"/>
           </a:solidFill>
-          <a:latin typeface="TradeGothic" charset="0"/>
-          <a:ea typeface="ＭＳ Ｐゴシック" charset="0"/>
-          <a:cs typeface="ＭＳ Ｐゴシック" charset="0"/>
+          <a:latin typeface="TradeGothic" pitchFamily="1" charset="0"/>
+          <a:ea typeface="MS PGothic" panose="020B0600070205080204" pitchFamily="1" charset="-128"/>
+          <a:cs typeface="MS PGothic" panose="020B0600070205080204" pitchFamily="1" charset="-128"/>
         </a:defRPr>
       </a:lvl8pPr>
       <a:lvl9pPr marL="1828800" algn="ctr" defTabSz="457200" rtl="0" fontAlgn="base">
@@ -4562,9 +4410,9 @@
           <a:solidFill>
             <a:schemeClr val="tx1"/>
           </a:solidFill>
-          <a:latin typeface="TradeGothic" charset="0"/>
-          <a:ea typeface="ＭＳ Ｐゴシック" charset="0"/>
-          <a:cs typeface="ＭＳ Ｐゴシック" charset="0"/>
+          <a:latin typeface="TradeGothic" pitchFamily="1" charset="0"/>
+          <a:ea typeface="MS PGothic" panose="020B0600070205080204" pitchFamily="1" charset="-128"/>
+          <a:cs typeface="MS PGothic" panose="020B0600070205080204" pitchFamily="1" charset="-128"/>
         </a:defRPr>
       </a:lvl9pPr>
     </p:titleStyle>
@@ -4576,15 +4424,15 @@
         <a:spcAft>
           <a:spcPct val="0"/>
         </a:spcAft>
-        <a:buFont typeface="Arial" pitchFamily="34" charset="0"/>
+        <a:buFont typeface="Arial" panose="020B0604020202020204" pitchFamily="34" charset="0"/>
         <a:buChar char="•"/>
         <a:defRPr sz="3200" kern="1200">
           <a:solidFill>
             <a:schemeClr val="tx1"/>
           </a:solidFill>
           <a:latin typeface="TradeGothic"/>
-          <a:ea typeface="ＭＳ Ｐゴシック" charset="0"/>
-          <a:cs typeface="ＭＳ Ｐゴシック" charset="0"/>
+          <a:ea typeface="MS PGothic" panose="020B0600070205080204" pitchFamily="1" charset="-128"/>
+          <a:cs typeface="MS PGothic" panose="020B0600070205080204" pitchFamily="1" charset="-128"/>
         </a:defRPr>
       </a:lvl1pPr>
       <a:lvl2pPr marL="742950" indent="-285750" algn="l" defTabSz="457200" rtl="0" eaLnBrk="0" fontAlgn="base" hangingPunct="0">
@@ -4594,14 +4442,14 @@
         <a:spcAft>
           <a:spcPct val="0"/>
         </a:spcAft>
-        <a:buFont typeface="Arial" pitchFamily="34" charset="0"/>
+        <a:buFont typeface="Arial" panose="020B0604020202020204" pitchFamily="34" charset="0"/>
         <a:buChar char="–"/>
         <a:defRPr sz="2800" kern="1200">
           <a:solidFill>
             <a:schemeClr val="tx1"/>
           </a:solidFill>
           <a:latin typeface="TradeGothic"/>
-          <a:ea typeface="ＭＳ Ｐゴシック" charset="0"/>
+          <a:ea typeface="MS PGothic" panose="020B0600070205080204" pitchFamily="1" charset="-128"/>
           <a:cs typeface="+mn-cs"/>
         </a:defRPr>
       </a:lvl2pPr>
@@ -4612,14 +4460,14 @@
         <a:spcAft>
           <a:spcPct val="0"/>
         </a:spcAft>
-        <a:buFont typeface="Arial" pitchFamily="34" charset="0"/>
+        <a:buFont typeface="Arial" panose="020B0604020202020204" pitchFamily="34" charset="0"/>
         <a:buChar char="•"/>
         <a:defRPr sz="2400" kern="1200">
           <a:solidFill>
             <a:schemeClr val="tx1"/>
           </a:solidFill>
           <a:latin typeface="TradeGothic"/>
-          <a:ea typeface="ＭＳ Ｐゴシック" charset="0"/>
+          <a:ea typeface="MS PGothic" panose="020B0600070205080204" pitchFamily="1" charset="-128"/>
           <a:cs typeface="+mn-cs"/>
         </a:defRPr>
       </a:lvl3pPr>
@@ -4630,14 +4478,14 @@
         <a:spcAft>
           <a:spcPct val="0"/>
         </a:spcAft>
-        <a:buFont typeface="Arial" pitchFamily="34" charset="0"/>
+        <a:buFont typeface="Arial" panose="020B0604020202020204" pitchFamily="34" charset="0"/>
         <a:buChar char="–"/>
         <a:defRPr sz="2000" kern="1200">
           <a:solidFill>
             <a:schemeClr val="tx1"/>
           </a:solidFill>
           <a:latin typeface="TradeGothic"/>
-          <a:ea typeface="ＭＳ Ｐゴシック" charset="0"/>
+          <a:ea typeface="MS PGothic" panose="020B0600070205080204" pitchFamily="1" charset="-128"/>
           <a:cs typeface="+mn-cs"/>
         </a:defRPr>
       </a:lvl4pPr>
@@ -4648,14 +4496,14 @@
         <a:spcAft>
           <a:spcPct val="0"/>
         </a:spcAft>
-        <a:buFont typeface="Arial" pitchFamily="34" charset="0"/>
+        <a:buFont typeface="Arial" panose="020B0604020202020204" pitchFamily="34" charset="0"/>
         <a:buChar char="»"/>
         <a:defRPr sz="2000" kern="1200">
           <a:solidFill>
             <a:schemeClr val="tx1"/>
           </a:solidFill>
           <a:latin typeface="TradeGothic"/>
-          <a:ea typeface="ＭＳ Ｐゴシック" charset="0"/>
+          <a:ea typeface="MS PGothic" panose="020B0600070205080204" pitchFamily="1" charset="-128"/>
           <a:cs typeface="+mn-cs"/>
         </a:defRPr>
       </a:lvl5pPr>
@@ -4663,7 +4511,7 @@
         <a:spcBef>
           <a:spcPct val="20000"/>
         </a:spcBef>
-        <a:buFont typeface="Arial"/>
+        <a:buFont typeface="Arial" panose="020B0604020202020204"/>
         <a:buChar char="•"/>
         <a:defRPr sz="2000" kern="1200">
           <a:solidFill>
@@ -4678,7 +4526,7 @@
         <a:spcBef>
           <a:spcPct val="20000"/>
         </a:spcBef>
-        <a:buFont typeface="Arial"/>
+        <a:buFont typeface="Arial" panose="020B0604020202020204"/>
         <a:buChar char="•"/>
         <a:defRPr sz="2000" kern="1200">
           <a:solidFill>
@@ -4693,7 +4541,7 @@
         <a:spcBef>
           <a:spcPct val="20000"/>
         </a:spcBef>
-        <a:buFont typeface="Arial"/>
+        <a:buFont typeface="Arial" panose="020B0604020202020204"/>
         <a:buChar char="•"/>
         <a:defRPr sz="2000" kern="1200">
           <a:solidFill>
@@ -4708,7 +4556,7 @@
         <a:spcBef>
           <a:spcPct val="20000"/>
         </a:spcBef>
-        <a:buFont typeface="Arial"/>
+        <a:buFont typeface="Arial" panose="020B0604020202020204"/>
         <a:buChar char="•"/>
         <a:defRPr sz="2000" kern="1200">
           <a:solidFill>
@@ -4846,26 +4694,11 @@
       </p:grpSpPr>
       <p:sp useBgFill="1">
         <p:nvSpPr>
-          <p:cNvPr id="36" name="Rectangle 24">
-            <a:extLst>
-              <a:ext uri="{FF2B5EF4-FFF2-40B4-BE49-F238E27FC236}">
-                <a16:creationId xmlns:a16="http://schemas.microsoft.com/office/drawing/2014/main" id="{3E443FD7-A66B-4AA0-872D-B088B9BC5F17}"/>
-              </a:ext>
-              <a:ext uri="{C183D7F6-B498-43B3-948B-1728B52AA6E4}">
-                <adec:decorative xmlns:adec="http://schemas.microsoft.com/office/drawing/2017/decorative" xmlns="" val="1"/>
-              </a:ext>
-            </a:extLst>
-          </p:cNvPr>
+          <p:cNvPr id="36" name="Rectangle 24"/>
           <p:cNvSpPr>
             <a:spLocks noGrp="1" noRot="1" noChangeAspect="1" noMove="1" noResize="1" noEditPoints="1" noAdjustHandles="1" noChangeArrowheads="1" noChangeShapeType="1" noTextEdit="1"/>
           </p:cNvSpPr>
-          <p:nvPr>
-            <p:extLst>
-              <p:ext uri="{386F3935-93C4-4BCD-93E2-E3B085C9AB24}">
-                <p16:designElem xmlns:p16="http://schemas.microsoft.com/office/powerpoint/2015/main" val="1"/>
-              </p:ext>
-            </p:extLst>
-          </p:nvPr>
+          <p:nvPr/>
         </p:nvSpPr>
         <p:spPr>
           <a:xfrm>
@@ -4906,26 +4739,11 @@
       </p:sp>
       <p:sp>
         <p:nvSpPr>
-          <p:cNvPr id="37" name="Freeform: Shape 26">
-            <a:extLst>
-              <a:ext uri="{FF2B5EF4-FFF2-40B4-BE49-F238E27FC236}">
-                <a16:creationId xmlns:a16="http://schemas.microsoft.com/office/drawing/2014/main" id="{C04BE0EF-3561-49B4-9A29-F283168A91C7}"/>
-              </a:ext>
-              <a:ext uri="{C183D7F6-B498-43B3-948B-1728B52AA6E4}">
-                <adec:decorative xmlns:adec="http://schemas.microsoft.com/office/drawing/2017/decorative" xmlns="" val="1"/>
-              </a:ext>
-            </a:extLst>
-          </p:cNvPr>
+          <p:cNvPr id="37" name="Freeform: Shape 26"/>
           <p:cNvSpPr>
             <a:spLocks noGrp="1" noRot="1" noChangeAspect="1" noMove="1" noResize="1" noEditPoints="1" noAdjustHandles="1" noChangeArrowheads="1" noChangeShapeType="1" noTextEdit="1"/>
           </p:cNvSpPr>
-          <p:nvPr>
-            <p:extLst>
-              <p:ext uri="{386F3935-93C4-4BCD-93E2-E3B085C9AB24}">
-                <p16:designElem xmlns:p16="http://schemas.microsoft.com/office/powerpoint/2015/main" val="1"/>
-              </p:ext>
-            </p:extLst>
-          </p:nvPr>
+          <p:nvPr/>
         </p:nvSpPr>
         <p:spPr>
           <a:xfrm>
@@ -5680,22 +5498,18 @@
       </p:sp>
       <p:pic>
         <p:nvPicPr>
-          <p:cNvPr id="5" name="Picture 4">
-            <a:extLst>
-              <a:ext uri="{FF2B5EF4-FFF2-40B4-BE49-F238E27FC236}">
-                <a16:creationId xmlns:a16="http://schemas.microsoft.com/office/drawing/2014/main" id="{9120848B-B2B4-45BE-A961-AEC0B06CF41B}"/>
-              </a:ext>
-            </a:extLst>
-          </p:cNvPr>
+          <p:cNvPr id="5" name="Picture 4"/>
           <p:cNvPicPr>
             <a:picLocks noChangeAspect="1"/>
           </p:cNvPicPr>
           <p:nvPr/>
         </p:nvPicPr>
         <p:blipFill rotWithShape="1">
-          <a:blip r:embed="rId2"/>
+          <a:blip r:embed="rId1"/>
           <a:srcRect r="59916"/>
-          <a:stretch/>
+          <a:stretch>
+            <a:fillRect/>
+          </a:stretch>
         </p:blipFill>
         <p:spPr>
           <a:xfrm>
@@ -5812,7 +5626,7 @@
         <p:spPr>
           <a:xfrm>
             <a:off x="331286" y="2076450"/>
-            <a:ext cx="5924550" cy="4703019"/>
+            <a:ext cx="5924550" cy="4799965"/>
           </a:xfrm>
           <a:prstGeom prst="rect">
             <a:avLst/>
@@ -5840,8 +5654,12 @@
                 <a:latin typeface="Arial" panose="020B0604020202020204" pitchFamily="34" charset="0"/>
                 <a:cs typeface="Arial" panose="020B0604020202020204" pitchFamily="34" charset="0"/>
               </a:rPr>
-              <a:t>Problem Statement ID –</a:t>
-            </a:r>
+              <a:t>Problem Statement ID –SIH26036</a:t>
+            </a:r>
+            <a:endParaRPr lang="en-US" sz="2400" b="1" dirty="0">
+              <a:latin typeface="Arial" panose="020B0604020202020204" pitchFamily="34" charset="0"/>
+              <a:cs typeface="Arial" panose="020B0604020202020204" pitchFamily="34" charset="0"/>
+            </a:endParaRPr>
           </a:p>
           <a:p>
             <a:pPr marL="285750" indent="-285750" algn="just">
@@ -5858,6 +5676,10 @@
               </a:rPr>
               <a:t>Problem Statement Title-</a:t>
             </a:r>
+            <a:endParaRPr lang="en-US" sz="2400" b="1" dirty="0">
+              <a:latin typeface="Arial" panose="020B0604020202020204" pitchFamily="34" charset="0"/>
+              <a:cs typeface="Arial" panose="020B0604020202020204" pitchFamily="34" charset="0"/>
+            </a:endParaRPr>
           </a:p>
           <a:p>
             <a:pPr marL="285750" indent="-285750" algn="just">
@@ -5874,6 +5696,10 @@
               </a:rPr>
               <a:t>Theme-</a:t>
             </a:r>
+            <a:endParaRPr lang="en-US" sz="2400" b="1" dirty="0">
+              <a:latin typeface="Arial" panose="020B0604020202020204" pitchFamily="34" charset="0"/>
+              <a:cs typeface="Arial" panose="020B0604020202020204" pitchFamily="34" charset="0"/>
+            </a:endParaRPr>
           </a:p>
           <a:p>
             <a:pPr marL="285750" indent="-285750" algn="just">
@@ -5890,6 +5716,10 @@
               </a:rPr>
               <a:t>PS Category- Software/Hardware</a:t>
             </a:r>
+            <a:endParaRPr lang="en-US" sz="2400" b="1" dirty="0">
+              <a:latin typeface="Arial" panose="020B0604020202020204" pitchFamily="34" charset="0"/>
+              <a:cs typeface="Arial" panose="020B0604020202020204" pitchFamily="34" charset="0"/>
+            </a:endParaRPr>
           </a:p>
           <a:p>
             <a:pPr marL="285750" indent="-285750" algn="just">
@@ -5906,6 +5736,10 @@
               </a:rPr>
               <a:t>Team ID-</a:t>
             </a:r>
+            <a:endParaRPr lang="en-US" sz="2400" b="1" dirty="0">
+              <a:latin typeface="Arial" panose="020B0604020202020204" pitchFamily="34" charset="0"/>
+              <a:cs typeface="Arial" panose="020B0604020202020204" pitchFamily="34" charset="0"/>
+            </a:endParaRPr>
           </a:p>
           <a:p>
             <a:pPr marL="285750" indent="-285750" algn="just">
@@ -5938,7 +5772,7 @@
           <p:nvPr/>
         </p:nvPicPr>
         <p:blipFill>
-          <a:blip r:embed="rId3">
+          <a:blip r:embed="rId2">
             <a:extLst>
               <a:ext uri="{28A0092B-C50C-407E-A947-70E740481C1C}">
                 <a14:useLocalDpi xmlns:a14="http://schemas.microsoft.com/office/drawing/2010/main" val="0"/>
@@ -6006,8 +5840,6 @@
           <a:ln w="9525">
             <a:noFill/>
             <a:miter lim="800000"/>
-            <a:headEnd/>
-            <a:tailEnd/>
           </a:ln>
           <a:effectLst>
             <a:outerShdw dist="23000" dir="5400000" rotWithShape="0">
@@ -6063,29 +5895,26 @@
           <a:lstStyle/>
           <a:p>
             <a:pPr eaLnBrk="1" hangingPunct="1"/>
-            <a:r>
-              <a:rPr lang="en-US" sz="3600" b="1" dirty="0">
-                <a:latin typeface="Times New Roman" panose="02020603050405020304" pitchFamily="18" charset="0"/>
-                <a:ea typeface="ＭＳ Ｐゴシック" pitchFamily="1" charset="-128"/>
-                <a:cs typeface="Times New Roman" panose="02020603050405020304" pitchFamily="18" charset="0"/>
-              </a:rPr>
-              <a:t/>
-            </a:r>
             <a:br>
               <a:rPr lang="en-US" sz="3600" b="1" dirty="0">
                 <a:latin typeface="Times New Roman" panose="02020603050405020304" pitchFamily="18" charset="0"/>
-                <a:ea typeface="ＭＳ Ｐゴシック" pitchFamily="1" charset="-128"/>
+                <a:ea typeface="MS PGothic" panose="020B0600070205080204" pitchFamily="1" charset="-128"/>
                 <a:cs typeface="Times New Roman" panose="02020603050405020304" pitchFamily="18" charset="0"/>
               </a:rPr>
             </a:br>
             <a:r>
               <a:rPr lang="en-US" sz="3600" b="1" dirty="0">
                 <a:latin typeface="Times New Roman" panose="02020603050405020304" pitchFamily="18" charset="0"/>
-                <a:ea typeface="ＭＳ Ｐゴシック" pitchFamily="1" charset="-128"/>
+                <a:ea typeface="MS PGothic" panose="020B0600070205080204" pitchFamily="1" charset="-128"/>
                 <a:cs typeface="Times New Roman" panose="02020603050405020304" pitchFamily="18" charset="0"/>
               </a:rPr>
               <a:t>IDEA TITLE</a:t>
             </a:r>
+            <a:endParaRPr lang="en-US" sz="3600" b="1" dirty="0">
+              <a:latin typeface="Times New Roman" panose="02020603050405020304" pitchFamily="18" charset="0"/>
+              <a:ea typeface="MS PGothic" panose="020B0600070205080204" pitchFamily="1" charset="-128"/>
+              <a:cs typeface="Times New Roman" panose="02020603050405020304" pitchFamily="18" charset="0"/>
+            </a:endParaRPr>
           </a:p>
         </p:txBody>
       </p:sp>
@@ -6109,8 +5938,6 @@
           <a:ln w="9525">
             <a:noFill/>
             <a:miter lim="800000"/>
-            <a:headEnd/>
-            <a:tailEnd/>
           </a:ln>
         </p:spPr>
         <p:txBody>
@@ -6128,8 +5955,8 @@
                 <a:solidFill>
                   <a:schemeClr val="tx2"/>
                 </a:solidFill>
-                <a:latin typeface="Arial" pitchFamily="34" charset="0"/>
-                <a:cs typeface="Arial" pitchFamily="34" charset="0"/>
+                <a:latin typeface="Arial" panose="020B0604020202020204" pitchFamily="34" charset="0"/>
+                <a:cs typeface="Arial" panose="020B0604020202020204" pitchFamily="34" charset="0"/>
               </a:rPr>
               <a:t>Proposed Solution (Describe your Idea/Solution/Prototype)</a:t>
             </a:r>
@@ -6137,8 +5964,8 @@
               <a:solidFill>
                 <a:schemeClr val="tx2"/>
               </a:solidFill>
-              <a:latin typeface="Arial" pitchFamily="34" charset="0"/>
-              <a:cs typeface="Arial" pitchFamily="34" charset="0"/>
+              <a:latin typeface="Arial" panose="020B0604020202020204" pitchFamily="34" charset="0"/>
+              <a:cs typeface="Arial" panose="020B0604020202020204" pitchFamily="34" charset="0"/>
             </a:endParaRPr>
           </a:p>
           <a:p>
@@ -6150,8 +5977,8 @@
               <a:solidFill>
                 <a:schemeClr val="tx2"/>
               </a:solidFill>
-              <a:latin typeface="Arial" pitchFamily="34" charset="0"/>
-              <a:cs typeface="Arial" pitchFamily="34" charset="0"/>
+              <a:latin typeface="Arial" panose="020B0604020202020204" pitchFamily="34" charset="0"/>
+              <a:cs typeface="Arial" panose="020B0604020202020204" pitchFamily="34" charset="0"/>
             </a:endParaRPr>
           </a:p>
           <a:p>
@@ -6163,8 +5990,8 @@
               <a:solidFill>
                 <a:schemeClr val="tx2"/>
               </a:solidFill>
-              <a:latin typeface="Arial" pitchFamily="34" charset="0"/>
-              <a:cs typeface="Arial" pitchFamily="34" charset="0"/>
+              <a:latin typeface="Arial" panose="020B0604020202020204" pitchFamily="34" charset="0"/>
+              <a:cs typeface="Arial" panose="020B0604020202020204" pitchFamily="34" charset="0"/>
             </a:endParaRPr>
           </a:p>
           <a:p>
@@ -6174,11 +6001,15 @@
             </a:pPr>
             <a:r>
               <a:rPr lang="en-US" sz="2800" dirty="0">
-                <a:latin typeface="Arial" pitchFamily="34" charset="0"/>
-                <a:cs typeface="Arial" pitchFamily="34" charset="0"/>
+                <a:latin typeface="Arial" panose="020B0604020202020204" pitchFamily="34" charset="0"/>
+                <a:cs typeface="Arial" panose="020B0604020202020204" pitchFamily="34" charset="0"/>
               </a:rPr>
               <a:t>Detailed explanation of the proposed solution</a:t>
             </a:r>
+            <a:endParaRPr lang="en-US" sz="2800" dirty="0">
+              <a:latin typeface="Arial" panose="020B0604020202020204" pitchFamily="34" charset="0"/>
+              <a:cs typeface="Arial" panose="020B0604020202020204" pitchFamily="34" charset="0"/>
+            </a:endParaRPr>
           </a:p>
           <a:p>
             <a:pPr marL="342900" indent="-342900" algn="just">
@@ -6187,11 +6018,15 @@
             </a:pPr>
             <a:r>
               <a:rPr lang="en-US" sz="2800" dirty="0">
-                <a:latin typeface="Arial" pitchFamily="34" charset="0"/>
-                <a:cs typeface="Arial" pitchFamily="34" charset="0"/>
+                <a:latin typeface="Arial" panose="020B0604020202020204" pitchFamily="34" charset="0"/>
+                <a:cs typeface="Arial" panose="020B0604020202020204" pitchFamily="34" charset="0"/>
               </a:rPr>
               <a:t> How it addresses the problem</a:t>
             </a:r>
+            <a:endParaRPr lang="en-US" sz="2800" dirty="0">
+              <a:latin typeface="Arial" panose="020B0604020202020204" pitchFamily="34" charset="0"/>
+              <a:cs typeface="Arial" panose="020B0604020202020204" pitchFamily="34" charset="0"/>
+            </a:endParaRPr>
           </a:p>
           <a:p>
             <a:pPr marL="342900" indent="-342900" algn="just">
@@ -6200,11 +6035,15 @@
             </a:pPr>
             <a:r>
               <a:rPr lang="en-US" sz="2800" dirty="0">
-                <a:latin typeface="Arial" pitchFamily="34" charset="0"/>
-                <a:cs typeface="Arial" pitchFamily="34" charset="0"/>
+                <a:latin typeface="Arial" panose="020B0604020202020204" pitchFamily="34" charset="0"/>
+                <a:cs typeface="Arial" panose="020B0604020202020204" pitchFamily="34" charset="0"/>
               </a:rPr>
               <a:t>Innovation and uniqueness of the solution </a:t>
             </a:r>
+            <a:endParaRPr lang="en-US" sz="2800" dirty="0">
+              <a:latin typeface="Arial" panose="020B0604020202020204" pitchFamily="34" charset="0"/>
+              <a:cs typeface="Arial" panose="020B0604020202020204" pitchFamily="34" charset="0"/>
+            </a:endParaRPr>
           </a:p>
         </p:txBody>
       </p:sp>
@@ -6229,8 +6068,6 @@
                   <a:schemeClr val="bg1"/>
                 </a:solidFill>
               </a:rPr>
-              <a:pPr/>
-              <a:t>2</a:t>
             </a:fld>
             <a:endParaRPr lang="en-US" b="1" dirty="0">
               <a:solidFill>
@@ -6281,16 +6118,7 @@
       </p:sp>
       <p:sp>
         <p:nvSpPr>
-          <p:cNvPr id="10" name="Oval 9" descr="Your startup LOGO">
-            <a:extLst>
-              <a:ext uri="{FF2B5EF4-FFF2-40B4-BE49-F238E27FC236}">
-                <a16:creationId xmlns:a16="http://schemas.microsoft.com/office/drawing/2014/main" id="{5DBCE864-823D-4A13-9607-5DA1F0ED5FB8}"/>
-              </a:ext>
-              <a:ext uri="{C183D7F6-B498-43B3-948B-1728B52AA6E4}">
-                <adec:decorative xmlns:adec="http://schemas.microsoft.com/office/drawing/2017/decorative" xmlns="" val="0"/>
-              </a:ext>
-            </a:extLst>
-          </p:cNvPr>
+          <p:cNvPr id="10" name="Oval 9" descr="Your startup LOGO"/>
           <p:cNvSpPr/>
           <p:nvPr/>
         </p:nvSpPr>
@@ -6339,7 +6167,7 @@
           <p:nvPr/>
         </p:nvPicPr>
         <p:blipFill>
-          <a:blip r:embed="rId3">
+          <a:blip r:embed="rId1">
             <a:extLst>
               <a:ext uri="{28A0092B-C50C-407E-A947-70E740481C1C}">
                 <a14:useLocalDpi xmlns:a14="http://schemas.microsoft.com/office/drawing/2010/main" val="0"/>
@@ -6387,13 +6215,7 @@
       </p:grpSpPr>
       <p:sp>
         <p:nvSpPr>
-          <p:cNvPr id="10" name="Rectangle 9">
-            <a:extLst>
-              <a:ext uri="{FF2B5EF4-FFF2-40B4-BE49-F238E27FC236}">
-                <a16:creationId xmlns:a16="http://schemas.microsoft.com/office/drawing/2014/main" id="{AD4F69D3-EEB0-4C4C-9434-B9960FB5854C}"/>
-              </a:ext>
-            </a:extLst>
-          </p:cNvPr>
+          <p:cNvPr id="10" name="Rectangle 9"/>
           <p:cNvSpPr>
             <a:spLocks noChangeArrowheads="1"/>
           </p:cNvSpPr>
@@ -6413,8 +6235,6 @@
           <a:ln w="9525">
             <a:noFill/>
             <a:miter lim="800000"/>
-            <a:headEnd/>
-            <a:tailEnd/>
           </a:ln>
           <a:effectLst>
             <a:outerShdw dist="23000" dir="5400000" rotWithShape="0">
@@ -6468,11 +6288,16 @@
             <a:r>
               <a:rPr lang="en-US" sz="3600" b="1" dirty="0">
                 <a:latin typeface="Times New Roman" panose="02020603050405020304" pitchFamily="18" charset="0"/>
-                <a:ea typeface="ＭＳ Ｐゴシック" pitchFamily="1" charset="-128"/>
+                <a:ea typeface="MS PGothic" panose="020B0600070205080204" pitchFamily="1" charset="-128"/>
                 <a:cs typeface="Times New Roman" panose="02020603050405020304" pitchFamily="18" charset="0"/>
               </a:rPr>
               <a:t>TECHNICAL APPROACH</a:t>
             </a:r>
+            <a:endParaRPr lang="en-US" sz="3600" b="1" dirty="0">
+              <a:latin typeface="Times New Roman" panose="02020603050405020304" pitchFamily="18" charset="0"/>
+              <a:ea typeface="MS PGothic" panose="020B0600070205080204" pitchFamily="1" charset="-128"/>
+              <a:cs typeface="Times New Roman" panose="02020603050405020304" pitchFamily="18" charset="0"/>
+            </a:endParaRPr>
           </a:p>
         </p:txBody>
       </p:sp>
@@ -6496,8 +6321,6 @@
           <a:ln w="9525">
             <a:noFill/>
             <a:miter lim="800000"/>
-            <a:headEnd/>
-            <a:tailEnd/>
           </a:ln>
         </p:spPr>
         <p:txBody>
@@ -6512,11 +6335,15 @@
             </a:pPr>
             <a:r>
               <a:rPr lang="en-US" sz="2800" dirty="0">
-                <a:latin typeface="Arial" pitchFamily="34" charset="0"/>
-                <a:cs typeface="Arial" pitchFamily="34" charset="0"/>
+                <a:latin typeface="Arial" panose="020B0604020202020204" pitchFamily="34" charset="0"/>
+                <a:cs typeface="Arial" panose="020B0604020202020204" pitchFamily="34" charset="0"/>
               </a:rPr>
               <a:t>Technologies to be used (e.g. programming languages, frameworks, hardware)</a:t>
             </a:r>
+            <a:endParaRPr lang="en-US" sz="2800" dirty="0">
+              <a:latin typeface="Arial" panose="020B0604020202020204" pitchFamily="34" charset="0"/>
+              <a:cs typeface="Arial" panose="020B0604020202020204" pitchFamily="34" charset="0"/>
+            </a:endParaRPr>
           </a:p>
           <a:p>
             <a:pPr marL="342900" indent="-342900" algn="just">
@@ -6525,11 +6352,15 @@
             </a:pPr>
             <a:r>
               <a:rPr lang="en-US" sz="2800" dirty="0">
-                <a:latin typeface="Arial" pitchFamily="34" charset="0"/>
-                <a:cs typeface="Arial" pitchFamily="34" charset="0"/>
+                <a:latin typeface="Arial" panose="020B0604020202020204" pitchFamily="34" charset="0"/>
+                <a:cs typeface="Arial" panose="020B0604020202020204" pitchFamily="34" charset="0"/>
               </a:rPr>
               <a:t>Methodology and process for implementation (Flow Charts/Images/ working prototype)</a:t>
             </a:r>
+            <a:endParaRPr lang="en-US" sz="2800" dirty="0">
+              <a:latin typeface="Arial" panose="020B0604020202020204" pitchFamily="34" charset="0"/>
+              <a:cs typeface="Arial" panose="020B0604020202020204" pitchFamily="34" charset="0"/>
+            </a:endParaRPr>
           </a:p>
         </p:txBody>
       </p:sp>
@@ -6554,8 +6385,6 @@
                   <a:schemeClr val="bg1"/>
                 </a:solidFill>
               </a:rPr>
-              <a:pPr/>
-              <a:t>3</a:t>
             </a:fld>
             <a:endParaRPr lang="en-US" b="1" dirty="0">
               <a:solidFill>
@@ -6606,16 +6435,7 @@
       </p:sp>
       <p:sp>
         <p:nvSpPr>
-          <p:cNvPr id="11" name="Oval 10" descr="Your startup LOGO">
-            <a:extLst>
-              <a:ext uri="{FF2B5EF4-FFF2-40B4-BE49-F238E27FC236}">
-                <a16:creationId xmlns:a16="http://schemas.microsoft.com/office/drawing/2014/main" id="{5DBCE864-823D-4A13-9607-5DA1F0ED5FB8}"/>
-              </a:ext>
-              <a:ext uri="{C183D7F6-B498-43B3-948B-1728B52AA6E4}">
-                <adec:decorative xmlns:adec="http://schemas.microsoft.com/office/drawing/2017/decorative" xmlns="" val="0"/>
-              </a:ext>
-            </a:extLst>
-          </p:cNvPr>
+          <p:cNvPr id="11" name="Oval 10" descr="Your startup LOGO"/>
           <p:cNvSpPr/>
           <p:nvPr/>
         </p:nvSpPr>
@@ -6664,7 +6484,7 @@
           <p:nvPr/>
         </p:nvPicPr>
         <p:blipFill>
-          <a:blip r:embed="rId3">
+          <a:blip r:embed="rId1">
             <a:extLst>
               <a:ext uri="{28A0092B-C50C-407E-A947-70E740481C1C}">
                 <a14:useLocalDpi xmlns:a14="http://schemas.microsoft.com/office/drawing/2010/main" val="0"/>
@@ -6712,13 +6532,7 @@
       </p:grpSpPr>
       <p:sp>
         <p:nvSpPr>
-          <p:cNvPr id="10" name="Rectangle 9">
-            <a:extLst>
-              <a:ext uri="{FF2B5EF4-FFF2-40B4-BE49-F238E27FC236}">
-                <a16:creationId xmlns:a16="http://schemas.microsoft.com/office/drawing/2014/main" id="{AD4F69D3-EEB0-4C4C-9434-B9960FB5854C}"/>
-              </a:ext>
-            </a:extLst>
-          </p:cNvPr>
+          <p:cNvPr id="10" name="Rectangle 9"/>
           <p:cNvSpPr>
             <a:spLocks noChangeArrowheads="1"/>
           </p:cNvSpPr>
@@ -6738,8 +6552,6 @@
           <a:ln w="9525">
             <a:noFill/>
             <a:miter lim="800000"/>
-            <a:headEnd/>
-            <a:tailEnd/>
           </a:ln>
           <a:effectLst>
             <a:outerShdw dist="23000" dir="5400000" rotWithShape="0">
@@ -6767,7 +6579,6 @@
               <a:buSzTx/>
               <a:buFontTx/>
               <a:buNone/>
-              <a:tabLst/>
               <a:defRPr/>
             </a:pPr>
             <a:endParaRPr kumimoji="0" lang="en-US" sz="1800" b="0" i="0" u="none" strike="noStrike" kern="1200" cap="none" spc="0" normalizeH="0" baseline="0" noProof="0" dirty="0">
@@ -6782,8 +6593,8 @@
               <a:effectLst/>
               <a:uLnTx/>
               <a:uFillTx/>
-              <a:latin typeface="Calibri"/>
-              <a:ea typeface="ＭＳ Ｐゴシック" pitchFamily="1" charset="-128"/>
+              <a:latin typeface="Calibri" panose="020F0502020204030204"/>
+              <a:ea typeface="MS PGothic" panose="020B0600070205080204" pitchFamily="1" charset="-128"/>
               <a:cs typeface="+mn-cs"/>
             </a:endParaRPr>
           </a:p>
@@ -6808,11 +6619,16 @@
             <a:r>
               <a:rPr lang="en-US" sz="3600" b="1" dirty="0">
                 <a:latin typeface="Times New Roman" panose="02020603050405020304" pitchFamily="18" charset="0"/>
-                <a:ea typeface="ＭＳ Ｐゴシック" pitchFamily="1" charset="-128"/>
+                <a:ea typeface="MS PGothic" panose="020B0600070205080204" pitchFamily="1" charset="-128"/>
                 <a:cs typeface="Times New Roman" panose="02020603050405020304" pitchFamily="18" charset="0"/>
               </a:rPr>
               <a:t>FEASIBILITY AND VIABILITY</a:t>
             </a:r>
+            <a:endParaRPr lang="en-US" sz="3600" b="1" dirty="0">
+              <a:latin typeface="Times New Roman" panose="02020603050405020304" pitchFamily="18" charset="0"/>
+              <a:ea typeface="MS PGothic" panose="020B0600070205080204" pitchFamily="1" charset="-128"/>
+              <a:cs typeface="Times New Roman" panose="02020603050405020304" pitchFamily="18" charset="0"/>
+            </a:endParaRPr>
           </a:p>
         </p:txBody>
       </p:sp>
@@ -6836,8 +6652,6 @@
           <a:ln w="9525">
             <a:noFill/>
             <a:miter lim="800000"/>
-            <a:headEnd/>
-            <a:tailEnd/>
           </a:ln>
         </p:spPr>
         <p:txBody>
@@ -6860,7 +6674,6 @@
               <a:buSzTx/>
               <a:buFont typeface="Arial" panose="020B0604020202020204" pitchFamily="34" charset="0"/>
               <a:buChar char="•"/>
-              <a:tabLst/>
               <a:defRPr/>
             </a:pPr>
             <a:r>
@@ -6868,8 +6681,8 @@
                 <a:solidFill>
                   <a:prstClr val="black"/>
                 </a:solidFill>
-                <a:latin typeface="Arial" pitchFamily="34" charset="0"/>
-                <a:cs typeface="Arial" pitchFamily="34" charset="0"/>
+                <a:latin typeface="Arial" panose="020B0604020202020204" pitchFamily="34" charset="0"/>
+                <a:cs typeface="Arial" panose="020B0604020202020204" pitchFamily="34" charset="0"/>
               </a:rPr>
               <a:t>Analysis of the feasibility of the idea</a:t>
             </a:r>
@@ -6883,9 +6696,9 @@
               <a:effectLst/>
               <a:uLnTx/>
               <a:uFillTx/>
-              <a:latin typeface="Arial" pitchFamily="34" charset="0"/>
-              <a:ea typeface="ＭＳ Ｐゴシック" pitchFamily="1" charset="-128"/>
-              <a:cs typeface="Arial" pitchFamily="34" charset="0"/>
+              <a:latin typeface="Arial" panose="020B0604020202020204" pitchFamily="34" charset="0"/>
+              <a:ea typeface="MS PGothic" panose="020B0600070205080204" pitchFamily="1" charset="-128"/>
+              <a:cs typeface="Arial" panose="020B0604020202020204" pitchFamily="34" charset="0"/>
             </a:endParaRPr>
           </a:p>
           <a:p>
@@ -6903,7 +6716,6 @@
               <a:buSzTx/>
               <a:buFont typeface="Arial" panose="020B0604020202020204" pitchFamily="34" charset="0"/>
               <a:buChar char="•"/>
-              <a:tabLst/>
               <a:defRPr/>
             </a:pPr>
             <a:r>
@@ -6911,11 +6723,18 @@
                 <a:solidFill>
                   <a:prstClr val="black"/>
                 </a:solidFill>
-                <a:latin typeface="Arial" pitchFamily="34" charset="0"/>
-                <a:cs typeface="Arial" pitchFamily="34" charset="0"/>
+                <a:latin typeface="Arial" panose="020B0604020202020204" pitchFamily="34" charset="0"/>
+                <a:cs typeface="Arial" panose="020B0604020202020204" pitchFamily="34" charset="0"/>
               </a:rPr>
               <a:t>Potential challenges and risks</a:t>
             </a:r>
+            <a:endParaRPr lang="en-US" sz="2800" dirty="0">
+              <a:solidFill>
+                <a:prstClr val="black"/>
+              </a:solidFill>
+              <a:latin typeface="Arial" panose="020B0604020202020204" pitchFamily="34" charset="0"/>
+              <a:cs typeface="Arial" panose="020B0604020202020204" pitchFamily="34" charset="0"/>
+            </a:endParaRPr>
           </a:p>
           <a:p>
             <a:pPr marL="342900" marR="0" lvl="0" indent="-342900" algn="just" defTabSz="457200" rtl="0" eaLnBrk="1" fontAlgn="base" latinLnBrk="0" hangingPunct="1">
@@ -6932,7 +6751,6 @@
               <a:buSzTx/>
               <a:buFont typeface="Arial" panose="020B0604020202020204" pitchFamily="34" charset="0"/>
               <a:buChar char="•"/>
-              <a:tabLst/>
               <a:defRPr/>
             </a:pPr>
             <a:r>
@@ -6946,9 +6764,9 @@
                 <a:effectLst/>
                 <a:uLnTx/>
                 <a:uFillTx/>
-                <a:latin typeface="Arial" pitchFamily="34" charset="0"/>
-                <a:ea typeface="ＭＳ Ｐゴシック" pitchFamily="1" charset="-128"/>
-                <a:cs typeface="Arial" pitchFamily="34" charset="0"/>
+                <a:latin typeface="Arial" panose="020B0604020202020204" pitchFamily="34" charset="0"/>
+                <a:ea typeface="MS PGothic" panose="020B0600070205080204" pitchFamily="1" charset="-128"/>
+                <a:cs typeface="Arial" panose="020B0604020202020204" pitchFamily="34" charset="0"/>
               </a:rPr>
               <a:t>Strategies</a:t>
             </a:r>
@@ -6963,9 +6781,9 @@
                 <a:effectLst/>
                 <a:uLnTx/>
                 <a:uFillTx/>
-                <a:latin typeface="Arial" pitchFamily="34" charset="0"/>
-                <a:ea typeface="ＭＳ Ｐゴシック" pitchFamily="1" charset="-128"/>
-                <a:cs typeface="Arial" pitchFamily="34" charset="0"/>
+                <a:latin typeface="Arial" panose="020B0604020202020204" pitchFamily="34" charset="0"/>
+                <a:ea typeface="MS PGothic" panose="020B0600070205080204" pitchFamily="1" charset="-128"/>
+                <a:cs typeface="Arial" panose="020B0604020202020204" pitchFamily="34" charset="0"/>
               </a:rPr>
               <a:t> for overcoming these challenges</a:t>
             </a:r>
@@ -6979,9 +6797,9 @@
               <a:effectLst/>
               <a:uLnTx/>
               <a:uFillTx/>
-              <a:latin typeface="Arial" pitchFamily="34" charset="0"/>
-              <a:ea typeface="ＭＳ Ｐゴシック" pitchFamily="1" charset="-128"/>
-              <a:cs typeface="Arial" pitchFamily="34" charset="0"/>
+              <a:latin typeface="Arial" panose="020B0604020202020204" pitchFamily="34" charset="0"/>
+              <a:ea typeface="MS PGothic" panose="020B0600070205080204" pitchFamily="1" charset="-128"/>
+              <a:cs typeface="Arial" panose="020B0604020202020204" pitchFamily="34" charset="0"/>
             </a:endParaRPr>
           </a:p>
         </p:txBody>
@@ -7015,7 +6833,6 @@
               <a:buSzTx/>
               <a:buFontTx/>
               <a:buNone/>
-              <a:tabLst/>
               <a:defRPr/>
             </a:pPr>
             <a:fld id="{677C3CE7-23F7-4828-823C-E0205DF2CF97}" type="slidenum">
@@ -7030,27 +6847,9 @@
                 <a:uLnTx/>
                 <a:uFillTx/>
                 <a:latin typeface="TradeGothic" pitchFamily="1" charset="0"/>
-                <a:ea typeface="ＭＳ Ｐゴシック" pitchFamily="1" charset="-128"/>
+                <a:ea typeface="MS PGothic" panose="020B0600070205080204" pitchFamily="1" charset="-128"/>
                 <a:cs typeface="+mn-cs"/>
               </a:rPr>
-              <a:pPr marL="0" marR="0" lvl="0" indent="0" algn="r" defTabSz="457200" rtl="0" eaLnBrk="1" fontAlgn="base" latinLnBrk="0" hangingPunct="1">
-                <a:lnSpc>
-                  <a:spcPct val="100000"/>
-                </a:lnSpc>
-                <a:spcBef>
-                  <a:spcPct val="0"/>
-                </a:spcBef>
-                <a:spcAft>
-                  <a:spcPct val="0"/>
-                </a:spcAft>
-                <a:buClrTx/>
-                <a:buSzTx/>
-                <a:buFontTx/>
-                <a:buNone/>
-                <a:tabLst/>
-                <a:defRPr/>
-              </a:pPr>
-              <a:t>4</a:t>
             </a:fld>
             <a:endParaRPr kumimoji="0" lang="en-US" sz="1200" b="1" i="0" u="none" strike="noStrike" kern="1200" cap="none" spc="0" normalizeH="0" baseline="0" noProof="0" dirty="0">
               <a:ln>
@@ -7063,7 +6862,7 @@
               <a:uLnTx/>
               <a:uFillTx/>
               <a:latin typeface="TradeGothic" pitchFamily="1" charset="0"/>
-              <a:ea typeface="ＭＳ Ｐゴシック" pitchFamily="1" charset="-128"/>
+              <a:ea typeface="MS PGothic" panose="020B0600070205080204" pitchFamily="1" charset="-128"/>
               <a:cs typeface="+mn-cs"/>
             </a:endParaRPr>
           </a:p>
@@ -7103,7 +6902,6 @@
               <a:buSzTx/>
               <a:buFontTx/>
               <a:buNone/>
-              <a:tabLst/>
               <a:defRPr/>
             </a:pPr>
             <a:r>
@@ -7142,16 +6940,7 @@
       </p:sp>
       <p:sp>
         <p:nvSpPr>
-          <p:cNvPr id="12" name="Oval 11" descr="Your startup LOGO">
-            <a:extLst>
-              <a:ext uri="{FF2B5EF4-FFF2-40B4-BE49-F238E27FC236}">
-                <a16:creationId xmlns:a16="http://schemas.microsoft.com/office/drawing/2014/main" id="{5DBCE864-823D-4A13-9607-5DA1F0ED5FB8}"/>
-              </a:ext>
-              <a:ext uri="{C183D7F6-B498-43B3-948B-1728B52AA6E4}">
-                <adec:decorative xmlns:adec="http://schemas.microsoft.com/office/drawing/2017/decorative" xmlns="" val="0"/>
-              </a:ext>
-            </a:extLst>
-          </p:cNvPr>
+          <p:cNvPr id="12" name="Oval 11" descr="Your startup LOGO"/>
           <p:cNvSpPr/>
           <p:nvPr/>
         </p:nvSpPr>
@@ -7200,7 +6989,7 @@
           <p:nvPr/>
         </p:nvPicPr>
         <p:blipFill>
-          <a:blip r:embed="rId3">
+          <a:blip r:embed="rId1">
             <a:extLst>
               <a:ext uri="{28A0092B-C50C-407E-A947-70E740481C1C}">
                 <a14:useLocalDpi xmlns:a14="http://schemas.microsoft.com/office/drawing/2010/main" val="0"/>
@@ -7222,11 +7011,6 @@
         </p:spPr>
       </p:pic>
     </p:spTree>
-    <p:extLst>
-      <p:ext uri="{BB962C8B-B14F-4D97-AF65-F5344CB8AC3E}">
-        <p14:creationId xmlns:p14="http://schemas.microsoft.com/office/powerpoint/2010/main" val="3753387913"/>
-      </p:ext>
-    </p:extLst>
   </p:cSld>
   <p:clrMapOvr>
     <a:masterClrMapping/>
@@ -7253,13 +7037,7 @@
       </p:grpSpPr>
       <p:sp>
         <p:nvSpPr>
-          <p:cNvPr id="10" name="Rectangle 9">
-            <a:extLst>
-              <a:ext uri="{FF2B5EF4-FFF2-40B4-BE49-F238E27FC236}">
-                <a16:creationId xmlns:a16="http://schemas.microsoft.com/office/drawing/2014/main" id="{AD4F69D3-EEB0-4C4C-9434-B9960FB5854C}"/>
-              </a:ext>
-            </a:extLst>
-          </p:cNvPr>
+          <p:cNvPr id="10" name="Rectangle 9"/>
           <p:cNvSpPr>
             <a:spLocks noChangeArrowheads="1"/>
           </p:cNvSpPr>
@@ -7279,8 +7057,6 @@
           <a:ln w="9525">
             <a:noFill/>
             <a:miter lim="800000"/>
-            <a:headEnd/>
-            <a:tailEnd/>
           </a:ln>
           <a:effectLst>
             <a:outerShdw dist="23000" dir="5400000" rotWithShape="0">
@@ -7308,7 +7084,6 @@
               <a:buSzTx/>
               <a:buFontTx/>
               <a:buNone/>
-              <a:tabLst/>
               <a:defRPr/>
             </a:pPr>
             <a:endParaRPr kumimoji="0" lang="en-US" sz="1800" b="0" i="0" u="none" strike="noStrike" kern="1200" cap="none" spc="0" normalizeH="0" baseline="0" noProof="0" dirty="0">
@@ -7323,8 +7098,8 @@
               <a:effectLst/>
               <a:uLnTx/>
               <a:uFillTx/>
-              <a:latin typeface="Calibri"/>
-              <a:ea typeface="ＭＳ Ｐゴシック" pitchFamily="1" charset="-128"/>
+              <a:latin typeface="Calibri" panose="020F0502020204030204"/>
+              <a:ea typeface="MS PGothic" panose="020B0600070205080204" pitchFamily="1" charset="-128"/>
               <a:cs typeface="+mn-cs"/>
             </a:endParaRPr>
           </a:p>
@@ -7349,11 +7124,16 @@
             <a:r>
               <a:rPr lang="en-US" sz="3600" b="1" dirty="0">
                 <a:latin typeface="Times New Roman" panose="02020603050405020304" pitchFamily="18" charset="0"/>
-                <a:ea typeface="ＭＳ Ｐゴシック" pitchFamily="1" charset="-128"/>
+                <a:ea typeface="MS PGothic" panose="020B0600070205080204" pitchFamily="1" charset="-128"/>
                 <a:cs typeface="Times New Roman" panose="02020603050405020304" pitchFamily="18" charset="0"/>
               </a:rPr>
               <a:t>IMPACT AND BENEFITS</a:t>
             </a:r>
+            <a:endParaRPr lang="en-US" sz="3600" b="1" dirty="0">
+              <a:latin typeface="Times New Roman" panose="02020603050405020304" pitchFamily="18" charset="0"/>
+              <a:ea typeface="MS PGothic" panose="020B0600070205080204" pitchFamily="1" charset="-128"/>
+              <a:cs typeface="Times New Roman" panose="02020603050405020304" pitchFamily="18" charset="0"/>
+            </a:endParaRPr>
           </a:p>
         </p:txBody>
       </p:sp>
@@ -7377,8 +7157,6 @@
           <a:ln w="9525">
             <a:noFill/>
             <a:miter lim="800000"/>
-            <a:headEnd/>
-            <a:tailEnd/>
           </a:ln>
         </p:spPr>
         <p:txBody>
@@ -7401,7 +7179,6 @@
               <a:buSzTx/>
               <a:buFont typeface="Arial" panose="020B0604020202020204" pitchFamily="34" charset="0"/>
               <a:buChar char="•"/>
-              <a:tabLst/>
               <a:defRPr/>
             </a:pPr>
             <a:r>
@@ -7415,12 +7192,26 @@
                 <a:effectLst/>
                 <a:uLnTx/>
                 <a:uFillTx/>
-                <a:latin typeface="Arial" pitchFamily="34" charset="0"/>
-                <a:ea typeface="ＭＳ Ｐゴシック" pitchFamily="1" charset="-128"/>
-                <a:cs typeface="Arial" pitchFamily="34" charset="0"/>
+                <a:latin typeface="Arial" panose="020B0604020202020204" pitchFamily="34" charset="0"/>
+                <a:ea typeface="MS PGothic" panose="020B0600070205080204" pitchFamily="1" charset="-128"/>
+                <a:cs typeface="Arial" panose="020B0604020202020204" pitchFamily="34" charset="0"/>
               </a:rPr>
               <a:t>Potential impact on the target audience</a:t>
             </a:r>
+            <a:endParaRPr kumimoji="0" lang="en-US" sz="2800" b="0" i="0" u="none" strike="noStrike" kern="1200" cap="none" spc="0" normalizeH="0" baseline="0" noProof="0" dirty="0">
+              <a:ln>
+                <a:noFill/>
+              </a:ln>
+              <a:solidFill>
+                <a:prstClr val="black"/>
+              </a:solidFill>
+              <a:effectLst/>
+              <a:uLnTx/>
+              <a:uFillTx/>
+              <a:latin typeface="Arial" panose="020B0604020202020204" pitchFamily="34" charset="0"/>
+              <a:ea typeface="MS PGothic" panose="020B0600070205080204" pitchFamily="1" charset="-128"/>
+              <a:cs typeface="Arial" panose="020B0604020202020204" pitchFamily="34" charset="0"/>
+            </a:endParaRPr>
           </a:p>
           <a:p>
             <a:pPr marL="342900" marR="0" lvl="0" indent="-342900" algn="just" defTabSz="457200" rtl="0" eaLnBrk="1" fontAlgn="base" latinLnBrk="0" hangingPunct="1">
@@ -7437,7 +7228,6 @@
               <a:buSzTx/>
               <a:buFont typeface="Arial" panose="020B0604020202020204" pitchFamily="34" charset="0"/>
               <a:buChar char="•"/>
-              <a:tabLst/>
               <a:defRPr/>
             </a:pPr>
             <a:r>
@@ -7445,11 +7235,18 @@
                 <a:solidFill>
                   <a:prstClr val="black"/>
                 </a:solidFill>
-                <a:latin typeface="Arial" pitchFamily="34" charset="0"/>
-                <a:cs typeface="Arial" pitchFamily="34" charset="0"/>
+                <a:latin typeface="Arial" panose="020B0604020202020204" pitchFamily="34" charset="0"/>
+                <a:cs typeface="Arial" panose="020B0604020202020204" pitchFamily="34" charset="0"/>
               </a:rPr>
               <a:t>Benefits of the solution (social, economic, environmental, etc.)</a:t>
             </a:r>
+            <a:endParaRPr lang="en-US" sz="2800" dirty="0">
+              <a:solidFill>
+                <a:prstClr val="black"/>
+              </a:solidFill>
+              <a:latin typeface="Arial" panose="020B0604020202020204" pitchFamily="34" charset="0"/>
+              <a:cs typeface="Arial" panose="020B0604020202020204" pitchFamily="34" charset="0"/>
+            </a:endParaRPr>
           </a:p>
         </p:txBody>
       </p:sp>
@@ -7482,7 +7279,6 @@
               <a:buSzTx/>
               <a:buFontTx/>
               <a:buNone/>
-              <a:tabLst/>
               <a:defRPr/>
             </a:pPr>
             <a:fld id="{677C3CE7-23F7-4828-823C-E0205DF2CF97}" type="slidenum">
@@ -7497,27 +7293,9 @@
                 <a:uLnTx/>
                 <a:uFillTx/>
                 <a:latin typeface="TradeGothic" pitchFamily="1" charset="0"/>
-                <a:ea typeface="ＭＳ Ｐゴシック" pitchFamily="1" charset="-128"/>
+                <a:ea typeface="MS PGothic" panose="020B0600070205080204" pitchFamily="1" charset="-128"/>
                 <a:cs typeface="+mn-cs"/>
               </a:rPr>
-              <a:pPr marL="0" marR="0" lvl="0" indent="0" algn="r" defTabSz="457200" rtl="0" eaLnBrk="1" fontAlgn="base" latinLnBrk="0" hangingPunct="1">
-                <a:lnSpc>
-                  <a:spcPct val="100000"/>
-                </a:lnSpc>
-                <a:spcBef>
-                  <a:spcPct val="0"/>
-                </a:spcBef>
-                <a:spcAft>
-                  <a:spcPct val="0"/>
-                </a:spcAft>
-                <a:buClrTx/>
-                <a:buSzTx/>
-                <a:buFontTx/>
-                <a:buNone/>
-                <a:tabLst/>
-                <a:defRPr/>
-              </a:pPr>
-              <a:t>5</a:t>
             </a:fld>
             <a:endParaRPr kumimoji="0" lang="en-US" sz="1200" b="1" i="0" u="none" strike="noStrike" kern="1200" cap="none" spc="0" normalizeH="0" baseline="0" noProof="0" dirty="0">
               <a:ln>
@@ -7530,7 +7308,7 @@
               <a:uLnTx/>
               <a:uFillTx/>
               <a:latin typeface="TradeGothic" pitchFamily="1" charset="0"/>
-              <a:ea typeface="ＭＳ Ｐゴシック" pitchFamily="1" charset="-128"/>
+              <a:ea typeface="MS PGothic" panose="020B0600070205080204" pitchFamily="1" charset="-128"/>
               <a:cs typeface="+mn-cs"/>
             </a:endParaRPr>
           </a:p>
@@ -7570,7 +7348,6 @@
               <a:buSzTx/>
               <a:buFontTx/>
               <a:buNone/>
-              <a:tabLst/>
               <a:defRPr/>
             </a:pPr>
             <a:r>
@@ -7609,16 +7386,7 @@
       </p:sp>
       <p:sp>
         <p:nvSpPr>
-          <p:cNvPr id="12" name="Oval 11" descr="Your startup LOGO">
-            <a:extLst>
-              <a:ext uri="{FF2B5EF4-FFF2-40B4-BE49-F238E27FC236}">
-                <a16:creationId xmlns:a16="http://schemas.microsoft.com/office/drawing/2014/main" id="{5DBCE864-823D-4A13-9607-5DA1F0ED5FB8}"/>
-              </a:ext>
-              <a:ext uri="{C183D7F6-B498-43B3-948B-1728B52AA6E4}">
-                <adec:decorative xmlns:adec="http://schemas.microsoft.com/office/drawing/2017/decorative" xmlns="" val="0"/>
-              </a:ext>
-            </a:extLst>
-          </p:cNvPr>
+          <p:cNvPr id="12" name="Oval 11" descr="Your startup LOGO"/>
           <p:cNvSpPr/>
           <p:nvPr/>
         </p:nvSpPr>
@@ -7667,7 +7435,7 @@
           <p:nvPr/>
         </p:nvPicPr>
         <p:blipFill>
-          <a:blip r:embed="rId3">
+          <a:blip r:embed="rId1">
             <a:extLst>
               <a:ext uri="{28A0092B-C50C-407E-A947-70E740481C1C}">
                 <a14:useLocalDpi xmlns:a14="http://schemas.microsoft.com/office/drawing/2010/main" val="0"/>
@@ -7689,11 +7457,6 @@
         </p:spPr>
       </p:pic>
     </p:spTree>
-    <p:extLst>
-      <p:ext uri="{BB962C8B-B14F-4D97-AF65-F5344CB8AC3E}">
-        <p14:creationId xmlns:p14="http://schemas.microsoft.com/office/powerpoint/2010/main" val="2997144140"/>
-      </p:ext>
-    </p:extLst>
   </p:cSld>
   <p:clrMapOvr>
     <a:masterClrMapping/>
@@ -7720,13 +7483,7 @@
       </p:grpSpPr>
       <p:sp>
         <p:nvSpPr>
-          <p:cNvPr id="10" name="Rectangle 9">
-            <a:extLst>
-              <a:ext uri="{FF2B5EF4-FFF2-40B4-BE49-F238E27FC236}">
-                <a16:creationId xmlns:a16="http://schemas.microsoft.com/office/drawing/2014/main" id="{AD4F69D3-EEB0-4C4C-9434-B9960FB5854C}"/>
-              </a:ext>
-            </a:extLst>
-          </p:cNvPr>
+          <p:cNvPr id="10" name="Rectangle 9"/>
           <p:cNvSpPr>
             <a:spLocks noChangeArrowheads="1"/>
           </p:cNvSpPr>
@@ -7746,8 +7503,6 @@
           <a:ln w="9525">
             <a:noFill/>
             <a:miter lim="800000"/>
-            <a:headEnd/>
-            <a:tailEnd/>
           </a:ln>
           <a:effectLst>
             <a:outerShdw dist="23000" dir="5400000" rotWithShape="0">
@@ -7775,7 +7530,6 @@
               <a:buSzTx/>
               <a:buFontTx/>
               <a:buNone/>
-              <a:tabLst/>
               <a:defRPr/>
             </a:pPr>
             <a:endParaRPr kumimoji="0" lang="en-US" sz="1800" b="0" i="0" u="none" strike="noStrike" kern="1200" cap="none" spc="0" normalizeH="0" baseline="0" noProof="0" dirty="0">
@@ -7790,8 +7544,8 @@
               <a:effectLst/>
               <a:uLnTx/>
               <a:uFillTx/>
-              <a:latin typeface="Calibri"/>
-              <a:ea typeface="ＭＳ Ｐゴシック" pitchFamily="1" charset="-128"/>
+              <a:latin typeface="Calibri" panose="020F0502020204030204"/>
+              <a:ea typeface="MS PGothic" panose="020B0600070205080204" pitchFamily="1" charset="-128"/>
               <a:cs typeface="+mn-cs"/>
             </a:endParaRPr>
           </a:p>
@@ -7816,11 +7570,16 @@
             <a:r>
               <a:rPr lang="en-US" sz="3600" b="1" dirty="0">
                 <a:latin typeface="Times New Roman" panose="02020603050405020304" pitchFamily="18" charset="0"/>
-                <a:ea typeface="ＭＳ Ｐゴシック" pitchFamily="1" charset="-128"/>
+                <a:ea typeface="MS PGothic" panose="020B0600070205080204" pitchFamily="1" charset="-128"/>
                 <a:cs typeface="Times New Roman" panose="02020603050405020304" pitchFamily="18" charset="0"/>
               </a:rPr>
               <a:t>RESEARCH  AND REFERENCES</a:t>
             </a:r>
+            <a:endParaRPr lang="en-US" sz="3600" b="1" dirty="0">
+              <a:latin typeface="Times New Roman" panose="02020603050405020304" pitchFamily="18" charset="0"/>
+              <a:ea typeface="MS PGothic" panose="020B0600070205080204" pitchFamily="1" charset="-128"/>
+              <a:cs typeface="Times New Roman" panose="02020603050405020304" pitchFamily="18" charset="0"/>
+            </a:endParaRPr>
           </a:p>
         </p:txBody>
       </p:sp>
@@ -7844,8 +7603,6 @@
           <a:ln w="9525">
             <a:noFill/>
             <a:miter lim="800000"/>
-            <a:headEnd/>
-            <a:tailEnd/>
           </a:ln>
         </p:spPr>
         <p:txBody>
@@ -7868,7 +7625,6 @@
               <a:buSzTx/>
               <a:buFont typeface="Arial" panose="020B0604020202020204" pitchFamily="34" charset="0"/>
               <a:buChar char="•"/>
-              <a:tabLst/>
               <a:defRPr/>
             </a:pPr>
             <a:r>
@@ -7876,8 +7632,8 @@
                 <a:solidFill>
                   <a:prstClr val="black"/>
                 </a:solidFill>
-                <a:latin typeface="Arial" pitchFamily="34" charset="0"/>
-                <a:cs typeface="Arial" pitchFamily="34" charset="0"/>
+                <a:latin typeface="Arial" panose="020B0604020202020204" pitchFamily="34" charset="0"/>
+                <a:cs typeface="Arial" panose="020B0604020202020204" pitchFamily="34" charset="0"/>
               </a:rPr>
               <a:t>Details / Links of the reference and research work</a:t>
             </a:r>
@@ -7891,9 +7647,9 @@
               <a:effectLst/>
               <a:uLnTx/>
               <a:uFillTx/>
-              <a:latin typeface="Arial" pitchFamily="34" charset="0"/>
-              <a:ea typeface="ＭＳ Ｐゴシック" pitchFamily="1" charset="-128"/>
-              <a:cs typeface="Arial" pitchFamily="34" charset="0"/>
+              <a:latin typeface="Arial" panose="020B0604020202020204" pitchFamily="34" charset="0"/>
+              <a:ea typeface="MS PGothic" panose="020B0600070205080204" pitchFamily="1" charset="-128"/>
+              <a:cs typeface="Arial" panose="020B0604020202020204" pitchFamily="34" charset="0"/>
             </a:endParaRPr>
           </a:p>
         </p:txBody>
@@ -7927,7 +7683,6 @@
               <a:buSzTx/>
               <a:buFontTx/>
               <a:buNone/>
-              <a:tabLst/>
               <a:defRPr/>
             </a:pPr>
             <a:fld id="{677C3CE7-23F7-4828-823C-E0205DF2CF97}" type="slidenum">
@@ -7942,27 +7697,9 @@
                 <a:uLnTx/>
                 <a:uFillTx/>
                 <a:latin typeface="TradeGothic" pitchFamily="1" charset="0"/>
-                <a:ea typeface="ＭＳ Ｐゴシック" pitchFamily="1" charset="-128"/>
+                <a:ea typeface="MS PGothic" panose="020B0600070205080204" pitchFamily="1" charset="-128"/>
                 <a:cs typeface="+mn-cs"/>
               </a:rPr>
-              <a:pPr marL="0" marR="0" lvl="0" indent="0" algn="r" defTabSz="457200" rtl="0" eaLnBrk="1" fontAlgn="base" latinLnBrk="0" hangingPunct="1">
-                <a:lnSpc>
-                  <a:spcPct val="100000"/>
-                </a:lnSpc>
-                <a:spcBef>
-                  <a:spcPct val="0"/>
-                </a:spcBef>
-                <a:spcAft>
-                  <a:spcPct val="0"/>
-                </a:spcAft>
-                <a:buClrTx/>
-                <a:buSzTx/>
-                <a:buFontTx/>
-                <a:buNone/>
-                <a:tabLst/>
-                <a:defRPr/>
-              </a:pPr>
-              <a:t>6</a:t>
             </a:fld>
             <a:endParaRPr kumimoji="0" lang="en-US" sz="1200" b="1" i="0" u="none" strike="noStrike" kern="1200" cap="none" spc="0" normalizeH="0" baseline="0" noProof="0" dirty="0">
               <a:ln>
@@ -7975,7 +7712,7 @@
               <a:uLnTx/>
               <a:uFillTx/>
               <a:latin typeface="TradeGothic" pitchFamily="1" charset="0"/>
-              <a:ea typeface="ＭＳ Ｐゴシック" pitchFamily="1" charset="-128"/>
+              <a:ea typeface="MS PGothic" panose="020B0600070205080204" pitchFamily="1" charset="-128"/>
               <a:cs typeface="+mn-cs"/>
             </a:endParaRPr>
           </a:p>
@@ -8015,7 +7752,6 @@
               <a:buSzTx/>
               <a:buFontTx/>
               <a:buNone/>
-              <a:tabLst/>
               <a:defRPr/>
             </a:pPr>
             <a:r>
@@ -8054,16 +7790,7 @@
       </p:sp>
       <p:sp>
         <p:nvSpPr>
-          <p:cNvPr id="9" name="Oval 8" descr="Your startup LOGO">
-            <a:extLst>
-              <a:ext uri="{FF2B5EF4-FFF2-40B4-BE49-F238E27FC236}">
-                <a16:creationId xmlns:a16="http://schemas.microsoft.com/office/drawing/2014/main" id="{5DBCE864-823D-4A13-9607-5DA1F0ED5FB8}"/>
-              </a:ext>
-              <a:ext uri="{C183D7F6-B498-43B3-948B-1728B52AA6E4}">
-                <adec:decorative xmlns:adec="http://schemas.microsoft.com/office/drawing/2017/decorative" xmlns="" val="0"/>
-              </a:ext>
-            </a:extLst>
-          </p:cNvPr>
+          <p:cNvPr id="9" name="Oval 8" descr="Your startup LOGO"/>
           <p:cNvSpPr/>
           <p:nvPr/>
         </p:nvSpPr>
@@ -8112,7 +7839,7 @@
           <p:nvPr/>
         </p:nvPicPr>
         <p:blipFill>
-          <a:blip r:embed="rId3">
+          <a:blip r:embed="rId1">
             <a:extLst>
               <a:ext uri="{28A0092B-C50C-407E-A947-70E740481C1C}">
                 <a14:useLocalDpi xmlns:a14="http://schemas.microsoft.com/office/drawing/2010/main" val="0"/>
@@ -8134,11 +7861,6 @@
         </p:spPr>
       </p:pic>
     </p:spTree>
-    <p:extLst>
-      <p:ext uri="{BB962C8B-B14F-4D97-AF65-F5344CB8AC3E}">
-        <p14:creationId xmlns:p14="http://schemas.microsoft.com/office/powerpoint/2010/main" val="3916788613"/>
-      </p:ext>
-    </p:extLst>
   </p:cSld>
   <p:clrMapOvr>
     <a:masterClrMapping/>
@@ -8165,13 +7887,7 @@
       </p:grpSpPr>
       <p:sp>
         <p:nvSpPr>
-          <p:cNvPr id="10" name="Rectangle 9">
-            <a:extLst>
-              <a:ext uri="{FF2B5EF4-FFF2-40B4-BE49-F238E27FC236}">
-                <a16:creationId xmlns:a16="http://schemas.microsoft.com/office/drawing/2014/main" id="{AD4F69D3-EEB0-4C4C-9434-B9960FB5854C}"/>
-              </a:ext>
-            </a:extLst>
-          </p:cNvPr>
+          <p:cNvPr id="10" name="Rectangle 9"/>
           <p:cNvSpPr>
             <a:spLocks noChangeArrowheads="1"/>
           </p:cNvSpPr>
@@ -8191,8 +7907,6 @@
           <a:ln w="9525">
             <a:noFill/>
             <a:miter lim="800000"/>
-            <a:headEnd/>
-            <a:tailEnd/>
           </a:ln>
           <a:effectLst>
             <a:outerShdw dist="23000" dir="5400000" rotWithShape="0">
@@ -8220,7 +7934,6 @@
               <a:buSzTx/>
               <a:buFontTx/>
               <a:buNone/>
-              <a:tabLst/>
               <a:defRPr/>
             </a:pPr>
             <a:endParaRPr kumimoji="0" lang="en-US" sz="1800" b="0" i="0" u="none" strike="noStrike" kern="1200" cap="none" spc="0" normalizeH="0" baseline="0" noProof="0" dirty="0">
@@ -8235,8 +7948,8 @@
               <a:effectLst/>
               <a:uLnTx/>
               <a:uFillTx/>
-              <a:latin typeface="Calibri"/>
-              <a:ea typeface="ＭＳ Ｐゴシック" pitchFamily="1" charset="-128"/>
+              <a:latin typeface="Calibri" panose="020F0502020204030204"/>
+              <a:ea typeface="MS PGothic" panose="020B0600070205080204" pitchFamily="1" charset="-128"/>
               <a:cs typeface="+mn-cs"/>
             </a:endParaRPr>
           </a:p>
@@ -8271,7 +7984,6 @@
               <a:buSzTx/>
               <a:buFontTx/>
               <a:buNone/>
-              <a:tabLst/>
               <a:defRPr/>
             </a:pPr>
             <a:fld id="{677C3CE7-23F7-4828-823C-E0205DF2CF97}" type="slidenum">
@@ -8286,27 +7998,9 @@
                 <a:uLnTx/>
                 <a:uFillTx/>
                 <a:latin typeface="TradeGothic" pitchFamily="1" charset="0"/>
-                <a:ea typeface="ＭＳ Ｐゴシック" pitchFamily="1" charset="-128"/>
+                <a:ea typeface="MS PGothic" panose="020B0600070205080204" pitchFamily="1" charset="-128"/>
                 <a:cs typeface="+mn-cs"/>
               </a:rPr>
-              <a:pPr marL="0" marR="0" lvl="0" indent="0" algn="r" defTabSz="457200" rtl="0" eaLnBrk="1" fontAlgn="base" latinLnBrk="0" hangingPunct="1">
-                <a:lnSpc>
-                  <a:spcPct val="100000"/>
-                </a:lnSpc>
-                <a:spcBef>
-                  <a:spcPct val="0"/>
-                </a:spcBef>
-                <a:spcAft>
-                  <a:spcPct val="0"/>
-                </a:spcAft>
-                <a:buClrTx/>
-                <a:buSzTx/>
-                <a:buFontTx/>
-                <a:buNone/>
-                <a:tabLst/>
-                <a:defRPr/>
-              </a:pPr>
-              <a:t>7</a:t>
             </a:fld>
             <a:endParaRPr kumimoji="0" lang="en-US" sz="1200" b="1" i="0" u="none" strike="noStrike" kern="1200" cap="none" spc="0" normalizeH="0" baseline="0" noProof="0" dirty="0">
               <a:ln>
@@ -8319,7 +8013,7 @@
               <a:uLnTx/>
               <a:uFillTx/>
               <a:latin typeface="TradeGothic" pitchFamily="1" charset="0"/>
-              <a:ea typeface="ＭＳ Ｐゴシック" pitchFamily="1" charset="-128"/>
+              <a:ea typeface="MS PGothic" panose="020B0600070205080204" pitchFamily="1" charset="-128"/>
               <a:cs typeface="+mn-cs"/>
             </a:endParaRPr>
           </a:p>
@@ -8359,7 +8053,6 @@
               <a:buSzTx/>
               <a:buFontTx/>
               <a:buNone/>
-              <a:tabLst/>
               <a:defRPr/>
             </a:pPr>
             <a:r>
@@ -8480,7 +8173,7 @@
                 <a:schemeClr val="dk1"/>
               </a:buClr>
               <a:buSzPct val="100000"/>
-              <a:buFont typeface="Calibri"/>
+              <a:buFont typeface="Calibri" panose="020F0502020204030204"/>
               <a:buAutoNum type="arabicPeriod"/>
             </a:pPr>
             <a:r>
@@ -8489,9 +8182,9 @@
                   <a:schemeClr val="dk1"/>
                 </a:solidFill>
                 <a:latin typeface="Arial" panose="020B0604020202020204" pitchFamily="34" charset="0"/>
-                <a:ea typeface="Calibri"/>
+                <a:ea typeface="Calibri" panose="020F0502020204030204"/>
                 <a:cs typeface="Arial" panose="020B0604020202020204" pitchFamily="34" charset="0"/>
-                <a:sym typeface="Calibri"/>
+                <a:sym typeface="Calibri" panose="020F0502020204030204"/>
               </a:rPr>
               <a:t>Kindly keep the maximum slides limit up to six </a:t>
             </a:r>
@@ -8501,9 +8194,9 @@
                   <a:srgbClr val="C00000"/>
                 </a:solidFill>
                 <a:latin typeface="Arial" panose="020B0604020202020204" pitchFamily="34" charset="0"/>
-                <a:ea typeface="Calibri"/>
+                <a:ea typeface="Calibri" panose="020F0502020204030204"/>
                 <a:cs typeface="Arial" panose="020B0604020202020204" pitchFamily="34" charset="0"/>
-                <a:sym typeface="Calibri"/>
+                <a:sym typeface="Calibri" panose="020F0502020204030204"/>
               </a:rPr>
               <a:t>(6). </a:t>
             </a:r>
@@ -8513,9 +8206,9 @@
                   <a:schemeClr val="dk1"/>
                 </a:solidFill>
                 <a:latin typeface="Arial" panose="020B0604020202020204" pitchFamily="34" charset="0"/>
-                <a:ea typeface="Calibri"/>
+                <a:ea typeface="Calibri" panose="020F0502020204030204"/>
                 <a:cs typeface="Arial" panose="020B0604020202020204" pitchFamily="34" charset="0"/>
-                <a:sym typeface="Calibri"/>
+                <a:sym typeface="Calibri" panose="020F0502020204030204"/>
               </a:rPr>
               <a:t>( Including the </a:t>
             </a:r>
@@ -8525,9 +8218,9 @@
                   <a:schemeClr val="dk1"/>
                 </a:solidFill>
                 <a:latin typeface="Arial" panose="020B0604020202020204" pitchFamily="34" charset="0"/>
-                <a:ea typeface="Calibri"/>
+                <a:ea typeface="Calibri" panose="020F0502020204030204"/>
                 <a:cs typeface="Arial" panose="020B0604020202020204" pitchFamily="34" charset="0"/>
-                <a:sym typeface="Calibri"/>
+                <a:sym typeface="Calibri" panose="020F0502020204030204"/>
               </a:rPr>
               <a:t>title slide) </a:t>
             </a:r>
@@ -8551,7 +8244,7 @@
                 <a:schemeClr val="dk1"/>
               </a:buClr>
               <a:buSzPct val="100000"/>
-              <a:buFont typeface="Calibri"/>
+              <a:buFont typeface="Calibri" panose="020F0502020204030204"/>
               <a:buAutoNum type="arabicPeriod"/>
             </a:pPr>
             <a:r>
@@ -8560,9 +8253,9 @@
                   <a:schemeClr val="dk1"/>
                 </a:solidFill>
                 <a:latin typeface="Arial" panose="020B0604020202020204" pitchFamily="34" charset="0"/>
-                <a:ea typeface="Calibri"/>
+                <a:ea typeface="Calibri" panose="020F0502020204030204"/>
                 <a:cs typeface="Arial" panose="020B0604020202020204" pitchFamily="34" charset="0"/>
-                <a:sym typeface="Calibri"/>
+                <a:sym typeface="Calibri" panose="020F0502020204030204"/>
               </a:rPr>
               <a:t>Try to avoid paragraphs and post your idea in points /diagrams / Infographics /pictures </a:t>
             </a:r>
@@ -8586,7 +8279,7 @@
                 <a:schemeClr val="dk1"/>
               </a:buClr>
               <a:buSzPct val="100000"/>
-              <a:buFont typeface="Calibri"/>
+              <a:buFont typeface="Calibri" panose="020F0502020204030204"/>
               <a:buAutoNum type="arabicPeriod"/>
             </a:pPr>
             <a:r>
@@ -8595,9 +8288,9 @@
                   <a:schemeClr val="dk1"/>
                 </a:solidFill>
                 <a:latin typeface="Arial" panose="020B0604020202020204" pitchFamily="34" charset="0"/>
-                <a:ea typeface="Calibri"/>
+                <a:ea typeface="Calibri" panose="020F0502020204030204"/>
                 <a:cs typeface="Arial" panose="020B0604020202020204" pitchFamily="34" charset="0"/>
-                <a:sym typeface="Calibri"/>
+                <a:sym typeface="Calibri" panose="020F0502020204030204"/>
               </a:rPr>
               <a:t>Keep your explanation precise and easy to understand</a:t>
             </a:r>
@@ -8621,7 +8314,7 @@
                 <a:schemeClr val="dk1"/>
               </a:buClr>
               <a:buSzPct val="100000"/>
-              <a:buFont typeface="Calibri"/>
+              <a:buFont typeface="Calibri" panose="020F0502020204030204"/>
               <a:buAutoNum type="arabicPeriod"/>
             </a:pPr>
             <a:r>
@@ -8630,9 +8323,9 @@
                   <a:schemeClr val="dk1"/>
                 </a:solidFill>
                 <a:latin typeface="Arial" panose="020B0604020202020204" pitchFamily="34" charset="0"/>
-                <a:ea typeface="Calibri"/>
+                <a:ea typeface="Calibri" panose="020F0502020204030204"/>
                 <a:cs typeface="Arial" panose="020B0604020202020204" pitchFamily="34" charset="0"/>
-                <a:sym typeface="Calibri"/>
+                <a:sym typeface="Calibri" panose="020F0502020204030204"/>
               </a:rPr>
               <a:t>Idea should be unique and novel. </a:t>
             </a:r>
@@ -8656,7 +8349,7 @@
                 <a:schemeClr val="dk1"/>
               </a:buClr>
               <a:buSzPct val="100000"/>
-              <a:buFont typeface="Calibri"/>
+              <a:buFont typeface="Calibri" panose="020F0502020204030204"/>
               <a:buAutoNum type="arabicPeriod"/>
             </a:pPr>
             <a:r>
@@ -8665,9 +8358,9 @@
                   <a:schemeClr val="dk1"/>
                 </a:solidFill>
                 <a:latin typeface="Arial" panose="020B0604020202020204" pitchFamily="34" charset="0"/>
-                <a:ea typeface="Calibri"/>
+                <a:ea typeface="Calibri" panose="020F0502020204030204"/>
                 <a:cs typeface="Arial" panose="020B0604020202020204" pitchFamily="34" charset="0"/>
-                <a:sym typeface="Calibri"/>
+                <a:sym typeface="Calibri" panose="020F0502020204030204"/>
               </a:rPr>
               <a:t>You can only use provided </a:t>
             </a:r>
@@ -8677,9 +8370,9 @@
                   <a:schemeClr val="dk1"/>
                 </a:solidFill>
                 <a:latin typeface="Arial" panose="020B0604020202020204" pitchFamily="34" charset="0"/>
-                <a:ea typeface="Calibri"/>
+                <a:ea typeface="Calibri" panose="020F0502020204030204"/>
                 <a:cs typeface="Arial" panose="020B0604020202020204" pitchFamily="34" charset="0"/>
-                <a:sym typeface="Calibri"/>
+                <a:sym typeface="Calibri" panose="020F0502020204030204"/>
               </a:rPr>
               <a:t>template</a:t>
             </a:r>
@@ -8689,9 +8382,9 @@
                   <a:schemeClr val="dk1"/>
                 </a:solidFill>
                 <a:latin typeface="Arial" panose="020B0604020202020204" pitchFamily="34" charset="0"/>
-                <a:ea typeface="Calibri"/>
+                <a:ea typeface="Calibri" panose="020F0502020204030204"/>
                 <a:cs typeface="Arial" panose="020B0604020202020204" pitchFamily="34" charset="0"/>
-                <a:sym typeface="Calibri"/>
+                <a:sym typeface="Calibri" panose="020F0502020204030204"/>
               </a:rPr>
               <a:t> for making the </a:t>
             </a:r>
@@ -8701,9 +8394,9 @@
                   <a:schemeClr val="dk1"/>
                 </a:solidFill>
                 <a:latin typeface="Arial" panose="020B0604020202020204" pitchFamily="34" charset="0"/>
-                <a:ea typeface="Calibri"/>
+                <a:ea typeface="Calibri" panose="020F0502020204030204"/>
                 <a:cs typeface="Arial" panose="020B0604020202020204" pitchFamily="34" charset="0"/>
-                <a:sym typeface="Calibri"/>
+                <a:sym typeface="Calibri" panose="020F0502020204030204"/>
               </a:rPr>
               <a:t>PPT</a:t>
             </a:r>
@@ -8713,9 +8406,9 @@
                   <a:schemeClr val="dk1"/>
                 </a:solidFill>
                 <a:latin typeface="Arial" panose="020B0604020202020204" pitchFamily="34" charset="0"/>
-                <a:ea typeface="Calibri"/>
+                <a:ea typeface="Calibri" panose="020F0502020204030204"/>
                 <a:cs typeface="Arial" panose="020B0604020202020204" pitchFamily="34" charset="0"/>
-                <a:sym typeface="Calibri"/>
+                <a:sym typeface="Calibri" panose="020F0502020204030204"/>
               </a:rPr>
               <a:t> without changing the idea details pointers (mentioned in previous slides).</a:t>
             </a:r>
@@ -8724,9 +8417,9 @@
                 <a:schemeClr val="dk1"/>
               </a:solidFill>
               <a:latin typeface="Arial" panose="020B0604020202020204" pitchFamily="34" charset="0"/>
-              <a:ea typeface="Calibri"/>
+              <a:ea typeface="Calibri" panose="020F0502020204030204"/>
               <a:cs typeface="Arial" panose="020B0604020202020204" pitchFamily="34" charset="0"/>
-              <a:sym typeface="Calibri"/>
+              <a:sym typeface="Calibri" panose="020F0502020204030204"/>
             </a:endParaRPr>
           </a:p>
           <a:p>
@@ -8744,7 +8437,7 @@
                 <a:schemeClr val="dk1"/>
               </a:buClr>
               <a:buSzPct val="100000"/>
-              <a:buFont typeface="Calibri"/>
+              <a:buFont typeface="Calibri" panose="020F0502020204030204"/>
               <a:buAutoNum type="arabicPeriod"/>
             </a:pPr>
             <a:r>
@@ -8753,9 +8446,9 @@
                   <a:schemeClr val="dk1"/>
                 </a:solidFill>
                 <a:latin typeface="Arial" panose="020B0604020202020204" pitchFamily="34" charset="0"/>
-                <a:ea typeface="Calibri"/>
+                <a:ea typeface="Calibri" panose="020F0502020204030204"/>
                 <a:cs typeface="Arial" panose="020B0604020202020204" pitchFamily="34" charset="0"/>
-                <a:sym typeface="Calibri"/>
+                <a:sym typeface="Calibri" panose="020F0502020204030204"/>
               </a:rPr>
               <a:t>You need to save the file in PDF and upload the same on portal. No PPT, Word Doc or any other format will be supported.</a:t>
             </a:r>
@@ -8779,7 +8472,7 @@
                 <a:schemeClr val="dk1"/>
               </a:buClr>
               <a:buSzPct val="100000"/>
-              <a:buFont typeface="Calibri"/>
+              <a:buFont typeface="Calibri" panose="020F0502020204030204"/>
               <a:buNone/>
             </a:pPr>
             <a:endParaRPr b="1" i="0" u="none" strike="noStrike" cap="none" dirty="0">
@@ -8787,9 +8480,9 @@
                 <a:schemeClr val="dk1"/>
               </a:solidFill>
               <a:latin typeface="Arial" panose="020B0604020202020204" pitchFamily="34" charset="0"/>
-              <a:ea typeface="Calibri"/>
+              <a:ea typeface="Calibri" panose="020F0502020204030204"/>
               <a:cs typeface="Arial" panose="020B0604020202020204" pitchFamily="34" charset="0"/>
-              <a:sym typeface="Calibri"/>
+              <a:sym typeface="Calibri" panose="020F0502020204030204"/>
             </a:endParaRPr>
           </a:p>
           <a:p>
@@ -8807,7 +8500,7 @@
                 <a:schemeClr val="dk1"/>
               </a:buClr>
               <a:buSzPct val="100000"/>
-              <a:buFont typeface="Arial"/>
+              <a:buFont typeface="Arial" panose="020B0604020202020204"/>
               <a:buNone/>
             </a:pPr>
             <a:r>
@@ -8816,9 +8509,9 @@
                   <a:srgbClr val="C00000"/>
                 </a:solidFill>
                 <a:latin typeface="Arial" panose="020B0604020202020204" pitchFamily="34" charset="0"/>
-                <a:ea typeface="Calibri"/>
+                <a:ea typeface="Calibri" panose="020F0502020204030204"/>
                 <a:cs typeface="Arial" panose="020B0604020202020204" pitchFamily="34" charset="0"/>
-                <a:sym typeface="Calibri"/>
+                <a:sym typeface="Calibri" panose="020F0502020204030204"/>
               </a:rPr>
               <a:t>Note - You can delete this slide (Important Pointers) when you upload the details of your idea on SIH portal.</a:t>
             </a:r>
@@ -8845,7 +8538,7 @@
                 <a:schemeClr val="dk1"/>
               </a:buClr>
               <a:buSzPct val="100000"/>
-              <a:buFont typeface="Calibri"/>
+              <a:buFont typeface="Calibri" panose="020F0502020204030204"/>
               <a:buNone/>
             </a:pPr>
             <a:endParaRPr sz="2000" b="1" i="0" u="none" strike="noStrike" cap="none" dirty="0">
@@ -8853,9 +8546,9 @@
                 <a:schemeClr val="dk1"/>
               </a:solidFill>
               <a:latin typeface="Arial" panose="020B0604020202020204" pitchFamily="34" charset="0"/>
-              <a:ea typeface="Calibri"/>
+              <a:ea typeface="Calibri" panose="020F0502020204030204"/>
               <a:cs typeface="Arial" panose="020B0604020202020204" pitchFamily="34" charset="0"/>
-              <a:sym typeface="Calibri"/>
+              <a:sym typeface="Calibri" panose="020F0502020204030204"/>
             </a:endParaRPr>
           </a:p>
         </p:txBody>
@@ -8940,7 +8633,7 @@
                   <a:schemeClr val="dk1"/>
                 </a:solidFill>
                 <a:latin typeface="Arial" panose="020B0604020202020204" pitchFamily="34" charset="0"/>
-                <a:ea typeface="Calibri"/>
+                <a:ea typeface="Calibri" panose="020F0502020204030204"/>
                 <a:cs typeface="Arial" panose="020B0604020202020204" pitchFamily="34" charset="0"/>
               </a:rPr>
               <a:t>Please ensure below pointers are met while submitting the Idea PPT:</a:t>
@@ -8950,7 +8643,7 @@
                 <a:schemeClr val="dk1"/>
               </a:solidFill>
               <a:latin typeface="Arial" panose="020B0604020202020204" pitchFamily="34" charset="0"/>
-              <a:ea typeface="Calibri"/>
+              <a:ea typeface="Calibri" panose="020F0502020204030204"/>
               <a:cs typeface="Arial" panose="020B0604020202020204" pitchFamily="34" charset="0"/>
             </a:endParaRPr>
           </a:p>
@@ -8965,7 +8658,7 @@
           <p:nvPr/>
         </p:nvPicPr>
         <p:blipFill>
-          <a:blip r:embed="rId3">
+          <a:blip r:embed="rId1">
             <a:extLst>
               <a:ext uri="{28A0092B-C50C-407E-A947-70E740481C1C}">
                 <a14:useLocalDpi xmlns:a14="http://schemas.microsoft.com/office/drawing/2010/main" val="0"/>
@@ -8987,11 +8680,6 @@
         </p:spPr>
       </p:pic>
     </p:spTree>
-    <p:extLst>
-      <p:ext uri="{BB962C8B-B14F-4D97-AF65-F5344CB8AC3E}">
-        <p14:creationId xmlns:p14="http://schemas.microsoft.com/office/powerpoint/2010/main" val="1588084416"/>
-      </p:ext>
-    </p:extLst>
   </p:cSld>
   <p:clrMapOvr>
     <a:masterClrMapping/>
@@ -9313,7 +9001,11 @@
       </a:style>
     </a:lnDef>
   </a:objectDefaults>
-  <a:extraClrSchemeLst/>
+  <a:extLst>
+    <a:ext uri="{05A4C25C-085E-4340-85A3-A5531E510DB2}">
+      <thm15:themeFamily xmlns:thm15="http://schemas.microsoft.com/office/thememl/2012/main" name="Office Theme" id="{62F939B6-93AF-4DB8-9C6B-D6C7DFDC589F}" vid="{4A3C46E8-61CC-4603-A589-7422A47A8E4A}"/>
+    </a:ext>
+  </a:extLst>
 </a:theme>
 </file>
 
@@ -9631,6 +9323,10 @@
       </a:style>
     </a:lnDef>
   </a:objectDefaults>
-  <a:extraClrSchemeLst/>
+  <a:extLst>
+    <a:ext uri="{05A4C25C-085E-4340-85A3-A5531E510DB2}">
+      <thm15:themeFamily xmlns:thm15="http://schemas.microsoft.com/office/thememl/2012/main" name="Office Theme" id="{62F939B6-93AF-4DB8-9C6B-D6C7DFDC589F}" vid="{4A3C46E8-61CC-4603-A589-7422A47A8E4A}"/>
+    </a:ext>
+  </a:extLst>
 </a:theme>
 </file>
--- a/SIH26036-presentation.pptx
+++ b/SIH26036-presentation.pptx
@@ -162,6 +162,59 @@
 </p:presentation>
 </file>
 
+<file path=ppt/revisionInfo.xml><?xml version="1.0" encoding="utf-8"?>
+<p1510:revInfo xmlns:a="http://schemas.openxmlformats.org/drawingml/2006/main" xmlns:r="http://schemas.openxmlformats.org/officeDocument/2006/relationships" xmlns:p1510="http://schemas.microsoft.com/office/powerpoint/2015/10/main">
+  <p1510:revLst>
+    <p1510:client id="{F8BB52B7-A1C3-42CE-A7C0-28C814CBBDC3}" v="2" dt="2026-08-29T06:16:21.471"/>
+  </p1510:revLst>
+</p1510:revInfo>
+</file>
+
+<file path=ppt/changesInfos/changesInfo1.xml><?xml version="1.0" encoding="utf-8"?>
+<pc:chgInfo xmlns:a="http://schemas.openxmlformats.org/drawingml/2006/main" xmlns:r="http://schemas.openxmlformats.org/officeDocument/2006/relationships" xmlns:ac="http://schemas.microsoft.com/office/drawing/2013/main/command" xmlns:pc="http://schemas.microsoft.com/office/powerpoint/2013/main/command">
+  <pc:docChgLst>
+    <pc:chgData name="Lavanya Meesala" userId="ef13baf08a0cc4b4" providerId="LiveId" clId="{56E4B609-986E-4210-93BC-E3F1B3466E1B}"/>
+    <pc:docChg chg="undo custSel modSld">
+      <pc:chgData name="Lavanya Meesala" userId="ef13baf08a0cc4b4" providerId="LiveId" clId="{56E4B609-986E-4210-93BC-E3F1B3466E1B}" dt="2026-08-29T06:49:18.606" v="39" actId="20577"/>
+      <pc:docMkLst>
+        <pc:docMk/>
+      </pc:docMkLst>
+      <pc:sldChg chg="addSp delSp modSp mod">
+        <pc:chgData name="Lavanya Meesala" userId="ef13baf08a0cc4b4" providerId="LiveId" clId="{56E4B609-986E-4210-93BC-E3F1B3466E1B}" dt="2026-08-29T06:49:18.606" v="39" actId="20577"/>
+        <pc:sldMkLst>
+          <pc:docMk/>
+          <pc:sldMk cId="0" sldId="281"/>
+        </pc:sldMkLst>
+        <pc:spChg chg="add mod">
+          <ac:chgData name="Lavanya Meesala" userId="ef13baf08a0cc4b4" providerId="LiveId" clId="{56E4B609-986E-4210-93BC-E3F1B3466E1B}" dt="2026-08-29T06:16:21.471" v="14" actId="767"/>
+          <ac:spMkLst>
+            <pc:docMk/>
+            <pc:sldMk cId="0" sldId="281"/>
+            <ac:spMk id="2" creationId="{54CD9E77-3428-CC83-7349-22F2EC011313}"/>
+          </ac:spMkLst>
+        </pc:spChg>
+        <pc:spChg chg="add del mod">
+          <ac:chgData name="Lavanya Meesala" userId="ef13baf08a0cc4b4" providerId="LiveId" clId="{56E4B609-986E-4210-93BC-E3F1B3466E1B}" dt="2026-08-29T06:16:54.403" v="36" actId="14100"/>
+          <ac:spMkLst>
+            <pc:docMk/>
+            <pc:sldMk cId="0" sldId="281"/>
+            <ac:spMk id="10" creationId="{5DBCE864-823D-4A13-9607-5DA1F0ED5FB8}"/>
+          </ac:spMkLst>
+        </pc:spChg>
+        <pc:spChg chg="mod">
+          <ac:chgData name="Lavanya Meesala" userId="ef13baf08a0cc4b4" providerId="LiveId" clId="{56E4B609-986E-4210-93BC-E3F1B3466E1B}" dt="2026-08-29T06:49:18.606" v="39" actId="20577"/>
+          <ac:spMkLst>
+            <pc:docMk/>
+            <pc:sldMk cId="0" sldId="281"/>
+            <ac:spMk id="15362" creationId="{00000000-0000-0000-0000-000000000000}"/>
+          </ac:spMkLst>
+        </pc:spChg>
+      </pc:sldChg>
+    </pc:docChg>
+  </pc:docChgLst>
+</pc:chgInfo>
+</file>
+
 <file path=ppt/notesMasters/notesMaster1.xml><?xml version="1.0" encoding="utf-8"?>
 <p:notesMaster xmlns:a="http://schemas.openxmlformats.org/drawingml/2006/main" xmlns:r="http://schemas.openxmlformats.org/officeDocument/2006/relationships" xmlns:p="http://schemas.openxmlformats.org/presentationml/2006/main">
   <p:cSld>
@@ -262,7 +315,7 @@
             <a:fld id="{C4D5ADD5-2BBC-4A94-8F86-D9013941F742}" type="datetimeFigureOut">
               <a:rPr lang="en-US"/>
               <a:pPr/>
-              <a:t>6/2/2026</a:t>
+              <a:t>8/29/2026</a:t>
             </a:fld>
             <a:endParaRPr lang="en-US"/>
           </a:p>
@@ -1713,7 +1766,7 @@
           <a:p>
             <a:fld id="{E60792E3-D524-454C-8AFD-A91972900BCB}" type="datetime1">
               <a:rPr lang="en-US" smtClean="0"/>
-              <a:t>6/2/2026</a:t>
+              <a:t>8/29/2026</a:t>
             </a:fld>
             <a:endParaRPr lang="en-US"/>
           </a:p>
@@ -1895,7 +1948,7 @@
           <a:p>
             <a:fld id="{053C3A68-6922-42D3-8905-ECC2D82A3469}" type="datetime1">
               <a:rPr lang="en-US" smtClean="0"/>
-              <a:t>6/2/2026</a:t>
+              <a:t>8/29/2026</a:t>
             </a:fld>
             <a:endParaRPr lang="en-US"/>
           </a:p>
@@ -2087,7 +2140,7 @@
           <a:p>
             <a:fld id="{CB69E9F4-7604-4950-A8B2-8ACDEDB1506E}" type="datetime1">
               <a:rPr lang="en-US" smtClean="0"/>
-              <a:t>6/2/2026</a:t>
+              <a:t>8/29/2026</a:t>
             </a:fld>
             <a:endParaRPr lang="en-US"/>
           </a:p>
@@ -2269,7 +2322,7 @@
           <a:p>
             <a:fld id="{708B7524-32A2-4C20-A58C-BC3BAA1042FC}" type="datetime1">
               <a:rPr lang="en-US" smtClean="0"/>
-              <a:t>6/2/2026</a:t>
+              <a:t>8/29/2026</a:t>
             </a:fld>
             <a:endParaRPr lang="en-US"/>
           </a:p>
@@ -2528,7 +2581,7 @@
           <a:p>
             <a:fld id="{1E994447-D6B2-43BB-A877-57F1A267B999}" type="datetime1">
               <a:rPr lang="en-US" smtClean="0"/>
-              <a:t>6/2/2026</a:t>
+              <a:t>8/29/2026</a:t>
             </a:fld>
             <a:endParaRPr lang="en-US"/>
           </a:p>
@@ -2827,7 +2880,7 @@
           <a:p>
             <a:fld id="{68920E16-BD35-483C-AA6B-346FC7E46DEA}" type="datetime1">
               <a:rPr lang="en-US" smtClean="0"/>
-              <a:t>6/2/2026</a:t>
+              <a:t>8/29/2026</a:t>
             </a:fld>
             <a:endParaRPr lang="en-US"/>
           </a:p>
@@ -3260,7 +3313,7 @@
           <a:p>
             <a:fld id="{2FEAC6F8-5103-4FC0-A69E-5C6AE6469DA8}" type="datetime1">
               <a:rPr lang="en-US" smtClean="0"/>
-              <a:t>6/2/2026</a:t>
+              <a:t>8/29/2026</a:t>
             </a:fld>
             <a:endParaRPr lang="en-US"/>
           </a:p>
@@ -3391,7 +3444,7 @@
           <a:p>
             <a:fld id="{C60C6921-0627-4C8F-83D5-0CF936D2FFDD}" type="datetime1">
               <a:rPr lang="en-US" smtClean="0"/>
-              <a:t>6/2/2026</a:t>
+              <a:t>8/29/2026</a:t>
             </a:fld>
             <a:endParaRPr lang="en-US"/>
           </a:p>
@@ -3500,7 +3553,7 @@
           <a:p>
             <a:fld id="{2FF08AD7-8103-40F8-983C-E2BA6BB9CBE0}" type="datetime1">
               <a:rPr lang="en-US" smtClean="0"/>
-              <a:t>6/2/2026</a:t>
+              <a:t>8/29/2026</a:t>
             </a:fld>
             <a:endParaRPr lang="en-US"/>
           </a:p>
@@ -3789,7 +3842,7 @@
           <a:p>
             <a:fld id="{DF8C06B4-9380-4A4D-AF49-A3596E17DAF5}" type="datetime1">
               <a:rPr lang="en-US" smtClean="0"/>
-              <a:t>6/2/2026</a:t>
+              <a:t>8/29/2026</a:t>
             </a:fld>
             <a:endParaRPr lang="en-US"/>
           </a:p>
@@ -4058,7 +4111,7 @@
           <a:p>
             <a:fld id="{EF7FDEF1-C582-4E22-9E77-D68326471F28}" type="datetime1">
               <a:rPr lang="en-US" smtClean="0"/>
-              <a:t>6/2/2026</a:t>
+              <a:t>8/29/2026</a:t>
             </a:fld>
             <a:endParaRPr lang="en-US"/>
           </a:p>
@@ -4301,7 +4354,7 @@
           <a:p>
             <a:fld id="{780A9602-A9A9-453F-AEF1-37B5837E02CD}" type="datetime1">
               <a:rPr lang="en-US" smtClean="0"/>
-              <a:t>6/2/2026</a:t>
+              <a:t>8/29/2026</a:t>
             </a:fld>
             <a:endParaRPr lang="en-US"/>
           </a:p>
@@ -4852,7 +4905,7 @@
                 <a16:creationId xmlns:a16="http://schemas.microsoft.com/office/drawing/2014/main" id="{3E443FD7-A66B-4AA0-872D-B088B9BC5F17}"/>
               </a:ext>
               <a:ext uri="{C183D7F6-B498-43B3-948B-1728B52AA6E4}">
-                <adec:decorative xmlns:adec="http://schemas.microsoft.com/office/drawing/2017/decorative" xmlns="" val="1"/>
+                <adec:decorative xmlns:adec="http://schemas.microsoft.com/office/drawing/2017/decorative" val="1"/>
               </a:ext>
             </a:extLst>
           </p:cNvPr>
@@ -4912,7 +4965,7 @@
                 <a16:creationId xmlns:a16="http://schemas.microsoft.com/office/drawing/2014/main" id="{C04BE0EF-3561-49B4-9A29-F283168A91C7}"/>
               </a:ext>
               <a:ext uri="{C183D7F6-B498-43B3-948B-1728B52AA6E4}">
-                <adec:decorative xmlns:adec="http://schemas.microsoft.com/office/drawing/2017/decorative" xmlns="" val="1"/>
+                <adec:decorative xmlns:adec="http://schemas.microsoft.com/office/drawing/2017/decorative" val="1"/>
               </a:ext>
             </a:extLst>
           </p:cNvPr>
@@ -5783,16 +5836,7 @@
                 </a:solidFill>
                 <a:latin typeface="Garamond" panose="02020404030301010803" pitchFamily="18" charset="0"/>
               </a:rPr>
-              <a:t>SMART INDIA HACKATHON </a:t>
-            </a:r>
-            <a:r>
-              <a:rPr lang="en-US" sz="4000" b="1" dirty="0" smtClean="0">
-                <a:solidFill>
-                  <a:schemeClr val="tx2"/>
-                </a:solidFill>
-                <a:latin typeface="Garamond" panose="02020404030301010803" pitchFamily="18" charset="0"/>
-              </a:rPr>
-              <a:t>2026</a:t>
+              <a:t>SMART INDIA HACKATHON 2026</a:t>
             </a:r>
             <a:endParaRPr lang="en-IN" sz="4000" b="1" dirty="0">
               <a:solidFill>
@@ -6063,14 +6107,6 @@
           <a:lstStyle/>
           <a:p>
             <a:pPr eaLnBrk="1" hangingPunct="1"/>
-            <a:r>
-              <a:rPr lang="en-US" sz="3600" b="1" dirty="0">
-                <a:latin typeface="Times New Roman" panose="02020603050405020304" pitchFamily="18" charset="0"/>
-                <a:ea typeface="ＭＳ Ｐゴシック" pitchFamily="1" charset="-128"/>
-                <a:cs typeface="Times New Roman" panose="02020603050405020304" pitchFamily="18" charset="0"/>
-              </a:rPr>
-              <a:t/>
-            </a:r>
             <a:br>
               <a:rPr lang="en-US" sz="3600" b="1" dirty="0">
                 <a:latin typeface="Times New Roman" panose="02020603050405020304" pitchFamily="18" charset="0"/>
@@ -6146,6 +6182,16 @@
               <a:buFont typeface="Arial" panose="020B0604020202020204" pitchFamily="34" charset="0"/>
               <a:buChar char="•"/>
             </a:pPr>
+            <a:r>
+              <a:rPr lang="en-US" sz="2000" u="sng">
+                <a:solidFill>
+                  <a:schemeClr val="tx2"/>
+                </a:solidFill>
+                <a:latin typeface="Arial" pitchFamily="34" charset="0"/>
+                <a:cs typeface="Arial" pitchFamily="34" charset="0"/>
+              </a:rPr>
+              <a:t>hii</a:t>
+            </a:r>
             <a:endParaRPr lang="en-US" sz="2000" u="sng" dirty="0">
               <a:solidFill>
                 <a:schemeClr val="tx2"/>
@@ -6287,7 +6333,7 @@
                 <a16:creationId xmlns:a16="http://schemas.microsoft.com/office/drawing/2014/main" id="{5DBCE864-823D-4A13-9607-5DA1F0ED5FB8}"/>
               </a:ext>
               <a:ext uri="{C183D7F6-B498-43B3-948B-1728B52AA6E4}">
-                <adec:decorative xmlns:adec="http://schemas.microsoft.com/office/drawing/2017/decorative" xmlns="" val="0"/>
+                <adec:decorative xmlns:adec="http://schemas.microsoft.com/office/drawing/2017/decorative" val="0"/>
               </a:ext>
             </a:extLst>
           </p:cNvPr>
@@ -6297,7 +6343,7 @@
         <p:spPr>
           <a:xfrm>
             <a:off x="329773" y="252246"/>
-            <a:ext cx="1251857" cy="807334"/>
+            <a:ext cx="1337661" cy="807334"/>
           </a:xfrm>
           <a:prstGeom prst="ellipse">
             <a:avLst/>
@@ -6323,8 +6369,8 @@
           <a:p>
             <a:pPr algn="ctr"/>
             <a:r>
-              <a:rPr lang="en-US" dirty="0"/>
-              <a:t>Your Team Name</a:t>
+              <a:rPr lang="en-US" dirty="0" err="1"/>
+              <a:t>visionX</a:t>
             </a:r>
             <a:endParaRPr lang="en-IN" dirty="0"/>
           </a:p>
@@ -6612,7 +6658,7 @@
                 <a16:creationId xmlns:a16="http://schemas.microsoft.com/office/drawing/2014/main" id="{5DBCE864-823D-4A13-9607-5DA1F0ED5FB8}"/>
               </a:ext>
               <a:ext uri="{C183D7F6-B498-43B3-948B-1728B52AA6E4}">
-                <adec:decorative xmlns:adec="http://schemas.microsoft.com/office/drawing/2017/decorative" xmlns="" val="0"/>
+                <adec:decorative xmlns:adec="http://schemas.microsoft.com/office/drawing/2017/decorative" val="0"/>
               </a:ext>
             </a:extLst>
           </p:cNvPr>
@@ -7148,7 +7194,7 @@
                 <a16:creationId xmlns:a16="http://schemas.microsoft.com/office/drawing/2014/main" id="{5DBCE864-823D-4A13-9607-5DA1F0ED5FB8}"/>
               </a:ext>
               <a:ext uri="{C183D7F6-B498-43B3-948B-1728B52AA6E4}">
-                <adec:decorative xmlns:adec="http://schemas.microsoft.com/office/drawing/2017/decorative" xmlns="" val="0"/>
+                <adec:decorative xmlns:adec="http://schemas.microsoft.com/office/drawing/2017/decorative" val="0"/>
               </a:ext>
             </a:extLst>
           </p:cNvPr>
@@ -7615,7 +7661,7 @@
                 <a16:creationId xmlns:a16="http://schemas.microsoft.com/office/drawing/2014/main" id="{5DBCE864-823D-4A13-9607-5DA1F0ED5FB8}"/>
               </a:ext>
               <a:ext uri="{C183D7F6-B498-43B3-948B-1728B52AA6E4}">
-                <adec:decorative xmlns:adec="http://schemas.microsoft.com/office/drawing/2017/decorative" xmlns="" val="0"/>
+                <adec:decorative xmlns:adec="http://schemas.microsoft.com/office/drawing/2017/decorative" val="0"/>
               </a:ext>
             </a:extLst>
           </p:cNvPr>
@@ -8060,7 +8106,7 @@
                 <a16:creationId xmlns:a16="http://schemas.microsoft.com/office/drawing/2014/main" id="{5DBCE864-823D-4A13-9607-5DA1F0ED5FB8}"/>
               </a:ext>
               <a:ext uri="{C183D7F6-B498-43B3-948B-1728B52AA6E4}">
-                <adec:decorative xmlns:adec="http://schemas.microsoft.com/office/drawing/2017/decorative" xmlns="" val="0"/>
+                <adec:decorative xmlns:adec="http://schemas.microsoft.com/office/drawing/2017/decorative" val="0"/>
               </a:ext>
             </a:extLst>
           </p:cNvPr>

--- a/SIH26036-presentation.pptx
+++ b/SIH26036-presentation.pptx
@@ -5654,7 +5654,7 @@
                 <a:latin typeface="Arial" panose="020B0604020202020204" pitchFamily="34" charset="0"/>
                 <a:cs typeface="Arial" panose="020B0604020202020204" pitchFamily="34" charset="0"/>
               </a:rPr>
-              <a:t>Problem Statement ID –SIH26036</a:t>
+              <a:t>Problem Statement ID –SIH2603</a:t>
             </a:r>
             <a:endParaRPr lang="en-US" sz="2400" b="1" dirty="0">
               <a:latin typeface="Arial" panose="020B0604020202020204" pitchFamily="34" charset="0"/>

--- a/SIH26036-presentation.pptx
+++ b/SIH26036-presentation.pptx
@@ -1,16 +1,16 @@
 
 <file path=ppt/presentation.xml><?xml version="1.0" encoding="utf-8"?>
-<p:presentation xmlns:a="http://schemas.openxmlformats.org/drawingml/2006/main" xmlns:p="http://schemas.openxmlformats.org/presentationml/2006/main" xmlns:r="http://schemas.openxmlformats.org/officeDocument/2006/relationships" xmlns:p14="http://schemas.microsoft.com/office/powerpoint/2010/main" xmlns:p15="http://schemas.microsoft.com/office/powerpoint/2012/main" xmlns:mc="http://schemas.openxmlformats.org/markup-compatibility/2006">
+<p:presentation xmlns:a="http://schemas.openxmlformats.org/drawingml/2006/main" xmlns:r="http://schemas.openxmlformats.org/officeDocument/2006/relationships" xmlns:p="http://schemas.openxmlformats.org/presentationml/2006/main">
   <p:sldMasterIdLst>
-    <p:sldMasterId id="2147483648" r:id="rId2"/>
+    <p:sldMasterId id="2147483648" r:id="rId1"/>
     <p:sldMasterId id="2147483661" r:id="rId3"/>
   </p:sldMasterIdLst>
   <p:notesMasterIdLst>
-    <p:notesMasterId r:id="rId4"/>
+    <p:notesMasterId r:id="rId6"/>
   </p:notesMasterIdLst>
   <p:sldIdLst>
-    <p:sldId id="256" r:id="rId5"/>
-    <p:sldId id="257" r:id="rId6"/>
+    <p:sldId id="256" r:id="rId4"/>
+    <p:sldId id="257" r:id="rId5"/>
     <p:sldId id="258" r:id="rId7"/>
     <p:sldId id="259" r:id="rId8"/>
     <p:sldId id="260" r:id="rId9"/>
@@ -19,11 +19,403 @@
   </p:sldIdLst>
   <p:sldSz cx="12192000" cy="6858000"/>
   <p:notesSz cx="6858000" cy="9144000"/>
+  <p:defaultTextStyle>
+    <a:lvl1pPr marL="0" algn="l" defTabSz="914400" rtl="0" eaLnBrk="1" latinLnBrk="0" hangingPunct="1">
+      <a:defRPr sz="1800" kern="1200">
+        <a:solidFill>
+          <a:schemeClr val="tx1"/>
+        </a:solidFill>
+        <a:latin typeface="+mn-lt"/>
+        <a:ea typeface="+mn-ea"/>
+        <a:cs typeface="+mn-cs"/>
+      </a:defRPr>
+    </a:lvl1pPr>
+    <a:lvl2pPr marL="457200" algn="l" defTabSz="914400" rtl="0" eaLnBrk="1" latinLnBrk="0" hangingPunct="1">
+      <a:defRPr sz="1800" kern="1200">
+        <a:solidFill>
+          <a:schemeClr val="tx1"/>
+        </a:solidFill>
+        <a:latin typeface="+mn-lt"/>
+        <a:ea typeface="+mn-ea"/>
+        <a:cs typeface="+mn-cs"/>
+      </a:defRPr>
+    </a:lvl2pPr>
+    <a:lvl3pPr marL="914400" algn="l" defTabSz="914400" rtl="0" eaLnBrk="1" latinLnBrk="0" hangingPunct="1">
+      <a:defRPr sz="1800" kern="1200">
+        <a:solidFill>
+          <a:schemeClr val="tx1"/>
+        </a:solidFill>
+        <a:latin typeface="+mn-lt"/>
+        <a:ea typeface="+mn-ea"/>
+        <a:cs typeface="+mn-cs"/>
+      </a:defRPr>
+    </a:lvl3pPr>
+    <a:lvl4pPr marL="1371600" algn="l" defTabSz="914400" rtl="0" eaLnBrk="1" latinLnBrk="0" hangingPunct="1">
+      <a:defRPr sz="1800" kern="1200">
+        <a:solidFill>
+          <a:schemeClr val="tx1"/>
+        </a:solidFill>
+        <a:latin typeface="+mn-lt"/>
+        <a:ea typeface="+mn-ea"/>
+        <a:cs typeface="+mn-cs"/>
+      </a:defRPr>
+    </a:lvl4pPr>
+    <a:lvl5pPr marL="1828800" algn="l" defTabSz="914400" rtl="0" eaLnBrk="1" latinLnBrk="0" hangingPunct="1">
+      <a:defRPr sz="1800" kern="1200">
+        <a:solidFill>
+          <a:schemeClr val="tx1"/>
+        </a:solidFill>
+        <a:latin typeface="+mn-lt"/>
+        <a:ea typeface="+mn-ea"/>
+        <a:cs typeface="+mn-cs"/>
+      </a:defRPr>
+    </a:lvl5pPr>
+    <a:lvl6pPr marL="2286000" algn="l" defTabSz="914400" rtl="0" eaLnBrk="1" latinLnBrk="0" hangingPunct="1">
+      <a:defRPr sz="1800" kern="1200">
+        <a:solidFill>
+          <a:schemeClr val="tx1"/>
+        </a:solidFill>
+        <a:latin typeface="+mn-lt"/>
+        <a:ea typeface="+mn-ea"/>
+        <a:cs typeface="+mn-cs"/>
+      </a:defRPr>
+    </a:lvl6pPr>
+    <a:lvl7pPr marL="2743200" algn="l" defTabSz="914400" rtl="0" eaLnBrk="1" latinLnBrk="0" hangingPunct="1">
+      <a:defRPr sz="1800" kern="1200">
+        <a:solidFill>
+          <a:schemeClr val="tx1"/>
+        </a:solidFill>
+        <a:latin typeface="+mn-lt"/>
+        <a:ea typeface="+mn-ea"/>
+        <a:cs typeface="+mn-cs"/>
+      </a:defRPr>
+    </a:lvl7pPr>
+    <a:lvl8pPr marL="3200400" algn="l" defTabSz="914400" rtl="0" eaLnBrk="1" latinLnBrk="0" hangingPunct="1">
+      <a:defRPr sz="1800" kern="1200">
+        <a:solidFill>
+          <a:schemeClr val="tx1"/>
+        </a:solidFill>
+        <a:latin typeface="+mn-lt"/>
+        <a:ea typeface="+mn-ea"/>
+        <a:cs typeface="+mn-cs"/>
+      </a:defRPr>
+    </a:lvl8pPr>
+    <a:lvl9pPr marL="3657600" algn="l" defTabSz="914400" rtl="0" eaLnBrk="1" latinLnBrk="0" hangingPunct="1">
+      <a:defRPr sz="1800" kern="1200">
+        <a:solidFill>
+          <a:schemeClr val="tx1"/>
+        </a:solidFill>
+        <a:latin typeface="+mn-lt"/>
+        <a:ea typeface="+mn-ea"/>
+        <a:cs typeface="+mn-cs"/>
+      </a:defRPr>
+    </a:lvl9pPr>
+  </p:defaultTextStyle>
 </p:presentation>
 </file>
 
 <file path=ppt/notesMasters/notesMaster1.xml><?xml version="1.0" encoding="utf-8"?>
-<p:notesMaster xmlns:a="http://schemas.openxmlformats.org/drawingml/2006/main" xmlns:p="http://schemas.openxmlformats.org/presentationml/2006/main" xmlns:r="http://schemas.openxmlformats.org/officeDocument/2006/relationships" xmlns:p14="http://schemas.microsoft.com/office/powerpoint/2010/main" xmlns:p15="http://schemas.microsoft.com/office/powerpoint/2012/main" xmlns:mc="http://schemas.openxmlformats.org/markup-compatibility/2006">
+<p:notesMaster xmlns:a="http://schemas.openxmlformats.org/drawingml/2006/main" xmlns:r="http://schemas.openxmlformats.org/officeDocument/2006/relationships" xmlns:p="http://schemas.openxmlformats.org/presentationml/2006/main">
+  <p:cSld>
+    <p:bg>
+      <p:bgRef idx="1001">
+        <a:schemeClr val="bg1"/>
+      </p:bgRef>
+    </p:bg>
+    <p:spTree>
+      <p:nvGrpSpPr>
+        <p:cNvPr id="1" name=""/>
+        <p:cNvGrpSpPr/>
+        <p:nvPr/>
+      </p:nvGrpSpPr>
+      <p:grpSpPr>
+        <a:xfrm>
+          <a:off x="0" y="0"/>
+          <a:ext cx="0" cy="0"/>
+          <a:chOff x="0" y="0"/>
+          <a:chExt cx="0" cy="0"/>
+        </a:xfrm>
+      </p:grpSpPr>
+      <p:sp>
+        <p:nvSpPr>
+          <p:cNvPr id="82" name="PlaceHolder 1"/>
+          <p:cNvSpPr>
+            <a:spLocks noGrp="1"/>
+          </p:cNvSpPr>
+          <p:nvPr>
+            <p:ph type="sldImg"/>
+          </p:nvPr>
+        </p:nvSpPr>
+        <p:spPr>
+          <a:xfrm>
+            <a:off x="216000" y="812520"/>
+            <a:ext cx="7127280" cy="4008960"/>
+          </a:xfrm>
+          <a:prstGeom prst="rect">
+            <a:avLst/>
+          </a:prstGeom>
+          <a:noFill/>
+          <a:ln w="0">
+            <a:noFill/>
+          </a:ln>
+        </p:spPr>
+        <p:txBody>
+          <a:bodyPr lIns="0" tIns="0" rIns="0" bIns="0" anchor="ctr">
+            <a:noAutofit/>
+          </a:bodyPr>
+          <a:p>
+            <a:pPr algn="ctr">
+              <a:buNone/>
+            </a:pPr>
+            <a:r>
+              <a:rPr lang="en-IN" sz="4400" b="0" strike="noStrike" spc="-1">
+                <a:latin typeface="Arial" panose="020B0604020202020204"/>
+              </a:rPr>
+              <a:t>Click to move the slide</a:t>
+            </a:r>
+            <a:endParaRPr lang="en-IN" sz="4400" b="0" strike="noStrike" spc="-1">
+              <a:latin typeface="Arial" panose="020B0604020202020204"/>
+            </a:endParaRPr>
+          </a:p>
+        </p:txBody>
+      </p:sp>
+      <p:sp>
+        <p:nvSpPr>
+          <p:cNvPr id="83" name="PlaceHolder 2"/>
+          <p:cNvSpPr>
+            <a:spLocks noGrp="1"/>
+          </p:cNvSpPr>
+          <p:nvPr>
+            <p:ph type="body"/>
+          </p:nvPr>
+        </p:nvSpPr>
+        <p:spPr>
+          <a:xfrm>
+            <a:off x="756000" y="5078520"/>
+            <a:ext cx="6047640" cy="4811040"/>
+          </a:xfrm>
+          <a:prstGeom prst="rect">
+            <a:avLst/>
+          </a:prstGeom>
+          <a:noFill/>
+          <a:ln w="0">
+            <a:noFill/>
+          </a:ln>
+        </p:spPr>
+        <p:txBody>
+          <a:bodyPr lIns="0" tIns="0" rIns="0" bIns="0" anchor="t">
+            <a:noAutofit/>
+          </a:bodyPr>
+          <a:p>
+            <a:r>
+              <a:rPr lang="en-IN" sz="2000" b="0" strike="noStrike" spc="-1">
+                <a:latin typeface="Arial" panose="020B0604020202020204"/>
+              </a:rPr>
+              <a:t>Click to edit the notes format</a:t>
+            </a:r>
+            <a:endParaRPr lang="en-IN" sz="2000" b="0" strike="noStrike" spc="-1">
+              <a:latin typeface="Arial" panose="020B0604020202020204"/>
+            </a:endParaRPr>
+          </a:p>
+        </p:txBody>
+      </p:sp>
+      <p:sp>
+        <p:nvSpPr>
+          <p:cNvPr id="84" name="PlaceHolder 3"/>
+          <p:cNvSpPr>
+            <a:spLocks noGrp="1"/>
+          </p:cNvSpPr>
+          <p:nvPr>
+            <p:ph type="hdr"/>
+          </p:nvPr>
+        </p:nvSpPr>
+        <p:spPr>
+          <a:xfrm>
+            <a:off x="0" y="0"/>
+            <a:ext cx="3280680" cy="534240"/>
+          </a:xfrm>
+          <a:prstGeom prst="rect">
+            <a:avLst/>
+          </a:prstGeom>
+          <a:noFill/>
+          <a:ln w="0">
+            <a:noFill/>
+          </a:ln>
+        </p:spPr>
+        <p:txBody>
+          <a:bodyPr lIns="0" tIns="0" rIns="0" bIns="0" anchor="t">
+            <a:noAutofit/>
+          </a:bodyPr>
+          <a:p>
+            <a:r>
+              <a:rPr lang="en-IN" sz="1400" b="0" strike="noStrike" spc="-1">
+                <a:latin typeface="Times New Roman" panose="02020603050405020304"/>
+              </a:rPr>
+              <a:t>&lt;header&gt;</a:t>
+            </a:r>
+            <a:endParaRPr lang="en-IN" sz="1400" b="0" strike="noStrike" spc="-1">
+              <a:latin typeface="Times New Roman" panose="02020603050405020304"/>
+            </a:endParaRPr>
+          </a:p>
+        </p:txBody>
+      </p:sp>
+      <p:sp>
+        <p:nvSpPr>
+          <p:cNvPr id="85" name="PlaceHolder 4"/>
+          <p:cNvSpPr>
+            <a:spLocks noGrp="1"/>
+          </p:cNvSpPr>
+          <p:nvPr>
+            <p:ph type="dt" idx="7"/>
+          </p:nvPr>
+        </p:nvSpPr>
+        <p:spPr>
+          <a:xfrm>
+            <a:off x="4278960" y="0"/>
+            <a:ext cx="3280680" cy="534240"/>
+          </a:xfrm>
+          <a:prstGeom prst="rect">
+            <a:avLst/>
+          </a:prstGeom>
+          <a:noFill/>
+          <a:ln w="0">
+            <a:noFill/>
+          </a:ln>
+        </p:spPr>
+        <p:txBody>
+          <a:bodyPr lIns="0" tIns="0" rIns="0" bIns="0" anchor="t">
+            <a:noAutofit/>
+          </a:bodyPr>
+          <a:lstStyle>
+            <a:lvl1pPr algn="r">
+              <a:buNone/>
+              <a:defRPr lang="en-IN" sz="1400" b="0" strike="noStrike" spc="-1">
+                <a:latin typeface="Times New Roman" panose="02020603050405020304"/>
+              </a:defRPr>
+            </a:lvl1pPr>
+          </a:lstStyle>
+          <a:p>
+            <a:pPr algn="r">
+              <a:buNone/>
+            </a:pPr>
+            <a:r>
+              <a:rPr lang="en-IN" sz="1400" b="0" strike="noStrike" spc="-1">
+                <a:latin typeface="Times New Roman" panose="02020603050405020304"/>
+              </a:rPr>
+              <a:t>&lt;date/time&gt;</a:t>
+            </a:r>
+            <a:endParaRPr lang="en-IN" sz="1400" b="0" strike="noStrike" spc="-1">
+              <a:latin typeface="Times New Roman" panose="02020603050405020304"/>
+            </a:endParaRPr>
+          </a:p>
+        </p:txBody>
+      </p:sp>
+      <p:sp>
+        <p:nvSpPr>
+          <p:cNvPr id="86" name="PlaceHolder 5"/>
+          <p:cNvSpPr>
+            <a:spLocks noGrp="1"/>
+          </p:cNvSpPr>
+          <p:nvPr>
+            <p:ph type="ftr" idx="8"/>
+          </p:nvPr>
+        </p:nvSpPr>
+        <p:spPr>
+          <a:xfrm>
+            <a:off x="0" y="10157400"/>
+            <a:ext cx="3280680" cy="534240"/>
+          </a:xfrm>
+          <a:prstGeom prst="rect">
+            <a:avLst/>
+          </a:prstGeom>
+          <a:noFill/>
+          <a:ln w="0">
+            <a:noFill/>
+          </a:ln>
+        </p:spPr>
+        <p:txBody>
+          <a:bodyPr lIns="0" tIns="0" rIns="0" bIns="0" anchor="b">
+            <a:noAutofit/>
+          </a:bodyPr>
+          <a:lstStyle>
+            <a:lvl1pPr>
+              <a:defRPr lang="en-IN" sz="1400" b="0" strike="noStrike" spc="-1">
+                <a:latin typeface="Times New Roman" panose="02020603050405020304"/>
+              </a:defRPr>
+            </a:lvl1pPr>
+          </a:lstStyle>
+          <a:p>
+            <a:r>
+              <a:rPr lang="en-IN" sz="1400" b="0" strike="noStrike" spc="-1">
+                <a:latin typeface="Times New Roman" panose="02020603050405020304"/>
+              </a:rPr>
+              <a:t>&lt;footer&gt;</a:t>
+            </a:r>
+            <a:endParaRPr lang="en-IN" sz="1400" b="0" strike="noStrike" spc="-1">
+              <a:latin typeface="Times New Roman" panose="02020603050405020304"/>
+            </a:endParaRPr>
+          </a:p>
+        </p:txBody>
+      </p:sp>
+      <p:sp>
+        <p:nvSpPr>
+          <p:cNvPr id="87" name="PlaceHolder 6"/>
+          <p:cNvSpPr>
+            <a:spLocks noGrp="1"/>
+          </p:cNvSpPr>
+          <p:nvPr>
+            <p:ph type="sldNum" idx="9"/>
+          </p:nvPr>
+        </p:nvSpPr>
+        <p:spPr>
+          <a:xfrm>
+            <a:off x="4278960" y="10157400"/>
+            <a:ext cx="3280680" cy="534240"/>
+          </a:xfrm>
+          <a:prstGeom prst="rect">
+            <a:avLst/>
+          </a:prstGeom>
+          <a:noFill/>
+          <a:ln w="0">
+            <a:noFill/>
+          </a:ln>
+        </p:spPr>
+        <p:txBody>
+          <a:bodyPr lIns="0" tIns="0" rIns="0" bIns="0" anchor="b">
+            <a:noAutofit/>
+          </a:bodyPr>
+          <a:lstStyle>
+            <a:lvl1pPr algn="r">
+              <a:buNone/>
+              <a:defRPr lang="en-IN" sz="1400" b="0" strike="noStrike" spc="-1">
+                <a:latin typeface="Times New Roman" panose="02020603050405020304"/>
+              </a:defRPr>
+            </a:lvl1pPr>
+          </a:lstStyle>
+          <a:p>
+            <a:pPr algn="r">
+              <a:buNone/>
+            </a:pPr>
+            <a:fld id="{2CBEB42E-CD77-46CD-8EB9-D861ACD354C3}" type="slidenum">
+              <a:rPr lang="en-IN" sz="1400" b="0" strike="noStrike" spc="-1">
+                <a:latin typeface="Times New Roman" panose="02020603050405020304"/>
+              </a:rPr>
+            </a:fld>
+            <a:endParaRPr lang="en-IN" sz="1400" b="0" strike="noStrike" spc="-1">
+              <a:latin typeface="Times New Roman" panose="02020603050405020304"/>
+            </a:endParaRPr>
+          </a:p>
+        </p:txBody>
+      </p:sp>
+    </p:spTree>
+  </p:cSld>
+  <p:clrMap bg1="lt1" tx1="dk1" bg2="lt2" tx2="dk2" accent1="accent1" accent2="accent2" accent3="accent3" accent4="accent4" accent5="accent5" accent6="accent6" hlink="hlink" folHlink="folHlink"/>
+  <p:notesStyle/>
+</p:notesMaster>
+</file>
+
+<file path=ppt/notesSlides/notesSlide1.xml><?xml version="1.0" encoding="utf-8"?>
+<p:notes xmlns:a="http://schemas.openxmlformats.org/drawingml/2006/main" xmlns:r="http://schemas.openxmlformats.org/officeDocument/2006/relationships" xmlns:p="http://schemas.openxmlformats.org/presentationml/2006/main">
   <p:cSld>
     <p:spTree>
       <p:nvGrpSpPr>
@@ -41,7 +433,7 @@
       </p:grpSpPr>
       <p:sp>
         <p:nvSpPr>
-          <p:cNvPr id="82" name="PlaceHolder 1"/>
+          <p:cNvPr id="138" name="PlaceHolder 1"/>
           <p:cNvSpPr>
             <a:spLocks noGrp="1"/>
           </p:cNvSpPr>
@@ -51,274 +443,117 @@
         </p:nvSpPr>
         <p:spPr>
           <a:xfrm>
-            <a:off x="216000" y="812520"/>
-            <a:ext cx="7127280" cy="4008960"/>
-          </a:xfrm>
-          <a:prstGeom prst="rect">
-            <a:avLst/>
-          </a:prstGeom>
-          <a:noFill/>
-          <a:ln w="0">
-            <a:noFill/>
-          </a:ln>
-        </p:spPr>
-        <p:txBody>
-          <a:bodyPr lIns="0" rIns="0" tIns="0" bIns="0" anchor="ctr">
+            <a:off x="380880" y="685800"/>
+            <a:ext cx="6094800" cy="3427920"/>
+          </a:xfrm>
+          <a:prstGeom prst="rect">
+            <a:avLst/>
+          </a:prstGeom>
+          <a:ln w="0">
+            <a:noFill/>
+          </a:ln>
+        </p:spPr>
+      </p:sp>
+      <p:sp>
+        <p:nvSpPr>
+          <p:cNvPr id="139" name="PlaceHolder 2"/>
+          <p:cNvSpPr>
+            <a:spLocks noGrp="1"/>
+          </p:cNvSpPr>
+          <p:nvPr>
+            <p:ph type="body"/>
+          </p:nvPr>
+        </p:nvSpPr>
+        <p:spPr>
+          <a:xfrm>
+            <a:off x="685800" y="4343400"/>
+            <a:ext cx="5485320" cy="4113720"/>
+          </a:xfrm>
+          <a:prstGeom prst="rect">
+            <a:avLst/>
+          </a:prstGeom>
+          <a:noFill/>
+          <a:ln w="0">
+            <a:noFill/>
+          </a:ln>
+        </p:spPr>
+        <p:txBody>
+          <a:bodyPr lIns="0" tIns="0" rIns="0" bIns="0" numCol="1" spcCol="0" anchor="t">
             <a:noAutofit/>
           </a:bodyPr>
           <a:p>
-            <a:pPr algn="ctr">
-              <a:buNone/>
-            </a:pPr>
-            <a:r>
-              <a:rPr b="0" lang="en-IN" sz="4400" spc="-1" strike="noStrike">
-                <a:latin typeface="Arial"/>
-              </a:rPr>
-              <a:t>Click to move the slide</a:t>
-            </a:r>
-            <a:endParaRPr b="0" lang="en-IN" sz="4400" spc="-1" strike="noStrike">
-              <a:latin typeface="Arial"/>
-            </a:endParaRPr>
-          </a:p>
-        </p:txBody>
-      </p:sp>
-      <p:sp>
-        <p:nvSpPr>
-          <p:cNvPr id="83" name="PlaceHolder 2"/>
-          <p:cNvSpPr>
-            <a:spLocks noGrp="1"/>
-          </p:cNvSpPr>
-          <p:nvPr>
-            <p:ph type="body"/>
-          </p:nvPr>
-        </p:nvSpPr>
-        <p:spPr>
-          <a:xfrm>
-            <a:off x="756000" y="5078520"/>
-            <a:ext cx="6047640" cy="4811040"/>
-          </a:xfrm>
-          <a:prstGeom prst="rect">
-            <a:avLst/>
-          </a:prstGeom>
-          <a:noFill/>
-          <a:ln w="0">
-            <a:noFill/>
-          </a:ln>
-        </p:spPr>
-        <p:txBody>
-          <a:bodyPr lIns="0" rIns="0" tIns="0" bIns="0" anchor="t">
-            <a:noAutofit/>
-          </a:bodyPr>
-          <a:p>
-            <a:r>
-              <a:rPr b="0" lang="en-IN" sz="2000" spc="-1" strike="noStrike">
-                <a:latin typeface="Arial"/>
-              </a:rPr>
-              <a:t>Click to edit the notes format</a:t>
-            </a:r>
-            <a:endParaRPr b="0" lang="en-IN" sz="2000" spc="-1" strike="noStrike">
-              <a:latin typeface="Arial"/>
-            </a:endParaRPr>
-          </a:p>
-        </p:txBody>
-      </p:sp>
-      <p:sp>
-        <p:nvSpPr>
-          <p:cNvPr id="84" name="PlaceHolder 3"/>
-          <p:cNvSpPr>
-            <a:spLocks noGrp="1"/>
-          </p:cNvSpPr>
-          <p:nvPr>
-            <p:ph type="hdr"/>
-          </p:nvPr>
-        </p:nvSpPr>
-        <p:spPr>
-          <a:xfrm>
-            <a:off x="0" y="0"/>
-            <a:ext cx="3280680" cy="534240"/>
-          </a:xfrm>
-          <a:prstGeom prst="rect">
-            <a:avLst/>
-          </a:prstGeom>
-          <a:noFill/>
-          <a:ln w="0">
-            <a:noFill/>
-          </a:ln>
-        </p:spPr>
-        <p:txBody>
-          <a:bodyPr lIns="0" rIns="0" tIns="0" bIns="0" anchor="t">
-            <a:noAutofit/>
-          </a:bodyPr>
-          <a:p>
-            <a:r>
-              <a:rPr b="0" lang="en-IN" sz="1400" spc="-1" strike="noStrike">
-                <a:latin typeface="Times New Roman"/>
-              </a:rPr>
-              <a:t>&lt;header&gt;</a:t>
-            </a:r>
-            <a:endParaRPr b="0" lang="en-IN" sz="1400" spc="-1" strike="noStrike">
-              <a:latin typeface="Times New Roman"/>
-            </a:endParaRPr>
-          </a:p>
-        </p:txBody>
-      </p:sp>
-      <p:sp>
-        <p:nvSpPr>
-          <p:cNvPr id="85" name="PlaceHolder 4"/>
-          <p:cNvSpPr>
-            <a:spLocks noGrp="1"/>
-          </p:cNvSpPr>
-          <p:nvPr>
-            <p:ph type="dt" idx="7"/>
-          </p:nvPr>
-        </p:nvSpPr>
-        <p:spPr>
-          <a:xfrm>
-            <a:off x="4278960" y="0"/>
-            <a:ext cx="3280680" cy="534240"/>
-          </a:xfrm>
-          <a:prstGeom prst="rect">
-            <a:avLst/>
-          </a:prstGeom>
-          <a:noFill/>
-          <a:ln w="0">
-            <a:noFill/>
-          </a:ln>
-        </p:spPr>
-        <p:txBody>
-          <a:bodyPr lIns="0" rIns="0" tIns="0" bIns="0" anchor="t">
+            <a:endParaRPr lang="en-IN" sz="2000" b="0" strike="noStrike" spc="-1">
+              <a:latin typeface="Arial" panose="020B0604020202020204"/>
+            </a:endParaRPr>
+          </a:p>
+        </p:txBody>
+      </p:sp>
+      <p:sp>
+        <p:nvSpPr>
+          <p:cNvPr id="140" name="PlaceHolder 3"/>
+          <p:cNvSpPr>
+            <a:spLocks noGrp="1"/>
+          </p:cNvSpPr>
+          <p:nvPr>
+            <p:ph type="sldNum" idx="22"/>
+          </p:nvPr>
+        </p:nvSpPr>
+        <p:spPr>
+          <a:xfrm>
+            <a:off x="3884760" y="8685360"/>
+            <a:ext cx="2970720" cy="456120"/>
+          </a:xfrm>
+          <a:prstGeom prst="rect">
+            <a:avLst/>
+          </a:prstGeom>
+          <a:noFill/>
+          <a:ln w="0">
+            <a:noFill/>
+          </a:ln>
+        </p:spPr>
+        <p:txBody>
+          <a:bodyPr lIns="0" tIns="0" rIns="0" bIns="0" numCol="1" spcCol="0" anchor="b">
             <a:noAutofit/>
           </a:bodyPr>
           <a:lstStyle>
             <a:lvl1pPr algn="r">
+              <a:lnSpc>
+                <a:spcPct val="100000"/>
+              </a:lnSpc>
               <a:buNone/>
-              <a:defRPr b="0" lang="en-IN" sz="1400" spc="-1" strike="noStrike">
-                <a:latin typeface="Times New Roman"/>
+              <a:defRPr lang="en-US" sz="1200" b="0" strike="noStrike" spc="-1">
+                <a:latin typeface="Times New Roman" panose="02020603050405020304"/>
               </a:defRPr>
             </a:lvl1pPr>
           </a:lstStyle>
           <a:p>
             <a:pPr algn="r">
+              <a:lnSpc>
+                <a:spcPct val="100000"/>
+              </a:lnSpc>
               <a:buNone/>
             </a:pPr>
-            <a:r>
-              <a:rPr b="0" lang="en-IN" sz="1400" spc="-1" strike="noStrike">
-                <a:latin typeface="Times New Roman"/>
+            <a:fld id="{ED7852B1-F119-4FEE-AC10-03D9BEF07B87}" type="slidenum">
+              <a:rPr lang="en-US" sz="1200" b="0" strike="noStrike" spc="-1">
+                <a:latin typeface="Times New Roman" panose="02020603050405020304"/>
               </a:rPr>
-              <a:t>&lt;date/time&gt;</a:t>
-            </a:r>
-            <a:endParaRPr b="0" lang="en-IN" sz="1400" spc="-1" strike="noStrike">
-              <a:latin typeface="Times New Roman"/>
-            </a:endParaRPr>
-          </a:p>
-        </p:txBody>
-      </p:sp>
-      <p:sp>
-        <p:nvSpPr>
-          <p:cNvPr id="86" name="PlaceHolder 5"/>
-          <p:cNvSpPr>
-            <a:spLocks noGrp="1"/>
-          </p:cNvSpPr>
-          <p:nvPr>
-            <p:ph type="ftr" idx="8"/>
-          </p:nvPr>
-        </p:nvSpPr>
-        <p:spPr>
-          <a:xfrm>
-            <a:off x="0" y="10157400"/>
-            <a:ext cx="3280680" cy="534240"/>
-          </a:xfrm>
-          <a:prstGeom prst="rect">
-            <a:avLst/>
-          </a:prstGeom>
-          <a:noFill/>
-          <a:ln w="0">
-            <a:noFill/>
-          </a:ln>
-        </p:spPr>
-        <p:txBody>
-          <a:bodyPr lIns="0" rIns="0" tIns="0" bIns="0" anchor="b">
-            <a:noAutofit/>
-          </a:bodyPr>
-          <a:lstStyle>
-            <a:lvl1pPr>
-              <a:defRPr b="0" lang="en-IN" sz="1400" spc="-1" strike="noStrike">
-                <a:latin typeface="Times New Roman"/>
-              </a:defRPr>
-            </a:lvl1pPr>
-          </a:lstStyle>
-          <a:p>
-            <a:r>
-              <a:rPr b="0" lang="en-IN" sz="1400" spc="-1" strike="noStrike">
-                <a:latin typeface="Times New Roman"/>
-              </a:rPr>
-              <a:t>&lt;footer&gt;</a:t>
-            </a:r>
-            <a:endParaRPr b="0" lang="en-IN" sz="1400" spc="-1" strike="noStrike">
-              <a:latin typeface="Times New Roman"/>
-            </a:endParaRPr>
-          </a:p>
-        </p:txBody>
-      </p:sp>
-      <p:sp>
-        <p:nvSpPr>
-          <p:cNvPr id="87" name="PlaceHolder 6"/>
-          <p:cNvSpPr>
-            <a:spLocks noGrp="1"/>
-          </p:cNvSpPr>
-          <p:nvPr>
-            <p:ph type="sldNum" idx="9"/>
-          </p:nvPr>
-        </p:nvSpPr>
-        <p:spPr>
-          <a:xfrm>
-            <a:off x="4278960" y="10157400"/>
-            <a:ext cx="3280680" cy="534240"/>
-          </a:xfrm>
-          <a:prstGeom prst="rect">
-            <a:avLst/>
-          </a:prstGeom>
-          <a:noFill/>
-          <a:ln w="0">
-            <a:noFill/>
-          </a:ln>
-        </p:spPr>
-        <p:txBody>
-          <a:bodyPr lIns="0" rIns="0" tIns="0" bIns="0" anchor="b">
-            <a:noAutofit/>
-          </a:bodyPr>
-          <a:lstStyle>
-            <a:lvl1pPr algn="r">
-              <a:buNone/>
-              <a:defRPr b="0" lang="en-IN" sz="1400" spc="-1" strike="noStrike">
-                <a:latin typeface="Times New Roman"/>
-              </a:defRPr>
-            </a:lvl1pPr>
-          </a:lstStyle>
-          <a:p>
-            <a:pPr algn="r">
-              <a:buNone/>
-            </a:pPr>
-            <a:fld id="{2CBEB42E-CD77-46CD-8EB9-D861ACD354C3}" type="slidenum">
-              <a:rPr b="0" lang="en-IN" sz="1400" spc="-1" strike="noStrike">
-                <a:latin typeface="Times New Roman"/>
-              </a:rPr>
-              <a:t>&lt;number&gt;</a:t>
             </a:fld>
-            <a:endParaRPr b="0" lang="en-IN" sz="1400" spc="-1" strike="noStrike">
-              <a:latin typeface="Times New Roman"/>
+            <a:endParaRPr lang="en-IN" sz="1200" b="0" strike="noStrike" spc="-1">
+              <a:latin typeface="Times New Roman" panose="02020603050405020304"/>
             </a:endParaRPr>
           </a:p>
         </p:txBody>
       </p:sp>
     </p:spTree>
   </p:cSld>
-  <p:clrMap bg1="lt1" bg2="lt2" tx1="dk1" tx2="dk2" accent1="accent1" accent2="accent2" accent3="accent3" accent4="accent4" accent5="accent5" accent6="accent6" hlink="hlink" folHlink="folHlink"/>
-</p:notesMaster>
+  <p:clrMapOvr>
+    <a:masterClrMapping/>
+  </p:clrMapOvr>
+</p:notes>
 </file>
 
 <file path=ppt/notesSlides/notesSlide2.xml><?xml version="1.0" encoding="utf-8"?>
-<p:notes xmlns:a="http://schemas.openxmlformats.org/drawingml/2006/main" xmlns:p="http://schemas.openxmlformats.org/presentationml/2006/main" xmlns:r="http://schemas.openxmlformats.org/officeDocument/2006/relationships" xmlns:p14="http://schemas.microsoft.com/office/powerpoint/2010/main" xmlns:p15="http://schemas.microsoft.com/office/powerpoint/2012/main" xmlns:mc="http://schemas.openxmlformats.org/markup-compatibility/2006">
+<p:notes xmlns:a="http://schemas.openxmlformats.org/drawingml/2006/main" xmlns:r="http://schemas.openxmlformats.org/officeDocument/2006/relationships" xmlns:p="http://schemas.openxmlformats.org/presentationml/2006/main">
   <p:cSld>
     <p:spTree>
       <p:nvGrpSpPr>
@@ -336,7 +571,7 @@
       </p:grpSpPr>
       <p:sp>
         <p:nvSpPr>
-          <p:cNvPr id="138" name="PlaceHolder 1"/>
+          <p:cNvPr id="141" name="PlaceHolder 1"/>
           <p:cNvSpPr>
             <a:spLocks noGrp="1"/>
           </p:cNvSpPr>
@@ -359,7 +594,7 @@
       </p:sp>
       <p:sp>
         <p:nvSpPr>
-          <p:cNvPr id="139" name="PlaceHolder 2"/>
+          <p:cNvPr id="142" name="PlaceHolder 2"/>
           <p:cNvSpPr>
             <a:spLocks noGrp="1"/>
           </p:cNvSpPr>
@@ -381,24 +616,24 @@
           </a:ln>
         </p:spPr>
         <p:txBody>
-          <a:bodyPr numCol="1" spcCol="0" lIns="0" rIns="0" tIns="0" bIns="0" anchor="t">
+          <a:bodyPr lIns="0" tIns="0" rIns="0" bIns="0" numCol="1" spcCol="0" anchor="t">
             <a:noAutofit/>
           </a:bodyPr>
           <a:p>
-            <a:endParaRPr b="0" lang="en-IN" sz="2000" spc="-1" strike="noStrike">
-              <a:latin typeface="Arial"/>
-            </a:endParaRPr>
-          </a:p>
-        </p:txBody>
-      </p:sp>
-      <p:sp>
-        <p:nvSpPr>
-          <p:cNvPr id="140" name="PlaceHolder 3"/>
-          <p:cNvSpPr>
-            <a:spLocks noGrp="1"/>
-          </p:cNvSpPr>
-          <p:nvPr>
-            <p:ph type="sldNum" idx="22"/>
+            <a:endParaRPr lang="en-IN" sz="2000" b="0" strike="noStrike" spc="-1">
+              <a:latin typeface="Arial" panose="020B0604020202020204"/>
+            </a:endParaRPr>
+          </a:p>
+        </p:txBody>
+      </p:sp>
+      <p:sp>
+        <p:nvSpPr>
+          <p:cNvPr id="143" name="PlaceHolder 3"/>
+          <p:cNvSpPr>
+            <a:spLocks noGrp="1"/>
+          </p:cNvSpPr>
+          <p:nvPr>
+            <p:ph type="sldNum" idx="23"/>
           </p:nvPr>
         </p:nvSpPr>
         <p:spPr>
@@ -415,7 +650,7 @@
           </a:ln>
         </p:spPr>
         <p:txBody>
-          <a:bodyPr numCol="1" spcCol="0" lIns="0" rIns="0" tIns="0" bIns="0" anchor="b">
+          <a:bodyPr lIns="0" tIns="0" rIns="0" bIns="0" numCol="1" spcCol="0" anchor="b">
             <a:noAutofit/>
           </a:bodyPr>
           <a:lstStyle>
@@ -424,8 +659,8 @@
                 <a:spcPct val="100000"/>
               </a:lnSpc>
               <a:buNone/>
-              <a:defRPr b="0" lang="en-US" sz="1200" spc="-1" strike="noStrike">
-                <a:latin typeface="Times New Roman"/>
+              <a:defRPr lang="en-US" sz="1200" b="0" strike="noStrike" spc="-1">
+                <a:latin typeface="Times New Roman" panose="02020603050405020304"/>
               </a:defRPr>
             </a:lvl1pPr>
           </a:lstStyle>
@@ -436,25 +671,27 @@
               </a:lnSpc>
               <a:buNone/>
             </a:pPr>
-            <a:fld id="{ED7852B1-F119-4FEE-AC10-03D9BEF07B87}" type="slidenum">
-              <a:rPr b="0" lang="en-US" sz="1200" spc="-1" strike="noStrike">
-                <a:latin typeface="Times New Roman"/>
+            <a:fld id="{EE8B9DF8-E473-44D2-8239-4CBA2E51694C}" type="slidenum">
+              <a:rPr lang="en-US" sz="1200" b="0" strike="noStrike" spc="-1">
+                <a:latin typeface="Times New Roman" panose="02020603050405020304"/>
               </a:rPr>
-              <a:t>&lt;number&gt;</a:t>
             </a:fld>
-            <a:endParaRPr b="0" lang="en-IN" sz="1200" spc="-1" strike="noStrike">
-              <a:latin typeface="Times New Roman"/>
+            <a:endParaRPr lang="en-IN" sz="1200" b="0" strike="noStrike" spc="-1">
+              <a:latin typeface="Times New Roman" panose="02020603050405020304"/>
             </a:endParaRPr>
           </a:p>
         </p:txBody>
       </p:sp>
     </p:spTree>
   </p:cSld>
+  <p:clrMapOvr>
+    <a:masterClrMapping/>
+  </p:clrMapOvr>
 </p:notes>
 </file>
 
 <file path=ppt/notesSlides/notesSlide3.xml><?xml version="1.0" encoding="utf-8"?>
-<p:notes xmlns:a="http://schemas.openxmlformats.org/drawingml/2006/main" xmlns:p="http://schemas.openxmlformats.org/presentationml/2006/main" xmlns:r="http://schemas.openxmlformats.org/officeDocument/2006/relationships" xmlns:p14="http://schemas.microsoft.com/office/powerpoint/2010/main" xmlns:p15="http://schemas.microsoft.com/office/powerpoint/2012/main" xmlns:mc="http://schemas.openxmlformats.org/markup-compatibility/2006">
+<p:notes xmlns:a="http://schemas.openxmlformats.org/drawingml/2006/main" xmlns:r="http://schemas.openxmlformats.org/officeDocument/2006/relationships" xmlns:p="http://schemas.openxmlformats.org/presentationml/2006/main">
   <p:cSld>
     <p:spTree>
       <p:nvGrpSpPr>
@@ -472,7 +709,7 @@
       </p:grpSpPr>
       <p:sp>
         <p:nvSpPr>
-          <p:cNvPr id="141" name="PlaceHolder 1"/>
+          <p:cNvPr id="144" name="PlaceHolder 1"/>
           <p:cNvSpPr>
             <a:spLocks noGrp="1"/>
           </p:cNvSpPr>
@@ -495,7 +732,7 @@
       </p:sp>
       <p:sp>
         <p:nvSpPr>
-          <p:cNvPr id="142" name="PlaceHolder 2"/>
+          <p:cNvPr id="145" name="PlaceHolder 2"/>
           <p:cNvSpPr>
             <a:spLocks noGrp="1"/>
           </p:cNvSpPr>
@@ -517,24 +754,24 @@
           </a:ln>
         </p:spPr>
         <p:txBody>
-          <a:bodyPr numCol="1" spcCol="0" lIns="0" rIns="0" tIns="0" bIns="0" anchor="t">
+          <a:bodyPr lIns="0" tIns="0" rIns="0" bIns="0" numCol="1" spcCol="0" anchor="t">
             <a:noAutofit/>
           </a:bodyPr>
           <a:p>
-            <a:endParaRPr b="0" lang="en-IN" sz="2000" spc="-1" strike="noStrike">
-              <a:latin typeface="Arial"/>
-            </a:endParaRPr>
-          </a:p>
-        </p:txBody>
-      </p:sp>
-      <p:sp>
-        <p:nvSpPr>
-          <p:cNvPr id="143" name="PlaceHolder 3"/>
-          <p:cNvSpPr>
-            <a:spLocks noGrp="1"/>
-          </p:cNvSpPr>
-          <p:nvPr>
-            <p:ph type="sldNum" idx="23"/>
+            <a:endParaRPr lang="en-IN" sz="2000" b="0" strike="noStrike" spc="-1">
+              <a:latin typeface="Arial" panose="020B0604020202020204"/>
+            </a:endParaRPr>
+          </a:p>
+        </p:txBody>
+      </p:sp>
+      <p:sp>
+        <p:nvSpPr>
+          <p:cNvPr id="146" name="PlaceHolder 3"/>
+          <p:cNvSpPr>
+            <a:spLocks noGrp="1"/>
+          </p:cNvSpPr>
+          <p:nvPr>
+            <p:ph type="sldNum" idx="24"/>
           </p:nvPr>
         </p:nvSpPr>
         <p:spPr>
@@ -551,7 +788,7 @@
           </a:ln>
         </p:spPr>
         <p:txBody>
-          <a:bodyPr numCol="1" spcCol="0" lIns="0" rIns="0" tIns="0" bIns="0" anchor="b">
+          <a:bodyPr lIns="0" tIns="0" rIns="0" bIns="0" numCol="1" spcCol="0" anchor="b">
             <a:noAutofit/>
           </a:bodyPr>
           <a:lstStyle>
@@ -560,8 +797,15 @@
                 <a:spcPct val="100000"/>
               </a:lnSpc>
               <a:buNone/>
-              <a:defRPr b="0" lang="en-US" sz="1200" spc="-1" strike="noStrike">
-                <a:latin typeface="Times New Roman"/>
+              <a:tabLst>
+                <a:tab pos="0" algn="l"/>
+              </a:tabLst>
+              <a:defRPr lang="en-US" sz="1200" b="0" strike="noStrike" spc="-1">
+                <a:solidFill>
+                  <a:srgbClr val="000000"/>
+                </a:solidFill>
+                <a:latin typeface="Calibri" panose="020F0502020204030204"/>
+                <a:ea typeface="MS PGothic" panose="020B0600070205080204" charset="-128"/>
               </a:defRPr>
             </a:lvl1pPr>
           </a:lstStyle>
@@ -571,26 +815,35 @@
                 <a:spcPct val="100000"/>
               </a:lnSpc>
               <a:buNone/>
+              <a:tabLst>
+                <a:tab pos="0" algn="l"/>
+              </a:tabLst>
             </a:pPr>
-            <a:fld id="{EE8B9DF8-E473-44D2-8239-4CBA2E51694C}" type="slidenum">
-              <a:rPr b="0" lang="en-US" sz="1200" spc="-1" strike="noStrike">
-                <a:latin typeface="Times New Roman"/>
+            <a:fld id="{8CC99B75-6C98-4613-95A4-A630DE0C91BD}" type="slidenum">
+              <a:rPr lang="en-US" sz="1200" b="0" strike="noStrike" spc="-1">
+                <a:solidFill>
+                  <a:srgbClr val="000000"/>
+                </a:solidFill>
+                <a:latin typeface="Calibri" panose="020F0502020204030204"/>
+                <a:ea typeface="MS PGothic" panose="020B0600070205080204" charset="-128"/>
               </a:rPr>
-              <a:t>&lt;number&gt;</a:t>
             </a:fld>
-            <a:endParaRPr b="0" lang="en-IN" sz="1200" spc="-1" strike="noStrike">
-              <a:latin typeface="Times New Roman"/>
+            <a:endParaRPr lang="en-IN" sz="1200" b="0" strike="noStrike" spc="-1">
+              <a:latin typeface="Times New Roman" panose="02020603050405020304"/>
             </a:endParaRPr>
           </a:p>
         </p:txBody>
       </p:sp>
     </p:spTree>
   </p:cSld>
+  <p:clrMapOvr>
+    <a:masterClrMapping/>
+  </p:clrMapOvr>
 </p:notes>
 </file>
 
 <file path=ppt/notesSlides/notesSlide4.xml><?xml version="1.0" encoding="utf-8"?>
-<p:notes xmlns:a="http://schemas.openxmlformats.org/drawingml/2006/main" xmlns:p="http://schemas.openxmlformats.org/presentationml/2006/main" xmlns:r="http://schemas.openxmlformats.org/officeDocument/2006/relationships" xmlns:p14="http://schemas.microsoft.com/office/powerpoint/2010/main" xmlns:p15="http://schemas.microsoft.com/office/powerpoint/2012/main" xmlns:mc="http://schemas.openxmlformats.org/markup-compatibility/2006">
+<p:notes xmlns:a="http://schemas.openxmlformats.org/drawingml/2006/main" xmlns:r="http://schemas.openxmlformats.org/officeDocument/2006/relationships" xmlns:p="http://schemas.openxmlformats.org/presentationml/2006/main">
   <p:cSld>
     <p:spTree>
       <p:nvGrpSpPr>
@@ -608,7 +861,7 @@
       </p:grpSpPr>
       <p:sp>
         <p:nvSpPr>
-          <p:cNvPr id="144" name="PlaceHolder 1"/>
+          <p:cNvPr id="147" name="PlaceHolder 1"/>
           <p:cNvSpPr>
             <a:spLocks noGrp="1"/>
           </p:cNvSpPr>
@@ -631,7 +884,7 @@
       </p:sp>
       <p:sp>
         <p:nvSpPr>
-          <p:cNvPr id="145" name="PlaceHolder 2"/>
+          <p:cNvPr id="148" name="PlaceHolder 2"/>
           <p:cNvSpPr>
             <a:spLocks noGrp="1"/>
           </p:cNvSpPr>
@@ -653,24 +906,24 @@
           </a:ln>
         </p:spPr>
         <p:txBody>
-          <a:bodyPr numCol="1" spcCol="0" lIns="0" rIns="0" tIns="0" bIns="0" anchor="t">
+          <a:bodyPr lIns="0" tIns="0" rIns="0" bIns="0" numCol="1" spcCol="0" anchor="t">
             <a:noAutofit/>
           </a:bodyPr>
           <a:p>
-            <a:endParaRPr b="0" lang="en-IN" sz="2000" spc="-1" strike="noStrike">
-              <a:latin typeface="Arial"/>
-            </a:endParaRPr>
-          </a:p>
-        </p:txBody>
-      </p:sp>
-      <p:sp>
-        <p:nvSpPr>
-          <p:cNvPr id="146" name="PlaceHolder 3"/>
-          <p:cNvSpPr>
-            <a:spLocks noGrp="1"/>
-          </p:cNvSpPr>
-          <p:nvPr>
-            <p:ph type="sldNum" idx="24"/>
+            <a:endParaRPr lang="en-IN" sz="2000" b="0" strike="noStrike" spc="-1">
+              <a:latin typeface="Arial" panose="020B0604020202020204"/>
+            </a:endParaRPr>
+          </a:p>
+        </p:txBody>
+      </p:sp>
+      <p:sp>
+        <p:nvSpPr>
+          <p:cNvPr id="149" name="PlaceHolder 3"/>
+          <p:cNvSpPr>
+            <a:spLocks noGrp="1"/>
+          </p:cNvSpPr>
+          <p:nvPr>
+            <p:ph type="sldNum" idx="25"/>
           </p:nvPr>
         </p:nvSpPr>
         <p:spPr>
@@ -687,7 +940,7 @@
           </a:ln>
         </p:spPr>
         <p:txBody>
-          <a:bodyPr numCol="1" spcCol="0" lIns="0" rIns="0" tIns="0" bIns="0" anchor="b">
+          <a:bodyPr lIns="0" tIns="0" rIns="0" bIns="0" numCol="1" spcCol="0" anchor="b">
             <a:noAutofit/>
           </a:bodyPr>
           <a:lstStyle>
@@ -697,14 +950,14 @@
               </a:lnSpc>
               <a:buNone/>
               <a:tabLst>
-                <a:tab algn="l" pos="0"/>
+                <a:tab pos="0" algn="l"/>
               </a:tabLst>
-              <a:defRPr b="0" lang="en-US" sz="1200" spc="-1" strike="noStrike">
+              <a:defRPr lang="en-US" sz="1200" b="0" strike="noStrike" spc="-1">
                 <a:solidFill>
                   <a:srgbClr val="000000"/>
                 </a:solidFill>
-                <a:latin typeface="Calibri"/>
-                <a:ea typeface="ＭＳ Ｐゴシック"/>
+                <a:latin typeface="Calibri" panose="020F0502020204030204"/>
+                <a:ea typeface="MS PGothic" panose="020B0600070205080204" charset="-128"/>
               </a:defRPr>
             </a:lvl1pPr>
           </a:lstStyle>
@@ -715,32 +968,34 @@
               </a:lnSpc>
               <a:buNone/>
               <a:tabLst>
-                <a:tab algn="l" pos="0"/>
+                <a:tab pos="0" algn="l"/>
               </a:tabLst>
             </a:pPr>
-            <a:fld id="{8CC99B75-6C98-4613-95A4-A630DE0C91BD}" type="slidenum">
-              <a:rPr b="0" lang="en-US" sz="1200" spc="-1" strike="noStrike">
+            <a:fld id="{4B561FAB-3F60-472F-BE96-6E85CBF84C7D}" type="slidenum">
+              <a:rPr lang="en-US" sz="1200" b="0" strike="noStrike" spc="-1">
                 <a:solidFill>
                   <a:srgbClr val="000000"/>
                 </a:solidFill>
-                <a:latin typeface="Calibri"/>
-                <a:ea typeface="ＭＳ Ｐゴシック"/>
+                <a:latin typeface="Calibri" panose="020F0502020204030204"/>
+                <a:ea typeface="MS PGothic" panose="020B0600070205080204" charset="-128"/>
               </a:rPr>
-              <a:t>&lt;number&gt;</a:t>
             </a:fld>
-            <a:endParaRPr b="0" lang="en-IN" sz="1200" spc="-1" strike="noStrike">
-              <a:latin typeface="Times New Roman"/>
+            <a:endParaRPr lang="en-IN" sz="1200" b="0" strike="noStrike" spc="-1">
+              <a:latin typeface="Times New Roman" panose="02020603050405020304"/>
             </a:endParaRPr>
           </a:p>
         </p:txBody>
       </p:sp>
     </p:spTree>
   </p:cSld>
+  <p:clrMapOvr>
+    <a:masterClrMapping/>
+  </p:clrMapOvr>
 </p:notes>
 </file>
 
 <file path=ppt/notesSlides/notesSlide5.xml><?xml version="1.0" encoding="utf-8"?>
-<p:notes xmlns:a="http://schemas.openxmlformats.org/drawingml/2006/main" xmlns:p="http://schemas.openxmlformats.org/presentationml/2006/main" xmlns:r="http://schemas.openxmlformats.org/officeDocument/2006/relationships" xmlns:p14="http://schemas.microsoft.com/office/powerpoint/2010/main" xmlns:p15="http://schemas.microsoft.com/office/powerpoint/2012/main" xmlns:mc="http://schemas.openxmlformats.org/markup-compatibility/2006">
+<p:notes xmlns:a="http://schemas.openxmlformats.org/drawingml/2006/main" xmlns:r="http://schemas.openxmlformats.org/officeDocument/2006/relationships" xmlns:p="http://schemas.openxmlformats.org/presentationml/2006/main">
   <p:cSld>
     <p:spTree>
       <p:nvGrpSpPr>
@@ -758,7 +1013,7 @@
       </p:grpSpPr>
       <p:sp>
         <p:nvSpPr>
-          <p:cNvPr id="147" name="PlaceHolder 1"/>
+          <p:cNvPr id="150" name="PlaceHolder 1"/>
           <p:cNvSpPr>
             <a:spLocks noGrp="1"/>
           </p:cNvSpPr>
@@ -781,7 +1036,7 @@
       </p:sp>
       <p:sp>
         <p:nvSpPr>
-          <p:cNvPr id="148" name="PlaceHolder 2"/>
+          <p:cNvPr id="151" name="PlaceHolder 2"/>
           <p:cNvSpPr>
             <a:spLocks noGrp="1"/>
           </p:cNvSpPr>
@@ -803,24 +1058,24 @@
           </a:ln>
         </p:spPr>
         <p:txBody>
-          <a:bodyPr numCol="1" spcCol="0" lIns="0" rIns="0" tIns="0" bIns="0" anchor="t">
+          <a:bodyPr lIns="0" tIns="0" rIns="0" bIns="0" numCol="1" spcCol="0" anchor="t">
             <a:noAutofit/>
           </a:bodyPr>
           <a:p>
-            <a:endParaRPr b="0" lang="en-IN" sz="2000" spc="-1" strike="noStrike">
-              <a:latin typeface="Arial"/>
-            </a:endParaRPr>
-          </a:p>
-        </p:txBody>
-      </p:sp>
-      <p:sp>
-        <p:nvSpPr>
-          <p:cNvPr id="149" name="PlaceHolder 3"/>
-          <p:cNvSpPr>
-            <a:spLocks noGrp="1"/>
-          </p:cNvSpPr>
-          <p:nvPr>
-            <p:ph type="sldNum" idx="25"/>
+            <a:endParaRPr lang="en-IN" sz="2000" b="0" strike="noStrike" spc="-1">
+              <a:latin typeface="Arial" panose="020B0604020202020204"/>
+            </a:endParaRPr>
+          </a:p>
+        </p:txBody>
+      </p:sp>
+      <p:sp>
+        <p:nvSpPr>
+          <p:cNvPr id="152" name="PlaceHolder 3"/>
+          <p:cNvSpPr>
+            <a:spLocks noGrp="1"/>
+          </p:cNvSpPr>
+          <p:nvPr>
+            <p:ph type="sldNum" idx="26"/>
           </p:nvPr>
         </p:nvSpPr>
         <p:spPr>
@@ -837,7 +1092,7 @@
           </a:ln>
         </p:spPr>
         <p:txBody>
-          <a:bodyPr numCol="1" spcCol="0" lIns="0" rIns="0" tIns="0" bIns="0" anchor="b">
+          <a:bodyPr lIns="0" tIns="0" rIns="0" bIns="0" numCol="1" spcCol="0" anchor="b">
             <a:noAutofit/>
           </a:bodyPr>
           <a:lstStyle>
@@ -847,14 +1102,14 @@
               </a:lnSpc>
               <a:buNone/>
               <a:tabLst>
-                <a:tab algn="l" pos="0"/>
+                <a:tab pos="0" algn="l"/>
               </a:tabLst>
-              <a:defRPr b="0" lang="en-US" sz="1200" spc="-1" strike="noStrike">
+              <a:defRPr lang="en-US" sz="1200" b="0" strike="noStrike" spc="-1">
                 <a:solidFill>
                   <a:srgbClr val="000000"/>
                 </a:solidFill>
-                <a:latin typeface="Calibri"/>
-                <a:ea typeface="ＭＳ Ｐゴシック"/>
+                <a:latin typeface="Calibri" panose="020F0502020204030204"/>
+                <a:ea typeface="MS PGothic" panose="020B0600070205080204" charset="-128"/>
               </a:defRPr>
             </a:lvl1pPr>
           </a:lstStyle>
@@ -865,32 +1120,34 @@
               </a:lnSpc>
               <a:buNone/>
               <a:tabLst>
-                <a:tab algn="l" pos="0"/>
+                <a:tab pos="0" algn="l"/>
               </a:tabLst>
             </a:pPr>
-            <a:fld id="{4B561FAB-3F60-472F-BE96-6E85CBF84C7D}" type="slidenum">
-              <a:rPr b="0" lang="en-US" sz="1200" spc="-1" strike="noStrike">
+            <a:fld id="{267E55A3-0822-4D0C-B4BC-7CC6E9F3389D}" type="slidenum">
+              <a:rPr lang="en-US" sz="1200" b="0" strike="noStrike" spc="-1">
                 <a:solidFill>
                   <a:srgbClr val="000000"/>
                 </a:solidFill>
-                <a:latin typeface="Calibri"/>
-                <a:ea typeface="ＭＳ Ｐゴシック"/>
+                <a:latin typeface="Calibri" panose="020F0502020204030204"/>
+                <a:ea typeface="MS PGothic" panose="020B0600070205080204" charset="-128"/>
               </a:rPr>
-              <a:t>&lt;number&gt;</a:t>
             </a:fld>
-            <a:endParaRPr b="0" lang="en-IN" sz="1200" spc="-1" strike="noStrike">
-              <a:latin typeface="Times New Roman"/>
+            <a:endParaRPr lang="en-IN" sz="1200" b="0" strike="noStrike" spc="-1">
+              <a:latin typeface="Times New Roman" panose="02020603050405020304"/>
             </a:endParaRPr>
           </a:p>
         </p:txBody>
       </p:sp>
     </p:spTree>
   </p:cSld>
+  <p:clrMapOvr>
+    <a:masterClrMapping/>
+  </p:clrMapOvr>
 </p:notes>
 </file>
 
 <file path=ppt/notesSlides/notesSlide6.xml><?xml version="1.0" encoding="utf-8"?>
-<p:notes xmlns:a="http://schemas.openxmlformats.org/drawingml/2006/main" xmlns:p="http://schemas.openxmlformats.org/presentationml/2006/main" xmlns:r="http://schemas.openxmlformats.org/officeDocument/2006/relationships" xmlns:p14="http://schemas.microsoft.com/office/powerpoint/2010/main" xmlns:p15="http://schemas.microsoft.com/office/powerpoint/2012/main" xmlns:mc="http://schemas.openxmlformats.org/markup-compatibility/2006">
+<p:notes xmlns:a="http://schemas.openxmlformats.org/drawingml/2006/main" xmlns:r="http://schemas.openxmlformats.org/officeDocument/2006/relationships" xmlns:p="http://schemas.openxmlformats.org/presentationml/2006/main">
   <p:cSld>
     <p:spTree>
       <p:nvGrpSpPr>
@@ -908,7 +1165,7 @@
       </p:grpSpPr>
       <p:sp>
         <p:nvSpPr>
-          <p:cNvPr id="150" name="PlaceHolder 1"/>
+          <p:cNvPr id="153" name="PlaceHolder 1"/>
           <p:cNvSpPr>
             <a:spLocks noGrp="1"/>
           </p:cNvSpPr>
@@ -931,7 +1188,7 @@
       </p:sp>
       <p:sp>
         <p:nvSpPr>
-          <p:cNvPr id="151" name="PlaceHolder 2"/>
+          <p:cNvPr id="154" name="PlaceHolder 2"/>
           <p:cNvSpPr>
             <a:spLocks noGrp="1"/>
           </p:cNvSpPr>
@@ -953,24 +1210,24 @@
           </a:ln>
         </p:spPr>
         <p:txBody>
-          <a:bodyPr numCol="1" spcCol="0" lIns="0" rIns="0" tIns="0" bIns="0" anchor="t">
+          <a:bodyPr lIns="0" tIns="0" rIns="0" bIns="0" numCol="1" spcCol="0" anchor="t">
             <a:noAutofit/>
           </a:bodyPr>
           <a:p>
-            <a:endParaRPr b="0" lang="en-IN" sz="2000" spc="-1" strike="noStrike">
-              <a:latin typeface="Arial"/>
-            </a:endParaRPr>
-          </a:p>
-        </p:txBody>
-      </p:sp>
-      <p:sp>
-        <p:nvSpPr>
-          <p:cNvPr id="152" name="PlaceHolder 3"/>
-          <p:cNvSpPr>
-            <a:spLocks noGrp="1"/>
-          </p:cNvSpPr>
-          <p:nvPr>
-            <p:ph type="sldNum" idx="26"/>
+            <a:endParaRPr lang="en-IN" sz="2000" b="0" strike="noStrike" spc="-1">
+              <a:latin typeface="Arial" panose="020B0604020202020204"/>
+            </a:endParaRPr>
+          </a:p>
+        </p:txBody>
+      </p:sp>
+      <p:sp>
+        <p:nvSpPr>
+          <p:cNvPr id="155" name="PlaceHolder 3"/>
+          <p:cNvSpPr>
+            <a:spLocks noGrp="1"/>
+          </p:cNvSpPr>
+          <p:nvPr>
+            <p:ph type="sldNum" idx="27"/>
           </p:nvPr>
         </p:nvSpPr>
         <p:spPr>
@@ -987,7 +1244,7 @@
           </a:ln>
         </p:spPr>
         <p:txBody>
-          <a:bodyPr numCol="1" spcCol="0" lIns="0" rIns="0" tIns="0" bIns="0" anchor="b">
+          <a:bodyPr lIns="0" tIns="0" rIns="0" bIns="0" numCol="1" spcCol="0" anchor="b">
             <a:noAutofit/>
           </a:bodyPr>
           <a:lstStyle>
@@ -997,14 +1254,14 @@
               </a:lnSpc>
               <a:buNone/>
               <a:tabLst>
-                <a:tab algn="l" pos="0"/>
+                <a:tab pos="0" algn="l"/>
               </a:tabLst>
-              <a:defRPr b="0" lang="en-US" sz="1200" spc="-1" strike="noStrike">
+              <a:defRPr lang="en-US" sz="1200" b="0" strike="noStrike" spc="-1">
                 <a:solidFill>
                   <a:srgbClr val="000000"/>
                 </a:solidFill>
-                <a:latin typeface="Calibri"/>
-                <a:ea typeface="ＭＳ Ｐゴシック"/>
+                <a:latin typeface="Calibri" panose="020F0502020204030204"/>
+                <a:ea typeface="MS PGothic" panose="020B0600070205080204" charset="-128"/>
               </a:defRPr>
             </a:lvl1pPr>
           </a:lstStyle>
@@ -1015,182 +1272,34 @@
               </a:lnSpc>
               <a:buNone/>
               <a:tabLst>
-                <a:tab algn="l" pos="0"/>
+                <a:tab pos="0" algn="l"/>
               </a:tabLst>
             </a:pPr>
-            <a:fld id="{267E55A3-0822-4D0C-B4BC-7CC6E9F3389D}" type="slidenum">
-              <a:rPr b="0" lang="en-US" sz="1200" spc="-1" strike="noStrike">
+            <a:fld id="{17DC6A1F-7929-4484-9330-67703A7FADF1}" type="slidenum">
+              <a:rPr lang="en-US" sz="1200" b="0" strike="noStrike" spc="-1">
                 <a:solidFill>
                   <a:srgbClr val="000000"/>
                 </a:solidFill>
-                <a:latin typeface="Calibri"/>
-                <a:ea typeface="ＭＳ Ｐゴシック"/>
+                <a:latin typeface="Calibri" panose="020F0502020204030204"/>
+                <a:ea typeface="MS PGothic" panose="020B0600070205080204" charset="-128"/>
               </a:rPr>
-              <a:t>&lt;number&gt;</a:t>
             </a:fld>
-            <a:endParaRPr b="0" lang="en-IN" sz="1200" spc="-1" strike="noStrike">
-              <a:latin typeface="Times New Roman"/>
+            <a:endParaRPr lang="en-IN" sz="1200" b="0" strike="noStrike" spc="-1">
+              <a:latin typeface="Times New Roman" panose="02020603050405020304"/>
             </a:endParaRPr>
           </a:p>
         </p:txBody>
       </p:sp>
     </p:spTree>
   </p:cSld>
-</p:notes>
-</file>
-
-<file path=ppt/notesSlides/notesSlide7.xml><?xml version="1.0" encoding="utf-8"?>
-<p:notes xmlns:a="http://schemas.openxmlformats.org/drawingml/2006/main" xmlns:p="http://schemas.openxmlformats.org/presentationml/2006/main" xmlns:r="http://schemas.openxmlformats.org/officeDocument/2006/relationships" xmlns:p14="http://schemas.microsoft.com/office/powerpoint/2010/main" xmlns:p15="http://schemas.microsoft.com/office/powerpoint/2012/main" xmlns:mc="http://schemas.openxmlformats.org/markup-compatibility/2006">
-  <p:cSld>
-    <p:spTree>
-      <p:nvGrpSpPr>
-        <p:cNvPr id="1" name=""/>
-        <p:cNvGrpSpPr/>
-        <p:nvPr/>
-      </p:nvGrpSpPr>
-      <p:grpSpPr>
-        <a:xfrm>
-          <a:off x="0" y="0"/>
-          <a:ext cx="0" cy="0"/>
-          <a:chOff x="0" y="0"/>
-          <a:chExt cx="0" cy="0"/>
-        </a:xfrm>
-      </p:grpSpPr>
-      <p:sp>
-        <p:nvSpPr>
-          <p:cNvPr id="153" name="PlaceHolder 1"/>
-          <p:cNvSpPr>
-            <a:spLocks noGrp="1"/>
-          </p:cNvSpPr>
-          <p:nvPr>
-            <p:ph type="sldImg"/>
-          </p:nvPr>
-        </p:nvSpPr>
-        <p:spPr>
-          <a:xfrm>
-            <a:off x="380880" y="685800"/>
-            <a:ext cx="6094800" cy="3427920"/>
-          </a:xfrm>
-          <a:prstGeom prst="rect">
-            <a:avLst/>
-          </a:prstGeom>
-          <a:ln w="0">
-            <a:noFill/>
-          </a:ln>
-        </p:spPr>
-      </p:sp>
-      <p:sp>
-        <p:nvSpPr>
-          <p:cNvPr id="154" name="PlaceHolder 2"/>
-          <p:cNvSpPr>
-            <a:spLocks noGrp="1"/>
-          </p:cNvSpPr>
-          <p:nvPr>
-            <p:ph type="body"/>
-          </p:nvPr>
-        </p:nvSpPr>
-        <p:spPr>
-          <a:xfrm>
-            <a:off x="685800" y="4343400"/>
-            <a:ext cx="5485320" cy="4113720"/>
-          </a:xfrm>
-          <a:prstGeom prst="rect">
-            <a:avLst/>
-          </a:prstGeom>
-          <a:noFill/>
-          <a:ln w="0">
-            <a:noFill/>
-          </a:ln>
-        </p:spPr>
-        <p:txBody>
-          <a:bodyPr numCol="1" spcCol="0" lIns="0" rIns="0" tIns="0" bIns="0" anchor="t">
-            <a:noAutofit/>
-          </a:bodyPr>
-          <a:p>
-            <a:endParaRPr b="0" lang="en-IN" sz="2000" spc="-1" strike="noStrike">
-              <a:latin typeface="Arial"/>
-            </a:endParaRPr>
-          </a:p>
-        </p:txBody>
-      </p:sp>
-      <p:sp>
-        <p:nvSpPr>
-          <p:cNvPr id="155" name="PlaceHolder 3"/>
-          <p:cNvSpPr>
-            <a:spLocks noGrp="1"/>
-          </p:cNvSpPr>
-          <p:nvPr>
-            <p:ph type="sldNum" idx="27"/>
-          </p:nvPr>
-        </p:nvSpPr>
-        <p:spPr>
-          <a:xfrm>
-            <a:off x="3884760" y="8685360"/>
-            <a:ext cx="2970720" cy="456120"/>
-          </a:xfrm>
-          <a:prstGeom prst="rect">
-            <a:avLst/>
-          </a:prstGeom>
-          <a:noFill/>
-          <a:ln w="0">
-            <a:noFill/>
-          </a:ln>
-        </p:spPr>
-        <p:txBody>
-          <a:bodyPr numCol="1" spcCol="0" lIns="0" rIns="0" tIns="0" bIns="0" anchor="b">
-            <a:noAutofit/>
-          </a:bodyPr>
-          <a:lstStyle>
-            <a:lvl1pPr algn="r">
-              <a:lnSpc>
-                <a:spcPct val="100000"/>
-              </a:lnSpc>
-              <a:buNone/>
-              <a:tabLst>
-                <a:tab algn="l" pos="0"/>
-              </a:tabLst>
-              <a:defRPr b="0" lang="en-US" sz="1200" spc="-1" strike="noStrike">
-                <a:solidFill>
-                  <a:srgbClr val="000000"/>
-                </a:solidFill>
-                <a:latin typeface="Calibri"/>
-                <a:ea typeface="ＭＳ Ｐゴシック"/>
-              </a:defRPr>
-            </a:lvl1pPr>
-          </a:lstStyle>
-          <a:p>
-            <a:pPr algn="r">
-              <a:lnSpc>
-                <a:spcPct val="100000"/>
-              </a:lnSpc>
-              <a:buNone/>
-              <a:tabLst>
-                <a:tab algn="l" pos="0"/>
-              </a:tabLst>
-            </a:pPr>
-            <a:fld id="{17DC6A1F-7929-4484-9330-67703A7FADF1}" type="slidenum">
-              <a:rPr b="0" lang="en-US" sz="1200" spc="-1" strike="noStrike">
-                <a:solidFill>
-                  <a:srgbClr val="000000"/>
-                </a:solidFill>
-                <a:latin typeface="Calibri"/>
-                <a:ea typeface="ＭＳ Ｐゴシック"/>
-              </a:rPr>
-              <a:t>&lt;number&gt;</a:t>
-            </a:fld>
-            <a:endParaRPr b="0" lang="en-IN" sz="1200" spc="-1" strike="noStrike">
-              <a:latin typeface="Times New Roman"/>
-            </a:endParaRPr>
-          </a:p>
-        </p:txBody>
-      </p:sp>
-    </p:spTree>
-  </p:cSld>
+  <p:clrMapOvr>
+    <a:masterClrMapping/>
+  </p:clrMapOvr>
 </p:notes>
 </file>
 
 <file path=ppt/slideLayouts/slideLayout1.xml><?xml version="1.0" encoding="utf-8"?>
-<p:sldLayout xmlns:a="http://schemas.openxmlformats.org/drawingml/2006/main" xmlns:p="http://schemas.openxmlformats.org/presentationml/2006/main" xmlns:r="http://schemas.openxmlformats.org/officeDocument/2006/relationships" xmlns:p14="http://schemas.microsoft.com/office/powerpoint/2010/main" xmlns:p15="http://schemas.microsoft.com/office/powerpoint/2012/main" xmlns:mc="http://schemas.openxmlformats.org/markup-compatibility/2006" type="blank" preserve="1">
+<p:sldLayout xmlns:a="http://schemas.openxmlformats.org/drawingml/2006/main" xmlns:r="http://schemas.openxmlformats.org/officeDocument/2006/relationships" xmlns:p="http://schemas.openxmlformats.org/presentationml/2006/main" type="blank" preserve="1">
   <p:cSld name="Blank Slide">
     <p:spTree>
       <p:nvGrpSpPr>
@@ -1241,8 +1350,9 @@
           <a:bodyPr/>
           <a:p>
             <a:fld id="{22C34302-17A9-4E36-9CEF-E67E70B1CFFA}" type="slidenum">
-              <a:t>&lt;#&gt;</a:t>
+              <a:rPr/>
             </a:fld>
+            <a:endParaRPr/>
           </a:p>
         </p:txBody>
       </p:sp>
@@ -1260,20 +1370,20 @@
         <p:txBody>
           <a:bodyPr/>
           <a:p>
-            <a:r>
-              <a:rPr lang="en-IN"/>
-              <a:t/>
-            </a:r>
+            <a:endParaRPr lang="en-IN"/>
           </a:p>
         </p:txBody>
       </p:sp>
     </p:spTree>
   </p:cSld>
+  <p:clrMapOvr>
+    <a:masterClrMapping/>
+  </p:clrMapOvr>
 </p:sldLayout>
 </file>
 
 <file path=ppt/slideLayouts/slideLayout10.xml><?xml version="1.0" encoding="utf-8"?>
-<p:sldLayout xmlns:a="http://schemas.openxmlformats.org/drawingml/2006/main" xmlns:p="http://schemas.openxmlformats.org/presentationml/2006/main" xmlns:r="http://schemas.openxmlformats.org/officeDocument/2006/relationships" xmlns:p14="http://schemas.microsoft.com/office/powerpoint/2010/main" xmlns:p15="http://schemas.microsoft.com/office/powerpoint/2012/main" xmlns:mc="http://schemas.openxmlformats.org/markup-compatibility/2006" type="objOverTx" preserve="1">
+<p:sldLayout xmlns:a="http://schemas.openxmlformats.org/drawingml/2006/main" xmlns:r="http://schemas.openxmlformats.org/officeDocument/2006/relationships" xmlns:p="http://schemas.openxmlformats.org/presentationml/2006/main" type="objOverTx" preserve="1">
   <p:cSld name="Title, Content over Content">
     <p:spTree>
       <p:nvGrpSpPr>
@@ -1313,15 +1423,15 @@
           </a:ln>
         </p:spPr>
         <p:txBody>
-          <a:bodyPr lIns="0" rIns="0" tIns="0" bIns="0" anchor="ctr">
+          <a:bodyPr lIns="0" tIns="0" rIns="0" bIns="0" anchor="ctr">
             <a:noAutofit/>
           </a:bodyPr>
           <a:p>
             <a:pPr algn="ctr">
               <a:buNone/>
             </a:pPr>
-            <a:endParaRPr b="0" lang="en-IN" sz="4400" spc="-1" strike="noStrike">
-              <a:latin typeface="Arial"/>
+            <a:endParaRPr lang="en-IN" sz="4400" b="0" strike="noStrike" spc="-1">
+              <a:latin typeface="Arial" panose="020B0604020202020204"/>
             </a:endParaRPr>
           </a:p>
         </p:txBody>
@@ -1350,12 +1460,12 @@
           </a:ln>
         </p:spPr>
         <p:txBody>
-          <a:bodyPr lIns="0" rIns="0" tIns="0" bIns="0" anchor="t">
+          <a:bodyPr lIns="0" tIns="0" rIns="0" bIns="0" anchor="t">
             <a:normAutofit/>
           </a:bodyPr>
           <a:p>
-            <a:endParaRPr b="0" lang="en-IN" sz="3200" spc="-1" strike="noStrike">
-              <a:latin typeface="Arial"/>
+            <a:endParaRPr lang="en-IN" sz="3200" b="0" strike="noStrike" spc="-1">
+              <a:latin typeface="Arial" panose="020B0604020202020204"/>
             </a:endParaRPr>
           </a:p>
         </p:txBody>
@@ -1384,12 +1494,12 @@
           </a:ln>
         </p:spPr>
         <p:txBody>
-          <a:bodyPr lIns="0" rIns="0" tIns="0" bIns="0" anchor="t">
+          <a:bodyPr lIns="0" tIns="0" rIns="0" bIns="0" anchor="t">
             <a:normAutofit/>
           </a:bodyPr>
           <a:p>
-            <a:endParaRPr b="0" lang="en-IN" sz="3200" spc="-1" strike="noStrike">
-              <a:latin typeface="Arial"/>
+            <a:endParaRPr lang="en-IN" sz="3200" b="0" strike="noStrike" spc="-1">
+              <a:latin typeface="Arial" panose="020B0604020202020204"/>
             </a:endParaRPr>
           </a:p>
         </p:txBody>
@@ -1429,8 +1539,9 @@
           <a:bodyPr/>
           <a:p>
             <a:fld id="{B7DF235F-9E31-4721-AF82-380EA50A32EF}" type="slidenum">
-              <a:t>&lt;#&gt;</a:t>
+              <a:rPr/>
             </a:fld>
+            <a:endParaRPr/>
           </a:p>
         </p:txBody>
       </p:sp>
@@ -1448,20 +1559,20 @@
         <p:txBody>
           <a:bodyPr/>
           <a:p>
-            <a:r>
-              <a:rPr lang="en-IN"/>
-              <a:t/>
-            </a:r>
+            <a:endParaRPr lang="en-IN"/>
           </a:p>
         </p:txBody>
       </p:sp>
     </p:spTree>
   </p:cSld>
+  <p:clrMapOvr>
+    <a:masterClrMapping/>
+  </p:clrMapOvr>
 </p:sldLayout>
 </file>
 
 <file path=ppt/slideLayouts/slideLayout11.xml><?xml version="1.0" encoding="utf-8"?>
-<p:sldLayout xmlns:a="http://schemas.openxmlformats.org/drawingml/2006/main" xmlns:p="http://schemas.openxmlformats.org/presentationml/2006/main" xmlns:r="http://schemas.openxmlformats.org/officeDocument/2006/relationships" xmlns:p14="http://schemas.microsoft.com/office/powerpoint/2010/main" xmlns:p15="http://schemas.microsoft.com/office/powerpoint/2012/main" xmlns:mc="http://schemas.openxmlformats.org/markup-compatibility/2006" type="fourObj" preserve="1">
+<p:sldLayout xmlns:a="http://schemas.openxmlformats.org/drawingml/2006/main" xmlns:r="http://schemas.openxmlformats.org/officeDocument/2006/relationships" xmlns:p="http://schemas.openxmlformats.org/presentationml/2006/main" type="fourObj" preserve="1">
   <p:cSld name="Title, 4 Content">
     <p:spTree>
       <p:nvGrpSpPr>
@@ -1501,15 +1612,15 @@
           </a:ln>
         </p:spPr>
         <p:txBody>
-          <a:bodyPr lIns="0" rIns="0" tIns="0" bIns="0" anchor="ctr">
+          <a:bodyPr lIns="0" tIns="0" rIns="0" bIns="0" anchor="ctr">
             <a:noAutofit/>
           </a:bodyPr>
           <a:p>
             <a:pPr algn="ctr">
               <a:buNone/>
             </a:pPr>
-            <a:endParaRPr b="0" lang="en-IN" sz="4400" spc="-1" strike="noStrike">
-              <a:latin typeface="Arial"/>
+            <a:endParaRPr lang="en-IN" sz="4400" b="0" strike="noStrike" spc="-1">
+              <a:latin typeface="Arial" panose="020B0604020202020204"/>
             </a:endParaRPr>
           </a:p>
         </p:txBody>
@@ -1538,12 +1649,12 @@
           </a:ln>
         </p:spPr>
         <p:txBody>
-          <a:bodyPr lIns="0" rIns="0" tIns="0" bIns="0" anchor="t">
+          <a:bodyPr lIns="0" tIns="0" rIns="0" bIns="0" anchor="t">
             <a:normAutofit/>
           </a:bodyPr>
           <a:p>
-            <a:endParaRPr b="0" lang="en-IN" sz="3200" spc="-1" strike="noStrike">
-              <a:latin typeface="Arial"/>
+            <a:endParaRPr lang="en-IN" sz="3200" b="0" strike="noStrike" spc="-1">
+              <a:latin typeface="Arial" panose="020B0604020202020204"/>
             </a:endParaRPr>
           </a:p>
         </p:txBody>
@@ -1572,12 +1683,12 @@
           </a:ln>
         </p:spPr>
         <p:txBody>
-          <a:bodyPr lIns="0" rIns="0" tIns="0" bIns="0" anchor="t">
+          <a:bodyPr lIns="0" tIns="0" rIns="0" bIns="0" anchor="t">
             <a:normAutofit/>
           </a:bodyPr>
           <a:p>
-            <a:endParaRPr b="0" lang="en-IN" sz="3200" spc="-1" strike="noStrike">
-              <a:latin typeface="Arial"/>
+            <a:endParaRPr lang="en-IN" sz="3200" b="0" strike="noStrike" spc="-1">
+              <a:latin typeface="Arial" panose="020B0604020202020204"/>
             </a:endParaRPr>
           </a:p>
         </p:txBody>
@@ -1606,12 +1717,12 @@
           </a:ln>
         </p:spPr>
         <p:txBody>
-          <a:bodyPr lIns="0" rIns="0" tIns="0" bIns="0" anchor="t">
+          <a:bodyPr lIns="0" tIns="0" rIns="0" bIns="0" anchor="t">
             <a:normAutofit/>
           </a:bodyPr>
           <a:p>
-            <a:endParaRPr b="0" lang="en-IN" sz="3200" spc="-1" strike="noStrike">
-              <a:latin typeface="Arial"/>
+            <a:endParaRPr lang="en-IN" sz="3200" b="0" strike="noStrike" spc="-1">
+              <a:latin typeface="Arial" panose="020B0604020202020204"/>
             </a:endParaRPr>
           </a:p>
         </p:txBody>
@@ -1640,12 +1751,12 @@
           </a:ln>
         </p:spPr>
         <p:txBody>
-          <a:bodyPr lIns="0" rIns="0" tIns="0" bIns="0" anchor="t">
+          <a:bodyPr lIns="0" tIns="0" rIns="0" bIns="0" anchor="t">
             <a:normAutofit/>
           </a:bodyPr>
           <a:p>
-            <a:endParaRPr b="0" lang="en-IN" sz="3200" spc="-1" strike="noStrike">
-              <a:latin typeface="Arial"/>
+            <a:endParaRPr lang="en-IN" sz="3200" b="0" strike="noStrike" spc="-1">
+              <a:latin typeface="Arial" panose="020B0604020202020204"/>
             </a:endParaRPr>
           </a:p>
         </p:txBody>
@@ -1685,8 +1796,9 @@
           <a:bodyPr/>
           <a:p>
             <a:fld id="{C70F871E-100D-410B-8A63-4702E0C9C6FD}" type="slidenum">
-              <a:t>&lt;#&gt;</a:t>
+              <a:rPr/>
             </a:fld>
+            <a:endParaRPr/>
           </a:p>
         </p:txBody>
       </p:sp>
@@ -1704,20 +1816,20 @@
         <p:txBody>
           <a:bodyPr/>
           <a:p>
-            <a:r>
-              <a:rPr lang="en-IN"/>
-              <a:t/>
-            </a:r>
+            <a:endParaRPr lang="en-IN"/>
           </a:p>
         </p:txBody>
       </p:sp>
     </p:spTree>
   </p:cSld>
+  <p:clrMapOvr>
+    <a:masterClrMapping/>
+  </p:clrMapOvr>
 </p:sldLayout>
 </file>
 
 <file path=ppt/slideLayouts/slideLayout12.xml><?xml version="1.0" encoding="utf-8"?>
-<p:sldLayout xmlns:a="http://schemas.openxmlformats.org/drawingml/2006/main" xmlns:p="http://schemas.openxmlformats.org/presentationml/2006/main" xmlns:r="http://schemas.openxmlformats.org/officeDocument/2006/relationships" xmlns:p14="http://schemas.microsoft.com/office/powerpoint/2010/main" xmlns:p15="http://schemas.microsoft.com/office/powerpoint/2012/main" xmlns:mc="http://schemas.openxmlformats.org/markup-compatibility/2006" type="blank" preserve="1">
+<p:sldLayout xmlns:a="http://schemas.openxmlformats.org/drawingml/2006/main" xmlns:r="http://schemas.openxmlformats.org/officeDocument/2006/relationships" xmlns:p="http://schemas.openxmlformats.org/presentationml/2006/main" type="blank" preserve="1">
   <p:cSld name="Title, 6 Content">
     <p:spTree>
       <p:nvGrpSpPr>
@@ -1757,15 +1869,15 @@
           </a:ln>
         </p:spPr>
         <p:txBody>
-          <a:bodyPr lIns="0" rIns="0" tIns="0" bIns="0" anchor="ctr">
+          <a:bodyPr lIns="0" tIns="0" rIns="0" bIns="0" anchor="ctr">
             <a:noAutofit/>
           </a:bodyPr>
           <a:p>
             <a:pPr algn="ctr">
               <a:buNone/>
             </a:pPr>
-            <a:endParaRPr b="0" lang="en-IN" sz="4400" spc="-1" strike="noStrike">
-              <a:latin typeface="Arial"/>
+            <a:endParaRPr lang="en-IN" sz="4400" b="0" strike="noStrike" spc="-1">
+              <a:latin typeface="Arial" panose="020B0604020202020204"/>
             </a:endParaRPr>
           </a:p>
         </p:txBody>
@@ -1794,12 +1906,12 @@
           </a:ln>
         </p:spPr>
         <p:txBody>
-          <a:bodyPr lIns="0" rIns="0" tIns="0" bIns="0" anchor="t">
+          <a:bodyPr lIns="0" tIns="0" rIns="0" bIns="0" anchor="t">
             <a:normAutofit/>
           </a:bodyPr>
           <a:p>
-            <a:endParaRPr b="0" lang="en-IN" sz="3200" spc="-1" strike="noStrike">
-              <a:latin typeface="Arial"/>
+            <a:endParaRPr lang="en-IN" sz="3200" b="0" strike="noStrike" spc="-1">
+              <a:latin typeface="Arial" panose="020B0604020202020204"/>
             </a:endParaRPr>
           </a:p>
         </p:txBody>
@@ -1828,12 +1940,12 @@
           </a:ln>
         </p:spPr>
         <p:txBody>
-          <a:bodyPr lIns="0" rIns="0" tIns="0" bIns="0" anchor="t">
+          <a:bodyPr lIns="0" tIns="0" rIns="0" bIns="0" anchor="t">
             <a:normAutofit/>
           </a:bodyPr>
           <a:p>
-            <a:endParaRPr b="0" lang="en-IN" sz="3200" spc="-1" strike="noStrike">
-              <a:latin typeface="Arial"/>
+            <a:endParaRPr lang="en-IN" sz="3200" b="0" strike="noStrike" spc="-1">
+              <a:latin typeface="Arial" panose="020B0604020202020204"/>
             </a:endParaRPr>
           </a:p>
         </p:txBody>
@@ -1862,12 +1974,12 @@
           </a:ln>
         </p:spPr>
         <p:txBody>
-          <a:bodyPr lIns="0" rIns="0" tIns="0" bIns="0" anchor="t">
+          <a:bodyPr lIns="0" tIns="0" rIns="0" bIns="0" anchor="t">
             <a:normAutofit/>
           </a:bodyPr>
           <a:p>
-            <a:endParaRPr b="0" lang="en-IN" sz="3200" spc="-1" strike="noStrike">
-              <a:latin typeface="Arial"/>
+            <a:endParaRPr lang="en-IN" sz="3200" b="0" strike="noStrike" spc="-1">
+              <a:latin typeface="Arial" panose="020B0604020202020204"/>
             </a:endParaRPr>
           </a:p>
         </p:txBody>
@@ -1896,12 +2008,12 @@
           </a:ln>
         </p:spPr>
         <p:txBody>
-          <a:bodyPr lIns="0" rIns="0" tIns="0" bIns="0" anchor="t">
+          <a:bodyPr lIns="0" tIns="0" rIns="0" bIns="0" anchor="t">
             <a:normAutofit/>
           </a:bodyPr>
           <a:p>
-            <a:endParaRPr b="0" lang="en-IN" sz="3200" spc="-1" strike="noStrike">
-              <a:latin typeface="Arial"/>
+            <a:endParaRPr lang="en-IN" sz="3200" b="0" strike="noStrike" spc="-1">
+              <a:latin typeface="Arial" panose="020B0604020202020204"/>
             </a:endParaRPr>
           </a:p>
         </p:txBody>
@@ -1930,12 +2042,12 @@
           </a:ln>
         </p:spPr>
         <p:txBody>
-          <a:bodyPr lIns="0" rIns="0" tIns="0" bIns="0" anchor="t">
+          <a:bodyPr lIns="0" tIns="0" rIns="0" bIns="0" anchor="t">
             <a:normAutofit/>
           </a:bodyPr>
           <a:p>
-            <a:endParaRPr b="0" lang="en-IN" sz="3200" spc="-1" strike="noStrike">
-              <a:latin typeface="Arial"/>
+            <a:endParaRPr lang="en-IN" sz="3200" b="0" strike="noStrike" spc="-1">
+              <a:latin typeface="Arial" panose="020B0604020202020204"/>
             </a:endParaRPr>
           </a:p>
         </p:txBody>
@@ -1964,12 +2076,12 @@
           </a:ln>
         </p:spPr>
         <p:txBody>
-          <a:bodyPr lIns="0" rIns="0" tIns="0" bIns="0" anchor="t">
+          <a:bodyPr lIns="0" tIns="0" rIns="0" bIns="0" anchor="t">
             <a:normAutofit/>
           </a:bodyPr>
           <a:p>
-            <a:endParaRPr b="0" lang="en-IN" sz="3200" spc="-1" strike="noStrike">
-              <a:latin typeface="Arial"/>
+            <a:endParaRPr lang="en-IN" sz="3200" b="0" strike="noStrike" spc="-1">
+              <a:latin typeface="Arial" panose="020B0604020202020204"/>
             </a:endParaRPr>
           </a:p>
         </p:txBody>
@@ -2009,8 +2121,9 @@
           <a:bodyPr/>
           <a:p>
             <a:fld id="{17F705E9-0577-4474-8CD2-6319FE07C2D4}" type="slidenum">
-              <a:t>&lt;#&gt;</a:t>
+              <a:rPr/>
             </a:fld>
+            <a:endParaRPr/>
           </a:p>
         </p:txBody>
       </p:sp>
@@ -2028,20 +2141,20 @@
         <p:txBody>
           <a:bodyPr/>
           <a:p>
-            <a:r>
-              <a:rPr lang="en-IN"/>
-              <a:t/>
-            </a:r>
+            <a:endParaRPr lang="en-IN"/>
           </a:p>
         </p:txBody>
       </p:sp>
     </p:spTree>
   </p:cSld>
+  <p:clrMapOvr>
+    <a:masterClrMapping/>
+  </p:clrMapOvr>
 </p:sldLayout>
 </file>
 
 <file path=ppt/slideLayouts/slideLayout13.xml><?xml version="1.0" encoding="utf-8"?>
-<p:sldLayout xmlns:a="http://schemas.openxmlformats.org/drawingml/2006/main" xmlns:p="http://schemas.openxmlformats.org/presentationml/2006/main" xmlns:r="http://schemas.openxmlformats.org/officeDocument/2006/relationships" xmlns:p14="http://schemas.microsoft.com/office/powerpoint/2010/main" xmlns:p15="http://schemas.microsoft.com/office/powerpoint/2012/main" xmlns:mc="http://schemas.openxmlformats.org/markup-compatibility/2006" type="blank" preserve="1">
+<p:sldLayout xmlns:a="http://schemas.openxmlformats.org/drawingml/2006/main" xmlns:r="http://schemas.openxmlformats.org/officeDocument/2006/relationships" xmlns:p="http://schemas.openxmlformats.org/presentationml/2006/main" type="blank" preserve="1">
   <p:cSld name="Blank Slide">
     <p:spTree>
       <p:nvGrpSpPr>
@@ -2092,8 +2205,9 @@
           <a:bodyPr/>
           <a:p>
             <a:fld id="{A169EF6E-70DC-4EF8-9159-DE0428DCF5B4}" type="slidenum">
-              <a:t>&lt;#&gt;</a:t>
+              <a:rPr/>
             </a:fld>
+            <a:endParaRPr/>
           </a:p>
         </p:txBody>
       </p:sp>
@@ -2111,20 +2225,20 @@
         <p:txBody>
           <a:bodyPr/>
           <a:p>
-            <a:r>
-              <a:rPr lang="en-IN"/>
-              <a:t/>
-            </a:r>
+            <a:endParaRPr lang="en-IN"/>
           </a:p>
         </p:txBody>
       </p:sp>
     </p:spTree>
   </p:cSld>
+  <p:clrMapOvr>
+    <a:masterClrMapping/>
+  </p:clrMapOvr>
 </p:sldLayout>
 </file>
 
 <file path=ppt/slideLayouts/slideLayout14.xml><?xml version="1.0" encoding="utf-8"?>
-<p:sldLayout xmlns:a="http://schemas.openxmlformats.org/drawingml/2006/main" xmlns:p="http://schemas.openxmlformats.org/presentationml/2006/main" xmlns:r="http://schemas.openxmlformats.org/officeDocument/2006/relationships" xmlns:p14="http://schemas.microsoft.com/office/powerpoint/2010/main" xmlns:p15="http://schemas.microsoft.com/office/powerpoint/2012/main" xmlns:mc="http://schemas.openxmlformats.org/markup-compatibility/2006" type="tx" preserve="1">
+<p:sldLayout xmlns:a="http://schemas.openxmlformats.org/drawingml/2006/main" xmlns:r="http://schemas.openxmlformats.org/officeDocument/2006/relationships" xmlns:p="http://schemas.openxmlformats.org/presentationml/2006/main" type="tx" preserve="1">
   <p:cSld name="Title Slide">
     <p:spTree>
       <p:nvGrpSpPr>
@@ -2164,15 +2278,15 @@
           </a:ln>
         </p:spPr>
         <p:txBody>
-          <a:bodyPr lIns="0" rIns="0" tIns="0" bIns="0" anchor="ctr">
+          <a:bodyPr lIns="0" tIns="0" rIns="0" bIns="0" anchor="ctr">
             <a:noAutofit/>
           </a:bodyPr>
           <a:p>
             <a:pPr algn="ctr">
               <a:buNone/>
             </a:pPr>
-            <a:endParaRPr b="0" lang="en-IN" sz="4400" spc="-1" strike="noStrike">
-              <a:latin typeface="Arial"/>
+            <a:endParaRPr lang="en-IN" sz="4400" b="0" strike="noStrike" spc="-1">
+              <a:latin typeface="Arial" panose="020B0604020202020204"/>
             </a:endParaRPr>
           </a:p>
         </p:txBody>
@@ -2201,15 +2315,15 @@
           </a:ln>
         </p:spPr>
         <p:txBody>
-          <a:bodyPr lIns="0" rIns="0" tIns="0" bIns="0" anchor="ctr">
+          <a:bodyPr lIns="0" tIns="0" rIns="0" bIns="0" anchor="ctr">
             <a:noAutofit/>
           </a:bodyPr>
           <a:p>
             <a:pPr algn="ctr">
               <a:buNone/>
             </a:pPr>
-            <a:endParaRPr b="0" lang="en-IN" sz="3200" spc="-1" strike="noStrike">
-              <a:latin typeface="Arial"/>
+            <a:endParaRPr lang="en-IN" sz="3200" b="0" strike="noStrike" spc="-1">
+              <a:latin typeface="Arial" panose="020B0604020202020204"/>
             </a:endParaRPr>
           </a:p>
         </p:txBody>
@@ -2249,8 +2363,9 @@
           <a:bodyPr/>
           <a:p>
             <a:fld id="{D0C06266-91ED-42C6-B0FB-0703F9FF5056}" type="slidenum">
-              <a:t>&lt;#&gt;</a:t>
+              <a:rPr/>
             </a:fld>
+            <a:endParaRPr/>
           </a:p>
         </p:txBody>
       </p:sp>
@@ -2268,20 +2383,20 @@
         <p:txBody>
           <a:bodyPr/>
           <a:p>
-            <a:r>
-              <a:rPr lang="en-IN"/>
-              <a:t/>
-            </a:r>
+            <a:endParaRPr lang="en-IN"/>
           </a:p>
         </p:txBody>
       </p:sp>
     </p:spTree>
   </p:cSld>
+  <p:clrMapOvr>
+    <a:masterClrMapping/>
+  </p:clrMapOvr>
 </p:sldLayout>
 </file>
 
 <file path=ppt/slideLayouts/slideLayout15.xml><?xml version="1.0" encoding="utf-8"?>
-<p:sldLayout xmlns:a="http://schemas.openxmlformats.org/drawingml/2006/main" xmlns:p="http://schemas.openxmlformats.org/presentationml/2006/main" xmlns:r="http://schemas.openxmlformats.org/officeDocument/2006/relationships" xmlns:p14="http://schemas.microsoft.com/office/powerpoint/2010/main" xmlns:p15="http://schemas.microsoft.com/office/powerpoint/2012/main" xmlns:mc="http://schemas.openxmlformats.org/markup-compatibility/2006" type="obj" preserve="1">
+<p:sldLayout xmlns:a="http://schemas.openxmlformats.org/drawingml/2006/main" xmlns:r="http://schemas.openxmlformats.org/officeDocument/2006/relationships" xmlns:p="http://schemas.openxmlformats.org/presentationml/2006/main" type="obj" preserve="1">
   <p:cSld name="Title, Content">
     <p:spTree>
       <p:nvGrpSpPr>
@@ -2321,15 +2436,15 @@
           </a:ln>
         </p:spPr>
         <p:txBody>
-          <a:bodyPr lIns="0" rIns="0" tIns="0" bIns="0" anchor="ctr">
+          <a:bodyPr lIns="0" tIns="0" rIns="0" bIns="0" anchor="ctr">
             <a:noAutofit/>
           </a:bodyPr>
           <a:p>
             <a:pPr algn="ctr">
               <a:buNone/>
             </a:pPr>
-            <a:endParaRPr b="0" lang="en-IN" sz="4400" spc="-1" strike="noStrike">
-              <a:latin typeface="Arial"/>
+            <a:endParaRPr lang="en-IN" sz="4400" b="0" strike="noStrike" spc="-1">
+              <a:latin typeface="Arial" panose="020B0604020202020204"/>
             </a:endParaRPr>
           </a:p>
         </p:txBody>
@@ -2358,12 +2473,12 @@
           </a:ln>
         </p:spPr>
         <p:txBody>
-          <a:bodyPr lIns="0" rIns="0" tIns="0" bIns="0" anchor="t">
+          <a:bodyPr lIns="0" tIns="0" rIns="0" bIns="0" anchor="t">
             <a:normAutofit/>
           </a:bodyPr>
           <a:p>
-            <a:endParaRPr b="0" lang="en-IN" sz="3200" spc="-1" strike="noStrike">
-              <a:latin typeface="Arial"/>
+            <a:endParaRPr lang="en-IN" sz="3200" b="0" strike="noStrike" spc="-1">
+              <a:latin typeface="Arial" panose="020B0604020202020204"/>
             </a:endParaRPr>
           </a:p>
         </p:txBody>
@@ -2403,8 +2518,9 @@
           <a:bodyPr/>
           <a:p>
             <a:fld id="{89106F82-924C-472C-8FE8-9295A1D58FCE}" type="slidenum">
-              <a:t>&lt;#&gt;</a:t>
+              <a:rPr/>
             </a:fld>
+            <a:endParaRPr/>
           </a:p>
         </p:txBody>
       </p:sp>
@@ -2422,20 +2538,20 @@
         <p:txBody>
           <a:bodyPr/>
           <a:p>
-            <a:r>
-              <a:rPr lang="en-IN"/>
-              <a:t/>
-            </a:r>
+            <a:endParaRPr lang="en-IN"/>
           </a:p>
         </p:txBody>
       </p:sp>
     </p:spTree>
   </p:cSld>
+  <p:clrMapOvr>
+    <a:masterClrMapping/>
+  </p:clrMapOvr>
 </p:sldLayout>
 </file>
 
 <file path=ppt/slideLayouts/slideLayout16.xml><?xml version="1.0" encoding="utf-8"?>
-<p:sldLayout xmlns:a="http://schemas.openxmlformats.org/drawingml/2006/main" xmlns:p="http://schemas.openxmlformats.org/presentationml/2006/main" xmlns:r="http://schemas.openxmlformats.org/officeDocument/2006/relationships" xmlns:p14="http://schemas.microsoft.com/office/powerpoint/2010/main" xmlns:p15="http://schemas.microsoft.com/office/powerpoint/2012/main" xmlns:mc="http://schemas.openxmlformats.org/markup-compatibility/2006" type="twoObj" preserve="1">
+<p:sldLayout xmlns:a="http://schemas.openxmlformats.org/drawingml/2006/main" xmlns:r="http://schemas.openxmlformats.org/officeDocument/2006/relationships" xmlns:p="http://schemas.openxmlformats.org/presentationml/2006/main" type="twoObj" preserve="1">
   <p:cSld name="Title, 2 Content">
     <p:spTree>
       <p:nvGrpSpPr>
@@ -2475,15 +2591,15 @@
           </a:ln>
         </p:spPr>
         <p:txBody>
-          <a:bodyPr lIns="0" rIns="0" tIns="0" bIns="0" anchor="ctr">
+          <a:bodyPr lIns="0" tIns="0" rIns="0" bIns="0" anchor="ctr">
             <a:noAutofit/>
           </a:bodyPr>
           <a:p>
             <a:pPr algn="ctr">
               <a:buNone/>
             </a:pPr>
-            <a:endParaRPr b="0" lang="en-IN" sz="4400" spc="-1" strike="noStrike">
-              <a:latin typeface="Arial"/>
+            <a:endParaRPr lang="en-IN" sz="4400" b="0" strike="noStrike" spc="-1">
+              <a:latin typeface="Arial" panose="020B0604020202020204"/>
             </a:endParaRPr>
           </a:p>
         </p:txBody>
@@ -2512,12 +2628,12 @@
           </a:ln>
         </p:spPr>
         <p:txBody>
-          <a:bodyPr lIns="0" rIns="0" tIns="0" bIns="0" anchor="t">
+          <a:bodyPr lIns="0" tIns="0" rIns="0" bIns="0" anchor="t">
             <a:normAutofit/>
           </a:bodyPr>
           <a:p>
-            <a:endParaRPr b="0" lang="en-IN" sz="3200" spc="-1" strike="noStrike">
-              <a:latin typeface="Arial"/>
+            <a:endParaRPr lang="en-IN" sz="3200" b="0" strike="noStrike" spc="-1">
+              <a:latin typeface="Arial" panose="020B0604020202020204"/>
             </a:endParaRPr>
           </a:p>
         </p:txBody>
@@ -2546,12 +2662,12 @@
           </a:ln>
         </p:spPr>
         <p:txBody>
-          <a:bodyPr lIns="0" rIns="0" tIns="0" bIns="0" anchor="t">
+          <a:bodyPr lIns="0" tIns="0" rIns="0" bIns="0" anchor="t">
             <a:normAutofit/>
           </a:bodyPr>
           <a:p>
-            <a:endParaRPr b="0" lang="en-IN" sz="3200" spc="-1" strike="noStrike">
-              <a:latin typeface="Arial"/>
+            <a:endParaRPr lang="en-IN" sz="3200" b="0" strike="noStrike" spc="-1">
+              <a:latin typeface="Arial" panose="020B0604020202020204"/>
             </a:endParaRPr>
           </a:p>
         </p:txBody>
@@ -2591,8 +2707,9 @@
           <a:bodyPr/>
           <a:p>
             <a:fld id="{9565E24A-B90A-461E-95AD-0B78A8A97E56}" type="slidenum">
-              <a:t>&lt;#&gt;</a:t>
+              <a:rPr/>
             </a:fld>
+            <a:endParaRPr/>
           </a:p>
         </p:txBody>
       </p:sp>
@@ -2610,20 +2727,20 @@
         <p:txBody>
           <a:bodyPr/>
           <a:p>
-            <a:r>
-              <a:rPr lang="en-IN"/>
-              <a:t/>
-            </a:r>
+            <a:endParaRPr lang="en-IN"/>
           </a:p>
         </p:txBody>
       </p:sp>
     </p:spTree>
   </p:cSld>
+  <p:clrMapOvr>
+    <a:masterClrMapping/>
+  </p:clrMapOvr>
 </p:sldLayout>
 </file>
 
 <file path=ppt/slideLayouts/slideLayout17.xml><?xml version="1.0" encoding="utf-8"?>
-<p:sldLayout xmlns:a="http://schemas.openxmlformats.org/drawingml/2006/main" xmlns:p="http://schemas.openxmlformats.org/presentationml/2006/main" xmlns:r="http://schemas.openxmlformats.org/officeDocument/2006/relationships" xmlns:p14="http://schemas.microsoft.com/office/powerpoint/2010/main" xmlns:p15="http://schemas.microsoft.com/office/powerpoint/2012/main" xmlns:mc="http://schemas.openxmlformats.org/markup-compatibility/2006" type="titleOnly" preserve="1">
+<p:sldLayout xmlns:a="http://schemas.openxmlformats.org/drawingml/2006/main" xmlns:r="http://schemas.openxmlformats.org/officeDocument/2006/relationships" xmlns:p="http://schemas.openxmlformats.org/presentationml/2006/main" type="titleOnly" preserve="1">
   <p:cSld name="Title Only">
     <p:spTree>
       <p:nvGrpSpPr>
@@ -2663,15 +2780,15 @@
           </a:ln>
         </p:spPr>
         <p:txBody>
-          <a:bodyPr lIns="0" rIns="0" tIns="0" bIns="0" anchor="ctr">
+          <a:bodyPr lIns="0" tIns="0" rIns="0" bIns="0" anchor="ctr">
             <a:noAutofit/>
           </a:bodyPr>
           <a:p>
             <a:pPr algn="ctr">
               <a:buNone/>
             </a:pPr>
-            <a:endParaRPr b="0" lang="en-IN" sz="4400" spc="-1" strike="noStrike">
-              <a:latin typeface="Arial"/>
+            <a:endParaRPr lang="en-IN" sz="4400" b="0" strike="noStrike" spc="-1">
+              <a:latin typeface="Arial" panose="020B0604020202020204"/>
             </a:endParaRPr>
           </a:p>
         </p:txBody>
@@ -2711,8 +2828,9 @@
           <a:bodyPr/>
           <a:p>
             <a:fld id="{6FEB2857-E0C9-4A76-92A2-2A1DF4045005}" type="slidenum">
-              <a:t>&lt;#&gt;</a:t>
+              <a:rPr/>
             </a:fld>
+            <a:endParaRPr/>
           </a:p>
         </p:txBody>
       </p:sp>
@@ -2730,20 +2848,20 @@
         <p:txBody>
           <a:bodyPr/>
           <a:p>
-            <a:r>
-              <a:rPr lang="en-IN"/>
-              <a:t/>
-            </a:r>
+            <a:endParaRPr lang="en-IN"/>
           </a:p>
         </p:txBody>
       </p:sp>
     </p:spTree>
   </p:cSld>
+  <p:clrMapOvr>
+    <a:masterClrMapping/>
+  </p:clrMapOvr>
 </p:sldLayout>
 </file>
 
 <file path=ppt/slideLayouts/slideLayout18.xml><?xml version="1.0" encoding="utf-8"?>
-<p:sldLayout xmlns:a="http://schemas.openxmlformats.org/drawingml/2006/main" xmlns:p="http://schemas.openxmlformats.org/presentationml/2006/main" xmlns:r="http://schemas.openxmlformats.org/officeDocument/2006/relationships" xmlns:p14="http://schemas.microsoft.com/office/powerpoint/2010/main" xmlns:p15="http://schemas.microsoft.com/office/powerpoint/2012/main" xmlns:mc="http://schemas.openxmlformats.org/markup-compatibility/2006" type="objOnly" preserve="1">
+<p:sldLayout xmlns:a="http://schemas.openxmlformats.org/drawingml/2006/main" xmlns:r="http://schemas.openxmlformats.org/officeDocument/2006/relationships" xmlns:p="http://schemas.openxmlformats.org/presentationml/2006/main" type="objOnly" preserve="1">
   <p:cSld name="Centered Text">
     <p:spTree>
       <p:nvGrpSpPr>
@@ -2783,15 +2901,15 @@
           </a:ln>
         </p:spPr>
         <p:txBody>
-          <a:bodyPr lIns="0" rIns="0" tIns="0" bIns="0" anchor="ctr">
+          <a:bodyPr lIns="0" tIns="0" rIns="0" bIns="0" anchor="ctr">
             <a:noAutofit/>
           </a:bodyPr>
           <a:p>
             <a:pPr algn="ctr">
               <a:buNone/>
             </a:pPr>
-            <a:endParaRPr b="0" lang="en-IN" sz="3200" spc="-1" strike="noStrike">
-              <a:latin typeface="Arial"/>
+            <a:endParaRPr lang="en-IN" sz="3200" b="0" strike="noStrike" spc="-1">
+              <a:latin typeface="Arial" panose="020B0604020202020204"/>
             </a:endParaRPr>
           </a:p>
         </p:txBody>
@@ -2831,8 +2949,9 @@
           <a:bodyPr/>
           <a:p>
             <a:fld id="{5E1DC8DE-FBAA-4CC1-842C-B06D054242F5}" type="slidenum">
-              <a:t>&lt;#&gt;</a:t>
+              <a:rPr/>
             </a:fld>
+            <a:endParaRPr/>
           </a:p>
         </p:txBody>
       </p:sp>
@@ -2850,20 +2969,20 @@
         <p:txBody>
           <a:bodyPr/>
           <a:p>
-            <a:r>
-              <a:rPr lang="en-IN"/>
-              <a:t/>
-            </a:r>
+            <a:endParaRPr lang="en-IN"/>
           </a:p>
         </p:txBody>
       </p:sp>
     </p:spTree>
   </p:cSld>
+  <p:clrMapOvr>
+    <a:masterClrMapping/>
+  </p:clrMapOvr>
 </p:sldLayout>
 </file>
 
 <file path=ppt/slideLayouts/slideLayout19.xml><?xml version="1.0" encoding="utf-8"?>
-<p:sldLayout xmlns:a="http://schemas.openxmlformats.org/drawingml/2006/main" xmlns:p="http://schemas.openxmlformats.org/presentationml/2006/main" xmlns:r="http://schemas.openxmlformats.org/officeDocument/2006/relationships" xmlns:p14="http://schemas.microsoft.com/office/powerpoint/2010/main" xmlns:p15="http://schemas.microsoft.com/office/powerpoint/2012/main" xmlns:mc="http://schemas.openxmlformats.org/markup-compatibility/2006" type="twoObjAndObj" preserve="1">
+<p:sldLayout xmlns:a="http://schemas.openxmlformats.org/drawingml/2006/main" xmlns:r="http://schemas.openxmlformats.org/officeDocument/2006/relationships" xmlns:p="http://schemas.openxmlformats.org/presentationml/2006/main" type="twoObjAndObj" preserve="1">
   <p:cSld name="Title, 2 Content and Content">
     <p:spTree>
       <p:nvGrpSpPr>
@@ -2903,15 +3022,15 @@
           </a:ln>
         </p:spPr>
         <p:txBody>
-          <a:bodyPr lIns="0" rIns="0" tIns="0" bIns="0" anchor="ctr">
+          <a:bodyPr lIns="0" tIns="0" rIns="0" bIns="0" anchor="ctr">
             <a:noAutofit/>
           </a:bodyPr>
           <a:p>
             <a:pPr algn="ctr">
               <a:buNone/>
             </a:pPr>
-            <a:endParaRPr b="0" lang="en-IN" sz="4400" spc="-1" strike="noStrike">
-              <a:latin typeface="Arial"/>
+            <a:endParaRPr lang="en-IN" sz="4400" b="0" strike="noStrike" spc="-1">
+              <a:latin typeface="Arial" panose="020B0604020202020204"/>
             </a:endParaRPr>
           </a:p>
         </p:txBody>
@@ -2940,12 +3059,12 @@
           </a:ln>
         </p:spPr>
         <p:txBody>
-          <a:bodyPr lIns="0" rIns="0" tIns="0" bIns="0" anchor="t">
+          <a:bodyPr lIns="0" tIns="0" rIns="0" bIns="0" anchor="t">
             <a:normAutofit/>
           </a:bodyPr>
           <a:p>
-            <a:endParaRPr b="0" lang="en-IN" sz="3200" spc="-1" strike="noStrike">
-              <a:latin typeface="Arial"/>
+            <a:endParaRPr lang="en-IN" sz="3200" b="0" strike="noStrike" spc="-1">
+              <a:latin typeface="Arial" panose="020B0604020202020204"/>
             </a:endParaRPr>
           </a:p>
         </p:txBody>
@@ -2974,12 +3093,12 @@
           </a:ln>
         </p:spPr>
         <p:txBody>
-          <a:bodyPr lIns="0" rIns="0" tIns="0" bIns="0" anchor="t">
+          <a:bodyPr lIns="0" tIns="0" rIns="0" bIns="0" anchor="t">
             <a:normAutofit/>
           </a:bodyPr>
           <a:p>
-            <a:endParaRPr b="0" lang="en-IN" sz="3200" spc="-1" strike="noStrike">
-              <a:latin typeface="Arial"/>
+            <a:endParaRPr lang="en-IN" sz="3200" b="0" strike="noStrike" spc="-1">
+              <a:latin typeface="Arial" panose="020B0604020202020204"/>
             </a:endParaRPr>
           </a:p>
         </p:txBody>
@@ -3008,12 +3127,12 @@
           </a:ln>
         </p:spPr>
         <p:txBody>
-          <a:bodyPr lIns="0" rIns="0" tIns="0" bIns="0" anchor="t">
+          <a:bodyPr lIns="0" tIns="0" rIns="0" bIns="0" anchor="t">
             <a:normAutofit/>
           </a:bodyPr>
           <a:p>
-            <a:endParaRPr b="0" lang="en-IN" sz="3200" spc="-1" strike="noStrike">
-              <a:latin typeface="Arial"/>
+            <a:endParaRPr lang="en-IN" sz="3200" b="0" strike="noStrike" spc="-1">
+              <a:latin typeface="Arial" panose="020B0604020202020204"/>
             </a:endParaRPr>
           </a:p>
         </p:txBody>
@@ -3053,8 +3172,9 @@
           <a:bodyPr/>
           <a:p>
             <a:fld id="{7DEA52B8-4F1E-4483-BF3B-283CD622EF44}" type="slidenum">
-              <a:t>&lt;#&gt;</a:t>
+              <a:rPr/>
             </a:fld>
+            <a:endParaRPr/>
           </a:p>
         </p:txBody>
       </p:sp>
@@ -3072,20 +3192,20 @@
         <p:txBody>
           <a:bodyPr/>
           <a:p>
-            <a:r>
-              <a:rPr lang="en-IN"/>
-              <a:t/>
-            </a:r>
+            <a:endParaRPr lang="en-IN"/>
           </a:p>
         </p:txBody>
       </p:sp>
     </p:spTree>
   </p:cSld>
+  <p:clrMapOvr>
+    <a:masterClrMapping/>
+  </p:clrMapOvr>
 </p:sldLayout>
 </file>
 
 <file path=ppt/slideLayouts/slideLayout2.xml><?xml version="1.0" encoding="utf-8"?>
-<p:sldLayout xmlns:a="http://schemas.openxmlformats.org/drawingml/2006/main" xmlns:p="http://schemas.openxmlformats.org/presentationml/2006/main" xmlns:r="http://schemas.openxmlformats.org/officeDocument/2006/relationships" xmlns:p14="http://schemas.microsoft.com/office/powerpoint/2010/main" xmlns:p15="http://schemas.microsoft.com/office/powerpoint/2012/main" xmlns:mc="http://schemas.openxmlformats.org/markup-compatibility/2006" type="tx" preserve="1">
+<p:sldLayout xmlns:a="http://schemas.openxmlformats.org/drawingml/2006/main" xmlns:r="http://schemas.openxmlformats.org/officeDocument/2006/relationships" xmlns:p="http://schemas.openxmlformats.org/presentationml/2006/main" type="tx" preserve="1">
   <p:cSld name="Title Slide">
     <p:spTree>
       <p:nvGrpSpPr>
@@ -3125,15 +3245,15 @@
           </a:ln>
         </p:spPr>
         <p:txBody>
-          <a:bodyPr lIns="0" rIns="0" tIns="0" bIns="0" anchor="ctr">
+          <a:bodyPr lIns="0" tIns="0" rIns="0" bIns="0" anchor="ctr">
             <a:noAutofit/>
           </a:bodyPr>
           <a:p>
             <a:pPr algn="ctr">
               <a:buNone/>
             </a:pPr>
-            <a:endParaRPr b="0" lang="en-IN" sz="4400" spc="-1" strike="noStrike">
-              <a:latin typeface="Arial"/>
+            <a:endParaRPr lang="en-IN" sz="4400" b="0" strike="noStrike" spc="-1">
+              <a:latin typeface="Arial" panose="020B0604020202020204"/>
             </a:endParaRPr>
           </a:p>
         </p:txBody>
@@ -3162,15 +3282,15 @@
           </a:ln>
         </p:spPr>
         <p:txBody>
-          <a:bodyPr lIns="0" rIns="0" tIns="0" bIns="0" anchor="ctr">
+          <a:bodyPr lIns="0" tIns="0" rIns="0" bIns="0" anchor="ctr">
             <a:noAutofit/>
           </a:bodyPr>
           <a:p>
             <a:pPr algn="ctr">
               <a:buNone/>
             </a:pPr>
-            <a:endParaRPr b="0" lang="en-IN" sz="3200" spc="-1" strike="noStrike">
-              <a:latin typeface="Arial"/>
+            <a:endParaRPr lang="en-IN" sz="3200" b="0" strike="noStrike" spc="-1">
+              <a:latin typeface="Arial" panose="020B0604020202020204"/>
             </a:endParaRPr>
           </a:p>
         </p:txBody>
@@ -3197,7 +3317,7 @@
       </p:sp>
       <p:sp>
         <p:nvSpPr>
-          <p:cNvPr id="5" name="PlaceHolder 4"/>
+          <p:cNvPr id="2" name="PlaceHolder 4"/>
           <p:cNvSpPr>
             <a:spLocks noGrp="1"/>
           </p:cNvSpPr>
@@ -3210,14 +3330,15 @@
           <a:bodyPr/>
           <a:p>
             <a:fld id="{9ED0991D-C8B3-480D-934D-4090E60542EF}" type="slidenum">
-              <a:t>&lt;#&gt;</a:t>
+              <a:rPr/>
             </a:fld>
-          </a:p>
-        </p:txBody>
-      </p:sp>
-      <p:sp>
-        <p:nvSpPr>
-          <p:cNvPr id="6" name="PlaceHolder 5"/>
+            <a:endParaRPr/>
+          </a:p>
+        </p:txBody>
+      </p:sp>
+      <p:sp>
+        <p:nvSpPr>
+          <p:cNvPr id="3" name="PlaceHolder 5"/>
           <p:cNvSpPr>
             <a:spLocks noGrp="1"/>
           </p:cNvSpPr>
@@ -3229,20 +3350,20 @@
         <p:txBody>
           <a:bodyPr/>
           <a:p>
-            <a:r>
-              <a:rPr lang="en-IN"/>
-              <a:t/>
-            </a:r>
+            <a:endParaRPr lang="en-IN"/>
           </a:p>
         </p:txBody>
       </p:sp>
     </p:spTree>
   </p:cSld>
+  <p:clrMapOvr>
+    <a:masterClrMapping/>
+  </p:clrMapOvr>
 </p:sldLayout>
 </file>
 
 <file path=ppt/slideLayouts/slideLayout20.xml><?xml version="1.0" encoding="utf-8"?>
-<p:sldLayout xmlns:a="http://schemas.openxmlformats.org/drawingml/2006/main" xmlns:p="http://schemas.openxmlformats.org/presentationml/2006/main" xmlns:r="http://schemas.openxmlformats.org/officeDocument/2006/relationships" xmlns:p14="http://schemas.microsoft.com/office/powerpoint/2010/main" xmlns:p15="http://schemas.microsoft.com/office/powerpoint/2012/main" xmlns:mc="http://schemas.openxmlformats.org/markup-compatibility/2006" type="objAndTwoObj" preserve="1">
+<p:sldLayout xmlns:a="http://schemas.openxmlformats.org/drawingml/2006/main" xmlns:r="http://schemas.openxmlformats.org/officeDocument/2006/relationships" xmlns:p="http://schemas.openxmlformats.org/presentationml/2006/main" type="objAndTwoObj" preserve="1">
   <p:cSld name="Title Content and 2 Content">
     <p:spTree>
       <p:nvGrpSpPr>
@@ -3282,15 +3403,15 @@
           </a:ln>
         </p:spPr>
         <p:txBody>
-          <a:bodyPr lIns="0" rIns="0" tIns="0" bIns="0" anchor="ctr">
+          <a:bodyPr lIns="0" tIns="0" rIns="0" bIns="0" anchor="ctr">
             <a:noAutofit/>
           </a:bodyPr>
           <a:p>
             <a:pPr algn="ctr">
               <a:buNone/>
             </a:pPr>
-            <a:endParaRPr b="0" lang="en-IN" sz="4400" spc="-1" strike="noStrike">
-              <a:latin typeface="Arial"/>
+            <a:endParaRPr lang="en-IN" sz="4400" b="0" strike="noStrike" spc="-1">
+              <a:latin typeface="Arial" panose="020B0604020202020204"/>
             </a:endParaRPr>
           </a:p>
         </p:txBody>
@@ -3319,12 +3440,12 @@
           </a:ln>
         </p:spPr>
         <p:txBody>
-          <a:bodyPr lIns="0" rIns="0" tIns="0" bIns="0" anchor="t">
+          <a:bodyPr lIns="0" tIns="0" rIns="0" bIns="0" anchor="t">
             <a:normAutofit/>
           </a:bodyPr>
           <a:p>
-            <a:endParaRPr b="0" lang="en-IN" sz="3200" spc="-1" strike="noStrike">
-              <a:latin typeface="Arial"/>
+            <a:endParaRPr lang="en-IN" sz="3200" b="0" strike="noStrike" spc="-1">
+              <a:latin typeface="Arial" panose="020B0604020202020204"/>
             </a:endParaRPr>
           </a:p>
         </p:txBody>
@@ -3353,12 +3474,12 @@
           </a:ln>
         </p:spPr>
         <p:txBody>
-          <a:bodyPr lIns="0" rIns="0" tIns="0" bIns="0" anchor="t">
+          <a:bodyPr lIns="0" tIns="0" rIns="0" bIns="0" anchor="t">
             <a:normAutofit/>
           </a:bodyPr>
           <a:p>
-            <a:endParaRPr b="0" lang="en-IN" sz="3200" spc="-1" strike="noStrike">
-              <a:latin typeface="Arial"/>
+            <a:endParaRPr lang="en-IN" sz="3200" b="0" strike="noStrike" spc="-1">
+              <a:latin typeface="Arial" panose="020B0604020202020204"/>
             </a:endParaRPr>
           </a:p>
         </p:txBody>
@@ -3387,12 +3508,12 @@
           </a:ln>
         </p:spPr>
         <p:txBody>
-          <a:bodyPr lIns="0" rIns="0" tIns="0" bIns="0" anchor="t">
+          <a:bodyPr lIns="0" tIns="0" rIns="0" bIns="0" anchor="t">
             <a:normAutofit/>
           </a:bodyPr>
           <a:p>
-            <a:endParaRPr b="0" lang="en-IN" sz="3200" spc="-1" strike="noStrike">
-              <a:latin typeface="Arial"/>
+            <a:endParaRPr lang="en-IN" sz="3200" b="0" strike="noStrike" spc="-1">
+              <a:latin typeface="Arial" panose="020B0604020202020204"/>
             </a:endParaRPr>
           </a:p>
         </p:txBody>
@@ -3432,8 +3553,9 @@
           <a:bodyPr/>
           <a:p>
             <a:fld id="{94CBDFA4-0A26-4FFB-BEDC-1AE0DD027EE5}" type="slidenum">
-              <a:t>&lt;#&gt;</a:t>
+              <a:rPr/>
             </a:fld>
+            <a:endParaRPr/>
           </a:p>
         </p:txBody>
       </p:sp>
@@ -3451,20 +3573,20 @@
         <p:txBody>
           <a:bodyPr/>
           <a:p>
-            <a:r>
-              <a:rPr lang="en-IN"/>
-              <a:t/>
-            </a:r>
+            <a:endParaRPr lang="en-IN"/>
           </a:p>
         </p:txBody>
       </p:sp>
     </p:spTree>
   </p:cSld>
+  <p:clrMapOvr>
+    <a:masterClrMapping/>
+  </p:clrMapOvr>
 </p:sldLayout>
 </file>
 
 <file path=ppt/slideLayouts/slideLayout21.xml><?xml version="1.0" encoding="utf-8"?>
-<p:sldLayout xmlns:a="http://schemas.openxmlformats.org/drawingml/2006/main" xmlns:p="http://schemas.openxmlformats.org/presentationml/2006/main" xmlns:r="http://schemas.openxmlformats.org/officeDocument/2006/relationships" xmlns:p14="http://schemas.microsoft.com/office/powerpoint/2010/main" xmlns:p15="http://schemas.microsoft.com/office/powerpoint/2012/main" xmlns:mc="http://schemas.openxmlformats.org/markup-compatibility/2006" type="twoObjOverTx" preserve="1">
+<p:sldLayout xmlns:a="http://schemas.openxmlformats.org/drawingml/2006/main" xmlns:r="http://schemas.openxmlformats.org/officeDocument/2006/relationships" xmlns:p="http://schemas.openxmlformats.org/presentationml/2006/main" type="twoObjOverTx" preserve="1">
   <p:cSld name="Title, 2 Content over Content">
     <p:spTree>
       <p:nvGrpSpPr>
@@ -3504,15 +3626,15 @@
           </a:ln>
         </p:spPr>
         <p:txBody>
-          <a:bodyPr lIns="0" rIns="0" tIns="0" bIns="0" anchor="ctr">
+          <a:bodyPr lIns="0" tIns="0" rIns="0" bIns="0" anchor="ctr">
             <a:noAutofit/>
           </a:bodyPr>
           <a:p>
             <a:pPr algn="ctr">
               <a:buNone/>
             </a:pPr>
-            <a:endParaRPr b="0" lang="en-IN" sz="4400" spc="-1" strike="noStrike">
-              <a:latin typeface="Arial"/>
+            <a:endParaRPr lang="en-IN" sz="4400" b="0" strike="noStrike" spc="-1">
+              <a:latin typeface="Arial" panose="020B0604020202020204"/>
             </a:endParaRPr>
           </a:p>
         </p:txBody>
@@ -3541,12 +3663,12 @@
           </a:ln>
         </p:spPr>
         <p:txBody>
-          <a:bodyPr lIns="0" rIns="0" tIns="0" bIns="0" anchor="t">
+          <a:bodyPr lIns="0" tIns="0" rIns="0" bIns="0" anchor="t">
             <a:normAutofit/>
           </a:bodyPr>
           <a:p>
-            <a:endParaRPr b="0" lang="en-IN" sz="3200" spc="-1" strike="noStrike">
-              <a:latin typeface="Arial"/>
+            <a:endParaRPr lang="en-IN" sz="3200" b="0" strike="noStrike" spc="-1">
+              <a:latin typeface="Arial" panose="020B0604020202020204"/>
             </a:endParaRPr>
           </a:p>
         </p:txBody>
@@ -3575,12 +3697,12 @@
           </a:ln>
         </p:spPr>
         <p:txBody>
-          <a:bodyPr lIns="0" rIns="0" tIns="0" bIns="0" anchor="t">
+          <a:bodyPr lIns="0" tIns="0" rIns="0" bIns="0" anchor="t">
             <a:normAutofit/>
           </a:bodyPr>
           <a:p>
-            <a:endParaRPr b="0" lang="en-IN" sz="3200" spc="-1" strike="noStrike">
-              <a:latin typeface="Arial"/>
+            <a:endParaRPr lang="en-IN" sz="3200" b="0" strike="noStrike" spc="-1">
+              <a:latin typeface="Arial" panose="020B0604020202020204"/>
             </a:endParaRPr>
           </a:p>
         </p:txBody>
@@ -3609,12 +3731,12 @@
           </a:ln>
         </p:spPr>
         <p:txBody>
-          <a:bodyPr lIns="0" rIns="0" tIns="0" bIns="0" anchor="t">
+          <a:bodyPr lIns="0" tIns="0" rIns="0" bIns="0" anchor="t">
             <a:normAutofit/>
           </a:bodyPr>
           <a:p>
-            <a:endParaRPr b="0" lang="en-IN" sz="3200" spc="-1" strike="noStrike">
-              <a:latin typeface="Arial"/>
+            <a:endParaRPr lang="en-IN" sz="3200" b="0" strike="noStrike" spc="-1">
+              <a:latin typeface="Arial" panose="020B0604020202020204"/>
             </a:endParaRPr>
           </a:p>
         </p:txBody>
@@ -3654,8 +3776,9 @@
           <a:bodyPr/>
           <a:p>
             <a:fld id="{7A7745DA-F0BF-4E10-9BB6-8FD3A897065B}" type="slidenum">
-              <a:t>&lt;#&gt;</a:t>
+              <a:rPr/>
             </a:fld>
+            <a:endParaRPr/>
           </a:p>
         </p:txBody>
       </p:sp>
@@ -3673,20 +3796,20 @@
         <p:txBody>
           <a:bodyPr/>
           <a:p>
-            <a:r>
-              <a:rPr lang="en-IN"/>
-              <a:t/>
-            </a:r>
+            <a:endParaRPr lang="en-IN"/>
           </a:p>
         </p:txBody>
       </p:sp>
     </p:spTree>
   </p:cSld>
+  <p:clrMapOvr>
+    <a:masterClrMapping/>
+  </p:clrMapOvr>
 </p:sldLayout>
 </file>
 
 <file path=ppt/slideLayouts/slideLayout22.xml><?xml version="1.0" encoding="utf-8"?>
-<p:sldLayout xmlns:a="http://schemas.openxmlformats.org/drawingml/2006/main" xmlns:p="http://schemas.openxmlformats.org/presentationml/2006/main" xmlns:r="http://schemas.openxmlformats.org/officeDocument/2006/relationships" xmlns:p14="http://schemas.microsoft.com/office/powerpoint/2010/main" xmlns:p15="http://schemas.microsoft.com/office/powerpoint/2012/main" xmlns:mc="http://schemas.openxmlformats.org/markup-compatibility/2006" type="objOverTx" preserve="1">
+<p:sldLayout xmlns:a="http://schemas.openxmlformats.org/drawingml/2006/main" xmlns:r="http://schemas.openxmlformats.org/officeDocument/2006/relationships" xmlns:p="http://schemas.openxmlformats.org/presentationml/2006/main" type="objOverTx" preserve="1">
   <p:cSld name="Title, Content over Content">
     <p:spTree>
       <p:nvGrpSpPr>
@@ -3726,15 +3849,15 @@
           </a:ln>
         </p:spPr>
         <p:txBody>
-          <a:bodyPr lIns="0" rIns="0" tIns="0" bIns="0" anchor="ctr">
+          <a:bodyPr lIns="0" tIns="0" rIns="0" bIns="0" anchor="ctr">
             <a:noAutofit/>
           </a:bodyPr>
           <a:p>
             <a:pPr algn="ctr">
               <a:buNone/>
             </a:pPr>
-            <a:endParaRPr b="0" lang="en-IN" sz="4400" spc="-1" strike="noStrike">
-              <a:latin typeface="Arial"/>
+            <a:endParaRPr lang="en-IN" sz="4400" b="0" strike="noStrike" spc="-1">
+              <a:latin typeface="Arial" panose="020B0604020202020204"/>
             </a:endParaRPr>
           </a:p>
         </p:txBody>
@@ -3763,12 +3886,12 @@
           </a:ln>
         </p:spPr>
         <p:txBody>
-          <a:bodyPr lIns="0" rIns="0" tIns="0" bIns="0" anchor="t">
+          <a:bodyPr lIns="0" tIns="0" rIns="0" bIns="0" anchor="t">
             <a:normAutofit/>
           </a:bodyPr>
           <a:p>
-            <a:endParaRPr b="0" lang="en-IN" sz="3200" spc="-1" strike="noStrike">
-              <a:latin typeface="Arial"/>
+            <a:endParaRPr lang="en-IN" sz="3200" b="0" strike="noStrike" spc="-1">
+              <a:latin typeface="Arial" panose="020B0604020202020204"/>
             </a:endParaRPr>
           </a:p>
         </p:txBody>
@@ -3797,12 +3920,12 @@
           </a:ln>
         </p:spPr>
         <p:txBody>
-          <a:bodyPr lIns="0" rIns="0" tIns="0" bIns="0" anchor="t">
+          <a:bodyPr lIns="0" tIns="0" rIns="0" bIns="0" anchor="t">
             <a:normAutofit/>
           </a:bodyPr>
           <a:p>
-            <a:endParaRPr b="0" lang="en-IN" sz="3200" spc="-1" strike="noStrike">
-              <a:latin typeface="Arial"/>
+            <a:endParaRPr lang="en-IN" sz="3200" b="0" strike="noStrike" spc="-1">
+              <a:latin typeface="Arial" panose="020B0604020202020204"/>
             </a:endParaRPr>
           </a:p>
         </p:txBody>
@@ -3842,8 +3965,9 @@
           <a:bodyPr/>
           <a:p>
             <a:fld id="{8074E612-90C9-46DD-AC26-2090A9C5358C}" type="slidenum">
-              <a:t>&lt;#&gt;</a:t>
+              <a:rPr/>
             </a:fld>
+            <a:endParaRPr/>
           </a:p>
         </p:txBody>
       </p:sp>
@@ -3861,20 +3985,20 @@
         <p:txBody>
           <a:bodyPr/>
           <a:p>
-            <a:r>
-              <a:rPr lang="en-IN"/>
-              <a:t/>
-            </a:r>
+            <a:endParaRPr lang="en-IN"/>
           </a:p>
         </p:txBody>
       </p:sp>
     </p:spTree>
   </p:cSld>
+  <p:clrMapOvr>
+    <a:masterClrMapping/>
+  </p:clrMapOvr>
 </p:sldLayout>
 </file>
 
 <file path=ppt/slideLayouts/slideLayout23.xml><?xml version="1.0" encoding="utf-8"?>
-<p:sldLayout xmlns:a="http://schemas.openxmlformats.org/drawingml/2006/main" xmlns:p="http://schemas.openxmlformats.org/presentationml/2006/main" xmlns:r="http://schemas.openxmlformats.org/officeDocument/2006/relationships" xmlns:p14="http://schemas.microsoft.com/office/powerpoint/2010/main" xmlns:p15="http://schemas.microsoft.com/office/powerpoint/2012/main" xmlns:mc="http://schemas.openxmlformats.org/markup-compatibility/2006" type="fourObj" preserve="1">
+<p:sldLayout xmlns:a="http://schemas.openxmlformats.org/drawingml/2006/main" xmlns:r="http://schemas.openxmlformats.org/officeDocument/2006/relationships" xmlns:p="http://schemas.openxmlformats.org/presentationml/2006/main" type="fourObj" preserve="1">
   <p:cSld name="Title, 4 Content">
     <p:spTree>
       <p:nvGrpSpPr>
@@ -3914,15 +4038,15 @@
           </a:ln>
         </p:spPr>
         <p:txBody>
-          <a:bodyPr lIns="0" rIns="0" tIns="0" bIns="0" anchor="ctr">
+          <a:bodyPr lIns="0" tIns="0" rIns="0" bIns="0" anchor="ctr">
             <a:noAutofit/>
           </a:bodyPr>
           <a:p>
             <a:pPr algn="ctr">
               <a:buNone/>
             </a:pPr>
-            <a:endParaRPr b="0" lang="en-IN" sz="4400" spc="-1" strike="noStrike">
-              <a:latin typeface="Arial"/>
+            <a:endParaRPr lang="en-IN" sz="4400" b="0" strike="noStrike" spc="-1">
+              <a:latin typeface="Arial" panose="020B0604020202020204"/>
             </a:endParaRPr>
           </a:p>
         </p:txBody>
@@ -3951,12 +4075,12 @@
           </a:ln>
         </p:spPr>
         <p:txBody>
-          <a:bodyPr lIns="0" rIns="0" tIns="0" bIns="0" anchor="t">
+          <a:bodyPr lIns="0" tIns="0" rIns="0" bIns="0" anchor="t">
             <a:normAutofit/>
           </a:bodyPr>
           <a:p>
-            <a:endParaRPr b="0" lang="en-IN" sz="3200" spc="-1" strike="noStrike">
-              <a:latin typeface="Arial"/>
+            <a:endParaRPr lang="en-IN" sz="3200" b="0" strike="noStrike" spc="-1">
+              <a:latin typeface="Arial" panose="020B0604020202020204"/>
             </a:endParaRPr>
           </a:p>
         </p:txBody>
@@ -3985,12 +4109,12 @@
           </a:ln>
         </p:spPr>
         <p:txBody>
-          <a:bodyPr lIns="0" rIns="0" tIns="0" bIns="0" anchor="t">
+          <a:bodyPr lIns="0" tIns="0" rIns="0" bIns="0" anchor="t">
             <a:normAutofit/>
           </a:bodyPr>
           <a:p>
-            <a:endParaRPr b="0" lang="en-IN" sz="3200" spc="-1" strike="noStrike">
-              <a:latin typeface="Arial"/>
+            <a:endParaRPr lang="en-IN" sz="3200" b="0" strike="noStrike" spc="-1">
+              <a:latin typeface="Arial" panose="020B0604020202020204"/>
             </a:endParaRPr>
           </a:p>
         </p:txBody>
@@ -4019,12 +4143,12 @@
           </a:ln>
         </p:spPr>
         <p:txBody>
-          <a:bodyPr lIns="0" rIns="0" tIns="0" bIns="0" anchor="t">
+          <a:bodyPr lIns="0" tIns="0" rIns="0" bIns="0" anchor="t">
             <a:normAutofit/>
           </a:bodyPr>
           <a:p>
-            <a:endParaRPr b="0" lang="en-IN" sz="3200" spc="-1" strike="noStrike">
-              <a:latin typeface="Arial"/>
+            <a:endParaRPr lang="en-IN" sz="3200" b="0" strike="noStrike" spc="-1">
+              <a:latin typeface="Arial" panose="020B0604020202020204"/>
             </a:endParaRPr>
           </a:p>
         </p:txBody>
@@ -4053,12 +4177,12 @@
           </a:ln>
         </p:spPr>
         <p:txBody>
-          <a:bodyPr lIns="0" rIns="0" tIns="0" bIns="0" anchor="t">
+          <a:bodyPr lIns="0" tIns="0" rIns="0" bIns="0" anchor="t">
             <a:normAutofit/>
           </a:bodyPr>
           <a:p>
-            <a:endParaRPr b="0" lang="en-IN" sz="3200" spc="-1" strike="noStrike">
-              <a:latin typeface="Arial"/>
+            <a:endParaRPr lang="en-IN" sz="3200" b="0" strike="noStrike" spc="-1">
+              <a:latin typeface="Arial" panose="020B0604020202020204"/>
             </a:endParaRPr>
           </a:p>
         </p:txBody>
@@ -4098,8 +4222,9 @@
           <a:bodyPr/>
           <a:p>
             <a:fld id="{1BBF0C62-9994-4B0D-B5EE-AFCC93A1BDDB}" type="slidenum">
-              <a:t>&lt;#&gt;</a:t>
+              <a:rPr/>
             </a:fld>
+            <a:endParaRPr/>
           </a:p>
         </p:txBody>
       </p:sp>
@@ -4117,20 +4242,20 @@
         <p:txBody>
           <a:bodyPr/>
           <a:p>
-            <a:r>
-              <a:rPr lang="en-IN"/>
-              <a:t/>
-            </a:r>
+            <a:endParaRPr lang="en-IN"/>
           </a:p>
         </p:txBody>
       </p:sp>
     </p:spTree>
   </p:cSld>
+  <p:clrMapOvr>
+    <a:masterClrMapping/>
+  </p:clrMapOvr>
 </p:sldLayout>
 </file>
 
 <file path=ppt/slideLayouts/slideLayout24.xml><?xml version="1.0" encoding="utf-8"?>
-<p:sldLayout xmlns:a="http://schemas.openxmlformats.org/drawingml/2006/main" xmlns:p="http://schemas.openxmlformats.org/presentationml/2006/main" xmlns:r="http://schemas.openxmlformats.org/officeDocument/2006/relationships" xmlns:p14="http://schemas.microsoft.com/office/powerpoint/2010/main" xmlns:p15="http://schemas.microsoft.com/office/powerpoint/2012/main" xmlns:mc="http://schemas.openxmlformats.org/markup-compatibility/2006" type="blank" preserve="1">
+<p:sldLayout xmlns:a="http://schemas.openxmlformats.org/drawingml/2006/main" xmlns:r="http://schemas.openxmlformats.org/officeDocument/2006/relationships" xmlns:p="http://schemas.openxmlformats.org/presentationml/2006/main" type="blank" preserve="1">
   <p:cSld name="Title, 6 Content">
     <p:spTree>
       <p:nvGrpSpPr>
@@ -4170,15 +4295,15 @@
           </a:ln>
         </p:spPr>
         <p:txBody>
-          <a:bodyPr lIns="0" rIns="0" tIns="0" bIns="0" anchor="ctr">
+          <a:bodyPr lIns="0" tIns="0" rIns="0" bIns="0" anchor="ctr">
             <a:noAutofit/>
           </a:bodyPr>
           <a:p>
             <a:pPr algn="ctr">
               <a:buNone/>
             </a:pPr>
-            <a:endParaRPr b="0" lang="en-IN" sz="4400" spc="-1" strike="noStrike">
-              <a:latin typeface="Arial"/>
+            <a:endParaRPr lang="en-IN" sz="4400" b="0" strike="noStrike" spc="-1">
+              <a:latin typeface="Arial" panose="020B0604020202020204"/>
             </a:endParaRPr>
           </a:p>
         </p:txBody>
@@ -4207,12 +4332,12 @@
           </a:ln>
         </p:spPr>
         <p:txBody>
-          <a:bodyPr lIns="0" rIns="0" tIns="0" bIns="0" anchor="t">
+          <a:bodyPr lIns="0" tIns="0" rIns="0" bIns="0" anchor="t">
             <a:normAutofit/>
           </a:bodyPr>
           <a:p>
-            <a:endParaRPr b="0" lang="en-IN" sz="3200" spc="-1" strike="noStrike">
-              <a:latin typeface="Arial"/>
+            <a:endParaRPr lang="en-IN" sz="3200" b="0" strike="noStrike" spc="-1">
+              <a:latin typeface="Arial" panose="020B0604020202020204"/>
             </a:endParaRPr>
           </a:p>
         </p:txBody>
@@ -4241,12 +4366,12 @@
           </a:ln>
         </p:spPr>
         <p:txBody>
-          <a:bodyPr lIns="0" rIns="0" tIns="0" bIns="0" anchor="t">
+          <a:bodyPr lIns="0" tIns="0" rIns="0" bIns="0" anchor="t">
             <a:normAutofit/>
           </a:bodyPr>
           <a:p>
-            <a:endParaRPr b="0" lang="en-IN" sz="3200" spc="-1" strike="noStrike">
-              <a:latin typeface="Arial"/>
+            <a:endParaRPr lang="en-IN" sz="3200" b="0" strike="noStrike" spc="-1">
+              <a:latin typeface="Arial" panose="020B0604020202020204"/>
             </a:endParaRPr>
           </a:p>
         </p:txBody>
@@ -4275,12 +4400,12 @@
           </a:ln>
         </p:spPr>
         <p:txBody>
-          <a:bodyPr lIns="0" rIns="0" tIns="0" bIns="0" anchor="t">
+          <a:bodyPr lIns="0" tIns="0" rIns="0" bIns="0" anchor="t">
             <a:normAutofit/>
           </a:bodyPr>
           <a:p>
-            <a:endParaRPr b="0" lang="en-IN" sz="3200" spc="-1" strike="noStrike">
-              <a:latin typeface="Arial"/>
+            <a:endParaRPr lang="en-IN" sz="3200" b="0" strike="noStrike" spc="-1">
+              <a:latin typeface="Arial" panose="020B0604020202020204"/>
             </a:endParaRPr>
           </a:p>
         </p:txBody>
@@ -4309,12 +4434,12 @@
           </a:ln>
         </p:spPr>
         <p:txBody>
-          <a:bodyPr lIns="0" rIns="0" tIns="0" bIns="0" anchor="t">
+          <a:bodyPr lIns="0" tIns="0" rIns="0" bIns="0" anchor="t">
             <a:normAutofit/>
           </a:bodyPr>
           <a:p>
-            <a:endParaRPr b="0" lang="en-IN" sz="3200" spc="-1" strike="noStrike">
-              <a:latin typeface="Arial"/>
+            <a:endParaRPr lang="en-IN" sz="3200" b="0" strike="noStrike" spc="-1">
+              <a:latin typeface="Arial" panose="020B0604020202020204"/>
             </a:endParaRPr>
           </a:p>
         </p:txBody>
@@ -4343,12 +4468,12 @@
           </a:ln>
         </p:spPr>
         <p:txBody>
-          <a:bodyPr lIns="0" rIns="0" tIns="0" bIns="0" anchor="t">
+          <a:bodyPr lIns="0" tIns="0" rIns="0" bIns="0" anchor="t">
             <a:normAutofit/>
           </a:bodyPr>
           <a:p>
-            <a:endParaRPr b="0" lang="en-IN" sz="3200" spc="-1" strike="noStrike">
-              <a:latin typeface="Arial"/>
+            <a:endParaRPr lang="en-IN" sz="3200" b="0" strike="noStrike" spc="-1">
+              <a:latin typeface="Arial" panose="020B0604020202020204"/>
             </a:endParaRPr>
           </a:p>
         </p:txBody>
@@ -4377,12 +4502,12 @@
           </a:ln>
         </p:spPr>
         <p:txBody>
-          <a:bodyPr lIns="0" rIns="0" tIns="0" bIns="0" anchor="t">
+          <a:bodyPr lIns="0" tIns="0" rIns="0" bIns="0" anchor="t">
             <a:normAutofit/>
           </a:bodyPr>
           <a:p>
-            <a:endParaRPr b="0" lang="en-IN" sz="3200" spc="-1" strike="noStrike">
-              <a:latin typeface="Arial"/>
+            <a:endParaRPr lang="en-IN" sz="3200" b="0" strike="noStrike" spc="-1">
+              <a:latin typeface="Arial" panose="020B0604020202020204"/>
             </a:endParaRPr>
           </a:p>
         </p:txBody>
@@ -4422,8 +4547,9 @@
           <a:bodyPr/>
           <a:p>
             <a:fld id="{7676D1E2-BD9A-48C5-83DF-0CA18D7E0A49}" type="slidenum">
-              <a:t>&lt;#&gt;</a:t>
+              <a:rPr/>
             </a:fld>
+            <a:endParaRPr/>
           </a:p>
         </p:txBody>
       </p:sp>
@@ -4441,20 +4567,20 @@
         <p:txBody>
           <a:bodyPr/>
           <a:p>
-            <a:r>
-              <a:rPr lang="en-IN"/>
-              <a:t/>
-            </a:r>
+            <a:endParaRPr lang="en-IN"/>
           </a:p>
         </p:txBody>
       </p:sp>
     </p:spTree>
   </p:cSld>
+  <p:clrMapOvr>
+    <a:masterClrMapping/>
+  </p:clrMapOvr>
 </p:sldLayout>
 </file>
 
 <file path=ppt/slideLayouts/slideLayout3.xml><?xml version="1.0" encoding="utf-8"?>
-<p:sldLayout xmlns:a="http://schemas.openxmlformats.org/drawingml/2006/main" xmlns:p="http://schemas.openxmlformats.org/presentationml/2006/main" xmlns:r="http://schemas.openxmlformats.org/officeDocument/2006/relationships" xmlns:p14="http://schemas.microsoft.com/office/powerpoint/2010/main" xmlns:p15="http://schemas.microsoft.com/office/powerpoint/2012/main" xmlns:mc="http://schemas.openxmlformats.org/markup-compatibility/2006" type="obj" preserve="1">
+<p:sldLayout xmlns:a="http://schemas.openxmlformats.org/drawingml/2006/main" xmlns:r="http://schemas.openxmlformats.org/officeDocument/2006/relationships" xmlns:p="http://schemas.openxmlformats.org/presentationml/2006/main" type="obj" preserve="1">
   <p:cSld name="Title, Content">
     <p:spTree>
       <p:nvGrpSpPr>
@@ -4494,15 +4620,15 @@
           </a:ln>
         </p:spPr>
         <p:txBody>
-          <a:bodyPr lIns="0" rIns="0" tIns="0" bIns="0" anchor="ctr">
+          <a:bodyPr lIns="0" tIns="0" rIns="0" bIns="0" anchor="ctr">
             <a:noAutofit/>
           </a:bodyPr>
           <a:p>
             <a:pPr algn="ctr">
               <a:buNone/>
             </a:pPr>
-            <a:endParaRPr b="0" lang="en-IN" sz="4400" spc="-1" strike="noStrike">
-              <a:latin typeface="Arial"/>
+            <a:endParaRPr lang="en-IN" sz="4400" b="0" strike="noStrike" spc="-1">
+              <a:latin typeface="Arial" panose="020B0604020202020204"/>
             </a:endParaRPr>
           </a:p>
         </p:txBody>
@@ -4531,12 +4657,12 @@
           </a:ln>
         </p:spPr>
         <p:txBody>
-          <a:bodyPr lIns="0" rIns="0" tIns="0" bIns="0" anchor="t">
+          <a:bodyPr lIns="0" tIns="0" rIns="0" bIns="0" anchor="t">
             <a:normAutofit/>
           </a:bodyPr>
           <a:p>
-            <a:endParaRPr b="0" lang="en-IN" sz="3200" spc="-1" strike="noStrike">
-              <a:latin typeface="Arial"/>
+            <a:endParaRPr lang="en-IN" sz="3200" b="0" strike="noStrike" spc="-1">
+              <a:latin typeface="Arial" panose="020B0604020202020204"/>
             </a:endParaRPr>
           </a:p>
         </p:txBody>
@@ -4576,8 +4702,9 @@
           <a:bodyPr/>
           <a:p>
             <a:fld id="{89E3D7E6-88C1-435E-A047-EFA036103880}" type="slidenum">
-              <a:t>&lt;#&gt;</a:t>
+              <a:rPr/>
             </a:fld>
+            <a:endParaRPr/>
           </a:p>
         </p:txBody>
       </p:sp>
@@ -4595,20 +4722,20 @@
         <p:txBody>
           <a:bodyPr/>
           <a:p>
-            <a:r>
-              <a:rPr lang="en-IN"/>
-              <a:t/>
-            </a:r>
+            <a:endParaRPr lang="en-IN"/>
           </a:p>
         </p:txBody>
       </p:sp>
     </p:spTree>
   </p:cSld>
+  <p:clrMapOvr>
+    <a:masterClrMapping/>
+  </p:clrMapOvr>
 </p:sldLayout>
 </file>
 
 <file path=ppt/slideLayouts/slideLayout4.xml><?xml version="1.0" encoding="utf-8"?>
-<p:sldLayout xmlns:a="http://schemas.openxmlformats.org/drawingml/2006/main" xmlns:p="http://schemas.openxmlformats.org/presentationml/2006/main" xmlns:r="http://schemas.openxmlformats.org/officeDocument/2006/relationships" xmlns:p14="http://schemas.microsoft.com/office/powerpoint/2010/main" xmlns:p15="http://schemas.microsoft.com/office/powerpoint/2012/main" xmlns:mc="http://schemas.openxmlformats.org/markup-compatibility/2006" type="twoObj" preserve="1">
+<p:sldLayout xmlns:a="http://schemas.openxmlformats.org/drawingml/2006/main" xmlns:r="http://schemas.openxmlformats.org/officeDocument/2006/relationships" xmlns:p="http://schemas.openxmlformats.org/presentationml/2006/main" type="twoObj" preserve="1">
   <p:cSld name="Title, 2 Content">
     <p:spTree>
       <p:nvGrpSpPr>
@@ -4648,15 +4775,15 @@
           </a:ln>
         </p:spPr>
         <p:txBody>
-          <a:bodyPr lIns="0" rIns="0" tIns="0" bIns="0" anchor="ctr">
+          <a:bodyPr lIns="0" tIns="0" rIns="0" bIns="0" anchor="ctr">
             <a:noAutofit/>
           </a:bodyPr>
           <a:p>
             <a:pPr algn="ctr">
               <a:buNone/>
             </a:pPr>
-            <a:endParaRPr b="0" lang="en-IN" sz="4400" spc="-1" strike="noStrike">
-              <a:latin typeface="Arial"/>
+            <a:endParaRPr lang="en-IN" sz="4400" b="0" strike="noStrike" spc="-1">
+              <a:latin typeface="Arial" panose="020B0604020202020204"/>
             </a:endParaRPr>
           </a:p>
         </p:txBody>
@@ -4685,12 +4812,12 @@
           </a:ln>
         </p:spPr>
         <p:txBody>
-          <a:bodyPr lIns="0" rIns="0" tIns="0" bIns="0" anchor="t">
+          <a:bodyPr lIns="0" tIns="0" rIns="0" bIns="0" anchor="t">
             <a:normAutofit/>
           </a:bodyPr>
           <a:p>
-            <a:endParaRPr b="0" lang="en-IN" sz="3200" spc="-1" strike="noStrike">
-              <a:latin typeface="Arial"/>
+            <a:endParaRPr lang="en-IN" sz="3200" b="0" strike="noStrike" spc="-1">
+              <a:latin typeface="Arial" panose="020B0604020202020204"/>
             </a:endParaRPr>
           </a:p>
         </p:txBody>
@@ -4719,12 +4846,12 @@
           </a:ln>
         </p:spPr>
         <p:txBody>
-          <a:bodyPr lIns="0" rIns="0" tIns="0" bIns="0" anchor="t">
+          <a:bodyPr lIns="0" tIns="0" rIns="0" bIns="0" anchor="t">
             <a:normAutofit/>
           </a:bodyPr>
           <a:p>
-            <a:endParaRPr b="0" lang="en-IN" sz="3200" spc="-1" strike="noStrike">
-              <a:latin typeface="Arial"/>
+            <a:endParaRPr lang="en-IN" sz="3200" b="0" strike="noStrike" spc="-1">
+              <a:latin typeface="Arial" panose="020B0604020202020204"/>
             </a:endParaRPr>
           </a:p>
         </p:txBody>
@@ -4764,8 +4891,9 @@
           <a:bodyPr/>
           <a:p>
             <a:fld id="{57EC3FC0-A8A5-4587-9E68-4851DB7415AF}" type="slidenum">
-              <a:t>&lt;#&gt;</a:t>
+              <a:rPr/>
             </a:fld>
+            <a:endParaRPr/>
           </a:p>
         </p:txBody>
       </p:sp>
@@ -4783,20 +4911,20 @@
         <p:txBody>
           <a:bodyPr/>
           <a:p>
-            <a:r>
-              <a:rPr lang="en-IN"/>
-              <a:t/>
-            </a:r>
+            <a:endParaRPr lang="en-IN"/>
           </a:p>
         </p:txBody>
       </p:sp>
     </p:spTree>
   </p:cSld>
+  <p:clrMapOvr>
+    <a:masterClrMapping/>
+  </p:clrMapOvr>
 </p:sldLayout>
 </file>
 
 <file path=ppt/slideLayouts/slideLayout5.xml><?xml version="1.0" encoding="utf-8"?>
-<p:sldLayout xmlns:a="http://schemas.openxmlformats.org/drawingml/2006/main" xmlns:p="http://schemas.openxmlformats.org/presentationml/2006/main" xmlns:r="http://schemas.openxmlformats.org/officeDocument/2006/relationships" xmlns:p14="http://schemas.microsoft.com/office/powerpoint/2010/main" xmlns:p15="http://schemas.microsoft.com/office/powerpoint/2012/main" xmlns:mc="http://schemas.openxmlformats.org/markup-compatibility/2006" type="titleOnly" preserve="1">
+<p:sldLayout xmlns:a="http://schemas.openxmlformats.org/drawingml/2006/main" xmlns:r="http://schemas.openxmlformats.org/officeDocument/2006/relationships" xmlns:p="http://schemas.openxmlformats.org/presentationml/2006/main" type="titleOnly" preserve="1">
   <p:cSld name="Title Only">
     <p:spTree>
       <p:nvGrpSpPr>
@@ -4836,15 +4964,15 @@
           </a:ln>
         </p:spPr>
         <p:txBody>
-          <a:bodyPr lIns="0" rIns="0" tIns="0" bIns="0" anchor="ctr">
+          <a:bodyPr lIns="0" tIns="0" rIns="0" bIns="0" anchor="ctr">
             <a:noAutofit/>
           </a:bodyPr>
           <a:p>
             <a:pPr algn="ctr">
               <a:buNone/>
             </a:pPr>
-            <a:endParaRPr b="0" lang="en-IN" sz="4400" spc="-1" strike="noStrike">
-              <a:latin typeface="Arial"/>
+            <a:endParaRPr lang="en-IN" sz="4400" b="0" strike="noStrike" spc="-1">
+              <a:latin typeface="Arial" panose="020B0604020202020204"/>
             </a:endParaRPr>
           </a:p>
         </p:txBody>
@@ -4884,8 +5012,9 @@
           <a:bodyPr/>
           <a:p>
             <a:fld id="{9CBAA6F9-139B-4AD2-9E92-94E1F194E096}" type="slidenum">
-              <a:t>&lt;#&gt;</a:t>
+              <a:rPr/>
             </a:fld>
+            <a:endParaRPr/>
           </a:p>
         </p:txBody>
       </p:sp>
@@ -4903,20 +5032,20 @@
         <p:txBody>
           <a:bodyPr/>
           <a:p>
-            <a:r>
-              <a:rPr lang="en-IN"/>
-              <a:t/>
-            </a:r>
+            <a:endParaRPr lang="en-IN"/>
           </a:p>
         </p:txBody>
       </p:sp>
     </p:spTree>
   </p:cSld>
+  <p:clrMapOvr>
+    <a:masterClrMapping/>
+  </p:clrMapOvr>
 </p:sldLayout>
 </file>
 
 <file path=ppt/slideLayouts/slideLayout6.xml><?xml version="1.0" encoding="utf-8"?>
-<p:sldLayout xmlns:a="http://schemas.openxmlformats.org/drawingml/2006/main" xmlns:p="http://schemas.openxmlformats.org/presentationml/2006/main" xmlns:r="http://schemas.openxmlformats.org/officeDocument/2006/relationships" xmlns:p14="http://schemas.microsoft.com/office/powerpoint/2010/main" xmlns:p15="http://schemas.microsoft.com/office/powerpoint/2012/main" xmlns:mc="http://schemas.openxmlformats.org/markup-compatibility/2006" type="objOnly" preserve="1">
+<p:sldLayout xmlns:a="http://schemas.openxmlformats.org/drawingml/2006/main" xmlns:r="http://schemas.openxmlformats.org/officeDocument/2006/relationships" xmlns:p="http://schemas.openxmlformats.org/presentationml/2006/main" type="objOnly" preserve="1">
   <p:cSld name="Centered Text">
     <p:spTree>
       <p:nvGrpSpPr>
@@ -4956,15 +5085,15 @@
           </a:ln>
         </p:spPr>
         <p:txBody>
-          <a:bodyPr lIns="0" rIns="0" tIns="0" bIns="0" anchor="ctr">
+          <a:bodyPr lIns="0" tIns="0" rIns="0" bIns="0" anchor="ctr">
             <a:noAutofit/>
           </a:bodyPr>
           <a:p>
             <a:pPr algn="ctr">
               <a:buNone/>
             </a:pPr>
-            <a:endParaRPr b="0" lang="en-IN" sz="3200" spc="-1" strike="noStrike">
-              <a:latin typeface="Arial"/>
+            <a:endParaRPr lang="en-IN" sz="3200" b="0" strike="noStrike" spc="-1">
+              <a:latin typeface="Arial" panose="020B0604020202020204"/>
             </a:endParaRPr>
           </a:p>
         </p:txBody>
@@ -5004,8 +5133,9 @@
           <a:bodyPr/>
           <a:p>
             <a:fld id="{FC01A44D-B6D3-4946-88C3-23BBE3BEAC6D}" type="slidenum">
-              <a:t>&lt;#&gt;</a:t>
+              <a:rPr/>
             </a:fld>
+            <a:endParaRPr/>
           </a:p>
         </p:txBody>
       </p:sp>
@@ -5023,20 +5153,20 @@
         <p:txBody>
           <a:bodyPr/>
           <a:p>
-            <a:r>
-              <a:rPr lang="en-IN"/>
-              <a:t/>
-            </a:r>
+            <a:endParaRPr lang="en-IN"/>
           </a:p>
         </p:txBody>
       </p:sp>
     </p:spTree>
   </p:cSld>
+  <p:clrMapOvr>
+    <a:masterClrMapping/>
+  </p:clrMapOvr>
 </p:sldLayout>
 </file>
 
 <file path=ppt/slideLayouts/slideLayout7.xml><?xml version="1.0" encoding="utf-8"?>
-<p:sldLayout xmlns:a="http://schemas.openxmlformats.org/drawingml/2006/main" xmlns:p="http://schemas.openxmlformats.org/presentationml/2006/main" xmlns:r="http://schemas.openxmlformats.org/officeDocument/2006/relationships" xmlns:p14="http://schemas.microsoft.com/office/powerpoint/2010/main" xmlns:p15="http://schemas.microsoft.com/office/powerpoint/2012/main" xmlns:mc="http://schemas.openxmlformats.org/markup-compatibility/2006" type="twoObjAndObj" preserve="1">
+<p:sldLayout xmlns:a="http://schemas.openxmlformats.org/drawingml/2006/main" xmlns:r="http://schemas.openxmlformats.org/officeDocument/2006/relationships" xmlns:p="http://schemas.openxmlformats.org/presentationml/2006/main" type="twoObjAndObj" preserve="1">
   <p:cSld name="Title, 2 Content and Content">
     <p:spTree>
       <p:nvGrpSpPr>
@@ -5076,15 +5206,15 @@
           </a:ln>
         </p:spPr>
         <p:txBody>
-          <a:bodyPr lIns="0" rIns="0" tIns="0" bIns="0" anchor="ctr">
+          <a:bodyPr lIns="0" tIns="0" rIns="0" bIns="0" anchor="ctr">
             <a:noAutofit/>
           </a:bodyPr>
           <a:p>
             <a:pPr algn="ctr">
               <a:buNone/>
             </a:pPr>
-            <a:endParaRPr b="0" lang="en-IN" sz="4400" spc="-1" strike="noStrike">
-              <a:latin typeface="Arial"/>
+            <a:endParaRPr lang="en-IN" sz="4400" b="0" strike="noStrike" spc="-1">
+              <a:latin typeface="Arial" panose="020B0604020202020204"/>
             </a:endParaRPr>
           </a:p>
         </p:txBody>
@@ -5113,12 +5243,12 @@
           </a:ln>
         </p:spPr>
         <p:txBody>
-          <a:bodyPr lIns="0" rIns="0" tIns="0" bIns="0" anchor="t">
+          <a:bodyPr lIns="0" tIns="0" rIns="0" bIns="0" anchor="t">
             <a:normAutofit/>
           </a:bodyPr>
           <a:p>
-            <a:endParaRPr b="0" lang="en-IN" sz="3200" spc="-1" strike="noStrike">
-              <a:latin typeface="Arial"/>
+            <a:endParaRPr lang="en-IN" sz="3200" b="0" strike="noStrike" spc="-1">
+              <a:latin typeface="Arial" panose="020B0604020202020204"/>
             </a:endParaRPr>
           </a:p>
         </p:txBody>
@@ -5147,12 +5277,12 @@
           </a:ln>
         </p:spPr>
         <p:txBody>
-          <a:bodyPr lIns="0" rIns="0" tIns="0" bIns="0" anchor="t">
+          <a:bodyPr lIns="0" tIns="0" rIns="0" bIns="0" anchor="t">
             <a:normAutofit/>
           </a:bodyPr>
           <a:p>
-            <a:endParaRPr b="0" lang="en-IN" sz="3200" spc="-1" strike="noStrike">
-              <a:latin typeface="Arial"/>
+            <a:endParaRPr lang="en-IN" sz="3200" b="0" strike="noStrike" spc="-1">
+              <a:latin typeface="Arial" panose="020B0604020202020204"/>
             </a:endParaRPr>
           </a:p>
         </p:txBody>
@@ -5181,12 +5311,12 @@
           </a:ln>
         </p:spPr>
         <p:txBody>
-          <a:bodyPr lIns="0" rIns="0" tIns="0" bIns="0" anchor="t">
+          <a:bodyPr lIns="0" tIns="0" rIns="0" bIns="0" anchor="t">
             <a:normAutofit/>
           </a:bodyPr>
           <a:p>
-            <a:endParaRPr b="0" lang="en-IN" sz="3200" spc="-1" strike="noStrike">
-              <a:latin typeface="Arial"/>
+            <a:endParaRPr lang="en-IN" sz="3200" b="0" strike="noStrike" spc="-1">
+              <a:latin typeface="Arial" panose="020B0604020202020204"/>
             </a:endParaRPr>
           </a:p>
         </p:txBody>
@@ -5226,8 +5356,9 @@
           <a:bodyPr/>
           <a:p>
             <a:fld id="{C954F9EB-528D-4396-86F9-5C9EC37DFACD}" type="slidenum">
-              <a:t>&lt;#&gt;</a:t>
+              <a:rPr/>
             </a:fld>
+            <a:endParaRPr/>
           </a:p>
         </p:txBody>
       </p:sp>
@@ -5245,20 +5376,20 @@
         <p:txBody>
           <a:bodyPr/>
           <a:p>
-            <a:r>
-              <a:rPr lang="en-IN"/>
-              <a:t/>
-            </a:r>
+            <a:endParaRPr lang="en-IN"/>
           </a:p>
         </p:txBody>
       </p:sp>
     </p:spTree>
   </p:cSld>
+  <p:clrMapOvr>
+    <a:masterClrMapping/>
+  </p:clrMapOvr>
 </p:sldLayout>
 </file>
 
 <file path=ppt/slideLayouts/slideLayout8.xml><?xml version="1.0" encoding="utf-8"?>
-<p:sldLayout xmlns:a="http://schemas.openxmlformats.org/drawingml/2006/main" xmlns:p="http://schemas.openxmlformats.org/presentationml/2006/main" xmlns:r="http://schemas.openxmlformats.org/officeDocument/2006/relationships" xmlns:p14="http://schemas.microsoft.com/office/powerpoint/2010/main" xmlns:p15="http://schemas.microsoft.com/office/powerpoint/2012/main" xmlns:mc="http://schemas.openxmlformats.org/markup-compatibility/2006" type="objAndTwoObj" preserve="1">
+<p:sldLayout xmlns:a="http://schemas.openxmlformats.org/drawingml/2006/main" xmlns:r="http://schemas.openxmlformats.org/officeDocument/2006/relationships" xmlns:p="http://schemas.openxmlformats.org/presentationml/2006/main" type="objAndTwoObj" preserve="1">
   <p:cSld name="Title Content and 2 Content">
     <p:spTree>
       <p:nvGrpSpPr>
@@ -5298,15 +5429,15 @@
           </a:ln>
         </p:spPr>
         <p:txBody>
-          <a:bodyPr lIns="0" rIns="0" tIns="0" bIns="0" anchor="ctr">
+          <a:bodyPr lIns="0" tIns="0" rIns="0" bIns="0" anchor="ctr">
             <a:noAutofit/>
           </a:bodyPr>
           <a:p>
             <a:pPr algn="ctr">
               <a:buNone/>
             </a:pPr>
-            <a:endParaRPr b="0" lang="en-IN" sz="4400" spc="-1" strike="noStrike">
-              <a:latin typeface="Arial"/>
+            <a:endParaRPr lang="en-IN" sz="4400" b="0" strike="noStrike" spc="-1">
+              <a:latin typeface="Arial" panose="020B0604020202020204"/>
             </a:endParaRPr>
           </a:p>
         </p:txBody>
@@ -5335,12 +5466,12 @@
           </a:ln>
         </p:spPr>
         <p:txBody>
-          <a:bodyPr lIns="0" rIns="0" tIns="0" bIns="0" anchor="t">
+          <a:bodyPr lIns="0" tIns="0" rIns="0" bIns="0" anchor="t">
             <a:normAutofit/>
           </a:bodyPr>
           <a:p>
-            <a:endParaRPr b="0" lang="en-IN" sz="3200" spc="-1" strike="noStrike">
-              <a:latin typeface="Arial"/>
+            <a:endParaRPr lang="en-IN" sz="3200" b="0" strike="noStrike" spc="-1">
+              <a:latin typeface="Arial" panose="020B0604020202020204"/>
             </a:endParaRPr>
           </a:p>
         </p:txBody>
@@ -5369,12 +5500,12 @@
           </a:ln>
         </p:spPr>
         <p:txBody>
-          <a:bodyPr lIns="0" rIns="0" tIns="0" bIns="0" anchor="t">
+          <a:bodyPr lIns="0" tIns="0" rIns="0" bIns="0" anchor="t">
             <a:normAutofit/>
           </a:bodyPr>
           <a:p>
-            <a:endParaRPr b="0" lang="en-IN" sz="3200" spc="-1" strike="noStrike">
-              <a:latin typeface="Arial"/>
+            <a:endParaRPr lang="en-IN" sz="3200" b="0" strike="noStrike" spc="-1">
+              <a:latin typeface="Arial" panose="020B0604020202020204"/>
             </a:endParaRPr>
           </a:p>
         </p:txBody>
@@ -5403,12 +5534,12 @@
           </a:ln>
         </p:spPr>
         <p:txBody>
-          <a:bodyPr lIns="0" rIns="0" tIns="0" bIns="0" anchor="t">
+          <a:bodyPr lIns="0" tIns="0" rIns="0" bIns="0" anchor="t">
             <a:normAutofit/>
           </a:bodyPr>
           <a:p>
-            <a:endParaRPr b="0" lang="en-IN" sz="3200" spc="-1" strike="noStrike">
-              <a:latin typeface="Arial"/>
+            <a:endParaRPr lang="en-IN" sz="3200" b="0" strike="noStrike" spc="-1">
+              <a:latin typeface="Arial" panose="020B0604020202020204"/>
             </a:endParaRPr>
           </a:p>
         </p:txBody>
@@ -5448,8 +5579,9 @@
           <a:bodyPr/>
           <a:p>
             <a:fld id="{E10A2A16-47CD-474A-AAC8-9B701937A53D}" type="slidenum">
-              <a:t>&lt;#&gt;</a:t>
+              <a:rPr/>
             </a:fld>
+            <a:endParaRPr/>
           </a:p>
         </p:txBody>
       </p:sp>
@@ -5467,20 +5599,20 @@
         <p:txBody>
           <a:bodyPr/>
           <a:p>
-            <a:r>
-              <a:rPr lang="en-IN"/>
-              <a:t/>
-            </a:r>
+            <a:endParaRPr lang="en-IN"/>
           </a:p>
         </p:txBody>
       </p:sp>
     </p:spTree>
   </p:cSld>
+  <p:clrMapOvr>
+    <a:masterClrMapping/>
+  </p:clrMapOvr>
 </p:sldLayout>
 </file>
 
 <file path=ppt/slideLayouts/slideLayout9.xml><?xml version="1.0" encoding="utf-8"?>
-<p:sldLayout xmlns:a="http://schemas.openxmlformats.org/drawingml/2006/main" xmlns:p="http://schemas.openxmlformats.org/presentationml/2006/main" xmlns:r="http://schemas.openxmlformats.org/officeDocument/2006/relationships" xmlns:p14="http://schemas.microsoft.com/office/powerpoint/2010/main" xmlns:p15="http://schemas.microsoft.com/office/powerpoint/2012/main" xmlns:mc="http://schemas.openxmlformats.org/markup-compatibility/2006" type="twoObjOverTx" preserve="1">
+<p:sldLayout xmlns:a="http://schemas.openxmlformats.org/drawingml/2006/main" xmlns:r="http://schemas.openxmlformats.org/officeDocument/2006/relationships" xmlns:p="http://schemas.openxmlformats.org/presentationml/2006/main" type="twoObjOverTx" preserve="1">
   <p:cSld name="Title, 2 Content over Content">
     <p:spTree>
       <p:nvGrpSpPr>
@@ -5520,15 +5652,15 @@
           </a:ln>
         </p:spPr>
         <p:txBody>
-          <a:bodyPr lIns="0" rIns="0" tIns="0" bIns="0" anchor="ctr">
+          <a:bodyPr lIns="0" tIns="0" rIns="0" bIns="0" anchor="ctr">
             <a:noAutofit/>
           </a:bodyPr>
           <a:p>
             <a:pPr algn="ctr">
               <a:buNone/>
             </a:pPr>
-            <a:endParaRPr b="0" lang="en-IN" sz="4400" spc="-1" strike="noStrike">
-              <a:latin typeface="Arial"/>
+            <a:endParaRPr lang="en-IN" sz="4400" b="0" strike="noStrike" spc="-1">
+              <a:latin typeface="Arial" panose="020B0604020202020204"/>
             </a:endParaRPr>
           </a:p>
         </p:txBody>
@@ -5557,12 +5689,12 @@
           </a:ln>
         </p:spPr>
         <p:txBody>
-          <a:bodyPr lIns="0" rIns="0" tIns="0" bIns="0" anchor="t">
+          <a:bodyPr lIns="0" tIns="0" rIns="0" bIns="0" anchor="t">
             <a:normAutofit/>
           </a:bodyPr>
           <a:p>
-            <a:endParaRPr b="0" lang="en-IN" sz="3200" spc="-1" strike="noStrike">
-              <a:latin typeface="Arial"/>
+            <a:endParaRPr lang="en-IN" sz="3200" b="0" strike="noStrike" spc="-1">
+              <a:latin typeface="Arial" panose="020B0604020202020204"/>
             </a:endParaRPr>
           </a:p>
         </p:txBody>
@@ -5591,12 +5723,12 @@
           </a:ln>
         </p:spPr>
         <p:txBody>
-          <a:bodyPr lIns="0" rIns="0" tIns="0" bIns="0" anchor="t">
+          <a:bodyPr lIns="0" tIns="0" rIns="0" bIns="0" anchor="t">
             <a:normAutofit/>
           </a:bodyPr>
           <a:p>
-            <a:endParaRPr b="0" lang="en-IN" sz="3200" spc="-1" strike="noStrike">
-              <a:latin typeface="Arial"/>
+            <a:endParaRPr lang="en-IN" sz="3200" b="0" strike="noStrike" spc="-1">
+              <a:latin typeface="Arial" panose="020B0604020202020204"/>
             </a:endParaRPr>
           </a:p>
         </p:txBody>
@@ -5625,12 +5757,12 @@
           </a:ln>
         </p:spPr>
         <p:txBody>
-          <a:bodyPr lIns="0" rIns="0" tIns="0" bIns="0" anchor="t">
+          <a:bodyPr lIns="0" tIns="0" rIns="0" bIns="0" anchor="t">
             <a:normAutofit/>
           </a:bodyPr>
           <a:p>
-            <a:endParaRPr b="0" lang="en-IN" sz="3200" spc="-1" strike="noStrike">
-              <a:latin typeface="Arial"/>
+            <a:endParaRPr lang="en-IN" sz="3200" b="0" strike="noStrike" spc="-1">
+              <a:latin typeface="Arial" panose="020B0604020202020204"/>
             </a:endParaRPr>
           </a:p>
         </p:txBody>
@@ -5670,8 +5802,9 @@
           <a:bodyPr/>
           <a:p>
             <a:fld id="{C927F91B-478E-46DB-A81F-A683D8E8A74F}" type="slidenum">
-              <a:t>&lt;#&gt;</a:t>
+              <a:rPr/>
             </a:fld>
+            <a:endParaRPr/>
           </a:p>
         </p:txBody>
       </p:sp>
@@ -5689,26 +5822,27 @@
         <p:txBody>
           <a:bodyPr/>
           <a:p>
-            <a:r>
-              <a:rPr lang="en-IN"/>
-              <a:t/>
-            </a:r>
+            <a:endParaRPr lang="en-IN"/>
           </a:p>
         </p:txBody>
       </p:sp>
     </p:spTree>
   </p:cSld>
+  <p:clrMapOvr>
+    <a:masterClrMapping/>
+  </p:clrMapOvr>
 </p:sldLayout>
 </file>
 
 <file path=ppt/slideMasters/slideMaster1.xml><?xml version="1.0" encoding="utf-8"?>
-<p:sldMaster xmlns:a="http://schemas.openxmlformats.org/drawingml/2006/main" xmlns:p="http://schemas.openxmlformats.org/presentationml/2006/main" xmlns:r="http://schemas.openxmlformats.org/officeDocument/2006/relationships" xmlns:p14="http://schemas.microsoft.com/office/powerpoint/2010/main" xmlns:p15="http://schemas.microsoft.com/office/powerpoint/2012/main" xmlns:mc="http://schemas.openxmlformats.org/markup-compatibility/2006">
+<p:sldMaster xmlns:a="http://schemas.openxmlformats.org/drawingml/2006/main" xmlns:r="http://schemas.openxmlformats.org/officeDocument/2006/relationships" xmlns:p="http://schemas.openxmlformats.org/presentationml/2006/main">
   <p:cSld>
     <p:bg>
       <p:bgPr>
         <a:solidFill>
-          <a:srgbClr val="ffffff"/>
+          <a:srgbClr val="FFFFFF"/>
         </a:solidFill>
+        <a:effectLst/>
       </p:bgPr>
     </p:bg>
     <p:spTree>
@@ -5749,25 +5883,25 @@
           </a:ln>
         </p:spPr>
         <p:txBody>
-          <a:bodyPr numCol="1" spcCol="0" lIns="0" rIns="0" tIns="0" bIns="0" anchor="ctr">
+          <a:bodyPr lIns="0" tIns="0" rIns="0" bIns="0" numCol="1" spcCol="0" anchor="ctr">
             <a:noAutofit/>
           </a:bodyPr>
           <a:p>
             <a:r>
-              <a:rPr b="0" lang="en-IN" sz="1800" spc="-1" strike="noStrike">
-                <a:latin typeface="Arial"/>
+              <a:rPr lang="en-IN" sz="1800" b="0" strike="noStrike" spc="-1">
+                <a:latin typeface="Arial" panose="020B0604020202020204"/>
               </a:rPr>
               <a:t>Click to edit the title text format</a:t>
             </a:r>
-            <a:endParaRPr b="0" lang="en-IN" sz="1800" spc="-1" strike="noStrike">
-              <a:latin typeface="Arial"/>
-            </a:endParaRPr>
-          </a:p>
-        </p:txBody>
-      </p:sp>
-      <p:sp>
-        <p:nvSpPr>
-          <p:cNvPr id="1" name="PlaceHolder 2"/>
+            <a:endParaRPr lang="en-IN" sz="1800" b="0" strike="noStrike" spc="-1">
+              <a:latin typeface="Arial" panose="020B0604020202020204"/>
+            </a:endParaRPr>
+          </a:p>
+        </p:txBody>
+      </p:sp>
+      <p:sp>
+        <p:nvSpPr>
+          <p:cNvPr id="2" name="PlaceHolder 2"/>
           <p:cNvSpPr>
             <a:spLocks noGrp="1"/>
           </p:cNvSpPr>
@@ -5789,55 +5923,55 @@
           </a:ln>
         </p:spPr>
         <p:txBody>
-          <a:bodyPr lIns="0" rIns="0" tIns="0" bIns="0" anchor="t">
+          <a:bodyPr lIns="0" tIns="0" rIns="0" bIns="0" anchor="t">
             <a:normAutofit/>
           </a:bodyPr>
           <a:p>
-            <a:pPr marL="432000" indent="-324000">
+            <a:pPr marL="431800" indent="-323850">
               <a:spcBef>
-                <a:spcPts val="1417"/>
+                <a:spcPts val="1415"/>
               </a:spcBef>
               <a:buClr>
                 <a:srgbClr val="000000"/>
               </a:buClr>
               <a:buSzPct val="45000"/>
-              <a:buFont typeface="Wingdings" charset="2"/>
+              <a:buFont typeface="Wingdings" panose="05000000000000000000" pitchFamily="2" charset="2"/>
               <a:buChar char=""/>
             </a:pPr>
             <a:r>
-              <a:rPr b="0" lang="en-IN" sz="1800" spc="-1" strike="noStrike">
-                <a:latin typeface="Arial"/>
+              <a:rPr lang="en-IN" sz="1800" b="0" strike="noStrike" spc="-1">
+                <a:latin typeface="Arial" panose="020B0604020202020204"/>
               </a:rPr>
               <a:t>Click to edit the outline text format</a:t>
             </a:r>
-            <a:endParaRPr b="0" lang="en-IN" sz="1800" spc="-1" strike="noStrike">
-              <a:latin typeface="Arial"/>
-            </a:endParaRPr>
-          </a:p>
-          <a:p>
-            <a:pPr lvl="1" marL="864000" indent="-324000">
+            <a:endParaRPr lang="en-IN" sz="1800" b="0" strike="noStrike" spc="-1">
+              <a:latin typeface="Arial" panose="020B0604020202020204"/>
+            </a:endParaRPr>
+          </a:p>
+          <a:p>
+            <a:pPr marL="864235" lvl="1" indent="-323850">
               <a:spcBef>
-                <a:spcPts val="1134"/>
+                <a:spcPts val="1135"/>
               </a:spcBef>
               <a:buClr>
                 <a:srgbClr val="000000"/>
               </a:buClr>
               <a:buSzPct val="75000"/>
-              <a:buFont typeface="Symbol" charset="2"/>
+              <a:buFont typeface="Symbol" panose="05050102010706020507" charset="2"/>
               <a:buChar char=""/>
             </a:pPr>
             <a:r>
-              <a:rPr b="0" lang="en-IN" sz="1800" spc="-1" strike="noStrike">
-                <a:latin typeface="Arial"/>
+              <a:rPr lang="en-IN" sz="1800" b="0" strike="noStrike" spc="-1">
+                <a:latin typeface="Arial" panose="020B0604020202020204"/>
               </a:rPr>
               <a:t>Second Outline Level</a:t>
             </a:r>
-            <a:endParaRPr b="0" lang="en-IN" sz="1800" spc="-1" strike="noStrike">
-              <a:latin typeface="Arial"/>
-            </a:endParaRPr>
-          </a:p>
-          <a:p>
-            <a:pPr lvl="2" marL="1296000" indent="-288000">
+            <a:endParaRPr lang="en-IN" sz="1800" b="0" strike="noStrike" spc="-1">
+              <a:latin typeface="Arial" panose="020B0604020202020204"/>
+            </a:endParaRPr>
+          </a:p>
+          <a:p>
+            <a:pPr marL="1296035" lvl="2" indent="-288290">
               <a:spcBef>
                 <a:spcPts val="850"/>
               </a:spcBef>
@@ -5845,112 +5979,112 @@
                 <a:srgbClr val="000000"/>
               </a:buClr>
               <a:buSzPct val="45000"/>
-              <a:buFont typeface="Wingdings" charset="2"/>
+              <a:buFont typeface="Wingdings" panose="05000000000000000000" pitchFamily="2" charset="2"/>
               <a:buChar char=""/>
             </a:pPr>
             <a:r>
-              <a:rPr b="0" lang="en-IN" sz="1800" spc="-1" strike="noStrike">
-                <a:latin typeface="Arial"/>
+              <a:rPr lang="en-IN" sz="1800" b="0" strike="noStrike" spc="-1">
+                <a:latin typeface="Arial" panose="020B0604020202020204"/>
               </a:rPr>
               <a:t>Third Outline Level</a:t>
             </a:r>
-            <a:endParaRPr b="0" lang="en-IN" sz="1800" spc="-1" strike="noStrike">
-              <a:latin typeface="Arial"/>
-            </a:endParaRPr>
-          </a:p>
-          <a:p>
-            <a:pPr lvl="3" marL="1728000" indent="-216000">
+            <a:endParaRPr lang="en-IN" sz="1800" b="0" strike="noStrike" spc="-1">
+              <a:latin typeface="Arial" panose="020B0604020202020204"/>
+            </a:endParaRPr>
+          </a:p>
+          <a:p>
+            <a:pPr marL="1727835" lvl="3" indent="-215900">
               <a:spcBef>
-                <a:spcPts val="567"/>
+                <a:spcPts val="565"/>
               </a:spcBef>
               <a:buClr>
                 <a:srgbClr val="000000"/>
               </a:buClr>
               <a:buSzPct val="75000"/>
-              <a:buFont typeface="Symbol" charset="2"/>
+              <a:buFont typeface="Symbol" panose="05050102010706020507" charset="2"/>
               <a:buChar char=""/>
             </a:pPr>
             <a:r>
-              <a:rPr b="0" lang="en-IN" sz="1800" spc="-1" strike="noStrike">
-                <a:latin typeface="Arial"/>
+              <a:rPr lang="en-IN" sz="1800" b="0" strike="noStrike" spc="-1">
+                <a:latin typeface="Arial" panose="020B0604020202020204"/>
               </a:rPr>
               <a:t>Fourth Outline Level</a:t>
             </a:r>
-            <a:endParaRPr b="0" lang="en-IN" sz="1800" spc="-1" strike="noStrike">
-              <a:latin typeface="Arial"/>
-            </a:endParaRPr>
-          </a:p>
-          <a:p>
-            <a:pPr lvl="4" marL="2160000" indent="-216000">
+            <a:endParaRPr lang="en-IN" sz="1800" b="0" strike="noStrike" spc="-1">
+              <a:latin typeface="Arial" panose="020B0604020202020204"/>
+            </a:endParaRPr>
+          </a:p>
+          <a:p>
+            <a:pPr marL="2160270" lvl="4" indent="-215900">
               <a:spcBef>
-                <a:spcPts val="283"/>
+                <a:spcPts val="285"/>
               </a:spcBef>
               <a:buClr>
                 <a:srgbClr val="000000"/>
               </a:buClr>
               <a:buSzPct val="45000"/>
-              <a:buFont typeface="Wingdings" charset="2"/>
+              <a:buFont typeface="Wingdings" panose="05000000000000000000" pitchFamily="2" charset="2"/>
               <a:buChar char=""/>
             </a:pPr>
             <a:r>
-              <a:rPr b="0" lang="en-IN" sz="1800" spc="-1" strike="noStrike">
-                <a:latin typeface="Arial"/>
+              <a:rPr lang="en-IN" sz="1800" b="0" strike="noStrike" spc="-1">
+                <a:latin typeface="Arial" panose="020B0604020202020204"/>
               </a:rPr>
               <a:t>Fifth Outline Level</a:t>
             </a:r>
-            <a:endParaRPr b="0" lang="en-IN" sz="1800" spc="-1" strike="noStrike">
-              <a:latin typeface="Arial"/>
-            </a:endParaRPr>
-          </a:p>
-          <a:p>
-            <a:pPr lvl="5" marL="2592000" indent="-216000">
+            <a:endParaRPr lang="en-IN" sz="1800" b="0" strike="noStrike" spc="-1">
+              <a:latin typeface="Arial" panose="020B0604020202020204"/>
+            </a:endParaRPr>
+          </a:p>
+          <a:p>
+            <a:pPr marL="2592070" lvl="5" indent="-215900">
               <a:spcBef>
-                <a:spcPts val="283"/>
+                <a:spcPts val="285"/>
               </a:spcBef>
               <a:buClr>
                 <a:srgbClr val="000000"/>
               </a:buClr>
               <a:buSzPct val="45000"/>
-              <a:buFont typeface="Wingdings" charset="2"/>
+              <a:buFont typeface="Wingdings" panose="05000000000000000000" pitchFamily="2" charset="2"/>
               <a:buChar char=""/>
             </a:pPr>
             <a:r>
-              <a:rPr b="0" lang="en-IN" sz="1800" spc="-1" strike="noStrike">
-                <a:latin typeface="Arial"/>
+              <a:rPr lang="en-IN" sz="1800" b="0" strike="noStrike" spc="-1">
+                <a:latin typeface="Arial" panose="020B0604020202020204"/>
               </a:rPr>
               <a:t>Sixth Outline Level</a:t>
             </a:r>
-            <a:endParaRPr b="0" lang="en-IN" sz="1800" spc="-1" strike="noStrike">
-              <a:latin typeface="Arial"/>
-            </a:endParaRPr>
-          </a:p>
-          <a:p>
-            <a:pPr lvl="6" marL="3024000" indent="-216000">
+            <a:endParaRPr lang="en-IN" sz="1800" b="0" strike="noStrike" spc="-1">
+              <a:latin typeface="Arial" panose="020B0604020202020204"/>
+            </a:endParaRPr>
+          </a:p>
+          <a:p>
+            <a:pPr marL="3023870" lvl="6" indent="-215900">
               <a:spcBef>
-                <a:spcPts val="283"/>
+                <a:spcPts val="285"/>
               </a:spcBef>
               <a:buClr>
                 <a:srgbClr val="000000"/>
               </a:buClr>
               <a:buSzPct val="45000"/>
-              <a:buFont typeface="Wingdings" charset="2"/>
+              <a:buFont typeface="Wingdings" panose="05000000000000000000" pitchFamily="2" charset="2"/>
               <a:buChar char=""/>
             </a:pPr>
             <a:r>
-              <a:rPr b="0" lang="en-IN" sz="1800" spc="-1" strike="noStrike">
-                <a:latin typeface="Arial"/>
+              <a:rPr lang="en-IN" sz="1800" b="0" strike="noStrike" spc="-1">
+                <a:latin typeface="Arial" panose="020B0604020202020204"/>
               </a:rPr>
               <a:t>Seventh Outline Level</a:t>
             </a:r>
-            <a:endParaRPr b="0" lang="en-IN" sz="1800" spc="-1" strike="noStrike">
-              <a:latin typeface="Arial"/>
-            </a:endParaRPr>
-          </a:p>
-        </p:txBody>
-      </p:sp>
-      <p:sp>
-        <p:nvSpPr>
-          <p:cNvPr id="2" name="PlaceHolder 3"/>
+            <a:endParaRPr lang="en-IN" sz="1800" b="0" strike="noStrike" spc="-1">
+              <a:latin typeface="Arial" panose="020B0604020202020204"/>
+            </a:endParaRPr>
+          </a:p>
+        </p:txBody>
+      </p:sp>
+      <p:sp>
+        <p:nvSpPr>
+          <p:cNvPr id="3" name="PlaceHolder 3"/>
           <p:cNvSpPr>
             <a:spLocks noGrp="1"/>
           </p:cNvSpPr>
@@ -5972,7 +6106,7 @@
           </a:ln>
         </p:spPr>
         <p:txBody>
-          <a:bodyPr lIns="90000" rIns="90000" tIns="45000" bIns="45000" anchor="ctr">
+          <a:bodyPr lIns="90000" tIns="45000" rIns="90000" bIns="45000" anchor="ctr">
             <a:noAutofit/>
           </a:bodyPr>
           <a:lstStyle>
@@ -5981,9 +6115,9 @@
                 <a:spcPct val="100000"/>
               </a:lnSpc>
               <a:buNone/>
-              <a:defRPr b="0" lang="en-US" sz="1200" spc="-1" strike="noStrike">
+              <a:defRPr lang="en-US" sz="1200" b="0" strike="noStrike" spc="-1">
                 <a:solidFill>
-                  <a:srgbClr val="8b8b8b"/>
+                  <a:srgbClr val="8B8B8B"/>
                 </a:solidFill>
                 <a:latin typeface="TradeGothic"/>
               </a:defRPr>
@@ -5997,23 +6131,23 @@
               <a:buNone/>
             </a:pPr>
             <a:r>
-              <a:rPr b="0" lang="en-US" sz="1200" spc="-1" strike="noStrike">
+              <a:rPr lang="en-US" sz="1200" b="0" strike="noStrike" spc="-1">
                 <a:solidFill>
-                  <a:srgbClr val="8b8b8b"/>
+                  <a:srgbClr val="8B8B8B"/>
                 </a:solidFill>
                 <a:latin typeface="TradeGothic"/>
               </a:rPr>
               <a:t>&lt;footer&gt;</a:t>
             </a:r>
-            <a:endParaRPr b="0" lang="en-IN" sz="1200" spc="-1" strike="noStrike">
-              <a:latin typeface="Times New Roman"/>
-            </a:endParaRPr>
-          </a:p>
-        </p:txBody>
-      </p:sp>
-      <p:sp>
-        <p:nvSpPr>
-          <p:cNvPr id="3" name="PlaceHolder 4"/>
+            <a:endParaRPr lang="en-IN" sz="1200" b="0" strike="noStrike" spc="-1">
+              <a:latin typeface="Times New Roman" panose="02020603050405020304"/>
+            </a:endParaRPr>
+          </a:p>
+        </p:txBody>
+      </p:sp>
+      <p:sp>
+        <p:nvSpPr>
+          <p:cNvPr id="4" name="PlaceHolder 4"/>
           <p:cNvSpPr>
             <a:spLocks noGrp="1"/>
           </p:cNvSpPr>
@@ -6035,7 +6169,7 @@
           </a:ln>
         </p:spPr>
         <p:txBody>
-          <a:bodyPr numCol="1" spcCol="0" lIns="90000" rIns="90000" tIns="45000" bIns="45000" anchor="ctr">
+          <a:bodyPr lIns="90000" tIns="45000" rIns="90000" bIns="45000" numCol="1" spcCol="0" anchor="ctr">
             <a:noAutofit/>
           </a:bodyPr>
           <a:lstStyle>
@@ -6044,12 +6178,12 @@
                 <a:spcPct val="100000"/>
               </a:lnSpc>
               <a:buNone/>
-              <a:defRPr b="0" lang="en-US" sz="1200" spc="-1" strike="noStrike">
+              <a:defRPr lang="en-US" sz="1200" b="0" strike="noStrike" spc="-1">
                 <a:solidFill>
                   <a:srgbClr val="898989"/>
                 </a:solidFill>
                 <a:latin typeface="TradeGothic"/>
-                <a:ea typeface="ＭＳ Ｐゴシック"/>
+                <a:ea typeface="MS PGothic" panose="020B0600070205080204" charset="-128"/>
               </a:defRPr>
             </a:lvl1pPr>
           </a:lstStyle>
@@ -6061,24 +6195,23 @@
               <a:buNone/>
             </a:pPr>
             <a:fld id="{115B815A-1294-44B3-8D0D-C1619A2BF932}" type="slidenum">
-              <a:rPr b="0" lang="en-US" sz="1200" spc="-1" strike="noStrike">
+              <a:rPr lang="en-US" sz="1200" b="0" strike="noStrike" spc="-1">
                 <a:solidFill>
                   <a:srgbClr val="898989"/>
                 </a:solidFill>
                 <a:latin typeface="TradeGothic"/>
-                <a:ea typeface="ＭＳ Ｐゴシック"/>
+                <a:ea typeface="MS PGothic" panose="020B0600070205080204" charset="-128"/>
               </a:rPr>
-              <a:t>&lt;number&gt;</a:t>
             </a:fld>
-            <a:endParaRPr b="0" lang="en-IN" sz="1200" spc="-1" strike="noStrike">
-              <a:latin typeface="Times New Roman"/>
-            </a:endParaRPr>
-          </a:p>
-        </p:txBody>
-      </p:sp>
-      <p:sp>
-        <p:nvSpPr>
-          <p:cNvPr id="4" name="PlaceHolder 5"/>
+            <a:endParaRPr lang="en-IN" sz="1200" b="0" strike="noStrike" spc="-1">
+              <a:latin typeface="Times New Roman" panose="02020603050405020304"/>
+            </a:endParaRPr>
+          </a:p>
+        </p:txBody>
+      </p:sp>
+      <p:sp>
+        <p:nvSpPr>
+          <p:cNvPr id="5" name="PlaceHolder 5"/>
           <p:cNvSpPr>
             <a:spLocks noGrp="1"/>
           </p:cNvSpPr>
@@ -6100,57 +6233,63 @@
           </a:ln>
         </p:spPr>
         <p:txBody>
-          <a:bodyPr numCol="1" spcCol="0" lIns="90000" rIns="90000" tIns="45000" bIns="45000" anchor="ctr">
+          <a:bodyPr lIns="90000" tIns="45000" rIns="90000" bIns="45000" numCol="1" spcCol="0" anchor="ctr">
             <a:noAutofit/>
           </a:bodyPr>
           <a:lstStyle>
             <a:lvl1pPr>
-              <a:defRPr b="0" lang="en-IN" sz="1400" spc="-1" strike="noStrike">
-                <a:latin typeface="Times New Roman"/>
+              <a:defRPr lang="en-IN" sz="1400" b="0" strike="noStrike" spc="-1">
+                <a:latin typeface="Times New Roman" panose="02020603050405020304"/>
               </a:defRPr>
             </a:lvl1pPr>
           </a:lstStyle>
           <a:p>
             <a:r>
-              <a:rPr b="0" lang="en-IN" sz="1400" spc="-1" strike="noStrike">
-                <a:latin typeface="Times New Roman"/>
+              <a:rPr lang="en-IN" sz="1400" b="0" strike="noStrike" spc="-1">
+                <a:latin typeface="Times New Roman" panose="02020603050405020304"/>
               </a:rPr>
               <a:t>&lt;date/time&gt;</a:t>
             </a:r>
-            <a:endParaRPr b="0" lang="en-IN" sz="1400" spc="-1" strike="noStrike">
-              <a:latin typeface="Times New Roman"/>
+            <a:endParaRPr lang="en-IN" sz="1400" b="0" strike="noStrike" spc="-1">
+              <a:latin typeface="Times New Roman" panose="02020603050405020304"/>
             </a:endParaRPr>
           </a:p>
         </p:txBody>
       </p:sp>
     </p:spTree>
   </p:cSld>
-  <p:clrMap bg1="lt1" bg2="lt2" tx1="dk1" tx2="dk2" accent1="accent1" accent2="accent2" accent3="accent3" accent4="accent4" accent5="accent5" accent6="accent6" hlink="hlink" folHlink="folHlink"/>
+  <p:clrMap bg1="lt1" tx1="dk1" bg2="lt2" tx2="dk2" accent1="accent1" accent2="accent2" accent3="accent3" accent4="accent4" accent5="accent5" accent6="accent6" hlink="hlink" folHlink="folHlink"/>
   <p:sldLayoutIdLst>
-    <p:sldLayoutId id="2147483649" r:id="rId2"/>
-    <p:sldLayoutId id="2147483650" r:id="rId3"/>
-    <p:sldLayoutId id="2147483651" r:id="rId4"/>
-    <p:sldLayoutId id="2147483652" r:id="rId5"/>
-    <p:sldLayoutId id="2147483653" r:id="rId6"/>
-    <p:sldLayoutId id="2147483654" r:id="rId7"/>
-    <p:sldLayoutId id="2147483655" r:id="rId8"/>
-    <p:sldLayoutId id="2147483656" r:id="rId9"/>
-    <p:sldLayoutId id="2147483657" r:id="rId10"/>
-    <p:sldLayoutId id="2147483658" r:id="rId11"/>
-    <p:sldLayoutId id="2147483659" r:id="rId12"/>
-    <p:sldLayoutId id="2147483660" r:id="rId13"/>
+    <p:sldLayoutId id="2147483649" r:id="rId1"/>
+    <p:sldLayoutId id="2147483650" r:id="rId2"/>
+    <p:sldLayoutId id="2147483651" r:id="rId3"/>
+    <p:sldLayoutId id="2147483652" r:id="rId4"/>
+    <p:sldLayoutId id="2147483653" r:id="rId5"/>
+    <p:sldLayoutId id="2147483654" r:id="rId6"/>
+    <p:sldLayoutId id="2147483655" r:id="rId7"/>
+    <p:sldLayoutId id="2147483656" r:id="rId8"/>
+    <p:sldLayoutId id="2147483657" r:id="rId9"/>
+    <p:sldLayoutId id="2147483658" r:id="rId10"/>
+    <p:sldLayoutId id="2147483659" r:id="rId11"/>
+    <p:sldLayoutId id="2147483660" r:id="rId12"/>
   </p:sldLayoutIdLst>
+  <p:txStyles>
+    <p:titleStyle/>
+    <p:bodyStyle/>
+    <p:otherStyle/>
+  </p:txStyles>
 </p:sldMaster>
 </file>
 
 <file path=ppt/slideMasters/slideMaster2.xml><?xml version="1.0" encoding="utf-8"?>
-<p:sldMaster xmlns:a="http://schemas.openxmlformats.org/drawingml/2006/main" xmlns:p="http://schemas.openxmlformats.org/presentationml/2006/main" xmlns:r="http://schemas.openxmlformats.org/officeDocument/2006/relationships" xmlns:p14="http://schemas.microsoft.com/office/powerpoint/2010/main" xmlns:p15="http://schemas.microsoft.com/office/powerpoint/2012/main" xmlns:mc="http://schemas.openxmlformats.org/markup-compatibility/2006">
+<p:sldMaster xmlns:a="http://schemas.openxmlformats.org/drawingml/2006/main" xmlns:r="http://schemas.openxmlformats.org/officeDocument/2006/relationships" xmlns:p="http://schemas.openxmlformats.org/presentationml/2006/main">
   <p:cSld>
     <p:bg>
       <p:bgPr>
         <a:solidFill>
-          <a:srgbClr val="ffffff"/>
+          <a:srgbClr val="FFFFFF"/>
         </a:solidFill>
+        <a:effectLst/>
       </p:bgPr>
     </p:bg>
     <p:spTree>
@@ -6191,7 +6330,7 @@
           </a:ln>
         </p:spPr>
         <p:txBody>
-          <a:bodyPr lIns="90000" rIns="90000" tIns="45000" bIns="45000" anchor="ctr">
+          <a:bodyPr lIns="90000" tIns="45000" rIns="90000" bIns="45000" anchor="ctr">
             <a:noAutofit/>
           </a:bodyPr>
           <a:lstStyle>
@@ -6200,9 +6339,9 @@
                 <a:spcPct val="100000"/>
               </a:lnSpc>
               <a:buNone/>
-              <a:defRPr b="0" lang="en-US" sz="1200" spc="-1" strike="noStrike">
+              <a:defRPr lang="en-US" sz="1200" b="0" strike="noStrike" spc="-1">
                 <a:solidFill>
-                  <a:srgbClr val="8b8b8b"/>
+                  <a:srgbClr val="8B8B8B"/>
                 </a:solidFill>
                 <a:latin typeface="TradeGothic"/>
               </a:defRPr>
@@ -6216,16 +6355,16 @@
               <a:buNone/>
             </a:pPr>
             <a:r>
-              <a:rPr b="0" lang="en-US" sz="1200" spc="-1" strike="noStrike">
+              <a:rPr lang="en-US" sz="1200" b="0" strike="noStrike" spc="-1">
                 <a:solidFill>
-                  <a:srgbClr val="8b8b8b"/>
+                  <a:srgbClr val="8B8B8B"/>
                 </a:solidFill>
                 <a:latin typeface="TradeGothic"/>
               </a:rPr>
               <a:t>&lt;footer&gt;</a:t>
             </a:r>
-            <a:endParaRPr b="0" lang="en-IN" sz="1200" spc="-1" strike="noStrike">
-              <a:latin typeface="Times New Roman"/>
+            <a:endParaRPr lang="en-IN" sz="1200" b="0" strike="noStrike" spc="-1">
+              <a:latin typeface="Times New Roman" panose="02020603050405020304"/>
             </a:endParaRPr>
           </a:p>
         </p:txBody>
@@ -6254,7 +6393,7 @@
           </a:ln>
         </p:spPr>
         <p:txBody>
-          <a:bodyPr numCol="1" spcCol="0" lIns="90000" rIns="90000" tIns="45000" bIns="45000" anchor="ctr">
+          <a:bodyPr lIns="90000" tIns="45000" rIns="90000" bIns="45000" numCol="1" spcCol="0" anchor="ctr">
             <a:noAutofit/>
           </a:bodyPr>
           <a:lstStyle>
@@ -6263,12 +6402,12 @@
                 <a:spcPct val="100000"/>
               </a:lnSpc>
               <a:buNone/>
-              <a:defRPr b="0" lang="en-US" sz="1200" spc="-1" strike="noStrike">
+              <a:defRPr lang="en-US" sz="1200" b="0" strike="noStrike" spc="-1">
                 <a:solidFill>
                   <a:srgbClr val="898989"/>
                 </a:solidFill>
                 <a:latin typeface="TradeGothic"/>
-                <a:ea typeface="ＭＳ Ｐゴシック"/>
+                <a:ea typeface="MS PGothic" panose="020B0600070205080204" charset="-128"/>
               </a:defRPr>
             </a:lvl1pPr>
           </a:lstStyle>
@@ -6280,17 +6419,16 @@
               <a:buNone/>
             </a:pPr>
             <a:fld id="{1D8BBF78-1F55-41D1-BE4B-EA4AB89958BD}" type="slidenum">
-              <a:rPr b="0" lang="en-US" sz="1200" spc="-1" strike="noStrike">
+              <a:rPr lang="en-US" sz="1200" b="0" strike="noStrike" spc="-1">
                 <a:solidFill>
                   <a:srgbClr val="898989"/>
                 </a:solidFill>
                 <a:latin typeface="TradeGothic"/>
-                <a:ea typeface="ＭＳ Ｐゴシック"/>
+                <a:ea typeface="MS PGothic" panose="020B0600070205080204" charset="-128"/>
               </a:rPr>
-              <a:t>&lt;number&gt;</a:t>
             </a:fld>
-            <a:endParaRPr b="0" lang="en-IN" sz="1200" spc="-1" strike="noStrike">
-              <a:latin typeface="Times New Roman"/>
+            <a:endParaRPr lang="en-IN" sz="1200" b="0" strike="noStrike" spc="-1">
+              <a:latin typeface="Times New Roman" panose="02020603050405020304"/>
             </a:endParaRPr>
           </a:p>
         </p:txBody>
@@ -6319,25 +6457,25 @@
           </a:ln>
         </p:spPr>
         <p:txBody>
-          <a:bodyPr numCol="1" spcCol="0" lIns="90000" rIns="90000" tIns="45000" bIns="45000" anchor="ctr">
+          <a:bodyPr lIns="90000" tIns="45000" rIns="90000" bIns="45000" numCol="1" spcCol="0" anchor="ctr">
             <a:noAutofit/>
           </a:bodyPr>
           <a:lstStyle>
             <a:lvl1pPr>
-              <a:defRPr b="0" lang="en-IN" sz="1400" spc="-1" strike="noStrike">
-                <a:latin typeface="Times New Roman"/>
+              <a:defRPr lang="en-IN" sz="1400" b="0" strike="noStrike" spc="-1">
+                <a:latin typeface="Times New Roman" panose="02020603050405020304"/>
               </a:defRPr>
             </a:lvl1pPr>
           </a:lstStyle>
           <a:p>
             <a:r>
-              <a:rPr b="0" lang="en-IN" sz="1400" spc="-1" strike="noStrike">
-                <a:latin typeface="Times New Roman"/>
+              <a:rPr lang="en-IN" sz="1400" b="0" strike="noStrike" spc="-1">
+                <a:latin typeface="Times New Roman" panose="02020603050405020304"/>
               </a:rPr>
               <a:t>&lt;date/time&gt;</a:t>
             </a:r>
-            <a:endParaRPr b="0" lang="en-IN" sz="1400" spc="-1" strike="noStrike">
-              <a:latin typeface="Times New Roman"/>
+            <a:endParaRPr lang="en-IN" sz="1400" b="0" strike="noStrike" spc="-1">
+              <a:latin typeface="Times New Roman" panose="02020603050405020304"/>
             </a:endParaRPr>
           </a:p>
         </p:txBody>
@@ -6366,7 +6504,7 @@
           </a:ln>
         </p:spPr>
         <p:txBody>
-          <a:bodyPr lIns="0" rIns="0" tIns="0" bIns="0" anchor="ctr">
+          <a:bodyPr lIns="0" tIns="0" rIns="0" bIns="0" anchor="ctr">
             <a:noAutofit/>
           </a:bodyPr>
           <a:p>
@@ -6374,13 +6512,13 @@
               <a:buNone/>
             </a:pPr>
             <a:r>
-              <a:rPr b="0" lang="en-IN" sz="4400" spc="-1" strike="noStrike">
-                <a:latin typeface="Arial"/>
+              <a:rPr lang="en-IN" sz="4400" b="0" strike="noStrike" spc="-1">
+                <a:latin typeface="Arial" panose="020B0604020202020204"/>
               </a:rPr>
               <a:t>Click to edit the title text format</a:t>
             </a:r>
-            <a:endParaRPr b="0" lang="en-IN" sz="4400" spc="-1" strike="noStrike">
-              <a:latin typeface="Arial"/>
+            <a:endParaRPr lang="en-IN" sz="4400" b="0" strike="noStrike" spc="-1">
+              <a:latin typeface="Arial" panose="020B0604020202020204"/>
             </a:endParaRPr>
           </a:p>
         </p:txBody>
@@ -6409,55 +6547,55 @@
           </a:ln>
         </p:spPr>
         <p:txBody>
-          <a:bodyPr lIns="0" rIns="0" tIns="0" bIns="0" anchor="t">
+          <a:bodyPr lIns="0" tIns="0" rIns="0" bIns="0" anchor="t">
             <a:normAutofit/>
           </a:bodyPr>
           <a:p>
-            <a:pPr marL="432000" indent="-324000">
+            <a:pPr marL="431800" indent="-323850">
               <a:spcBef>
-                <a:spcPts val="1417"/>
+                <a:spcPts val="1415"/>
               </a:spcBef>
               <a:buClr>
                 <a:srgbClr val="000000"/>
               </a:buClr>
               <a:buSzPct val="45000"/>
-              <a:buFont typeface="Wingdings" charset="2"/>
+              <a:buFont typeface="Wingdings" panose="05000000000000000000" pitchFamily="2" charset="2"/>
               <a:buChar char=""/>
             </a:pPr>
             <a:r>
-              <a:rPr b="0" lang="en-IN" sz="3200" spc="-1" strike="noStrike">
-                <a:latin typeface="Arial"/>
+              <a:rPr lang="en-IN" sz="3200" b="0" strike="noStrike" spc="-1">
+                <a:latin typeface="Arial" panose="020B0604020202020204"/>
               </a:rPr>
               <a:t>Click to edit the outline text format</a:t>
             </a:r>
-            <a:endParaRPr b="0" lang="en-IN" sz="3200" spc="-1" strike="noStrike">
-              <a:latin typeface="Arial"/>
-            </a:endParaRPr>
-          </a:p>
-          <a:p>
-            <a:pPr lvl="1" marL="864000" indent="-324000">
+            <a:endParaRPr lang="en-IN" sz="3200" b="0" strike="noStrike" spc="-1">
+              <a:latin typeface="Arial" panose="020B0604020202020204"/>
+            </a:endParaRPr>
+          </a:p>
+          <a:p>
+            <a:pPr marL="864235" lvl="1" indent="-323850">
               <a:spcBef>
-                <a:spcPts val="1134"/>
+                <a:spcPts val="1135"/>
               </a:spcBef>
               <a:buClr>
                 <a:srgbClr val="000000"/>
               </a:buClr>
               <a:buSzPct val="75000"/>
-              <a:buFont typeface="Symbol" charset="2"/>
+              <a:buFont typeface="Symbol" panose="05050102010706020507" charset="2"/>
               <a:buChar char=""/>
             </a:pPr>
             <a:r>
-              <a:rPr b="0" lang="en-IN" sz="2800" spc="-1" strike="noStrike">
-                <a:latin typeface="Arial"/>
+              <a:rPr lang="en-IN" sz="2800" b="0" strike="noStrike" spc="-1">
+                <a:latin typeface="Arial" panose="020B0604020202020204"/>
               </a:rPr>
               <a:t>Second Outline Level</a:t>
             </a:r>
-            <a:endParaRPr b="0" lang="en-IN" sz="2800" spc="-1" strike="noStrike">
-              <a:latin typeface="Arial"/>
-            </a:endParaRPr>
-          </a:p>
-          <a:p>
-            <a:pPr lvl="2" marL="1296000" indent="-288000">
+            <a:endParaRPr lang="en-IN" sz="2800" b="0" strike="noStrike" spc="-1">
+              <a:latin typeface="Arial" panose="020B0604020202020204"/>
+            </a:endParaRPr>
+          </a:p>
+          <a:p>
+            <a:pPr marL="1296035" lvl="2" indent="-288290">
               <a:spcBef>
                 <a:spcPts val="850"/>
               </a:spcBef>
@@ -6465,137 +6603,143 @@
                 <a:srgbClr val="000000"/>
               </a:buClr>
               <a:buSzPct val="45000"/>
-              <a:buFont typeface="Wingdings" charset="2"/>
+              <a:buFont typeface="Wingdings" panose="05000000000000000000" pitchFamily="2" charset="2"/>
               <a:buChar char=""/>
             </a:pPr>
             <a:r>
-              <a:rPr b="0" lang="en-IN" sz="2400" spc="-1" strike="noStrike">
-                <a:latin typeface="Arial"/>
+              <a:rPr lang="en-IN" sz="2400" b="0" strike="noStrike" spc="-1">
+                <a:latin typeface="Arial" panose="020B0604020202020204"/>
               </a:rPr>
               <a:t>Third Outline Level</a:t>
             </a:r>
-            <a:endParaRPr b="0" lang="en-IN" sz="2400" spc="-1" strike="noStrike">
-              <a:latin typeface="Arial"/>
-            </a:endParaRPr>
-          </a:p>
-          <a:p>
-            <a:pPr lvl="3" marL="1728000" indent="-216000">
+            <a:endParaRPr lang="en-IN" sz="2400" b="0" strike="noStrike" spc="-1">
+              <a:latin typeface="Arial" panose="020B0604020202020204"/>
+            </a:endParaRPr>
+          </a:p>
+          <a:p>
+            <a:pPr marL="1727835" lvl="3" indent="-215900">
               <a:spcBef>
-                <a:spcPts val="567"/>
+                <a:spcPts val="565"/>
               </a:spcBef>
               <a:buClr>
                 <a:srgbClr val="000000"/>
               </a:buClr>
               <a:buSzPct val="75000"/>
-              <a:buFont typeface="Symbol" charset="2"/>
+              <a:buFont typeface="Symbol" panose="05050102010706020507" charset="2"/>
               <a:buChar char=""/>
             </a:pPr>
             <a:r>
-              <a:rPr b="0" lang="en-IN" sz="2000" spc="-1" strike="noStrike">
-                <a:latin typeface="Arial"/>
+              <a:rPr lang="en-IN" sz="2000" b="0" strike="noStrike" spc="-1">
+                <a:latin typeface="Arial" panose="020B0604020202020204"/>
               </a:rPr>
               <a:t>Fourth Outline Level</a:t>
             </a:r>
-            <a:endParaRPr b="0" lang="en-IN" sz="2000" spc="-1" strike="noStrike">
-              <a:latin typeface="Arial"/>
-            </a:endParaRPr>
-          </a:p>
-          <a:p>
-            <a:pPr lvl="4" marL="2160000" indent="-216000">
+            <a:endParaRPr lang="en-IN" sz="2000" b="0" strike="noStrike" spc="-1">
+              <a:latin typeface="Arial" panose="020B0604020202020204"/>
+            </a:endParaRPr>
+          </a:p>
+          <a:p>
+            <a:pPr marL="2160270" lvl="4" indent="-215900">
               <a:spcBef>
-                <a:spcPts val="283"/>
+                <a:spcPts val="285"/>
               </a:spcBef>
               <a:buClr>
                 <a:srgbClr val="000000"/>
               </a:buClr>
               <a:buSzPct val="45000"/>
-              <a:buFont typeface="Wingdings" charset="2"/>
+              <a:buFont typeface="Wingdings" panose="05000000000000000000" pitchFamily="2" charset="2"/>
               <a:buChar char=""/>
             </a:pPr>
             <a:r>
-              <a:rPr b="0" lang="en-IN" sz="2000" spc="-1" strike="noStrike">
-                <a:latin typeface="Arial"/>
+              <a:rPr lang="en-IN" sz="2000" b="0" strike="noStrike" spc="-1">
+                <a:latin typeface="Arial" panose="020B0604020202020204"/>
               </a:rPr>
               <a:t>Fifth Outline Level</a:t>
             </a:r>
-            <a:endParaRPr b="0" lang="en-IN" sz="2000" spc="-1" strike="noStrike">
-              <a:latin typeface="Arial"/>
-            </a:endParaRPr>
-          </a:p>
-          <a:p>
-            <a:pPr lvl="5" marL="2592000" indent="-216000">
+            <a:endParaRPr lang="en-IN" sz="2000" b="0" strike="noStrike" spc="-1">
+              <a:latin typeface="Arial" panose="020B0604020202020204"/>
+            </a:endParaRPr>
+          </a:p>
+          <a:p>
+            <a:pPr marL="2592070" lvl="5" indent="-215900">
               <a:spcBef>
-                <a:spcPts val="283"/>
+                <a:spcPts val="285"/>
               </a:spcBef>
               <a:buClr>
                 <a:srgbClr val="000000"/>
               </a:buClr>
               <a:buSzPct val="45000"/>
-              <a:buFont typeface="Wingdings" charset="2"/>
+              <a:buFont typeface="Wingdings" panose="05000000000000000000" pitchFamily="2" charset="2"/>
               <a:buChar char=""/>
             </a:pPr>
             <a:r>
-              <a:rPr b="0" lang="en-IN" sz="2000" spc="-1" strike="noStrike">
-                <a:latin typeface="Arial"/>
+              <a:rPr lang="en-IN" sz="2000" b="0" strike="noStrike" spc="-1">
+                <a:latin typeface="Arial" panose="020B0604020202020204"/>
               </a:rPr>
               <a:t>Sixth Outline Level</a:t>
             </a:r>
-            <a:endParaRPr b="0" lang="en-IN" sz="2000" spc="-1" strike="noStrike">
-              <a:latin typeface="Arial"/>
-            </a:endParaRPr>
-          </a:p>
-          <a:p>
-            <a:pPr lvl="6" marL="3024000" indent="-216000">
+            <a:endParaRPr lang="en-IN" sz="2000" b="0" strike="noStrike" spc="-1">
+              <a:latin typeface="Arial" panose="020B0604020202020204"/>
+            </a:endParaRPr>
+          </a:p>
+          <a:p>
+            <a:pPr marL="3023870" lvl="6" indent="-215900">
               <a:spcBef>
-                <a:spcPts val="283"/>
+                <a:spcPts val="285"/>
               </a:spcBef>
               <a:buClr>
                 <a:srgbClr val="000000"/>
               </a:buClr>
               <a:buSzPct val="45000"/>
-              <a:buFont typeface="Wingdings" charset="2"/>
+              <a:buFont typeface="Wingdings" panose="05000000000000000000" pitchFamily="2" charset="2"/>
               <a:buChar char=""/>
             </a:pPr>
             <a:r>
-              <a:rPr b="0" lang="en-IN" sz="2000" spc="-1" strike="noStrike">
-                <a:latin typeface="Arial"/>
+              <a:rPr lang="en-IN" sz="2000" b="0" strike="noStrike" spc="-1">
+                <a:latin typeface="Arial" panose="020B0604020202020204"/>
               </a:rPr>
               <a:t>Seventh Outline Level</a:t>
             </a:r>
-            <a:endParaRPr b="0" lang="en-IN" sz="2000" spc="-1" strike="noStrike">
-              <a:latin typeface="Arial"/>
+            <a:endParaRPr lang="en-IN" sz="2000" b="0" strike="noStrike" spc="-1">
+              <a:latin typeface="Arial" panose="020B0604020202020204"/>
             </a:endParaRPr>
           </a:p>
         </p:txBody>
       </p:sp>
     </p:spTree>
   </p:cSld>
-  <p:clrMap bg1="lt1" bg2="lt2" tx1="dk1" tx2="dk2" accent1="accent1" accent2="accent2" accent3="accent3" accent4="accent4" accent5="accent5" accent6="accent6" hlink="hlink" folHlink="folHlink"/>
+  <p:clrMap bg1="lt1" tx1="dk1" bg2="lt2" tx2="dk2" accent1="accent1" accent2="accent2" accent3="accent3" accent4="accent4" accent5="accent5" accent6="accent6" hlink="hlink" folHlink="folHlink"/>
   <p:sldLayoutIdLst>
-    <p:sldLayoutId id="2147483662" r:id="rId2"/>
-    <p:sldLayoutId id="2147483663" r:id="rId3"/>
-    <p:sldLayoutId id="2147483664" r:id="rId4"/>
-    <p:sldLayoutId id="2147483665" r:id="rId5"/>
-    <p:sldLayoutId id="2147483666" r:id="rId6"/>
-    <p:sldLayoutId id="2147483667" r:id="rId7"/>
-    <p:sldLayoutId id="2147483668" r:id="rId8"/>
-    <p:sldLayoutId id="2147483669" r:id="rId9"/>
-    <p:sldLayoutId id="2147483670" r:id="rId10"/>
-    <p:sldLayoutId id="2147483671" r:id="rId11"/>
-    <p:sldLayoutId id="2147483672" r:id="rId12"/>
-    <p:sldLayoutId id="2147483673" r:id="rId13"/>
+    <p:sldLayoutId id="2147483662" r:id="rId1"/>
+    <p:sldLayoutId id="2147483663" r:id="rId2"/>
+    <p:sldLayoutId id="2147483664" r:id="rId3"/>
+    <p:sldLayoutId id="2147483665" r:id="rId4"/>
+    <p:sldLayoutId id="2147483666" r:id="rId5"/>
+    <p:sldLayoutId id="2147483667" r:id="rId6"/>
+    <p:sldLayoutId id="2147483668" r:id="rId7"/>
+    <p:sldLayoutId id="2147483669" r:id="rId8"/>
+    <p:sldLayoutId id="2147483670" r:id="rId9"/>
+    <p:sldLayoutId id="2147483671" r:id="rId10"/>
+    <p:sldLayoutId id="2147483672" r:id="rId11"/>
+    <p:sldLayoutId id="2147483673" r:id="rId12"/>
   </p:sldLayoutIdLst>
+  <p:txStyles>
+    <p:titleStyle/>
+    <p:bodyStyle/>
+    <p:otherStyle/>
+  </p:txStyles>
 </p:sldMaster>
 </file>
 
 <file path=ppt/slides/slide1.xml><?xml version="1.0" encoding="utf-8"?>
-<p:sld xmlns:a="http://schemas.openxmlformats.org/drawingml/2006/main" xmlns:p="http://schemas.openxmlformats.org/presentationml/2006/main" xmlns:r="http://schemas.openxmlformats.org/officeDocument/2006/relationships" xmlns:p14="http://schemas.microsoft.com/office/powerpoint/2010/main" xmlns:p15="http://schemas.microsoft.com/office/powerpoint/2012/main" xmlns:mc="http://schemas.openxmlformats.org/markup-compatibility/2006">
+<p:sld xmlns:a="http://schemas.openxmlformats.org/drawingml/2006/main" xmlns:r="http://schemas.openxmlformats.org/officeDocument/2006/relationships" xmlns:p="http://schemas.openxmlformats.org/presentationml/2006/main">
   <p:cSld>
     <p:bg>
       <p:bgPr>
         <a:solidFill>
-          <a:srgbClr val="ffffff"/>
+          <a:srgbClr val="FFFFFF"/>
         </a:solidFill>
+        <a:effectLst/>
       </p:bgPr>
     </p:bg>
     <p:spTree>
@@ -6663,6 +6807,7 @@
             <a:avLst/>
             <a:gdLst/>
             <a:ahLst/>
+            <a:cxnLst/>
             <a:rect l="l" t="t" r="r" b="b"/>
             <a:pathLst>
               <a:path w="6184806" h="5154967">
@@ -7027,14 +7172,16 @@
       </p:sp>
       <p:pic>
         <p:nvPicPr>
-          <p:cNvPr id="90" name="Picture 4" descr=""/>
+          <p:cNvPr id="90" name="Picture 4"/>
           <p:cNvPicPr/>
           <p:nvPr/>
         </p:nvPicPr>
         <p:blipFill>
           <a:blip r:embed="rId1"/>
-          <a:srcRect l="0" t="0" r="59916" b="0"/>
-          <a:stretch/>
+          <a:srcRect r="59916"/>
+          <a:stretch>
+            <a:fillRect/>
+          </a:stretch>
         </p:blipFill>
         <p:spPr>
           <a:xfrm>
@@ -7073,7 +7220,7 @@
           </a:ln>
         </p:spPr>
         <p:txBody>
-          <a:bodyPr numCol="1" spcCol="0" lIns="0" rIns="0" tIns="0" bIns="0" anchor="t">
+          <a:bodyPr lIns="0" tIns="0" rIns="0" bIns="0" numCol="1" spcCol="0" anchor="t">
             <a:noAutofit/>
           </a:bodyPr>
           <a:p>
@@ -7082,15 +7229,15 @@
                 <a:spcPct val="100000"/>
               </a:lnSpc>
               <a:spcBef>
-                <a:spcPts val="641"/>
+                <a:spcPts val="640"/>
               </a:spcBef>
               <a:buNone/>
               <a:tabLst>
-                <a:tab algn="l" pos="0"/>
+                <a:tab pos="0" algn="l"/>
               </a:tabLst>
             </a:pPr>
-            <a:endParaRPr b="0" lang="en-IN" sz="3200" spc="-1" strike="noStrike">
-              <a:latin typeface="Arial"/>
+            <a:endParaRPr lang="en-IN" sz="3200" b="0" strike="noStrike" spc="-1">
+              <a:latin typeface="Arial" panose="020B0604020202020204"/>
             </a:endParaRPr>
           </a:p>
           <a:p>
@@ -7099,25 +7246,25 @@
                 <a:spcPct val="100000"/>
               </a:lnSpc>
               <a:spcBef>
-                <a:spcPts val="641"/>
+                <a:spcPts val="640"/>
               </a:spcBef>
               <a:buNone/>
               <a:tabLst>
-                <a:tab algn="l" pos="0"/>
+                <a:tab pos="0" algn="l"/>
               </a:tabLst>
             </a:pPr>
             <a:r>
-              <a:rPr b="1" lang="en-US" sz="3200" spc="-1" strike="noStrike">
+              <a:rPr lang="en-US" sz="3200" b="1" strike="noStrike" spc="-1">
                 <a:solidFill>
                   <a:srgbClr val="000000"/>
                 </a:solidFill>
-                <a:latin typeface="Times New Roman"/>
-                <a:ea typeface="ＭＳ Ｐゴシック"/>
+                <a:latin typeface="Times New Roman" panose="02020603050405020304"/>
+                <a:ea typeface="MS PGothic" panose="020B0600070205080204" charset="-128"/>
               </a:rPr>
               <a:t>TITLE PAGE</a:t>
             </a:r>
-            <a:endParaRPr b="0" lang="en-IN" sz="3200" spc="-1" strike="noStrike">
-              <a:latin typeface="Arial"/>
+            <a:endParaRPr lang="en-IN" sz="3200" b="0" strike="noStrike" spc="-1">
+              <a:latin typeface="Arial" panose="020B0604020202020204"/>
             </a:endParaRPr>
           </a:p>
         </p:txBody>
@@ -7146,7 +7293,7 @@
           </a:ln>
         </p:spPr>
         <p:txBody>
-          <a:bodyPr numCol="1" spcCol="0" lIns="0" rIns="0" tIns="0" bIns="0" anchor="ctr">
+          <a:bodyPr lIns="0" tIns="0" rIns="0" bIns="0" numCol="1" spcCol="0" anchor="ctr">
             <a:noAutofit/>
           </a:bodyPr>
           <a:p>
@@ -7157,17 +7304,17 @@
               <a:buNone/>
             </a:pPr>
             <a:r>
-              <a:rPr b="1" lang="en-US" sz="4000" spc="-1" strike="noStrike">
+              <a:rPr lang="en-US" sz="4000" b="1" strike="noStrike" spc="-1">
                 <a:solidFill>
-                  <a:srgbClr val="1f497d"/>
+                  <a:srgbClr val="1F497D"/>
                 </a:solidFill>
                 <a:latin typeface="Garamond"/>
-                <a:ea typeface="ＭＳ Ｐゴシック"/>
+                <a:ea typeface="MS PGothic" panose="020B0600070205080204" charset="-128"/>
               </a:rPr>
               <a:t>SMART INDIA HACKATHON 2026</a:t>
             </a:r>
-            <a:endParaRPr b="0" lang="en-IN" sz="4000" spc="-1" strike="noStrike">
-              <a:latin typeface="Arial"/>
+            <a:endParaRPr lang="en-IN" sz="4000" b="0" strike="noStrike" spc="-1">
+              <a:latin typeface="Arial" panose="020B0604020202020204"/>
             </a:endParaRPr>
           </a:p>
         </p:txBody>
@@ -7181,7 +7328,7 @@
         <p:spPr>
           <a:xfrm>
             <a:off x="-267120" y="2446920"/>
-            <a:ext cx="5923440" cy="4753080"/>
+            <a:ext cx="5923440" cy="4797425"/>
           </a:xfrm>
           <a:prstGeom prst="rect">
             <a:avLst/>
@@ -7192,13 +7339,19 @@
           </a:ln>
         </p:spPr>
         <p:style>
-          <a:lnRef idx="0"/>
-          <a:fillRef idx="0"/>
-          <a:effectRef idx="0"/>
+          <a:lnRef idx="0">
+            <a:srgbClr val="FFFFFF"/>
+          </a:lnRef>
+          <a:fillRef idx="0">
+            <a:srgbClr val="FFFFFF"/>
+          </a:fillRef>
+          <a:effectRef idx="0">
+            <a:srgbClr val="FFFFFF"/>
+          </a:effectRef>
           <a:fontRef idx="minor"/>
         </p:style>
         <p:txBody>
-          <a:bodyPr lIns="90000" rIns="90000" tIns="45000" bIns="45000" anchor="t">
+          <a:bodyPr lIns="90000" tIns="45000" rIns="90000" bIns="45000" anchor="t">
             <a:spAutoFit/>
           </a:bodyPr>
           <a:p>
@@ -7208,171 +7361,173 @@
               </a:lnSpc>
               <a:buNone/>
             </a:pPr>
-            <a:endParaRPr b="0" lang="en-IN" sz="1800" spc="-1" strike="noStrike">
-              <a:latin typeface="Arial"/>
-            </a:endParaRPr>
-          </a:p>
-          <a:p>
-            <a:pPr marL="285840" indent="-285840" algn="just">
+            <a:endParaRPr lang="en-IN" sz="1800" b="0" strike="noStrike" spc="-1">
+              <a:latin typeface="Arial" panose="020B0604020202020204"/>
+            </a:endParaRPr>
+          </a:p>
+          <a:p>
+            <a:pPr marL="285750" indent="-285750" algn="just">
               <a:lnSpc>
                 <a:spcPct val="200000"/>
               </a:lnSpc>
               <a:buClr>
                 <a:srgbClr val="000000"/>
               </a:buClr>
-              <a:buFont typeface="Arial"/>
+              <a:buFont typeface="Arial" panose="020B0604020202020204"/>
               <a:buChar char="•"/>
             </a:pPr>
             <a:r>
-              <a:rPr b="1" lang="en-US" sz="2400" spc="-1" strike="noStrike">
+              <a:rPr lang="en-US" sz="2400" b="1" strike="noStrike" spc="-1">
                 <a:solidFill>
                   <a:srgbClr val="000000"/>
                 </a:solidFill>
-                <a:latin typeface="Arial"/>
-                <a:ea typeface="ＭＳ Ｐゴシック"/>
+                <a:latin typeface="Arial" panose="020B0604020202020204"/>
+                <a:ea typeface="MS PGothic" panose="020B0600070205080204" charset="-128"/>
               </a:rPr>
-              <a:t>Problem Statement ID –</a:t>
+              <a:t>Problem Statement ID –hiihello</a:t>
             </a:r>
-            <a:endParaRPr b="0" lang="en-IN" sz="2400" spc="-1" strike="noStrike">
-              <a:latin typeface="Arial"/>
-            </a:endParaRPr>
-          </a:p>
-          <a:p>
-            <a:pPr marL="285840" indent="-285840" algn="just">
+            <a:endParaRPr lang="en-IN" sz="2400" b="0" strike="noStrike" spc="-1">
+              <a:latin typeface="Arial" panose="020B0604020202020204"/>
+            </a:endParaRPr>
+          </a:p>
+          <a:p>
+            <a:pPr marL="285750" indent="-285750" algn="just">
               <a:lnSpc>
                 <a:spcPct val="200000"/>
               </a:lnSpc>
               <a:buClr>
                 <a:srgbClr val="000000"/>
               </a:buClr>
-              <a:buFont typeface="Arial"/>
+              <a:buFont typeface="Arial" panose="020B0604020202020204"/>
               <a:buChar char="•"/>
             </a:pPr>
             <a:r>
-              <a:rPr b="1" lang="en-US" sz="2400" spc="-1" strike="noStrike">
+              <a:rPr lang="en-US" sz="2400" b="1" strike="noStrike" spc="-1">
                 <a:solidFill>
                   <a:srgbClr val="000000"/>
                 </a:solidFill>
-                <a:latin typeface="Arial"/>
-                <a:ea typeface="ＭＳ Ｐゴシック"/>
+                <a:latin typeface="Arial" panose="020B0604020202020204"/>
+                <a:ea typeface="MS PGothic" panose="020B0600070205080204" charset="-128"/>
               </a:rPr>
               <a:t>Problem Statement Title-</a:t>
             </a:r>
-            <a:endParaRPr b="0" lang="en-IN" sz="2400" spc="-1" strike="noStrike">
-              <a:latin typeface="Arial"/>
-            </a:endParaRPr>
-          </a:p>
-          <a:p>
-            <a:pPr marL="285840" indent="-285840" algn="just">
+            <a:endParaRPr lang="en-IN" sz="2400" b="0" strike="noStrike" spc="-1">
+              <a:latin typeface="Arial" panose="020B0604020202020204"/>
+            </a:endParaRPr>
+          </a:p>
+          <a:p>
+            <a:pPr marL="285750" indent="-285750" algn="just">
               <a:lnSpc>
                 <a:spcPct val="200000"/>
               </a:lnSpc>
               <a:buClr>
                 <a:srgbClr val="000000"/>
               </a:buClr>
-              <a:buFont typeface="Arial"/>
+              <a:buFont typeface="Arial" panose="020B0604020202020204"/>
               <a:buChar char="•"/>
             </a:pPr>
             <a:r>
-              <a:rPr b="1" lang="en-US" sz="2400" spc="-1" strike="noStrike">
+              <a:rPr lang="en-US" sz="2400" b="1" strike="noStrike" spc="-1">
                 <a:solidFill>
                   <a:srgbClr val="000000"/>
                 </a:solidFill>
-                <a:latin typeface="Arial"/>
-                <a:ea typeface="ＭＳ Ｐゴシック"/>
+                <a:latin typeface="Arial" panose="020B0604020202020204"/>
+                <a:ea typeface="MS PGothic" panose="020B0600070205080204" charset="-128"/>
               </a:rPr>
               <a:t>Theme-</a:t>
             </a:r>
-            <a:endParaRPr b="0" lang="en-IN" sz="2400" spc="-1" strike="noStrike">
-              <a:latin typeface="Arial"/>
-            </a:endParaRPr>
-          </a:p>
-          <a:p>
-            <a:pPr marL="285840" indent="-285840" algn="just">
+            <a:endParaRPr lang="en-IN" sz="2400" b="0" strike="noStrike" spc="-1">
+              <a:latin typeface="Arial" panose="020B0604020202020204"/>
+            </a:endParaRPr>
+          </a:p>
+          <a:p>
+            <a:pPr marL="285750" indent="-285750" algn="just">
               <a:lnSpc>
                 <a:spcPct val="200000"/>
               </a:lnSpc>
               <a:buClr>
                 <a:srgbClr val="000000"/>
               </a:buClr>
-              <a:buFont typeface="Arial"/>
+              <a:buFont typeface="Arial" panose="020B0604020202020204"/>
               <a:buChar char="•"/>
             </a:pPr>
             <a:r>
-              <a:rPr b="1" lang="en-US" sz="2400" spc="-1" strike="noStrike">
+              <a:rPr lang="en-US" sz="2400" b="1" strike="noStrike" spc="-1">
                 <a:solidFill>
                   <a:srgbClr val="000000"/>
                 </a:solidFill>
-                <a:latin typeface="Arial"/>
-                <a:ea typeface="ＭＳ Ｐゴシック"/>
+                <a:latin typeface="Arial" panose="020B0604020202020204"/>
+                <a:ea typeface="MS PGothic" panose="020B0600070205080204" charset="-128"/>
               </a:rPr>
               <a:t>PS Category- Software/Hardware</a:t>
             </a:r>
-            <a:endParaRPr b="0" lang="en-IN" sz="2400" spc="-1" strike="noStrike">
-              <a:latin typeface="Arial"/>
-            </a:endParaRPr>
-          </a:p>
-          <a:p>
-            <a:pPr marL="285840" indent="-285840" algn="just">
+            <a:endParaRPr lang="en-IN" sz="2400" b="0" strike="noStrike" spc="-1">
+              <a:latin typeface="Arial" panose="020B0604020202020204"/>
+            </a:endParaRPr>
+          </a:p>
+          <a:p>
+            <a:pPr marL="285750" indent="-285750" algn="just">
               <a:lnSpc>
                 <a:spcPct val="200000"/>
               </a:lnSpc>
               <a:buClr>
                 <a:srgbClr val="000000"/>
               </a:buClr>
-              <a:buFont typeface="Arial"/>
+              <a:buFont typeface="Arial" panose="020B0604020202020204"/>
               <a:buChar char="•"/>
             </a:pPr>
             <a:r>
-              <a:rPr b="1" lang="en-US" sz="2400" spc="-1" strike="noStrike">
+              <a:rPr lang="en-US" sz="2400" b="1" strike="noStrike" spc="-1">
                 <a:solidFill>
                   <a:srgbClr val="000000"/>
                 </a:solidFill>
-                <a:latin typeface="Arial"/>
-                <a:ea typeface="ＭＳ Ｐゴシック"/>
+                <a:latin typeface="Arial" panose="020B0604020202020204"/>
+                <a:ea typeface="MS PGothic" panose="020B0600070205080204" charset="-128"/>
               </a:rPr>
               <a:t>Team ID-</a:t>
             </a:r>
-            <a:endParaRPr b="0" lang="en-IN" sz="2400" spc="-1" strike="noStrike">
-              <a:latin typeface="Arial"/>
-            </a:endParaRPr>
-          </a:p>
-          <a:p>
-            <a:pPr marL="285840" indent="-285840" algn="just">
+            <a:endParaRPr lang="en-IN" sz="2400" b="0" strike="noStrike" spc="-1">
+              <a:latin typeface="Arial" panose="020B0604020202020204"/>
+            </a:endParaRPr>
+          </a:p>
+          <a:p>
+            <a:pPr marL="285750" indent="-285750" algn="just">
               <a:lnSpc>
                 <a:spcPct val="200000"/>
               </a:lnSpc>
               <a:buClr>
                 <a:srgbClr val="000000"/>
               </a:buClr>
-              <a:buFont typeface="Arial"/>
+              <a:buFont typeface="Arial" panose="020B0604020202020204"/>
               <a:buChar char="•"/>
             </a:pPr>
             <a:r>
-              <a:rPr b="1" lang="en-US" sz="2400" spc="-1" strike="noStrike">
+              <a:rPr lang="en-US" sz="2400" b="1" strike="noStrike" spc="-1">
                 <a:solidFill>
                   <a:srgbClr val="000000"/>
                 </a:solidFill>
-                <a:latin typeface="Arial"/>
-                <a:ea typeface="ＭＳ Ｐゴシック"/>
+                <a:latin typeface="Arial" panose="020B0604020202020204"/>
+                <a:ea typeface="MS PGothic" panose="020B0600070205080204" charset="-128"/>
               </a:rPr>
               <a:t>Team Name (Registered on portal)</a:t>
             </a:r>
-            <a:endParaRPr b="0" lang="en-IN" sz="2400" spc="-1" strike="noStrike">
-              <a:latin typeface="Arial"/>
+            <a:endParaRPr lang="en-IN" sz="2400" b="0" strike="noStrike" spc="-1">
+              <a:latin typeface="Arial" panose="020B0604020202020204"/>
             </a:endParaRPr>
           </a:p>
         </p:txBody>
       </p:sp>
       <p:pic>
         <p:nvPicPr>
-          <p:cNvPr id="94" name="Picture 1" descr=""/>
+          <p:cNvPr id="94" name="Picture 1"/>
           <p:cNvPicPr/>
           <p:nvPr/>
         </p:nvPicPr>
         <p:blipFill>
           <a:blip r:embed="rId2"/>
-          <a:stretch/>
+          <a:stretch>
+            <a:fillRect/>
+          </a:stretch>
         </p:blipFill>
         <p:spPr>
           <a:xfrm>
@@ -7389,8 +7544,11 @@
       </p:pic>
     </p:spTree>
   </p:cSld>
-  <mc:AlternateContent>
-    <mc:Choice Requires="p14">
+  <p:clrMapOvr>
+    <a:masterClrMapping/>
+  </p:clrMapOvr>
+  <mc:AlternateContent xmlns:mc="http://schemas.openxmlformats.org/markup-compatibility/2006">
+    <mc:Choice xmlns:p14="http://schemas.microsoft.com/office/powerpoint/2010/main" Requires="p14">
       <p:transition spd="slow" p14:dur="2000"/>
     </mc:Choice>
     <mc:Fallback>
@@ -7401,7 +7559,7 @@
 </file>
 
 <file path=ppt/slides/slide2.xml><?xml version="1.0" encoding="utf-8"?>
-<p:sld xmlns:a="http://schemas.openxmlformats.org/drawingml/2006/main" xmlns:p="http://schemas.openxmlformats.org/presentationml/2006/main" xmlns:r="http://schemas.openxmlformats.org/officeDocument/2006/relationships" xmlns:p14="http://schemas.microsoft.com/office/powerpoint/2010/main" xmlns:p15="http://schemas.microsoft.com/office/powerpoint/2012/main" xmlns:mc="http://schemas.openxmlformats.org/markup-compatibility/2006">
+<p:sld xmlns:a="http://schemas.openxmlformats.org/drawingml/2006/main" xmlns:r="http://schemas.openxmlformats.org/officeDocument/2006/relationships" xmlns:p="http://schemas.openxmlformats.org/presentationml/2006/main">
   <p:cSld>
     <p:spTree>
       <p:nvGrpSpPr>
@@ -7432,13 +7590,13 @@
             <a:avLst/>
           </a:prstGeom>
           <a:solidFill>
-            <a:srgbClr val="0070c0"/>
+            <a:srgbClr val="0070C0"/>
           </a:solidFill>
           <a:ln w="9525">
             <a:noFill/>
           </a:ln>
           <a:effectLst>
-            <a:outerShdw dir="5400000" dist="23040" rotWithShape="0">
+            <a:outerShdw dist="23040" dir="5400000" rotWithShape="0">
               <a:srgbClr val="808080">
                 <a:alpha val="35000"/>
               </a:srgbClr>
@@ -7446,9 +7604,15 @@
           </a:effectLst>
         </p:spPr>
         <p:style>
-          <a:lnRef idx="0"/>
-          <a:fillRef idx="0"/>
-          <a:effectRef idx="0"/>
+          <a:lnRef idx="0">
+            <a:srgbClr val="FFFFFF"/>
+          </a:lnRef>
+          <a:fillRef idx="0">
+            <a:srgbClr val="FFFFFF"/>
+          </a:fillRef>
+          <a:effectRef idx="0">
+            <a:srgbClr val="FFFFFF"/>
+          </a:effectRef>
           <a:fontRef idx="minor"/>
         </p:style>
       </p:sp>
@@ -7476,7 +7640,7 @@
           </a:ln>
         </p:spPr>
         <p:txBody>
-          <a:bodyPr numCol="1" spcCol="0" lIns="90000" rIns="90000" tIns="45000" bIns="45000" anchor="ctr">
+          <a:bodyPr lIns="90000" tIns="45000" rIns="90000" bIns="45000" numCol="1" spcCol="0" anchor="ctr">
             <a:noAutofit/>
           </a:bodyPr>
           <a:p>
@@ -7490,17 +7654,17 @@
               <a:rPr sz="3600"/>
             </a:br>
             <a:r>
-              <a:rPr b="1" lang="en-US" sz="3600" spc="-1" strike="noStrike">
+              <a:rPr lang="en-US" sz="3600" b="1" strike="noStrike" spc="-1">
                 <a:solidFill>
                   <a:srgbClr val="000000"/>
                 </a:solidFill>
-                <a:latin typeface="Times New Roman"/>
-                <a:ea typeface="ＭＳ Ｐゴシック"/>
+                <a:latin typeface="Times New Roman" panose="02020603050405020304"/>
+                <a:ea typeface="MS PGothic" panose="020B0600070205080204" charset="-128"/>
               </a:rPr>
               <a:t>IDEA TITLE</a:t>
             </a:r>
-            <a:endParaRPr b="0" lang="en-IN" sz="3600" spc="-1" strike="noStrike">
-              <a:latin typeface="Arial"/>
+            <a:endParaRPr lang="en-IN" sz="3600" b="0" strike="noStrike" spc="-1">
+              <a:latin typeface="Arial" panose="020B0604020202020204"/>
             </a:endParaRPr>
           </a:p>
         </p:txBody>
@@ -7525,39 +7689,45 @@
           </a:ln>
         </p:spPr>
         <p:style>
-          <a:lnRef idx="0"/>
-          <a:fillRef idx="0"/>
-          <a:effectRef idx="0"/>
+          <a:lnRef idx="0">
+            <a:srgbClr val="FFFFFF"/>
+          </a:lnRef>
+          <a:fillRef idx="0">
+            <a:srgbClr val="FFFFFF"/>
+          </a:fillRef>
+          <a:effectRef idx="0">
+            <a:srgbClr val="FFFFFF"/>
+          </a:effectRef>
           <a:fontRef idx="minor"/>
         </p:style>
         <p:txBody>
-          <a:bodyPr lIns="90000" rIns="90000" tIns="45000" bIns="45000" anchor="t">
+          <a:bodyPr lIns="90000" tIns="45000" rIns="90000" bIns="45000" anchor="t">
             <a:spAutoFit/>
           </a:bodyPr>
           <a:p>
-            <a:pPr marL="343080" indent="-343080">
+            <a:pPr marL="342900" indent="-342900">
               <a:lnSpc>
                 <a:spcPct val="100000"/>
               </a:lnSpc>
               <a:buClr>
-                <a:srgbClr val="1f497d"/>
+                <a:srgbClr val="1F497D"/>
               </a:buClr>
-              <a:buFont typeface="Wingdings" charset="2"/>
+              <a:buFont typeface="Wingdings" panose="05000000000000000000" pitchFamily="2" charset="2"/>
               <a:buChar char=""/>
             </a:pPr>
             <a:r>
-              <a:rPr b="1" lang="en-US" sz="3200" spc="-1" strike="noStrike" u="sng">
+              <a:rPr lang="en-US" sz="3200" b="1" u="sng" strike="noStrike" spc="-1">
                 <a:solidFill>
-                  <a:srgbClr val="1f497d"/>
+                  <a:srgbClr val="1F497D"/>
                 </a:solidFill>
                 <a:uFillTx/>
-                <a:latin typeface="Arial"/>
-                <a:ea typeface="ＭＳ Ｐゴシック"/>
+                <a:latin typeface="Arial" panose="020B0604020202020204"/>
+                <a:ea typeface="MS PGothic" panose="020B0600070205080204" charset="-128"/>
               </a:rPr>
               <a:t>Proposed Solution (Describe your Idea/Solution/Prototype)</a:t>
             </a:r>
-            <a:endParaRPr b="0" lang="en-IN" sz="3200" spc="-1" strike="noStrike">
-              <a:latin typeface="Arial"/>
+            <a:endParaRPr lang="en-IN" sz="3200" b="0" strike="noStrike" spc="-1">
+              <a:latin typeface="Arial" panose="020B0604020202020204"/>
             </a:endParaRPr>
           </a:p>
           <a:p>
@@ -7567,8 +7737,8 @@
               </a:lnSpc>
               <a:buNone/>
             </a:pPr>
-            <a:endParaRPr b="0" lang="en-IN" sz="2000" spc="-1" strike="noStrike">
-              <a:latin typeface="Arial"/>
+            <a:endParaRPr lang="en-IN" sz="2000" b="0" strike="noStrike" spc="-1">
+              <a:latin typeface="Arial" panose="020B0604020202020204"/>
             </a:endParaRPr>
           </a:p>
           <a:p>
@@ -7578,93 +7748,93 @@
               </a:lnSpc>
               <a:buNone/>
             </a:pPr>
-            <a:endParaRPr b="0" lang="en-IN" sz="2000" spc="-1" strike="noStrike">
-              <a:latin typeface="Arial"/>
-            </a:endParaRPr>
-          </a:p>
-          <a:p>
-            <a:pPr marL="343080" indent="-343080" algn="just">
+            <a:endParaRPr lang="en-IN" sz="2000" b="0" strike="noStrike" spc="-1">
+              <a:latin typeface="Arial" panose="020B0604020202020204"/>
+            </a:endParaRPr>
+          </a:p>
+          <a:p>
+            <a:pPr marL="342900" indent="-342900" algn="just">
               <a:lnSpc>
                 <a:spcPct val="100000"/>
               </a:lnSpc>
               <a:buClr>
                 <a:srgbClr val="000000"/>
               </a:buClr>
-              <a:buFont typeface="Arial"/>
+              <a:buFont typeface="Arial" panose="020B0604020202020204"/>
               <a:buChar char="•"/>
             </a:pPr>
             <a:r>
-              <a:rPr b="0" lang="en-US" sz="2800" spc="-1" strike="noStrike">
+              <a:rPr lang="en-US" sz="2800" b="0" strike="noStrike" spc="-1">
                 <a:solidFill>
                   <a:srgbClr val="000000"/>
                 </a:solidFill>
-                <a:latin typeface="Arial"/>
-                <a:ea typeface="ＭＳ Ｐゴシック"/>
+                <a:latin typeface="Arial" panose="020B0604020202020204"/>
+                <a:ea typeface="MS PGothic" panose="020B0600070205080204" charset="-128"/>
               </a:rPr>
               <a:t>Detailed explanation of the proposed solution</a:t>
             </a:r>
-            <a:endParaRPr b="0" lang="en-IN" sz="2800" spc="-1" strike="noStrike">
-              <a:latin typeface="Arial"/>
-            </a:endParaRPr>
-          </a:p>
-          <a:p>
-            <a:pPr marL="343080" indent="-343080" algn="just">
+            <a:endParaRPr lang="en-IN" sz="2800" b="0" strike="noStrike" spc="-1">
+              <a:latin typeface="Arial" panose="020B0604020202020204"/>
+            </a:endParaRPr>
+          </a:p>
+          <a:p>
+            <a:pPr marL="342900" indent="-342900" algn="just">
               <a:lnSpc>
                 <a:spcPct val="100000"/>
               </a:lnSpc>
               <a:buClr>
                 <a:srgbClr val="000000"/>
               </a:buClr>
-              <a:buFont typeface="Arial"/>
+              <a:buFont typeface="Arial" panose="020B0604020202020204"/>
               <a:buChar char="•"/>
             </a:pPr>
             <a:r>
-              <a:rPr b="0" lang="en-US" sz="2800" spc="-1" strike="noStrike">
+              <a:rPr lang="en-US" sz="2800" b="0" strike="noStrike" spc="-1">
                 <a:solidFill>
                   <a:srgbClr val="000000"/>
                 </a:solidFill>
-                <a:latin typeface="Arial"/>
-                <a:ea typeface="ＭＳ Ｐゴシック"/>
+                <a:latin typeface="Arial" panose="020B0604020202020204"/>
+                <a:ea typeface="MS PGothic" panose="020B0600070205080204" charset="-128"/>
               </a:rPr>
               <a:t> </a:t>
             </a:r>
             <a:r>
-              <a:rPr b="0" lang="en-US" sz="2800" spc="-1" strike="noStrike">
+              <a:rPr lang="en-US" sz="2800" b="0" strike="noStrike" spc="-1">
                 <a:solidFill>
                   <a:srgbClr val="000000"/>
                 </a:solidFill>
-                <a:latin typeface="Arial"/>
-                <a:ea typeface="ＭＳ Ｐゴシック"/>
+                <a:latin typeface="Arial" panose="020B0604020202020204"/>
+                <a:ea typeface="MS PGothic" panose="020B0600070205080204" charset="-128"/>
               </a:rPr>
               <a:t>How it addresses the problem,hii</a:t>
             </a:r>
-            <a:endParaRPr b="0" lang="en-IN" sz="2800" spc="-1" strike="noStrike">
-              <a:latin typeface="Arial"/>
-            </a:endParaRPr>
-          </a:p>
-          <a:p>
-            <a:pPr marL="343080" indent="-343080" algn="just">
+            <a:endParaRPr lang="en-IN" sz="2800" b="0" strike="noStrike" spc="-1">
+              <a:latin typeface="Arial" panose="020B0604020202020204"/>
+            </a:endParaRPr>
+          </a:p>
+          <a:p>
+            <a:pPr marL="342900" indent="-342900" algn="just">
               <a:lnSpc>
                 <a:spcPct val="100000"/>
               </a:lnSpc>
               <a:buClr>
                 <a:srgbClr val="000000"/>
               </a:buClr>
-              <a:buFont typeface="Arial"/>
+              <a:buFont typeface="Arial" panose="020B0604020202020204"/>
               <a:buChar char="•"/>
             </a:pPr>
             <a:r>
-              <a:rPr b="0" lang="en-US" sz="2800" spc="-1" strike="noStrike">
+              <a:rPr lang="en-US" sz="2800" b="0" strike="noStrike" spc="-1">
                 <a:solidFill>
                   <a:srgbClr val="000000"/>
                 </a:solidFill>
-                <a:latin typeface="Arial"/>
-                <a:ea typeface="ＭＳ Ｐゴシック"/>
+                <a:latin typeface="Arial" panose="020B0604020202020204"/>
+                <a:ea typeface="MS PGothic" panose="020B0600070205080204" charset="-128"/>
               </a:rPr>
               <a:t>Innovation and uniqueness of the solution </a:t>
             </a:r>
-            <a:endParaRPr b="0" lang="en-IN" sz="2800" spc="-1" strike="noStrike">
-              <a:latin typeface="Arial"/>
+            <a:endParaRPr lang="en-IN" sz="2800" b="0" strike="noStrike" spc="-1">
+              <a:latin typeface="Arial" panose="020B0604020202020204"/>
             </a:endParaRPr>
           </a:p>
         </p:txBody>
@@ -7693,7 +7863,7 @@
           </a:ln>
         </p:spPr>
         <p:txBody>
-          <a:bodyPr numCol="1" spcCol="0" lIns="90000" rIns="90000" tIns="45000" bIns="45000" anchor="ctr">
+          <a:bodyPr lIns="90000" tIns="45000" rIns="90000" bIns="45000" numCol="1" spcCol="0" anchor="ctr">
             <a:noAutofit/>
           </a:bodyPr>
           <a:lstStyle>
@@ -7702,12 +7872,12 @@
                 <a:spcPct val="100000"/>
               </a:lnSpc>
               <a:buNone/>
-              <a:defRPr b="1" lang="en-US" sz="1200" spc="-1" strike="noStrike">
+              <a:defRPr lang="en-US" sz="1200" b="1" strike="noStrike" spc="-1">
                 <a:solidFill>
-                  <a:srgbClr val="ffffff"/>
+                  <a:srgbClr val="FFFFFF"/>
                 </a:solidFill>
                 <a:latin typeface="TradeGothic"/>
-                <a:ea typeface="ＭＳ Ｐゴシック"/>
+                <a:ea typeface="MS PGothic" panose="020B0600070205080204" charset="-128"/>
               </a:defRPr>
             </a:lvl1pPr>
           </a:lstStyle>
@@ -7719,17 +7889,16 @@
               <a:buNone/>
             </a:pPr>
             <a:fld id="{E724714D-8E22-4202-98AC-5DF8C75C506D}" type="slidenum">
-              <a:rPr b="1" lang="en-US" sz="1200" spc="-1" strike="noStrike">
+              <a:rPr lang="en-US" sz="1200" b="1" strike="noStrike" spc="-1">
                 <a:solidFill>
-                  <a:srgbClr val="ffffff"/>
+                  <a:srgbClr val="FFFFFF"/>
                 </a:solidFill>
                 <a:latin typeface="TradeGothic"/>
-                <a:ea typeface="ＭＳ Ｐゴシック"/>
+                <a:ea typeface="MS PGothic" panose="020B0600070205080204" charset="-128"/>
               </a:rPr>
-              <a:t>&lt;number&gt;</a:t>
             </a:fld>
-            <a:endParaRPr b="0" lang="en-IN" sz="1200" spc="-1" strike="noStrike">
-              <a:latin typeface="Times New Roman"/>
+            <a:endParaRPr lang="en-IN" sz="1200" b="0" strike="noStrike" spc="-1">
+              <a:latin typeface="Times New Roman" panose="02020603050405020304"/>
             </a:endParaRPr>
           </a:p>
         </p:txBody>
@@ -7758,7 +7927,7 @@
           </a:ln>
         </p:spPr>
         <p:txBody>
-          <a:bodyPr lIns="90000" rIns="90000" tIns="45000" bIns="45000" anchor="ctr">
+          <a:bodyPr lIns="90000" tIns="45000" rIns="90000" bIns="45000" anchor="ctr">
             <a:noAutofit/>
           </a:bodyPr>
           <a:lstStyle>
@@ -7767,9 +7936,9 @@
                 <a:spcPct val="100000"/>
               </a:lnSpc>
               <a:buNone/>
-              <a:defRPr b="0" lang="en-US" sz="1200" spc="-1" strike="noStrike">
+              <a:defRPr lang="en-US" sz="1200" b="0" strike="noStrike" spc="-1">
                 <a:solidFill>
-                  <a:srgbClr val="ffffff"/>
+                  <a:srgbClr val="FFFFFF"/>
                 </a:solidFill>
                 <a:latin typeface="TradeGothic"/>
               </a:defRPr>
@@ -7783,16 +7952,16 @@
               <a:buNone/>
             </a:pPr>
             <a:r>
-              <a:rPr b="0" lang="en-US" sz="1200" spc="-1" strike="noStrike">
+              <a:rPr lang="en-US" sz="1200" b="0" strike="noStrike" spc="-1">
                 <a:solidFill>
-                  <a:srgbClr val="ffffff"/>
+                  <a:srgbClr val="FFFFFF"/>
                 </a:solidFill>
                 <a:latin typeface="TradeGothic"/>
               </a:rPr>
               <a:t>@SIH Idea submission- Template</a:t>
             </a:r>
-            <a:endParaRPr b="0" lang="en-IN" sz="1200" spc="-1" strike="noStrike">
-              <a:latin typeface="Times New Roman"/>
+            <a:endParaRPr lang="en-IN" sz="1200" b="0" strike="noStrike" spc="-1">
+              <a:latin typeface="Times New Roman" panose="02020603050405020304"/>
             </a:endParaRPr>
           </a:p>
         </p:txBody>
@@ -7812,11 +7981,11 @@
             <a:avLst/>
           </a:prstGeom>
           <a:solidFill>
-            <a:srgbClr val="ffffff"/>
+            <a:srgbClr val="FFFFFF"/>
           </a:solidFill>
           <a:ln>
             <a:solidFill>
-              <a:srgbClr val="8064a2"/>
+              <a:srgbClr val="8064A2"/>
             </a:solidFill>
             <a:round/>
           </a:ln>
@@ -7834,7 +8003,7 @@
           <a:fontRef idx="minor"/>
         </p:style>
         <p:txBody>
-          <a:bodyPr lIns="90000" rIns="90000" tIns="45000" bIns="45000" anchor="ctr">
+          <a:bodyPr lIns="90000" tIns="45000" rIns="90000" bIns="45000" anchor="ctr">
             <a:noAutofit/>
           </a:bodyPr>
           <a:p>
@@ -7845,30 +8014,32 @@
               <a:buNone/>
             </a:pPr>
             <a:r>
-              <a:rPr b="0" lang="en-US" sz="1800" spc="-1" strike="noStrike">
+              <a:rPr lang="en-US" sz="1800" b="0" strike="noStrike" spc="-1">
                 <a:solidFill>
                   <a:srgbClr val="000000"/>
                 </a:solidFill>
-                <a:latin typeface="Calibri"/>
-                <a:ea typeface="ＭＳ Ｐゴシック"/>
+                <a:latin typeface="Calibri" panose="020F0502020204030204"/>
+                <a:ea typeface="MS PGothic" panose="020B0600070205080204" charset="-128"/>
               </a:rPr>
               <a:t>Your Team Name</a:t>
             </a:r>
-            <a:endParaRPr b="0" lang="en-IN" sz="1800" spc="-1" strike="noStrike">
-              <a:latin typeface="Arial"/>
+            <a:endParaRPr lang="en-IN" sz="1800" b="0" strike="noStrike" spc="-1">
+              <a:latin typeface="Arial" panose="020B0604020202020204"/>
             </a:endParaRPr>
           </a:p>
         </p:txBody>
       </p:sp>
       <p:pic>
         <p:nvPicPr>
-          <p:cNvPr id="101" name="Picture 10" descr=""/>
+          <p:cNvPr id="101" name="Picture 10"/>
           <p:cNvPicPr/>
           <p:nvPr/>
         </p:nvPicPr>
         <p:blipFill>
           <a:blip r:embed="rId1"/>
-          <a:stretch/>
+          <a:stretch>
+            <a:fillRect/>
+          </a:stretch>
         </p:blipFill>
         <p:spPr>
           <a:xfrm>
@@ -7885,8 +8056,11 @@
       </p:pic>
     </p:spTree>
   </p:cSld>
-  <mc:AlternateContent>
-    <mc:Choice Requires="p14">
+  <p:clrMapOvr>
+    <a:masterClrMapping/>
+  </p:clrMapOvr>
+  <mc:AlternateContent xmlns:mc="http://schemas.openxmlformats.org/markup-compatibility/2006">
+    <mc:Choice xmlns:p14="http://schemas.microsoft.com/office/powerpoint/2010/main" Requires="p14">
       <p:transition spd="slow" p14:dur="2000"/>
     </mc:Choice>
     <mc:Fallback>
@@ -7897,7 +8071,7 @@
 </file>
 
 <file path=ppt/slides/slide3.xml><?xml version="1.0" encoding="utf-8"?>
-<p:sld xmlns:a="http://schemas.openxmlformats.org/drawingml/2006/main" xmlns:p="http://schemas.openxmlformats.org/presentationml/2006/main" xmlns:r="http://schemas.openxmlformats.org/officeDocument/2006/relationships" xmlns:p14="http://schemas.microsoft.com/office/powerpoint/2010/main" xmlns:p15="http://schemas.microsoft.com/office/powerpoint/2012/main" xmlns:mc="http://schemas.openxmlformats.org/markup-compatibility/2006">
+<p:sld xmlns:a="http://schemas.openxmlformats.org/drawingml/2006/main" xmlns:r="http://schemas.openxmlformats.org/officeDocument/2006/relationships" xmlns:p="http://schemas.openxmlformats.org/presentationml/2006/main">
   <p:cSld>
     <p:spTree>
       <p:nvGrpSpPr>
@@ -7928,13 +8102,13 @@
             <a:avLst/>
           </a:prstGeom>
           <a:solidFill>
-            <a:srgbClr val="0070c0"/>
+            <a:srgbClr val="0070C0"/>
           </a:solidFill>
           <a:ln w="9525">
             <a:noFill/>
           </a:ln>
           <a:effectLst>
-            <a:outerShdw dir="5400000" dist="23040" rotWithShape="0">
+            <a:outerShdw dist="23040" dir="5400000" rotWithShape="0">
               <a:srgbClr val="808080">
                 <a:alpha val="35000"/>
               </a:srgbClr>
@@ -7942,9 +8116,15 @@
           </a:effectLst>
         </p:spPr>
         <p:style>
-          <a:lnRef idx="0"/>
-          <a:fillRef idx="0"/>
-          <a:effectRef idx="0"/>
+          <a:lnRef idx="0">
+            <a:srgbClr val="FFFFFF"/>
+          </a:lnRef>
+          <a:fillRef idx="0">
+            <a:srgbClr val="FFFFFF"/>
+          </a:fillRef>
+          <a:effectRef idx="0">
+            <a:srgbClr val="FFFFFF"/>
+          </a:effectRef>
           <a:fontRef idx="minor"/>
         </p:style>
       </p:sp>
@@ -7972,7 +8152,7 @@
           </a:ln>
         </p:spPr>
         <p:txBody>
-          <a:bodyPr numCol="1" spcCol="0" lIns="90000" rIns="90000" tIns="45000" bIns="45000" anchor="ctr">
+          <a:bodyPr lIns="90000" tIns="45000" rIns="90000" bIns="45000" numCol="1" spcCol="0" anchor="ctr">
             <a:noAutofit/>
           </a:bodyPr>
           <a:p>
@@ -7983,17 +8163,17 @@
               <a:buNone/>
             </a:pPr>
             <a:r>
-              <a:rPr b="1" lang="en-US" sz="3600" spc="-1" strike="noStrike">
+              <a:rPr lang="en-US" sz="3600" b="1" strike="noStrike" spc="-1">
                 <a:solidFill>
                   <a:srgbClr val="000000"/>
                 </a:solidFill>
-                <a:latin typeface="Times New Roman"/>
-                <a:ea typeface="ＭＳ Ｐゴシック"/>
+                <a:latin typeface="Times New Roman" panose="02020603050405020304"/>
+                <a:ea typeface="MS PGothic" panose="020B0600070205080204" charset="-128"/>
               </a:rPr>
               <a:t>TECHNICAL APPROACH</a:t>
             </a:r>
-            <a:endParaRPr b="0" lang="en-IN" sz="3600" spc="-1" strike="noStrike">
-              <a:latin typeface="Arial"/>
+            <a:endParaRPr lang="en-IN" sz="3600" b="0" strike="noStrike" spc="-1">
+              <a:latin typeface="Arial" panose="020B0604020202020204"/>
             </a:endParaRPr>
           </a:p>
         </p:txBody>
@@ -8018,63 +8198,69 @@
           </a:ln>
         </p:spPr>
         <p:style>
-          <a:lnRef idx="0"/>
-          <a:fillRef idx="0"/>
-          <a:effectRef idx="0"/>
+          <a:lnRef idx="0">
+            <a:srgbClr val="FFFFFF"/>
+          </a:lnRef>
+          <a:fillRef idx="0">
+            <a:srgbClr val="FFFFFF"/>
+          </a:fillRef>
+          <a:effectRef idx="0">
+            <a:srgbClr val="FFFFFF"/>
+          </a:effectRef>
           <a:fontRef idx="minor"/>
         </p:style>
         <p:txBody>
-          <a:bodyPr lIns="90000" rIns="90000" tIns="45000" bIns="45000" anchor="t">
+          <a:bodyPr lIns="90000" tIns="45000" rIns="90000" bIns="45000" anchor="t">
             <a:spAutoFit/>
           </a:bodyPr>
           <a:p>
-            <a:pPr marL="343080" indent="-343080" algn="just">
+            <a:pPr marL="342900" indent="-342900" algn="just">
               <a:lnSpc>
                 <a:spcPct val="100000"/>
               </a:lnSpc>
               <a:buClr>
                 <a:srgbClr val="000000"/>
               </a:buClr>
-              <a:buFont typeface="Arial"/>
+              <a:buFont typeface="Arial" panose="020B0604020202020204"/>
               <a:buChar char="•"/>
             </a:pPr>
             <a:r>
-              <a:rPr b="0" lang="en-US" sz="2800" spc="-1" strike="noStrike">
+              <a:rPr lang="en-US" sz="2800" b="0" strike="noStrike" spc="-1">
                 <a:solidFill>
                   <a:srgbClr val="000000"/>
                 </a:solidFill>
-                <a:latin typeface="Arial"/>
-                <a:ea typeface="ＭＳ Ｐゴシック"/>
+                <a:latin typeface="Arial" panose="020B0604020202020204"/>
+                <a:ea typeface="MS PGothic" panose="020B0600070205080204" charset="-128"/>
               </a:rPr>
               <a:t>Technologies to be used (e.g. programming languages, frameworks, hardware)</a:t>
             </a:r>
-            <a:endParaRPr b="0" lang="en-IN" sz="2800" spc="-1" strike="noStrike">
-              <a:latin typeface="Arial"/>
-            </a:endParaRPr>
-          </a:p>
-          <a:p>
-            <a:pPr marL="343080" indent="-343080" algn="just">
+            <a:endParaRPr lang="en-IN" sz="2800" b="0" strike="noStrike" spc="-1">
+              <a:latin typeface="Arial" panose="020B0604020202020204"/>
+            </a:endParaRPr>
+          </a:p>
+          <a:p>
+            <a:pPr marL="342900" indent="-342900" algn="just">
               <a:lnSpc>
                 <a:spcPct val="100000"/>
               </a:lnSpc>
               <a:buClr>
                 <a:srgbClr val="000000"/>
               </a:buClr>
-              <a:buFont typeface="Arial"/>
+              <a:buFont typeface="Arial" panose="020B0604020202020204"/>
               <a:buChar char="•"/>
             </a:pPr>
             <a:r>
-              <a:rPr b="0" lang="en-US" sz="2800" spc="-1" strike="noStrike">
+              <a:rPr lang="en-US" sz="2800" b="0" strike="noStrike" spc="-1">
                 <a:solidFill>
                   <a:srgbClr val="000000"/>
                 </a:solidFill>
-                <a:latin typeface="Arial"/>
-                <a:ea typeface="ＭＳ Ｐゴシック"/>
+                <a:latin typeface="Arial" panose="020B0604020202020204"/>
+                <a:ea typeface="MS PGothic" panose="020B0600070205080204" charset="-128"/>
               </a:rPr>
               <a:t>Methodology and process for implementation (Flow Charts/Images/ working prototype)</a:t>
             </a:r>
-            <a:endParaRPr b="0" lang="en-IN" sz="2800" spc="-1" strike="noStrike">
-              <a:latin typeface="Arial"/>
+            <a:endParaRPr lang="en-IN" sz="2800" b="0" strike="noStrike" spc="-1">
+              <a:latin typeface="Arial" panose="020B0604020202020204"/>
             </a:endParaRPr>
           </a:p>
         </p:txBody>
@@ -8103,7 +8289,7 @@
           </a:ln>
         </p:spPr>
         <p:txBody>
-          <a:bodyPr numCol="1" spcCol="0" lIns="90000" rIns="90000" tIns="45000" bIns="45000" anchor="ctr">
+          <a:bodyPr lIns="90000" tIns="45000" rIns="90000" bIns="45000" numCol="1" spcCol="0" anchor="ctr">
             <a:noAutofit/>
           </a:bodyPr>
           <a:lstStyle>
@@ -8112,12 +8298,12 @@
                 <a:spcPct val="100000"/>
               </a:lnSpc>
               <a:buNone/>
-              <a:defRPr b="1" lang="en-US" sz="1200" spc="-1" strike="noStrike">
+              <a:defRPr lang="en-US" sz="1200" b="1" strike="noStrike" spc="-1">
                 <a:solidFill>
-                  <a:srgbClr val="ffffff"/>
+                  <a:srgbClr val="FFFFFF"/>
                 </a:solidFill>
                 <a:latin typeface="TradeGothic"/>
-                <a:ea typeface="ＭＳ Ｐゴシック"/>
+                <a:ea typeface="MS PGothic" panose="020B0600070205080204" charset="-128"/>
               </a:defRPr>
             </a:lvl1pPr>
           </a:lstStyle>
@@ -8129,17 +8315,16 @@
               <a:buNone/>
             </a:pPr>
             <a:fld id="{5E40592A-E24F-4933-9F1B-02287B018DDB}" type="slidenum">
-              <a:rPr b="1" lang="en-US" sz="1200" spc="-1" strike="noStrike">
+              <a:rPr lang="en-US" sz="1200" b="1" strike="noStrike" spc="-1">
                 <a:solidFill>
-                  <a:srgbClr val="ffffff"/>
+                  <a:srgbClr val="FFFFFF"/>
                 </a:solidFill>
                 <a:latin typeface="TradeGothic"/>
-                <a:ea typeface="ＭＳ Ｐゴシック"/>
+                <a:ea typeface="MS PGothic" panose="020B0600070205080204" charset="-128"/>
               </a:rPr>
-              <a:t>&lt;number&gt;</a:t>
             </a:fld>
-            <a:endParaRPr b="0" lang="en-IN" sz="1200" spc="-1" strike="noStrike">
-              <a:latin typeface="Times New Roman"/>
+            <a:endParaRPr lang="en-IN" sz="1200" b="0" strike="noStrike" spc="-1">
+              <a:latin typeface="Times New Roman" panose="02020603050405020304"/>
             </a:endParaRPr>
           </a:p>
         </p:txBody>
@@ -8168,7 +8353,7 @@
           </a:ln>
         </p:spPr>
         <p:txBody>
-          <a:bodyPr lIns="90000" rIns="90000" tIns="45000" bIns="45000" anchor="ctr">
+          <a:bodyPr lIns="90000" tIns="45000" rIns="90000" bIns="45000" anchor="ctr">
             <a:noAutofit/>
           </a:bodyPr>
           <a:lstStyle>
@@ -8177,9 +8362,9 @@
                 <a:spcPct val="100000"/>
               </a:lnSpc>
               <a:buNone/>
-              <a:defRPr b="0" lang="en-US" sz="1200" spc="-1" strike="noStrike">
+              <a:defRPr lang="en-US" sz="1200" b="0" strike="noStrike" spc="-1">
                 <a:solidFill>
-                  <a:srgbClr val="ffffff"/>
+                  <a:srgbClr val="FFFFFF"/>
                 </a:solidFill>
                 <a:latin typeface="TradeGothic"/>
               </a:defRPr>
@@ -8193,16 +8378,16 @@
               <a:buNone/>
             </a:pPr>
             <a:r>
-              <a:rPr b="0" lang="en-US" sz="1200" spc="-1" strike="noStrike">
+              <a:rPr lang="en-US" sz="1200" b="0" strike="noStrike" spc="-1">
                 <a:solidFill>
-                  <a:srgbClr val="ffffff"/>
+                  <a:srgbClr val="FFFFFF"/>
                 </a:solidFill>
                 <a:latin typeface="TradeGothic"/>
               </a:rPr>
               <a:t>@SIH Idea submission- Template</a:t>
             </a:r>
-            <a:endParaRPr b="0" lang="en-IN" sz="1200" spc="-1" strike="noStrike">
-              <a:latin typeface="Times New Roman"/>
+            <a:endParaRPr lang="en-IN" sz="1200" b="0" strike="noStrike" spc="-1">
+              <a:latin typeface="Times New Roman" panose="02020603050405020304"/>
             </a:endParaRPr>
           </a:p>
         </p:txBody>
@@ -8222,11 +8407,11 @@
             <a:avLst/>
           </a:prstGeom>
           <a:solidFill>
-            <a:srgbClr val="ffffff"/>
+            <a:srgbClr val="FFFFFF"/>
           </a:solidFill>
           <a:ln>
             <a:solidFill>
-              <a:srgbClr val="8064a2"/>
+              <a:srgbClr val="8064A2"/>
             </a:solidFill>
             <a:round/>
           </a:ln>
@@ -8244,7 +8429,7 @@
           <a:fontRef idx="minor"/>
         </p:style>
         <p:txBody>
-          <a:bodyPr lIns="90000" rIns="90000" tIns="45000" bIns="45000" anchor="ctr">
+          <a:bodyPr lIns="90000" tIns="45000" rIns="90000" bIns="45000" anchor="ctr">
             <a:noAutofit/>
           </a:bodyPr>
           <a:p>
@@ -8255,30 +8440,32 @@
               <a:buNone/>
             </a:pPr>
             <a:r>
-              <a:rPr b="0" lang="en-US" sz="1800" spc="-1" strike="noStrike">
+              <a:rPr lang="en-US" sz="1800" b="0" strike="noStrike" spc="-1">
                 <a:solidFill>
                   <a:srgbClr val="000000"/>
                 </a:solidFill>
-                <a:latin typeface="Calibri"/>
-                <a:ea typeface="ＭＳ Ｐゴシック"/>
+                <a:latin typeface="Calibri" panose="020F0502020204030204"/>
+                <a:ea typeface="MS PGothic" panose="020B0600070205080204" charset="-128"/>
               </a:rPr>
               <a:t>Your Team Name</a:t>
             </a:r>
-            <a:endParaRPr b="0" lang="en-IN" sz="1800" spc="-1" strike="noStrike">
-              <a:latin typeface="Arial"/>
+            <a:endParaRPr lang="en-IN" sz="1800" b="0" strike="noStrike" spc="-1">
+              <a:latin typeface="Arial" panose="020B0604020202020204"/>
             </a:endParaRPr>
           </a:p>
         </p:txBody>
       </p:sp>
       <p:pic>
         <p:nvPicPr>
-          <p:cNvPr id="108" name="Picture 11" descr=""/>
+          <p:cNvPr id="108" name="Picture 11"/>
           <p:cNvPicPr/>
           <p:nvPr/>
         </p:nvPicPr>
         <p:blipFill>
           <a:blip r:embed="rId1"/>
-          <a:stretch/>
+          <a:stretch>
+            <a:fillRect/>
+          </a:stretch>
         </p:blipFill>
         <p:spPr>
           <a:xfrm>
@@ -8295,8 +8482,11 @@
       </p:pic>
     </p:spTree>
   </p:cSld>
-  <mc:AlternateContent>
-    <mc:Choice Requires="p14">
+  <p:clrMapOvr>
+    <a:masterClrMapping/>
+  </p:clrMapOvr>
+  <mc:AlternateContent xmlns:mc="http://schemas.openxmlformats.org/markup-compatibility/2006">
+    <mc:Choice xmlns:p14="http://schemas.microsoft.com/office/powerpoint/2010/main" Requires="p14">
       <p:transition spd="slow" p14:dur="2000"/>
     </mc:Choice>
     <mc:Fallback>
@@ -8307,7 +8497,7 @@
 </file>
 
 <file path=ppt/slides/slide4.xml><?xml version="1.0" encoding="utf-8"?>
-<p:sld xmlns:a="http://schemas.openxmlformats.org/drawingml/2006/main" xmlns:p="http://schemas.openxmlformats.org/presentationml/2006/main" xmlns:r="http://schemas.openxmlformats.org/officeDocument/2006/relationships" xmlns:p14="http://schemas.microsoft.com/office/powerpoint/2010/main" xmlns:p15="http://schemas.microsoft.com/office/powerpoint/2012/main" xmlns:mc="http://schemas.openxmlformats.org/markup-compatibility/2006">
+<p:sld xmlns:a="http://schemas.openxmlformats.org/drawingml/2006/main" xmlns:r="http://schemas.openxmlformats.org/officeDocument/2006/relationships" xmlns:p="http://schemas.openxmlformats.org/presentationml/2006/main">
   <p:cSld>
     <p:spTree>
       <p:nvGrpSpPr>
@@ -8338,13 +8528,13 @@
             <a:avLst/>
           </a:prstGeom>
           <a:solidFill>
-            <a:srgbClr val="0070c0"/>
+            <a:srgbClr val="0070C0"/>
           </a:solidFill>
           <a:ln w="9525">
             <a:noFill/>
           </a:ln>
           <a:effectLst>
-            <a:outerShdw dir="5400000" dist="23040" rotWithShape="0">
+            <a:outerShdw dist="23040" dir="5400000" rotWithShape="0">
               <a:srgbClr val="808080">
                 <a:alpha val="35000"/>
               </a:srgbClr>
@@ -8352,9 +8542,15 @@
           </a:effectLst>
         </p:spPr>
         <p:style>
-          <a:lnRef idx="0"/>
-          <a:fillRef idx="0"/>
-          <a:effectRef idx="0"/>
+          <a:lnRef idx="0">
+            <a:srgbClr val="FFFFFF"/>
+          </a:lnRef>
+          <a:fillRef idx="0">
+            <a:srgbClr val="FFFFFF"/>
+          </a:fillRef>
+          <a:effectRef idx="0">
+            <a:srgbClr val="FFFFFF"/>
+          </a:effectRef>
           <a:fontRef idx="minor"/>
         </p:style>
       </p:sp>
@@ -8382,7 +8578,7 @@
           </a:ln>
         </p:spPr>
         <p:txBody>
-          <a:bodyPr numCol="1" spcCol="0" lIns="90000" rIns="90000" tIns="45000" bIns="45000" anchor="ctr">
+          <a:bodyPr lIns="90000" tIns="45000" rIns="90000" bIns="45000" numCol="1" spcCol="0" anchor="ctr">
             <a:noAutofit/>
           </a:bodyPr>
           <a:p>
@@ -8393,17 +8589,17 @@
               <a:buNone/>
             </a:pPr>
             <a:r>
-              <a:rPr b="1" lang="en-US" sz="3600" spc="-1" strike="noStrike">
+              <a:rPr lang="en-US" sz="3600" b="1" strike="noStrike" spc="-1">
                 <a:solidFill>
                   <a:srgbClr val="000000"/>
                 </a:solidFill>
-                <a:latin typeface="Times New Roman"/>
-                <a:ea typeface="ＭＳ Ｐゴシック"/>
+                <a:latin typeface="Times New Roman" panose="02020603050405020304"/>
+                <a:ea typeface="MS PGothic" panose="020B0600070205080204" charset="-128"/>
               </a:rPr>
               <a:t>FEASIBILITY AND VIABILITY</a:t>
             </a:r>
-            <a:endParaRPr b="0" lang="en-IN" sz="3600" spc="-1" strike="noStrike">
-              <a:latin typeface="Arial"/>
+            <a:endParaRPr lang="en-IN" sz="3600" b="0" strike="noStrike" spc="-1">
+              <a:latin typeface="Arial" panose="020B0604020202020204"/>
             </a:endParaRPr>
           </a:p>
         </p:txBody>
@@ -8428,88 +8624,94 @@
           </a:ln>
         </p:spPr>
         <p:style>
-          <a:lnRef idx="0"/>
-          <a:fillRef idx="0"/>
-          <a:effectRef idx="0"/>
+          <a:lnRef idx="0">
+            <a:srgbClr val="FFFFFF"/>
+          </a:lnRef>
+          <a:fillRef idx="0">
+            <a:srgbClr val="FFFFFF"/>
+          </a:fillRef>
+          <a:effectRef idx="0">
+            <a:srgbClr val="FFFFFF"/>
+          </a:effectRef>
           <a:fontRef idx="minor"/>
         </p:style>
         <p:txBody>
-          <a:bodyPr lIns="90000" rIns="90000" tIns="45000" bIns="45000" anchor="t">
+          <a:bodyPr lIns="90000" tIns="45000" rIns="90000" bIns="45000" anchor="t">
             <a:spAutoFit/>
           </a:bodyPr>
           <a:p>
-            <a:pPr marL="343080" indent="-343080" algn="just">
+            <a:pPr marL="342900" indent="-342900" algn="just">
               <a:lnSpc>
                 <a:spcPct val="100000"/>
               </a:lnSpc>
               <a:buClr>
                 <a:srgbClr val="000000"/>
               </a:buClr>
-              <a:buFont typeface="Arial"/>
+              <a:buFont typeface="Arial" panose="020B0604020202020204"/>
               <a:buChar char="•"/>
             </a:pPr>
             <a:r>
-              <a:rPr b="0" lang="en-US" sz="2800" spc="-1" strike="noStrike">
+              <a:rPr lang="en-US" sz="2800" b="0" strike="noStrike" spc="-1">
                 <a:solidFill>
                   <a:srgbClr val="000000"/>
                 </a:solidFill>
-                <a:latin typeface="Arial"/>
-                <a:ea typeface="ＭＳ Ｐゴシック"/>
+                <a:latin typeface="Arial" panose="020B0604020202020204"/>
+                <a:ea typeface="MS PGothic" panose="020B0600070205080204" charset="-128"/>
               </a:rPr>
               <a:t>Analysis of the feasibility of the idea</a:t>
             </a:r>
-            <a:endParaRPr b="0" lang="en-IN" sz="2800" spc="-1" strike="noStrike">
-              <a:latin typeface="Arial"/>
-            </a:endParaRPr>
-          </a:p>
-          <a:p>
-            <a:pPr marL="343080" indent="-343080" algn="just">
+            <a:endParaRPr lang="en-IN" sz="2800" b="0" strike="noStrike" spc="-1">
+              <a:latin typeface="Arial" panose="020B0604020202020204"/>
+            </a:endParaRPr>
+          </a:p>
+          <a:p>
+            <a:pPr marL="342900" indent="-342900" algn="just">
               <a:lnSpc>
                 <a:spcPct val="100000"/>
               </a:lnSpc>
               <a:buClr>
                 <a:srgbClr val="000000"/>
               </a:buClr>
-              <a:buFont typeface="Arial"/>
+              <a:buFont typeface="Arial" panose="020B0604020202020204"/>
               <a:buChar char="•"/>
             </a:pPr>
             <a:r>
-              <a:rPr b="0" lang="en-US" sz="2800" spc="-1" strike="noStrike">
+              <a:rPr lang="en-US" sz="2800" b="0" strike="noStrike" spc="-1">
                 <a:solidFill>
                   <a:srgbClr val="000000"/>
                 </a:solidFill>
-                <a:latin typeface="Arial"/>
-                <a:ea typeface="ＭＳ Ｐゴシック"/>
+                <a:latin typeface="Arial" panose="020B0604020202020204"/>
+                <a:ea typeface="MS PGothic" panose="020B0600070205080204" charset="-128"/>
               </a:rPr>
               <a:t>Potential challenges and risks</a:t>
             </a:r>
-            <a:endParaRPr b="0" lang="en-IN" sz="2800" spc="-1" strike="noStrike">
-              <a:latin typeface="Arial"/>
-            </a:endParaRPr>
-          </a:p>
-          <a:p>
-            <a:pPr marL="343080" indent="-343080" algn="just">
+            <a:endParaRPr lang="en-IN" sz="2800" b="0" strike="noStrike" spc="-1">
+              <a:latin typeface="Arial" panose="020B0604020202020204"/>
+            </a:endParaRPr>
+          </a:p>
+          <a:p>
+            <a:pPr marL="342900" indent="-342900" algn="just">
               <a:lnSpc>
                 <a:spcPct val="100000"/>
               </a:lnSpc>
               <a:buClr>
                 <a:srgbClr val="000000"/>
               </a:buClr>
-              <a:buFont typeface="Arial"/>
+              <a:buFont typeface="Arial" panose="020B0604020202020204"/>
               <a:buChar char="•"/>
             </a:pPr>
             <a:r>
-              <a:rPr b="0" lang="en-US" sz="2800" spc="-1" strike="noStrike">
+              <a:rPr lang="en-US" sz="2800" b="0" strike="noStrike" spc="-1">
                 <a:solidFill>
                   <a:srgbClr val="000000"/>
                 </a:solidFill>
-                <a:latin typeface="Arial"/>
-                <a:ea typeface="ＭＳ Ｐゴシック"/>
+                <a:latin typeface="Arial" panose="020B0604020202020204"/>
+                <a:ea typeface="MS PGothic" panose="020B0600070205080204" charset="-128"/>
               </a:rPr>
               <a:t>Strategies for overcoming these challenges</a:t>
             </a:r>
-            <a:endParaRPr b="0" lang="en-IN" sz="2800" spc="-1" strike="noStrike">
-              <a:latin typeface="Arial"/>
+            <a:endParaRPr lang="en-IN" sz="2800" b="0" strike="noStrike" spc="-1">
+              <a:latin typeface="Arial" panose="020B0604020202020204"/>
             </a:endParaRPr>
           </a:p>
         </p:txBody>
@@ -8538,7 +8740,7 @@
           </a:ln>
         </p:spPr>
         <p:txBody>
-          <a:bodyPr numCol="1" spcCol="0" lIns="90000" rIns="90000" tIns="45000" bIns="45000" anchor="ctr">
+          <a:bodyPr lIns="90000" tIns="45000" rIns="90000" bIns="45000" numCol="1" spcCol="0" anchor="ctr">
             <a:noAutofit/>
           </a:bodyPr>
           <a:lstStyle>
@@ -8548,14 +8750,14 @@
               </a:lnSpc>
               <a:buNone/>
               <a:tabLst>
-                <a:tab algn="l" pos="0"/>
+                <a:tab pos="0" algn="l"/>
               </a:tabLst>
-              <a:defRPr b="1" lang="en-US" sz="1200" spc="-1" strike="noStrike">
+              <a:defRPr lang="en-US" sz="1200" b="1" strike="noStrike" spc="-1">
                 <a:solidFill>
-                  <a:srgbClr val="ffffff"/>
+                  <a:srgbClr val="FFFFFF"/>
                 </a:solidFill>
                 <a:latin typeface="TradeGothic"/>
-                <a:ea typeface="ＭＳ Ｐゴシック"/>
+                <a:ea typeface="MS PGothic" panose="020B0600070205080204" charset="-128"/>
               </a:defRPr>
             </a:lvl1pPr>
           </a:lstStyle>
@@ -8566,21 +8768,20 @@
               </a:lnSpc>
               <a:buNone/>
               <a:tabLst>
-                <a:tab algn="l" pos="0"/>
+                <a:tab pos="0" algn="l"/>
               </a:tabLst>
             </a:pPr>
             <a:fld id="{62A89959-386E-45D0-B9C4-6D90C6F01CF8}" type="slidenum">
-              <a:rPr b="1" lang="en-US" sz="1200" spc="-1" strike="noStrike">
+              <a:rPr lang="en-US" sz="1200" b="1" strike="noStrike" spc="-1">
                 <a:solidFill>
-                  <a:srgbClr val="ffffff"/>
+                  <a:srgbClr val="FFFFFF"/>
                 </a:solidFill>
                 <a:latin typeface="TradeGothic"/>
-                <a:ea typeface="ＭＳ Ｐゴシック"/>
+                <a:ea typeface="MS PGothic" panose="020B0600070205080204" charset="-128"/>
               </a:rPr>
-              <a:t>&lt;number&gt;</a:t>
             </a:fld>
-            <a:endParaRPr b="0" lang="en-IN" sz="1200" spc="-1" strike="noStrike">
-              <a:latin typeface="Times New Roman"/>
+            <a:endParaRPr lang="en-IN" sz="1200" b="0" strike="noStrike" spc="-1">
+              <a:latin typeface="Times New Roman" panose="02020603050405020304"/>
             </a:endParaRPr>
           </a:p>
         </p:txBody>
@@ -8609,7 +8810,7 @@
           </a:ln>
         </p:spPr>
         <p:txBody>
-          <a:bodyPr lIns="90000" rIns="90000" tIns="45000" bIns="45000" anchor="ctr">
+          <a:bodyPr lIns="90000" tIns="45000" rIns="90000" bIns="45000" anchor="ctr">
             <a:noAutofit/>
           </a:bodyPr>
           <a:lstStyle>
@@ -8619,11 +8820,11 @@
               </a:lnSpc>
               <a:buNone/>
               <a:tabLst>
-                <a:tab algn="l" pos="0"/>
+                <a:tab pos="0" algn="l"/>
               </a:tabLst>
-              <a:defRPr b="0" lang="en-US" sz="1200" spc="-1" strike="noStrike">
+              <a:defRPr lang="en-US" sz="1200" b="0" strike="noStrike" spc="-1">
                 <a:solidFill>
-                  <a:srgbClr val="ffffff"/>
+                  <a:srgbClr val="FFFFFF"/>
                 </a:solidFill>
                 <a:latin typeface="TradeGothic"/>
               </a:defRPr>
@@ -8636,20 +8837,20 @@
               </a:lnSpc>
               <a:buNone/>
               <a:tabLst>
-                <a:tab algn="l" pos="0"/>
+                <a:tab pos="0" algn="l"/>
               </a:tabLst>
             </a:pPr>
             <a:r>
-              <a:rPr b="0" lang="en-US" sz="1200" spc="-1" strike="noStrike">
+              <a:rPr lang="en-US" sz="1200" b="0" strike="noStrike" spc="-1">
                 <a:solidFill>
-                  <a:srgbClr val="ffffff"/>
+                  <a:srgbClr val="FFFFFF"/>
                 </a:solidFill>
                 <a:latin typeface="TradeGothic"/>
               </a:rPr>
               <a:t>@SIH Idea submission- Template</a:t>
             </a:r>
-            <a:endParaRPr b="0" lang="en-IN" sz="1200" spc="-1" strike="noStrike">
-              <a:latin typeface="Times New Roman"/>
+            <a:endParaRPr lang="en-IN" sz="1200" b="0" strike="noStrike" spc="-1">
+              <a:latin typeface="Times New Roman" panose="02020603050405020304"/>
             </a:endParaRPr>
           </a:p>
         </p:txBody>
@@ -8669,11 +8870,11 @@
             <a:avLst/>
           </a:prstGeom>
           <a:solidFill>
-            <a:srgbClr val="ffffff"/>
+            <a:srgbClr val="FFFFFF"/>
           </a:solidFill>
           <a:ln>
             <a:solidFill>
-              <a:srgbClr val="8064a2"/>
+              <a:srgbClr val="8064A2"/>
             </a:solidFill>
             <a:round/>
           </a:ln>
@@ -8691,7 +8892,7 @@
           <a:fontRef idx="minor"/>
         </p:style>
         <p:txBody>
-          <a:bodyPr lIns="90000" rIns="90000" tIns="45000" bIns="45000" anchor="ctr">
+          <a:bodyPr lIns="90000" tIns="45000" rIns="90000" bIns="45000" anchor="ctr">
             <a:noAutofit/>
           </a:bodyPr>
           <a:p>
@@ -8702,30 +8903,32 @@
               <a:buNone/>
             </a:pPr>
             <a:r>
-              <a:rPr b="0" lang="en-US" sz="1800" spc="-1" strike="noStrike">
+              <a:rPr lang="en-US" sz="1800" b="0" strike="noStrike" spc="-1">
                 <a:solidFill>
                   <a:srgbClr val="000000"/>
                 </a:solidFill>
-                <a:latin typeface="Calibri"/>
-                <a:ea typeface="ＭＳ Ｐゴシック"/>
+                <a:latin typeface="Calibri" panose="020F0502020204030204"/>
+                <a:ea typeface="MS PGothic" panose="020B0600070205080204" charset="-128"/>
               </a:rPr>
               <a:t>Your Team Name</a:t>
             </a:r>
-            <a:endParaRPr b="0" lang="en-IN" sz="1800" spc="-1" strike="noStrike">
-              <a:latin typeface="Arial"/>
+            <a:endParaRPr lang="en-IN" sz="1800" b="0" strike="noStrike" spc="-1">
+              <a:latin typeface="Arial" panose="020B0604020202020204"/>
             </a:endParaRPr>
           </a:p>
         </p:txBody>
       </p:sp>
       <p:pic>
         <p:nvPicPr>
-          <p:cNvPr id="115" name="Picture 10" descr=""/>
+          <p:cNvPr id="115" name="Picture 10"/>
           <p:cNvPicPr/>
           <p:nvPr/>
         </p:nvPicPr>
         <p:blipFill>
           <a:blip r:embed="rId1"/>
-          <a:stretch/>
+          <a:stretch>
+            <a:fillRect/>
+          </a:stretch>
         </p:blipFill>
         <p:spPr>
           <a:xfrm>
@@ -8742,8 +8945,11 @@
       </p:pic>
     </p:spTree>
   </p:cSld>
-  <mc:AlternateContent>
-    <mc:Choice Requires="p14">
+  <p:clrMapOvr>
+    <a:masterClrMapping/>
+  </p:clrMapOvr>
+  <mc:AlternateContent xmlns:mc="http://schemas.openxmlformats.org/markup-compatibility/2006">
+    <mc:Choice xmlns:p14="http://schemas.microsoft.com/office/powerpoint/2010/main" Requires="p14">
       <p:transition spd="slow" p14:dur="2000"/>
     </mc:Choice>
     <mc:Fallback>
@@ -8754,7 +8960,7 @@
 </file>
 
 <file path=ppt/slides/slide5.xml><?xml version="1.0" encoding="utf-8"?>
-<p:sld xmlns:a="http://schemas.openxmlformats.org/drawingml/2006/main" xmlns:p="http://schemas.openxmlformats.org/presentationml/2006/main" xmlns:r="http://schemas.openxmlformats.org/officeDocument/2006/relationships" xmlns:p14="http://schemas.microsoft.com/office/powerpoint/2010/main" xmlns:p15="http://schemas.microsoft.com/office/powerpoint/2012/main" xmlns:mc="http://schemas.openxmlformats.org/markup-compatibility/2006">
+<p:sld xmlns:a="http://schemas.openxmlformats.org/drawingml/2006/main" xmlns:r="http://schemas.openxmlformats.org/officeDocument/2006/relationships" xmlns:p="http://schemas.openxmlformats.org/presentationml/2006/main">
   <p:cSld>
     <p:spTree>
       <p:nvGrpSpPr>
@@ -8785,13 +8991,13 @@
             <a:avLst/>
           </a:prstGeom>
           <a:solidFill>
-            <a:srgbClr val="0070c0"/>
+            <a:srgbClr val="0070C0"/>
           </a:solidFill>
           <a:ln w="9525">
             <a:noFill/>
           </a:ln>
           <a:effectLst>
-            <a:outerShdw dir="5400000" dist="23040" rotWithShape="0">
+            <a:outerShdw dist="23040" dir="5400000" rotWithShape="0">
               <a:srgbClr val="808080">
                 <a:alpha val="35000"/>
               </a:srgbClr>
@@ -8799,9 +9005,15 @@
           </a:effectLst>
         </p:spPr>
         <p:style>
-          <a:lnRef idx="0"/>
-          <a:fillRef idx="0"/>
-          <a:effectRef idx="0"/>
+          <a:lnRef idx="0">
+            <a:srgbClr val="FFFFFF"/>
+          </a:lnRef>
+          <a:fillRef idx="0">
+            <a:srgbClr val="FFFFFF"/>
+          </a:fillRef>
+          <a:effectRef idx="0">
+            <a:srgbClr val="FFFFFF"/>
+          </a:effectRef>
           <a:fontRef idx="minor"/>
         </p:style>
       </p:sp>
@@ -8829,7 +9041,7 @@
           </a:ln>
         </p:spPr>
         <p:txBody>
-          <a:bodyPr numCol="1" spcCol="0" lIns="90000" rIns="90000" tIns="45000" bIns="45000" anchor="ctr">
+          <a:bodyPr lIns="90000" tIns="45000" rIns="90000" bIns="45000" numCol="1" spcCol="0" anchor="ctr">
             <a:noAutofit/>
           </a:bodyPr>
           <a:p>
@@ -8840,17 +9052,17 @@
               <a:buNone/>
             </a:pPr>
             <a:r>
-              <a:rPr b="1" lang="en-US" sz="3600" spc="-1" strike="noStrike">
+              <a:rPr lang="en-US" sz="3600" b="1" strike="noStrike" spc="-1">
                 <a:solidFill>
                   <a:srgbClr val="000000"/>
                 </a:solidFill>
-                <a:latin typeface="Times New Roman"/>
-                <a:ea typeface="ＭＳ Ｐゴシック"/>
+                <a:latin typeface="Times New Roman" panose="02020603050405020304"/>
+                <a:ea typeface="MS PGothic" panose="020B0600070205080204" charset="-128"/>
               </a:rPr>
               <a:t>IMPACT AND BENEFITS</a:t>
             </a:r>
-            <a:endParaRPr b="0" lang="en-IN" sz="3600" spc="-1" strike="noStrike">
-              <a:latin typeface="Arial"/>
+            <a:endParaRPr lang="en-IN" sz="3600" b="0" strike="noStrike" spc="-1">
+              <a:latin typeface="Arial" panose="020B0604020202020204"/>
             </a:endParaRPr>
           </a:p>
         </p:txBody>
@@ -8875,63 +9087,69 @@
           </a:ln>
         </p:spPr>
         <p:style>
-          <a:lnRef idx="0"/>
-          <a:fillRef idx="0"/>
-          <a:effectRef idx="0"/>
+          <a:lnRef idx="0">
+            <a:srgbClr val="FFFFFF"/>
+          </a:lnRef>
+          <a:fillRef idx="0">
+            <a:srgbClr val="FFFFFF"/>
+          </a:fillRef>
+          <a:effectRef idx="0">
+            <a:srgbClr val="FFFFFF"/>
+          </a:effectRef>
           <a:fontRef idx="minor"/>
         </p:style>
         <p:txBody>
-          <a:bodyPr lIns="90000" rIns="90000" tIns="45000" bIns="45000" anchor="t">
+          <a:bodyPr lIns="90000" tIns="45000" rIns="90000" bIns="45000" anchor="t">
             <a:spAutoFit/>
           </a:bodyPr>
           <a:p>
-            <a:pPr marL="343080" indent="-343080" algn="just">
+            <a:pPr marL="342900" indent="-342900" algn="just">
               <a:lnSpc>
                 <a:spcPct val="100000"/>
               </a:lnSpc>
               <a:buClr>
                 <a:srgbClr val="000000"/>
               </a:buClr>
-              <a:buFont typeface="Arial"/>
+              <a:buFont typeface="Arial" panose="020B0604020202020204"/>
               <a:buChar char="•"/>
             </a:pPr>
             <a:r>
-              <a:rPr b="0" lang="en-US" sz="2800" spc="-1" strike="noStrike">
+              <a:rPr lang="en-US" sz="2800" b="0" strike="noStrike" spc="-1">
                 <a:solidFill>
                   <a:srgbClr val="000000"/>
                 </a:solidFill>
-                <a:latin typeface="Arial"/>
-                <a:ea typeface="ＭＳ Ｐゴシック"/>
+                <a:latin typeface="Arial" panose="020B0604020202020204"/>
+                <a:ea typeface="MS PGothic" panose="020B0600070205080204" charset="-128"/>
               </a:rPr>
               <a:t>Potential impact on the target audience</a:t>
             </a:r>
-            <a:endParaRPr b="0" lang="en-IN" sz="2800" spc="-1" strike="noStrike">
-              <a:latin typeface="Arial"/>
-            </a:endParaRPr>
-          </a:p>
-          <a:p>
-            <a:pPr marL="343080" indent="-343080" algn="just">
+            <a:endParaRPr lang="en-IN" sz="2800" b="0" strike="noStrike" spc="-1">
+              <a:latin typeface="Arial" panose="020B0604020202020204"/>
+            </a:endParaRPr>
+          </a:p>
+          <a:p>
+            <a:pPr marL="342900" indent="-342900" algn="just">
               <a:lnSpc>
                 <a:spcPct val="100000"/>
               </a:lnSpc>
               <a:buClr>
                 <a:srgbClr val="000000"/>
               </a:buClr>
-              <a:buFont typeface="Arial"/>
+              <a:buFont typeface="Arial" panose="020B0604020202020204"/>
               <a:buChar char="•"/>
             </a:pPr>
             <a:r>
-              <a:rPr b="0" lang="en-US" sz="2800" spc="-1" strike="noStrike">
+              <a:rPr lang="en-US" sz="2800" b="0" strike="noStrike" spc="-1">
                 <a:solidFill>
                   <a:srgbClr val="000000"/>
                 </a:solidFill>
-                <a:latin typeface="Arial"/>
-                <a:ea typeface="ＭＳ Ｐゴシック"/>
+                <a:latin typeface="Arial" panose="020B0604020202020204"/>
+                <a:ea typeface="MS PGothic" panose="020B0600070205080204" charset="-128"/>
               </a:rPr>
               <a:t>Benefits of the solution (social, economic, environmental, etc.)</a:t>
             </a:r>
-            <a:endParaRPr b="0" lang="en-IN" sz="2800" spc="-1" strike="noStrike">
-              <a:latin typeface="Arial"/>
+            <a:endParaRPr lang="en-IN" sz="2800" b="0" strike="noStrike" spc="-1">
+              <a:latin typeface="Arial" panose="020B0604020202020204"/>
             </a:endParaRPr>
           </a:p>
         </p:txBody>
@@ -8960,7 +9178,7 @@
           </a:ln>
         </p:spPr>
         <p:txBody>
-          <a:bodyPr numCol="1" spcCol="0" lIns="90000" rIns="90000" tIns="45000" bIns="45000" anchor="ctr">
+          <a:bodyPr lIns="90000" tIns="45000" rIns="90000" bIns="45000" numCol="1" spcCol="0" anchor="ctr">
             <a:noAutofit/>
           </a:bodyPr>
           <a:lstStyle>
@@ -8970,14 +9188,14 @@
               </a:lnSpc>
               <a:buNone/>
               <a:tabLst>
-                <a:tab algn="l" pos="0"/>
+                <a:tab pos="0" algn="l"/>
               </a:tabLst>
-              <a:defRPr b="1" lang="en-US" sz="1200" spc="-1" strike="noStrike">
+              <a:defRPr lang="en-US" sz="1200" b="1" strike="noStrike" spc="-1">
                 <a:solidFill>
-                  <a:srgbClr val="ffffff"/>
+                  <a:srgbClr val="FFFFFF"/>
                 </a:solidFill>
                 <a:latin typeface="TradeGothic"/>
-                <a:ea typeface="ＭＳ Ｐゴシック"/>
+                <a:ea typeface="MS PGothic" panose="020B0600070205080204" charset="-128"/>
               </a:defRPr>
             </a:lvl1pPr>
           </a:lstStyle>
@@ -8988,21 +9206,20 @@
               </a:lnSpc>
               <a:buNone/>
               <a:tabLst>
-                <a:tab algn="l" pos="0"/>
+                <a:tab pos="0" algn="l"/>
               </a:tabLst>
             </a:pPr>
             <a:fld id="{DE00E229-B67D-4BF6-BC59-7375C5A8ADD5}" type="slidenum">
-              <a:rPr b="1" lang="en-US" sz="1200" spc="-1" strike="noStrike">
+              <a:rPr lang="en-US" sz="1200" b="1" strike="noStrike" spc="-1">
                 <a:solidFill>
-                  <a:srgbClr val="ffffff"/>
+                  <a:srgbClr val="FFFFFF"/>
                 </a:solidFill>
                 <a:latin typeface="TradeGothic"/>
-                <a:ea typeface="ＭＳ Ｐゴシック"/>
+                <a:ea typeface="MS PGothic" panose="020B0600070205080204" charset="-128"/>
               </a:rPr>
-              <a:t>&lt;number&gt;</a:t>
             </a:fld>
-            <a:endParaRPr b="0" lang="en-IN" sz="1200" spc="-1" strike="noStrike">
-              <a:latin typeface="Times New Roman"/>
+            <a:endParaRPr lang="en-IN" sz="1200" b="0" strike="noStrike" spc="-1">
+              <a:latin typeface="Times New Roman" panose="02020603050405020304"/>
             </a:endParaRPr>
           </a:p>
         </p:txBody>
@@ -9031,7 +9248,7 @@
           </a:ln>
         </p:spPr>
         <p:txBody>
-          <a:bodyPr lIns="90000" rIns="90000" tIns="45000" bIns="45000" anchor="ctr">
+          <a:bodyPr lIns="90000" tIns="45000" rIns="90000" bIns="45000" anchor="ctr">
             <a:noAutofit/>
           </a:bodyPr>
           <a:lstStyle>
@@ -9041,11 +9258,11 @@
               </a:lnSpc>
               <a:buNone/>
               <a:tabLst>
-                <a:tab algn="l" pos="0"/>
+                <a:tab pos="0" algn="l"/>
               </a:tabLst>
-              <a:defRPr b="0" lang="en-US" sz="1200" spc="-1" strike="noStrike">
+              <a:defRPr lang="en-US" sz="1200" b="0" strike="noStrike" spc="-1">
                 <a:solidFill>
-                  <a:srgbClr val="ffffff"/>
+                  <a:srgbClr val="FFFFFF"/>
                 </a:solidFill>
                 <a:latin typeface="TradeGothic"/>
               </a:defRPr>
@@ -9058,20 +9275,20 @@
               </a:lnSpc>
               <a:buNone/>
               <a:tabLst>
-                <a:tab algn="l" pos="0"/>
+                <a:tab pos="0" algn="l"/>
               </a:tabLst>
             </a:pPr>
             <a:r>
-              <a:rPr b="0" lang="en-US" sz="1200" spc="-1" strike="noStrike">
+              <a:rPr lang="en-US" sz="1200" b="0" strike="noStrike" spc="-1">
                 <a:solidFill>
-                  <a:srgbClr val="ffffff"/>
+                  <a:srgbClr val="FFFFFF"/>
                 </a:solidFill>
                 <a:latin typeface="TradeGothic"/>
               </a:rPr>
               <a:t>@SIH Idea submission- Template</a:t>
             </a:r>
-            <a:endParaRPr b="0" lang="en-IN" sz="1200" spc="-1" strike="noStrike">
-              <a:latin typeface="Times New Roman"/>
+            <a:endParaRPr lang="en-IN" sz="1200" b="0" strike="noStrike" spc="-1">
+              <a:latin typeface="Times New Roman" panose="02020603050405020304"/>
             </a:endParaRPr>
           </a:p>
         </p:txBody>
@@ -9091,11 +9308,11 @@
             <a:avLst/>
           </a:prstGeom>
           <a:solidFill>
-            <a:srgbClr val="ffffff"/>
+            <a:srgbClr val="FFFFFF"/>
           </a:solidFill>
           <a:ln>
             <a:solidFill>
-              <a:srgbClr val="8064a2"/>
+              <a:srgbClr val="8064A2"/>
             </a:solidFill>
             <a:round/>
           </a:ln>
@@ -9113,7 +9330,7 @@
           <a:fontRef idx="minor"/>
         </p:style>
         <p:txBody>
-          <a:bodyPr lIns="90000" rIns="90000" tIns="45000" bIns="45000" anchor="ctr">
+          <a:bodyPr lIns="90000" tIns="45000" rIns="90000" bIns="45000" anchor="ctr">
             <a:noAutofit/>
           </a:bodyPr>
           <a:p>
@@ -9124,30 +9341,32 @@
               <a:buNone/>
             </a:pPr>
             <a:r>
-              <a:rPr b="0" lang="en-US" sz="1800" spc="-1" strike="noStrike">
+              <a:rPr lang="en-US" sz="1800" b="0" strike="noStrike" spc="-1">
                 <a:solidFill>
                   <a:srgbClr val="000000"/>
                 </a:solidFill>
-                <a:latin typeface="Calibri"/>
-                <a:ea typeface="ＭＳ Ｐゴシック"/>
+                <a:latin typeface="Calibri" panose="020F0502020204030204"/>
+                <a:ea typeface="MS PGothic" panose="020B0600070205080204" charset="-128"/>
               </a:rPr>
               <a:t>Your Team Name</a:t>
             </a:r>
-            <a:endParaRPr b="0" lang="en-IN" sz="1800" spc="-1" strike="noStrike">
-              <a:latin typeface="Arial"/>
+            <a:endParaRPr lang="en-IN" sz="1800" b="0" strike="noStrike" spc="-1">
+              <a:latin typeface="Arial" panose="020B0604020202020204"/>
             </a:endParaRPr>
           </a:p>
         </p:txBody>
       </p:sp>
       <p:pic>
         <p:nvPicPr>
-          <p:cNvPr id="122" name="Picture 10" descr=""/>
+          <p:cNvPr id="122" name="Picture 10"/>
           <p:cNvPicPr/>
           <p:nvPr/>
         </p:nvPicPr>
         <p:blipFill>
           <a:blip r:embed="rId1"/>
-          <a:stretch/>
+          <a:stretch>
+            <a:fillRect/>
+          </a:stretch>
         </p:blipFill>
         <p:spPr>
           <a:xfrm>
@@ -9164,8 +9383,11 @@
       </p:pic>
     </p:spTree>
   </p:cSld>
-  <mc:AlternateContent>
-    <mc:Choice Requires="p14">
+  <p:clrMapOvr>
+    <a:masterClrMapping/>
+  </p:clrMapOvr>
+  <mc:AlternateContent xmlns:mc="http://schemas.openxmlformats.org/markup-compatibility/2006">
+    <mc:Choice xmlns:p14="http://schemas.microsoft.com/office/powerpoint/2010/main" Requires="p14">
       <p:transition spd="slow" p14:dur="2000"/>
     </mc:Choice>
     <mc:Fallback>
@@ -9176,7 +9398,7 @@
 </file>
 
 <file path=ppt/slides/slide6.xml><?xml version="1.0" encoding="utf-8"?>
-<p:sld xmlns:a="http://schemas.openxmlformats.org/drawingml/2006/main" xmlns:p="http://schemas.openxmlformats.org/presentationml/2006/main" xmlns:r="http://schemas.openxmlformats.org/officeDocument/2006/relationships" xmlns:p14="http://schemas.microsoft.com/office/powerpoint/2010/main" xmlns:p15="http://schemas.microsoft.com/office/powerpoint/2012/main" xmlns:mc="http://schemas.openxmlformats.org/markup-compatibility/2006">
+<p:sld xmlns:a="http://schemas.openxmlformats.org/drawingml/2006/main" xmlns:r="http://schemas.openxmlformats.org/officeDocument/2006/relationships" xmlns:p="http://schemas.openxmlformats.org/presentationml/2006/main">
   <p:cSld>
     <p:spTree>
       <p:nvGrpSpPr>
@@ -9207,13 +9429,13 @@
             <a:avLst/>
           </a:prstGeom>
           <a:solidFill>
-            <a:srgbClr val="0070c0"/>
+            <a:srgbClr val="0070C0"/>
           </a:solidFill>
           <a:ln w="9525">
             <a:noFill/>
           </a:ln>
           <a:effectLst>
-            <a:outerShdw dir="5400000" dist="23040" rotWithShape="0">
+            <a:outerShdw dist="23040" dir="5400000" rotWithShape="0">
               <a:srgbClr val="808080">
                 <a:alpha val="35000"/>
               </a:srgbClr>
@@ -9221,9 +9443,15 @@
           </a:effectLst>
         </p:spPr>
         <p:style>
-          <a:lnRef idx="0"/>
-          <a:fillRef idx="0"/>
-          <a:effectRef idx="0"/>
+          <a:lnRef idx="0">
+            <a:srgbClr val="FFFFFF"/>
+          </a:lnRef>
+          <a:fillRef idx="0">
+            <a:srgbClr val="FFFFFF"/>
+          </a:fillRef>
+          <a:effectRef idx="0">
+            <a:srgbClr val="FFFFFF"/>
+          </a:effectRef>
           <a:fontRef idx="minor"/>
         </p:style>
       </p:sp>
@@ -9251,7 +9479,7 @@
           </a:ln>
         </p:spPr>
         <p:txBody>
-          <a:bodyPr numCol="1" spcCol="0" lIns="90000" rIns="90000" tIns="45000" bIns="45000" anchor="ctr">
+          <a:bodyPr lIns="90000" tIns="45000" rIns="90000" bIns="45000" numCol="1" spcCol="0" anchor="ctr">
             <a:noAutofit/>
           </a:bodyPr>
           <a:p>
@@ -9262,17 +9490,17 @@
               <a:buNone/>
             </a:pPr>
             <a:r>
-              <a:rPr b="1" lang="en-US" sz="3600" spc="-1" strike="noStrike">
+              <a:rPr lang="en-US" sz="3600" b="1" strike="noStrike" spc="-1">
                 <a:solidFill>
                   <a:srgbClr val="000000"/>
                 </a:solidFill>
-                <a:latin typeface="Times New Roman"/>
-                <a:ea typeface="ＭＳ Ｐゴシック"/>
+                <a:latin typeface="Times New Roman" panose="02020603050405020304"/>
+                <a:ea typeface="MS PGothic" panose="020B0600070205080204" charset="-128"/>
               </a:rPr>
               <a:t>RESEARCH  AND REFERENCES</a:t>
             </a:r>
-            <a:endParaRPr b="0" lang="en-IN" sz="3600" spc="-1" strike="noStrike">
-              <a:latin typeface="Arial"/>
+            <a:endParaRPr lang="en-IN" sz="3600" b="0" strike="noStrike" spc="-1">
+              <a:latin typeface="Arial" panose="020B0604020202020204"/>
             </a:endParaRPr>
           </a:p>
         </p:txBody>
@@ -9297,38 +9525,44 @@
           </a:ln>
         </p:spPr>
         <p:style>
-          <a:lnRef idx="0"/>
-          <a:fillRef idx="0"/>
-          <a:effectRef idx="0"/>
+          <a:lnRef idx="0">
+            <a:srgbClr val="FFFFFF"/>
+          </a:lnRef>
+          <a:fillRef idx="0">
+            <a:srgbClr val="FFFFFF"/>
+          </a:fillRef>
+          <a:effectRef idx="0">
+            <a:srgbClr val="FFFFFF"/>
+          </a:effectRef>
           <a:fontRef idx="minor"/>
         </p:style>
         <p:txBody>
-          <a:bodyPr lIns="90000" rIns="90000" tIns="45000" bIns="45000" anchor="t">
+          <a:bodyPr lIns="90000" tIns="45000" rIns="90000" bIns="45000" anchor="t">
             <a:spAutoFit/>
           </a:bodyPr>
           <a:p>
-            <a:pPr marL="343080" indent="-343080" algn="just">
+            <a:pPr marL="342900" indent="-342900" algn="just">
               <a:lnSpc>
                 <a:spcPct val="100000"/>
               </a:lnSpc>
               <a:buClr>
                 <a:srgbClr val="000000"/>
               </a:buClr>
-              <a:buFont typeface="Arial"/>
+              <a:buFont typeface="Arial" panose="020B0604020202020204"/>
               <a:buChar char="•"/>
             </a:pPr>
             <a:r>
-              <a:rPr b="0" lang="en-US" sz="2800" spc="-1" strike="noStrike">
+              <a:rPr lang="en-US" sz="2800" b="0" strike="noStrike" spc="-1">
                 <a:solidFill>
                   <a:srgbClr val="000000"/>
                 </a:solidFill>
-                <a:latin typeface="Arial"/>
-                <a:ea typeface="ＭＳ Ｐゴシック"/>
+                <a:latin typeface="Arial" panose="020B0604020202020204"/>
+                <a:ea typeface="MS PGothic" panose="020B0600070205080204" charset="-128"/>
               </a:rPr>
               <a:t>Details / Links of the reference and research work</a:t>
             </a:r>
-            <a:endParaRPr b="0" lang="en-IN" sz="2800" spc="-1" strike="noStrike">
-              <a:latin typeface="Arial"/>
+            <a:endParaRPr lang="en-IN" sz="2800" b="0" strike="noStrike" spc="-1">
+              <a:latin typeface="Arial" panose="020B0604020202020204"/>
             </a:endParaRPr>
           </a:p>
         </p:txBody>
@@ -9357,7 +9591,7 @@
           </a:ln>
         </p:spPr>
         <p:txBody>
-          <a:bodyPr numCol="1" spcCol="0" lIns="90000" rIns="90000" tIns="45000" bIns="45000" anchor="ctr">
+          <a:bodyPr lIns="90000" tIns="45000" rIns="90000" bIns="45000" numCol="1" spcCol="0" anchor="ctr">
             <a:noAutofit/>
           </a:bodyPr>
           <a:lstStyle>
@@ -9367,14 +9601,14 @@
               </a:lnSpc>
               <a:buNone/>
               <a:tabLst>
-                <a:tab algn="l" pos="0"/>
+                <a:tab pos="0" algn="l"/>
               </a:tabLst>
-              <a:defRPr b="1" lang="en-US" sz="1200" spc="-1" strike="noStrike">
+              <a:defRPr lang="en-US" sz="1200" b="1" strike="noStrike" spc="-1">
                 <a:solidFill>
-                  <a:srgbClr val="ffffff"/>
+                  <a:srgbClr val="FFFFFF"/>
                 </a:solidFill>
                 <a:latin typeface="TradeGothic"/>
-                <a:ea typeface="ＭＳ Ｐゴシック"/>
+                <a:ea typeface="MS PGothic" panose="020B0600070205080204" charset="-128"/>
               </a:defRPr>
             </a:lvl1pPr>
           </a:lstStyle>
@@ -9385,21 +9619,20 @@
               </a:lnSpc>
               <a:buNone/>
               <a:tabLst>
-                <a:tab algn="l" pos="0"/>
+                <a:tab pos="0" algn="l"/>
               </a:tabLst>
             </a:pPr>
             <a:fld id="{39C1B53E-3607-443E-82A1-A61E50045F9D}" type="slidenum">
-              <a:rPr b="1" lang="en-US" sz="1200" spc="-1" strike="noStrike">
+              <a:rPr lang="en-US" sz="1200" b="1" strike="noStrike" spc="-1">
                 <a:solidFill>
-                  <a:srgbClr val="ffffff"/>
+                  <a:srgbClr val="FFFFFF"/>
                 </a:solidFill>
                 <a:latin typeface="TradeGothic"/>
-                <a:ea typeface="ＭＳ Ｐゴシック"/>
+                <a:ea typeface="MS PGothic" panose="020B0600070205080204" charset="-128"/>
               </a:rPr>
-              <a:t>&lt;number&gt;</a:t>
             </a:fld>
-            <a:endParaRPr b="0" lang="en-IN" sz="1200" spc="-1" strike="noStrike">
-              <a:latin typeface="Times New Roman"/>
+            <a:endParaRPr lang="en-IN" sz="1200" b="0" strike="noStrike" spc="-1">
+              <a:latin typeface="Times New Roman" panose="02020603050405020304"/>
             </a:endParaRPr>
           </a:p>
         </p:txBody>
@@ -9428,7 +9661,7 @@
           </a:ln>
         </p:spPr>
         <p:txBody>
-          <a:bodyPr lIns="90000" rIns="90000" tIns="45000" bIns="45000" anchor="ctr">
+          <a:bodyPr lIns="90000" tIns="45000" rIns="90000" bIns="45000" anchor="ctr">
             <a:noAutofit/>
           </a:bodyPr>
           <a:lstStyle>
@@ -9438,11 +9671,11 @@
               </a:lnSpc>
               <a:buNone/>
               <a:tabLst>
-                <a:tab algn="l" pos="0"/>
+                <a:tab pos="0" algn="l"/>
               </a:tabLst>
-              <a:defRPr b="0" lang="en-US" sz="1200" spc="-1" strike="noStrike">
+              <a:defRPr lang="en-US" sz="1200" b="0" strike="noStrike" spc="-1">
                 <a:solidFill>
-                  <a:srgbClr val="ffffff"/>
+                  <a:srgbClr val="FFFFFF"/>
                 </a:solidFill>
                 <a:latin typeface="TradeGothic"/>
               </a:defRPr>
@@ -9455,20 +9688,20 @@
               </a:lnSpc>
               <a:buNone/>
               <a:tabLst>
-                <a:tab algn="l" pos="0"/>
+                <a:tab pos="0" algn="l"/>
               </a:tabLst>
             </a:pPr>
             <a:r>
-              <a:rPr b="0" lang="en-US" sz="1200" spc="-1" strike="noStrike">
+              <a:rPr lang="en-US" sz="1200" b="0" strike="noStrike" spc="-1">
                 <a:solidFill>
-                  <a:srgbClr val="ffffff"/>
+                  <a:srgbClr val="FFFFFF"/>
                 </a:solidFill>
                 <a:latin typeface="TradeGothic"/>
               </a:rPr>
               <a:t>@SIH Idea submission- Template</a:t>
             </a:r>
-            <a:endParaRPr b="0" lang="en-IN" sz="1200" spc="-1" strike="noStrike">
-              <a:latin typeface="Times New Roman"/>
+            <a:endParaRPr lang="en-IN" sz="1200" b="0" strike="noStrike" spc="-1">
+              <a:latin typeface="Times New Roman" panose="02020603050405020304"/>
             </a:endParaRPr>
           </a:p>
         </p:txBody>
@@ -9488,11 +9721,11 @@
             <a:avLst/>
           </a:prstGeom>
           <a:solidFill>
-            <a:srgbClr val="ffffff"/>
+            <a:srgbClr val="FFFFFF"/>
           </a:solidFill>
           <a:ln>
             <a:solidFill>
-              <a:srgbClr val="8064a2"/>
+              <a:srgbClr val="8064A2"/>
             </a:solidFill>
             <a:round/>
           </a:ln>
@@ -9510,7 +9743,7 @@
           <a:fontRef idx="minor"/>
         </p:style>
         <p:txBody>
-          <a:bodyPr lIns="90000" rIns="90000" tIns="45000" bIns="45000" anchor="ctr">
+          <a:bodyPr lIns="90000" tIns="45000" rIns="90000" bIns="45000" anchor="ctr">
             <a:noAutofit/>
           </a:bodyPr>
           <a:p>
@@ -9521,30 +9754,32 @@
               <a:buNone/>
             </a:pPr>
             <a:r>
-              <a:rPr b="0" lang="en-US" sz="1800" spc="-1" strike="noStrike">
+              <a:rPr lang="en-US" sz="1800" b="0" strike="noStrike" spc="-1">
                 <a:solidFill>
                   <a:srgbClr val="000000"/>
                 </a:solidFill>
-                <a:latin typeface="Calibri"/>
-                <a:ea typeface="ＭＳ Ｐゴシック"/>
+                <a:latin typeface="Calibri" panose="020F0502020204030204"/>
+                <a:ea typeface="MS PGothic" panose="020B0600070205080204" charset="-128"/>
               </a:rPr>
               <a:t>Your Team Name</a:t>
             </a:r>
-            <a:endParaRPr b="0" lang="en-IN" sz="1800" spc="-1" strike="noStrike">
-              <a:latin typeface="Arial"/>
+            <a:endParaRPr lang="en-IN" sz="1800" b="0" strike="noStrike" spc="-1">
+              <a:latin typeface="Arial" panose="020B0604020202020204"/>
             </a:endParaRPr>
           </a:p>
         </p:txBody>
       </p:sp>
       <p:pic>
         <p:nvPicPr>
-          <p:cNvPr id="129" name="Picture 11" descr=""/>
+          <p:cNvPr id="129" name="Picture 11"/>
           <p:cNvPicPr/>
           <p:nvPr/>
         </p:nvPicPr>
         <p:blipFill>
           <a:blip r:embed="rId1"/>
-          <a:stretch/>
+          <a:stretch>
+            <a:fillRect/>
+          </a:stretch>
         </p:blipFill>
         <p:spPr>
           <a:xfrm>
@@ -9561,8 +9796,11 @@
       </p:pic>
     </p:spTree>
   </p:cSld>
-  <mc:AlternateContent>
-    <mc:Choice Requires="p14">
+  <p:clrMapOvr>
+    <a:masterClrMapping/>
+  </p:clrMapOvr>
+  <mc:AlternateContent xmlns:mc="http://schemas.openxmlformats.org/markup-compatibility/2006">
+    <mc:Choice xmlns:p14="http://schemas.microsoft.com/office/powerpoint/2010/main" Requires="p14">
       <p:transition spd="slow" p14:dur="2000"/>
     </mc:Choice>
     <mc:Fallback>
@@ -9573,7 +9811,7 @@
 </file>
 
 <file path=ppt/slides/slide7.xml><?xml version="1.0" encoding="utf-8"?>
-<p:sld xmlns:a="http://schemas.openxmlformats.org/drawingml/2006/main" xmlns:p="http://schemas.openxmlformats.org/presentationml/2006/main" xmlns:r="http://schemas.openxmlformats.org/officeDocument/2006/relationships" xmlns:p14="http://schemas.microsoft.com/office/powerpoint/2010/main" xmlns:p15="http://schemas.microsoft.com/office/powerpoint/2012/main" xmlns:mc="http://schemas.openxmlformats.org/markup-compatibility/2006">
+<p:sld xmlns:a="http://schemas.openxmlformats.org/drawingml/2006/main" xmlns:r="http://schemas.openxmlformats.org/officeDocument/2006/relationships" xmlns:p="http://schemas.openxmlformats.org/presentationml/2006/main">
   <p:cSld>
     <p:spTree>
       <p:nvGrpSpPr>
@@ -9604,13 +9842,13 @@
             <a:avLst/>
           </a:prstGeom>
           <a:solidFill>
-            <a:srgbClr val="0070c0"/>
+            <a:srgbClr val="0070C0"/>
           </a:solidFill>
           <a:ln w="9525">
             <a:noFill/>
           </a:ln>
           <a:effectLst>
-            <a:outerShdw dir="5400000" dist="23040" rotWithShape="0">
+            <a:outerShdw dist="23040" dir="5400000" rotWithShape="0">
               <a:srgbClr val="808080">
                 <a:alpha val="35000"/>
               </a:srgbClr>
@@ -9618,9 +9856,15 @@
           </a:effectLst>
         </p:spPr>
         <p:style>
-          <a:lnRef idx="0"/>
-          <a:fillRef idx="0"/>
-          <a:effectRef idx="0"/>
+          <a:lnRef idx="0">
+            <a:srgbClr val="FFFFFF"/>
+          </a:lnRef>
+          <a:fillRef idx="0">
+            <a:srgbClr val="FFFFFF"/>
+          </a:fillRef>
+          <a:effectRef idx="0">
+            <a:srgbClr val="FFFFFF"/>
+          </a:effectRef>
           <a:fontRef idx="minor"/>
         </p:style>
       </p:sp>
@@ -9648,7 +9892,7 @@
           </a:ln>
         </p:spPr>
         <p:txBody>
-          <a:bodyPr numCol="1" spcCol="0" lIns="90000" rIns="90000" tIns="45000" bIns="45000" anchor="ctr">
+          <a:bodyPr lIns="90000" tIns="45000" rIns="90000" bIns="45000" numCol="1" spcCol="0" anchor="ctr">
             <a:noAutofit/>
           </a:bodyPr>
           <a:lstStyle>
@@ -9658,14 +9902,14 @@
               </a:lnSpc>
               <a:buNone/>
               <a:tabLst>
-                <a:tab algn="l" pos="0"/>
+                <a:tab pos="0" algn="l"/>
               </a:tabLst>
-              <a:defRPr b="1" lang="en-US" sz="1200" spc="-1" strike="noStrike">
+              <a:defRPr lang="en-US" sz="1200" b="1" strike="noStrike" spc="-1">
                 <a:solidFill>
-                  <a:srgbClr val="ffffff"/>
+                  <a:srgbClr val="FFFFFF"/>
                 </a:solidFill>
                 <a:latin typeface="TradeGothic"/>
-                <a:ea typeface="ＭＳ Ｐゴシック"/>
+                <a:ea typeface="MS PGothic" panose="020B0600070205080204" charset="-128"/>
               </a:defRPr>
             </a:lvl1pPr>
           </a:lstStyle>
@@ -9676,21 +9920,20 @@
               </a:lnSpc>
               <a:buNone/>
               <a:tabLst>
-                <a:tab algn="l" pos="0"/>
+                <a:tab pos="0" algn="l"/>
               </a:tabLst>
             </a:pPr>
             <a:fld id="{F5D5CD68-9D8C-473A-8D66-F3E46334690C}" type="slidenum">
-              <a:rPr b="1" lang="en-US" sz="1200" spc="-1" strike="noStrike">
+              <a:rPr lang="en-US" sz="1200" b="1" strike="noStrike" spc="-1">
                 <a:solidFill>
-                  <a:srgbClr val="ffffff"/>
+                  <a:srgbClr val="FFFFFF"/>
                 </a:solidFill>
                 <a:latin typeface="TradeGothic"/>
-                <a:ea typeface="ＭＳ Ｐゴシック"/>
+                <a:ea typeface="MS PGothic" panose="020B0600070205080204" charset="-128"/>
               </a:rPr>
-              <a:t>&lt;number&gt;</a:t>
             </a:fld>
-            <a:endParaRPr b="0" lang="en-IN" sz="1200" spc="-1" strike="noStrike">
-              <a:latin typeface="Times New Roman"/>
+            <a:endParaRPr lang="en-IN" sz="1200" b="0" strike="noStrike" spc="-1">
+              <a:latin typeface="Times New Roman" panose="02020603050405020304"/>
             </a:endParaRPr>
           </a:p>
         </p:txBody>
@@ -9719,7 +9962,7 @@
           </a:ln>
         </p:spPr>
         <p:txBody>
-          <a:bodyPr lIns="90000" rIns="90000" tIns="45000" bIns="45000" anchor="ctr">
+          <a:bodyPr lIns="90000" tIns="45000" rIns="90000" bIns="45000" anchor="ctr">
             <a:noAutofit/>
           </a:bodyPr>
           <a:lstStyle>
@@ -9729,11 +9972,11 @@
               </a:lnSpc>
               <a:buNone/>
               <a:tabLst>
-                <a:tab algn="l" pos="0"/>
+                <a:tab pos="0" algn="l"/>
               </a:tabLst>
-              <a:defRPr b="0" lang="en-US" sz="1200" spc="-1" strike="noStrike">
+              <a:defRPr lang="en-US" sz="1200" b="0" strike="noStrike" spc="-1">
                 <a:solidFill>
-                  <a:srgbClr val="ffffff"/>
+                  <a:srgbClr val="FFFFFF"/>
                 </a:solidFill>
                 <a:latin typeface="TradeGothic"/>
               </a:defRPr>
@@ -9746,20 +9989,20 @@
               </a:lnSpc>
               <a:buNone/>
               <a:tabLst>
-                <a:tab algn="l" pos="0"/>
+                <a:tab pos="0" algn="l"/>
               </a:tabLst>
             </a:pPr>
             <a:r>
-              <a:rPr b="0" lang="en-US" sz="1200" spc="-1" strike="noStrike">
+              <a:rPr lang="en-US" sz="1200" b="0" strike="noStrike" spc="-1">
                 <a:solidFill>
-                  <a:srgbClr val="ffffff"/>
+                  <a:srgbClr val="FFFFFF"/>
                 </a:solidFill>
                 <a:latin typeface="TradeGothic"/>
               </a:rPr>
               <a:t>@SIH Idea submission- Template</a:t>
             </a:r>
-            <a:endParaRPr b="0" lang="en-IN" sz="1200" spc="-1" strike="noStrike">
-              <a:latin typeface="Times New Roman"/>
+            <a:endParaRPr lang="en-IN" sz="1200" b="0" strike="noStrike" spc="-1">
+              <a:latin typeface="Times New Roman" panose="02020603050405020304"/>
             </a:endParaRPr>
           </a:p>
         </p:txBody>
@@ -9789,12 +10032,12 @@
           </a:solidFill>
           <a:ln w="38100">
             <a:solidFill>
-              <a:srgbClr val="4a7ebb"/>
+              <a:srgbClr val="4A7EBB"/>
             </a:solidFill>
             <a:round/>
           </a:ln>
           <a:effectLst>
-            <a:outerShdw blurRad="39960" dir="5400000" dist="23040" rotWithShape="0">
+            <a:outerShdw blurRad="39960" dist="23040" dir="5400000" rotWithShape="0">
               <a:srgbClr val="000000">
                 <a:alpha val="35000"/>
               </a:srgbClr>
@@ -9834,259 +10077,265 @@
           </a:ln>
         </p:spPr>
         <p:style>
-          <a:lnRef idx="0"/>
-          <a:fillRef idx="0"/>
-          <a:effectRef idx="0"/>
+          <a:lnRef idx="0">
+            <a:srgbClr val="FFFFFF"/>
+          </a:lnRef>
+          <a:fillRef idx="0">
+            <a:srgbClr val="FFFFFF"/>
+          </a:fillRef>
+          <a:effectRef idx="0">
+            <a:srgbClr val="FFFFFF"/>
+          </a:effectRef>
           <a:fontRef idx="minor"/>
         </p:style>
         <p:txBody>
-          <a:bodyPr lIns="90000" rIns="90000" tIns="45000" bIns="45000" anchor="t">
+          <a:bodyPr lIns="90000" tIns="45000" rIns="90000" bIns="45000" anchor="t">
             <a:noAutofit/>
           </a:bodyPr>
           <a:p>
-            <a:pPr marL="514440" indent="-514440" algn="just">
+            <a:pPr marL="514350" indent="-514350" algn="just">
               <a:lnSpc>
                 <a:spcPct val="90000"/>
               </a:lnSpc>
               <a:buClr>
                 <a:srgbClr val="000000"/>
               </a:buClr>
-              <a:buFont typeface="Calibri"/>
+              <a:buFont typeface="Calibri" panose="020F0502020204030204"/>
               <a:buAutoNum type="arabicPeriod"/>
             </a:pPr>
             <a:r>
-              <a:rPr b="1" lang="en-US" sz="1800" spc="-1" strike="noStrike">
+              <a:rPr lang="en-US" sz="1800" b="1" strike="noStrike" spc="-1">
                 <a:solidFill>
                   <a:srgbClr val="000000"/>
                 </a:solidFill>
-                <a:latin typeface="Arial"/>
-                <a:ea typeface="Calibri"/>
+                <a:latin typeface="Arial" panose="020B0604020202020204"/>
+                <a:ea typeface="Calibri" panose="020F0502020204030204"/>
               </a:rPr>
               <a:t>Kindly keep the maximum slides limit up to six </a:t>
             </a:r>
             <a:r>
-              <a:rPr b="1" lang="en-US" sz="1800" spc="-1" strike="noStrike">
+              <a:rPr lang="en-US" sz="1800" b="1" strike="noStrike" spc="-1">
                 <a:solidFill>
-                  <a:srgbClr val="c00000"/>
+                  <a:srgbClr val="C00000"/>
                 </a:solidFill>
-                <a:latin typeface="Arial"/>
-                <a:ea typeface="Calibri"/>
+                <a:latin typeface="Arial" panose="020B0604020202020204"/>
+                <a:ea typeface="Calibri" panose="020F0502020204030204"/>
               </a:rPr>
               <a:t>(6). </a:t>
             </a:r>
             <a:r>
-              <a:rPr b="1" lang="en-US" sz="1800" spc="-1" strike="noStrike">
+              <a:rPr lang="en-US" sz="1800" b="1" strike="noStrike" spc="-1">
                 <a:solidFill>
                   <a:srgbClr val="000000"/>
                 </a:solidFill>
-                <a:latin typeface="Arial"/>
-                <a:ea typeface="Calibri"/>
+                <a:latin typeface="Arial" panose="020B0604020202020204"/>
+                <a:ea typeface="Calibri" panose="020F0502020204030204"/>
               </a:rPr>
               <a:t>( Including the title slide) </a:t>
             </a:r>
-            <a:endParaRPr b="0" lang="en-IN" sz="1800" spc="-1" strike="noStrike">
-              <a:latin typeface="Arial"/>
-            </a:endParaRPr>
-          </a:p>
-          <a:p>
-            <a:pPr marL="514440" indent="-514440" algn="just">
+            <a:endParaRPr lang="en-IN" sz="1800" b="0" strike="noStrike" spc="-1">
+              <a:latin typeface="Arial" panose="020B0604020202020204"/>
+            </a:endParaRPr>
+          </a:p>
+          <a:p>
+            <a:pPr marL="514350" indent="-514350" algn="just">
               <a:lnSpc>
                 <a:spcPct val="90000"/>
               </a:lnSpc>
               <a:spcBef>
-                <a:spcPts val="1001"/>
+                <a:spcPts val="1000"/>
               </a:spcBef>
               <a:buClr>
                 <a:srgbClr val="000000"/>
               </a:buClr>
-              <a:buFont typeface="Calibri"/>
+              <a:buFont typeface="Calibri" panose="020F0502020204030204"/>
               <a:buAutoNum type="arabicPeriod"/>
             </a:pPr>
             <a:r>
-              <a:rPr b="1" lang="en-US" sz="1800" spc="-1" strike="noStrike">
+              <a:rPr lang="en-US" sz="1800" b="1" strike="noStrike" spc="-1">
                 <a:solidFill>
                   <a:srgbClr val="000000"/>
                 </a:solidFill>
-                <a:latin typeface="Arial"/>
-                <a:ea typeface="Calibri"/>
+                <a:latin typeface="Arial" panose="020B0604020202020204"/>
+                <a:ea typeface="Calibri" panose="020F0502020204030204"/>
               </a:rPr>
               <a:t>Try to avoid paragraphs and post your idea in points /diagrams / Infographics /pictures </a:t>
             </a:r>
-            <a:endParaRPr b="0" lang="en-IN" sz="1800" spc="-1" strike="noStrike">
-              <a:latin typeface="Arial"/>
-            </a:endParaRPr>
-          </a:p>
-          <a:p>
-            <a:pPr marL="514440" indent="-514440" algn="just">
+            <a:endParaRPr lang="en-IN" sz="1800" b="0" strike="noStrike" spc="-1">
+              <a:latin typeface="Arial" panose="020B0604020202020204"/>
+            </a:endParaRPr>
+          </a:p>
+          <a:p>
+            <a:pPr marL="514350" indent="-514350" algn="just">
               <a:lnSpc>
                 <a:spcPct val="90000"/>
               </a:lnSpc>
               <a:spcBef>
-                <a:spcPts val="1001"/>
+                <a:spcPts val="1000"/>
               </a:spcBef>
               <a:buClr>
                 <a:srgbClr val="000000"/>
               </a:buClr>
-              <a:buFont typeface="Calibri"/>
+              <a:buFont typeface="Calibri" panose="020F0502020204030204"/>
               <a:buAutoNum type="arabicPeriod"/>
             </a:pPr>
             <a:r>
-              <a:rPr b="1" lang="en-US" sz="1800" spc="-1" strike="noStrike">
+              <a:rPr lang="en-US" sz="1800" b="1" strike="noStrike" spc="-1">
                 <a:solidFill>
                   <a:srgbClr val="000000"/>
                 </a:solidFill>
-                <a:latin typeface="Arial"/>
-                <a:ea typeface="Calibri"/>
+                <a:latin typeface="Arial" panose="020B0604020202020204"/>
+                <a:ea typeface="Calibri" panose="020F0502020204030204"/>
               </a:rPr>
               <a:t>Keep your explanation precise and easy to understand</a:t>
             </a:r>
-            <a:endParaRPr b="0" lang="en-IN" sz="1800" spc="-1" strike="noStrike">
-              <a:latin typeface="Arial"/>
-            </a:endParaRPr>
-          </a:p>
-          <a:p>
-            <a:pPr marL="514440" indent="-514440" algn="just">
+            <a:endParaRPr lang="en-IN" sz="1800" b="0" strike="noStrike" spc="-1">
+              <a:latin typeface="Arial" panose="020B0604020202020204"/>
+            </a:endParaRPr>
+          </a:p>
+          <a:p>
+            <a:pPr marL="514350" indent="-514350" algn="just">
               <a:lnSpc>
                 <a:spcPct val="90000"/>
               </a:lnSpc>
               <a:spcBef>
-                <a:spcPts val="1001"/>
+                <a:spcPts val="1000"/>
               </a:spcBef>
               <a:buClr>
                 <a:srgbClr val="000000"/>
               </a:buClr>
-              <a:buFont typeface="Calibri"/>
+              <a:buFont typeface="Calibri" panose="020F0502020204030204"/>
               <a:buAutoNum type="arabicPeriod"/>
             </a:pPr>
             <a:r>
-              <a:rPr b="1" lang="en-US" sz="1800" spc="-1" strike="noStrike">
+              <a:rPr lang="en-US" sz="1800" b="1" strike="noStrike" spc="-1">
                 <a:solidFill>
                   <a:srgbClr val="000000"/>
                 </a:solidFill>
-                <a:latin typeface="Arial"/>
-                <a:ea typeface="Calibri"/>
+                <a:latin typeface="Arial" panose="020B0604020202020204"/>
+                <a:ea typeface="Calibri" panose="020F0502020204030204"/>
               </a:rPr>
               <a:t>Idea should be unique and novel. </a:t>
             </a:r>
-            <a:endParaRPr b="0" lang="en-IN" sz="1800" spc="-1" strike="noStrike">
-              <a:latin typeface="Arial"/>
-            </a:endParaRPr>
-          </a:p>
-          <a:p>
-            <a:pPr marL="514440" indent="-514440" algn="just">
+            <a:endParaRPr lang="en-IN" sz="1800" b="0" strike="noStrike" spc="-1">
+              <a:latin typeface="Arial" panose="020B0604020202020204"/>
+            </a:endParaRPr>
+          </a:p>
+          <a:p>
+            <a:pPr marL="514350" indent="-514350" algn="just">
               <a:lnSpc>
                 <a:spcPct val="90000"/>
               </a:lnSpc>
               <a:spcBef>
-                <a:spcPts val="1001"/>
+                <a:spcPts val="1000"/>
               </a:spcBef>
               <a:buClr>
                 <a:srgbClr val="000000"/>
               </a:buClr>
-              <a:buFont typeface="Calibri"/>
+              <a:buFont typeface="Calibri" panose="020F0502020204030204"/>
               <a:buAutoNum type="arabicPeriod"/>
             </a:pPr>
             <a:r>
-              <a:rPr b="1" lang="en-US" sz="1800" spc="-1" strike="noStrike">
+              <a:rPr lang="en-US" sz="1800" b="1" strike="noStrike" spc="-1">
                 <a:solidFill>
                   <a:srgbClr val="000000"/>
                 </a:solidFill>
-                <a:latin typeface="Arial"/>
-                <a:ea typeface="Calibri"/>
+                <a:latin typeface="Arial" panose="020B0604020202020204"/>
+                <a:ea typeface="Calibri" panose="020F0502020204030204"/>
               </a:rPr>
               <a:t>You can only use provided template for making the PPT without changing the idea details pointers (mentioned in previous slides).</a:t>
             </a:r>
-            <a:endParaRPr b="0" lang="en-IN" sz="1800" spc="-1" strike="noStrike">
-              <a:latin typeface="Arial"/>
-            </a:endParaRPr>
-          </a:p>
-          <a:p>
-            <a:pPr marL="514440" indent="-514440" algn="just">
+            <a:endParaRPr lang="en-IN" sz="1800" b="0" strike="noStrike" spc="-1">
+              <a:latin typeface="Arial" panose="020B0604020202020204"/>
+            </a:endParaRPr>
+          </a:p>
+          <a:p>
+            <a:pPr marL="514350" indent="-514350" algn="just">
               <a:lnSpc>
                 <a:spcPct val="90000"/>
               </a:lnSpc>
               <a:spcBef>
-                <a:spcPts val="1001"/>
+                <a:spcPts val="1000"/>
               </a:spcBef>
               <a:buClr>
                 <a:srgbClr val="000000"/>
               </a:buClr>
-              <a:buFont typeface="Calibri"/>
+              <a:buFont typeface="Calibri" panose="020F0502020204030204"/>
               <a:buAutoNum type="arabicPeriod"/>
             </a:pPr>
             <a:r>
-              <a:rPr b="1" lang="en-US" sz="1800" spc="-1" strike="noStrike">
+              <a:rPr lang="en-US" sz="1800" b="1" strike="noStrike" spc="-1">
                 <a:solidFill>
                   <a:srgbClr val="000000"/>
                 </a:solidFill>
-                <a:latin typeface="Arial"/>
-                <a:ea typeface="Calibri"/>
+                <a:latin typeface="Arial" panose="020B0604020202020204"/>
+                <a:ea typeface="Calibri" panose="020F0502020204030204"/>
               </a:rPr>
               <a:t>You need to save the file in PDF and upload the same on portal. No PPT, Word Doc or any other format will be supported.</a:t>
             </a:r>
-            <a:endParaRPr b="0" lang="en-IN" sz="1800" spc="-1" strike="noStrike">
-              <a:latin typeface="Arial"/>
-            </a:endParaRPr>
-          </a:p>
-          <a:p>
-            <a:pPr marL="514440" indent="-349920" algn="just">
+            <a:endParaRPr lang="en-IN" sz="1800" b="0" strike="noStrike" spc="-1">
+              <a:latin typeface="Arial" panose="020B0604020202020204"/>
+            </a:endParaRPr>
+          </a:p>
+          <a:p>
+            <a:pPr marL="514350" indent="-349885" algn="just">
               <a:lnSpc>
                 <a:spcPct val="90000"/>
               </a:lnSpc>
               <a:spcBef>
-                <a:spcPts val="1001"/>
+                <a:spcPts val="1000"/>
               </a:spcBef>
               <a:buNone/>
               <a:tabLst>
-                <a:tab algn="l" pos="0"/>
+                <a:tab pos="0" algn="l"/>
               </a:tabLst>
             </a:pPr>
-            <a:endParaRPr b="0" lang="en-IN" sz="1800" spc="-1" strike="noStrike">
-              <a:latin typeface="Arial"/>
-            </a:endParaRPr>
-          </a:p>
-          <a:p>
-            <a:pPr marL="514440" indent="-349920" algn="just">
+            <a:endParaRPr lang="en-IN" sz="1800" b="0" strike="noStrike" spc="-1">
+              <a:latin typeface="Arial" panose="020B0604020202020204"/>
+            </a:endParaRPr>
+          </a:p>
+          <a:p>
+            <a:pPr marL="514350" indent="-349885" algn="just">
               <a:lnSpc>
                 <a:spcPct val="90000"/>
               </a:lnSpc>
               <a:spcBef>
-                <a:spcPts val="1001"/>
+                <a:spcPts val="1000"/>
               </a:spcBef>
               <a:buNone/>
               <a:tabLst>
-                <a:tab algn="l" pos="0"/>
+                <a:tab pos="0" algn="l"/>
               </a:tabLst>
             </a:pPr>
             <a:r>
-              <a:rPr b="1" lang="en-US" sz="1800" spc="-1" strike="noStrike">
+              <a:rPr lang="en-US" sz="1800" b="1" strike="noStrike" spc="-1">
                 <a:solidFill>
-                  <a:srgbClr val="c00000"/>
+                  <a:srgbClr val="C00000"/>
                 </a:solidFill>
-                <a:latin typeface="Arial"/>
-                <a:ea typeface="Calibri"/>
+                <a:latin typeface="Arial" panose="020B0604020202020204"/>
+                <a:ea typeface="Calibri" panose="020F0502020204030204"/>
               </a:rPr>
               <a:t>Note - You can delete this slide (Important Pointers) when you upload the details of your idea on SIH portal.</a:t>
             </a:r>
-            <a:endParaRPr b="0" lang="en-IN" sz="1800" spc="-1" strike="noStrike">
-              <a:latin typeface="Arial"/>
-            </a:endParaRPr>
-          </a:p>
-          <a:p>
-            <a:pPr marL="914400" indent="-316080" algn="just">
+            <a:endParaRPr lang="en-IN" sz="1800" b="0" strike="noStrike" spc="-1">
+              <a:latin typeface="Arial" panose="020B0604020202020204"/>
+            </a:endParaRPr>
+          </a:p>
+          <a:p>
+            <a:pPr marL="914400" indent="-316230" algn="just">
               <a:lnSpc>
                 <a:spcPct val="90000"/>
               </a:lnSpc>
               <a:spcBef>
-                <a:spcPts val="499"/>
+                <a:spcPts val="500"/>
               </a:spcBef>
               <a:buNone/>
               <a:tabLst>
-                <a:tab algn="l" pos="0"/>
+                <a:tab pos="0" algn="l"/>
               </a:tabLst>
             </a:pPr>
-            <a:endParaRPr b="0" lang="en-IN" sz="2000" spc="-1" strike="noStrike">
-              <a:latin typeface="Arial"/>
+            <a:endParaRPr lang="en-IN" sz="2000" b="0" strike="noStrike" spc="-1">
+              <a:latin typeface="Arial" panose="020B0604020202020204"/>
             </a:endParaRPr>
           </a:p>
         </p:txBody>
@@ -10111,13 +10360,19 @@
           </a:ln>
         </p:spPr>
         <p:style>
-          <a:lnRef idx="0"/>
-          <a:fillRef idx="0"/>
-          <a:effectRef idx="0"/>
+          <a:lnRef idx="0">
+            <a:srgbClr val="FFFFFF"/>
+          </a:lnRef>
+          <a:fillRef idx="0">
+            <a:srgbClr val="FFFFFF"/>
+          </a:fillRef>
+          <a:effectRef idx="0">
+            <a:srgbClr val="FFFFFF"/>
+          </a:effectRef>
           <a:fontRef idx="minor"/>
         </p:style>
         <p:txBody>
-          <a:bodyPr lIns="90000" rIns="90000" tIns="45000" bIns="45000" anchor="t">
+          <a:bodyPr lIns="90000" tIns="45000" rIns="90000" bIns="45000" anchor="t">
             <a:spAutoFit/>
           </a:bodyPr>
           <a:p>
@@ -10128,17 +10383,17 @@
               <a:buNone/>
             </a:pPr>
             <a:r>
-              <a:rPr b="1" lang="en-US" sz="3600" spc="-1" strike="noStrike">
+              <a:rPr lang="en-US" sz="3600" b="1" strike="noStrike" spc="-1">
                 <a:solidFill>
                   <a:srgbClr val="000000"/>
                 </a:solidFill>
-                <a:latin typeface="Times New Roman"/>
-                <a:ea typeface="ＭＳ Ｐゴシック"/>
+                <a:latin typeface="Times New Roman" panose="02020603050405020304"/>
+                <a:ea typeface="MS PGothic" panose="020B0600070205080204" charset="-128"/>
               </a:rPr>
               <a:t>IMPORTANT INSTRUCTIONS</a:t>
             </a:r>
-            <a:endParaRPr b="0" lang="en-IN" sz="3600" spc="-1" strike="noStrike">
-              <a:latin typeface="Arial"/>
+            <a:endParaRPr lang="en-IN" sz="3600" b="0" strike="noStrike" spc="-1">
+              <a:latin typeface="Arial" panose="020B0604020202020204"/>
             </a:endParaRPr>
           </a:p>
         </p:txBody>
@@ -10163,13 +10418,19 @@
           </a:ln>
         </p:spPr>
         <p:style>
-          <a:lnRef idx="0"/>
-          <a:fillRef idx="0"/>
-          <a:effectRef idx="0"/>
+          <a:lnRef idx="0">
+            <a:srgbClr val="FFFFFF"/>
+          </a:lnRef>
+          <a:fillRef idx="0">
+            <a:srgbClr val="FFFFFF"/>
+          </a:fillRef>
+          <a:effectRef idx="0">
+            <a:srgbClr val="FFFFFF"/>
+          </a:effectRef>
           <a:fontRef idx="minor"/>
         </p:style>
         <p:txBody>
-          <a:bodyPr lIns="90000" rIns="90000" tIns="45000" bIns="45000" anchor="t">
+          <a:bodyPr lIns="90000" tIns="45000" rIns="90000" bIns="45000" anchor="t">
             <a:spAutoFit/>
           </a:bodyPr>
           <a:p>
@@ -10178,35 +10439,37 @@
                 <a:spcPct val="90000"/>
               </a:lnSpc>
               <a:spcBef>
-                <a:spcPts val="1001"/>
+                <a:spcPts val="1000"/>
               </a:spcBef>
               <a:buNone/>
             </a:pPr>
             <a:r>
-              <a:rPr b="1" lang="en-US" sz="1800" spc="-1" strike="noStrike">
+              <a:rPr lang="en-US" sz="1800" b="1" strike="noStrike" spc="-1">
                 <a:solidFill>
                   <a:srgbClr val="000000"/>
                 </a:solidFill>
-                <a:latin typeface="Arial"/>
-                <a:ea typeface="Calibri"/>
+                <a:latin typeface="Arial" panose="020B0604020202020204"/>
+                <a:ea typeface="Calibri" panose="020F0502020204030204"/>
               </a:rPr>
               <a:t>Please ensure below pointers are met while submitting the Idea PPT:</a:t>
             </a:r>
-            <a:endParaRPr b="0" lang="en-IN" sz="1800" spc="-1" strike="noStrike">
-              <a:latin typeface="Arial"/>
+            <a:endParaRPr lang="en-IN" sz="1800" b="0" strike="noStrike" spc="-1">
+              <a:latin typeface="Arial" panose="020B0604020202020204"/>
             </a:endParaRPr>
           </a:p>
         </p:txBody>
       </p:sp>
       <p:pic>
         <p:nvPicPr>
-          <p:cNvPr id="137" name="Picture 12" descr=""/>
+          <p:cNvPr id="137" name="Picture 12"/>
           <p:cNvPicPr/>
           <p:nvPr/>
         </p:nvPicPr>
         <p:blipFill>
           <a:blip r:embed="rId1"/>
-          <a:stretch/>
+          <a:stretch>
+            <a:fillRect/>
+          </a:stretch>
         </p:blipFill>
         <p:spPr>
           <a:xfrm>
@@ -10223,8 +10486,11 @@
       </p:pic>
     </p:spTree>
   </p:cSld>
-  <mc:AlternateContent>
-    <mc:Choice Requires="p14">
+  <p:clrMapOvr>
+    <a:masterClrMapping/>
+  </p:clrMapOvr>
+  <mc:AlternateContent xmlns:mc="http://schemas.openxmlformats.org/markup-compatibility/2006">
+    <mc:Choice xmlns:p14="http://schemas.microsoft.com/office/powerpoint/2010/main" Requires="p14">
       <p:transition spd="slow" p14:dur="2000"/>
     </mc:Choice>
     <mc:Fallback>
@@ -10245,31 +10511,31 @@
         <a:sysClr val="window" lastClr="FFFFFF"/>
       </a:lt1>
       <a:dk2>
-        <a:srgbClr val="1f497d"/>
+        <a:srgbClr val="1F497D"/>
       </a:dk2>
       <a:lt2>
-        <a:srgbClr val="eeece1"/>
+        <a:srgbClr val="EEECE1"/>
       </a:lt2>
       <a:accent1>
-        <a:srgbClr val="4f81bd"/>
+        <a:srgbClr val="4F81BD"/>
       </a:accent1>
       <a:accent2>
-        <a:srgbClr val="c0504d"/>
+        <a:srgbClr val="C0504D"/>
       </a:accent2>
       <a:accent3>
-        <a:srgbClr val="9bbb59"/>
+        <a:srgbClr val="9BBB59"/>
       </a:accent3>
       <a:accent4>
-        <a:srgbClr val="8064a2"/>
+        <a:srgbClr val="8064A2"/>
       </a:accent4>
       <a:accent5>
-        <a:srgbClr val="4bacc6"/>
+        <a:srgbClr val="4BACC6"/>
       </a:accent5>
       <a:accent6>
-        <a:srgbClr val="f79646"/>
+        <a:srgbClr val="F79646"/>
       </a:accent6>
       <a:hlink>
-        <a:srgbClr val="0000ff"/>
+        <a:srgbClr val="0000FF"/>
       </a:hlink>
       <a:folHlink>
         <a:srgbClr val="800080"/>
@@ -10457,6 +10723,11 @@
       </a:bgFillStyleLst>
     </a:fmtScheme>
   </a:themeElements>
+  <a:extLst>
+    <a:ext uri="{05A4C25C-085E-4340-85A3-A5531E510DB2}">
+      <thm15:themeFamily xmlns:thm15="http://schemas.microsoft.com/office/thememl/2012/main" name="Office Theme" id="{62F939B6-93AF-4DB8-9C6B-D6C7DFDC589F}" vid="{4A3C46E8-61CC-4603-A589-7422A47A8E4A}"/>
+    </a:ext>
+  </a:extLst>
 </a:theme>
 </file>
 
@@ -10471,31 +10742,31 @@
         <a:sysClr val="window" lastClr="FFFFFF"/>
       </a:lt1>
       <a:dk2>
-        <a:srgbClr val="1f497d"/>
+        <a:srgbClr val="1F497D"/>
       </a:dk2>
       <a:lt2>
-        <a:srgbClr val="eeece1"/>
+        <a:srgbClr val="EEECE1"/>
       </a:lt2>
       <a:accent1>
-        <a:srgbClr val="4f81bd"/>
+        <a:srgbClr val="4F81BD"/>
       </a:accent1>
       <a:accent2>
-        <a:srgbClr val="c0504d"/>
+        <a:srgbClr val="C0504D"/>
       </a:accent2>
       <a:accent3>
-        <a:srgbClr val="9bbb59"/>
+        <a:srgbClr val="9BBB59"/>
       </a:accent3>
       <a:accent4>
-        <a:srgbClr val="8064a2"/>
+        <a:srgbClr val="8064A2"/>
       </a:accent4>
       <a:accent5>
-        <a:srgbClr val="4bacc6"/>
+        <a:srgbClr val="4BACC6"/>
       </a:accent5>
       <a:accent6>
-        <a:srgbClr val="f79646"/>
+        <a:srgbClr val="F79646"/>
       </a:accent6>
       <a:hlink>
-        <a:srgbClr val="0000ff"/>
+        <a:srgbClr val="0000FF"/>
       </a:hlink>
       <a:folHlink>
         <a:srgbClr val="800080"/>
@@ -10683,6 +10954,11 @@
       </a:bgFillStyleLst>
     </a:fmtScheme>
   </a:themeElements>
+  <a:extLst>
+    <a:ext uri="{05A4C25C-085E-4340-85A3-A5531E510DB2}">
+      <thm15:themeFamily xmlns:thm15="http://schemas.microsoft.com/office/thememl/2012/main" name="Office Theme" id="{62F939B6-93AF-4DB8-9C6B-D6C7DFDC589F}" vid="{4A3C46E8-61CC-4603-A589-7422A47A8E4A}"/>
+    </a:ext>
+  </a:extLst>
 </a:theme>
 </file>
 
@@ -10697,31 +10973,31 @@
         <a:sysClr val="window" lastClr="FFFFFF"/>
       </a:lt1>
       <a:dk2>
-        <a:srgbClr val="1f497d"/>
+        <a:srgbClr val="1F497D"/>
       </a:dk2>
       <a:lt2>
-        <a:srgbClr val="eeece1"/>
+        <a:srgbClr val="EEECE1"/>
       </a:lt2>
       <a:accent1>
-        <a:srgbClr val="4f81bd"/>
+        <a:srgbClr val="4F81BD"/>
       </a:accent1>
       <a:accent2>
-        <a:srgbClr val="c0504d"/>
+        <a:srgbClr val="C0504D"/>
       </a:accent2>
       <a:accent3>
-        <a:srgbClr val="9bbb59"/>
+        <a:srgbClr val="9BBB59"/>
       </a:accent3>
       <a:accent4>
-        <a:srgbClr val="8064a2"/>
+        <a:srgbClr val="8064A2"/>
       </a:accent4>
       <a:accent5>
-        <a:srgbClr val="4bacc6"/>
+        <a:srgbClr val="4BACC6"/>
       </a:accent5>
       <a:accent6>
-        <a:srgbClr val="f79646"/>
+        <a:srgbClr val="F79646"/>
       </a:accent6>
       <a:hlink>
-        <a:srgbClr val="0000ff"/>
+        <a:srgbClr val="0000FF"/>
       </a:hlink>
       <a:folHlink>
         <a:srgbClr val="800080"/>
@@ -10909,5 +11185,10 @@
       </a:bgFillStyleLst>
     </a:fmtScheme>
   </a:themeElements>
+  <a:extLst>
+    <a:ext uri="{05A4C25C-085E-4340-85A3-A5531E510DB2}">
+      <thm15:themeFamily xmlns:thm15="http://schemas.microsoft.com/office/thememl/2012/main" name="Office Theme" id="{62F939B6-93AF-4DB8-9C6B-D6C7DFDC589F}" vid="{4A3C46E8-61CC-4603-A589-7422A47A8E4A}"/>
+    </a:ext>
+  </a:extLst>
 </a:theme>
 </file>
--- a/SIH26036-presentation.pptx
+++ b/SIH26036-presentation.pptx
@@ -5625,8 +5625,8 @@
         </p:nvSpPr>
         <p:spPr>
           <a:xfrm>
-            <a:off x="331286" y="2076450"/>
-            <a:ext cx="5924550" cy="4799965"/>
+            <a:off x="524961" y="2400935"/>
+            <a:ext cx="5924550" cy="5539105"/>
           </a:xfrm>
           <a:prstGeom prst="rect">
             <a:avLst/>
@@ -5714,7 +5714,7 @@
                 <a:latin typeface="Arial" panose="020B0604020202020204" pitchFamily="34" charset="0"/>
                 <a:cs typeface="Arial" panose="020B0604020202020204" pitchFamily="34" charset="0"/>
               </a:rPr>
-              <a:t>PS Category- Software/Hardware</a:t>
+              <a:t>PS Category- Software/Hardware-Software</a:t>
             </a:r>
             <a:endParaRPr lang="en-US" sz="2400" b="1" dirty="0">
               <a:latin typeface="Arial" panose="020B0604020202020204" pitchFamily="34" charset="0"/>

--- a/SIH26036-presentation.pptx
+++ b/SIH26036-presentation.pptx
@@ -67,20 +67,17 @@
             <a:noAutofit/>
           </a:bodyPr>
           <a:p>
-            <a:r>
-              <a:rPr b="0" lang="en-US" sz="4400" spc="-1" strike="noStrike">
-                <a:solidFill>
-                  <a:srgbClr val="000000"/>
-                </a:solidFill>
-                <a:latin typeface="Calibri"/>
+            <a:pPr algn="ctr">
+              <a:buNone/>
+            </a:pPr>
+            <a:r>
+              <a:rPr b="0" lang="en-IN" sz="4400" spc="-1" strike="noStrike">
+                <a:latin typeface="Arial"/>
               </a:rPr>
               <a:t>Click to move the slide</a:t>
             </a:r>
-            <a:endParaRPr b="0" lang="en-US" sz="4400" spc="-1" strike="noStrike">
-              <a:solidFill>
-                <a:srgbClr val="000000"/>
-              </a:solidFill>
-              <a:latin typeface="Calibri"/>
+            <a:endParaRPr b="0" lang="en-IN" sz="4400" spc="-1" strike="noStrike">
+              <a:latin typeface="Arial"/>
             </a:endParaRPr>
           </a:p>
         </p:txBody>
@@ -302,7 +299,7 @@
             <a:pPr algn="r">
               <a:buNone/>
             </a:pPr>
-            <a:fld id="{10369DE2-213F-4192-AF0A-45646F8B55BC}" type="slidenum">
+            <a:fld id="{732469A8-E0D8-4322-A5D2-BDFDFB79A810}" type="slidenum">
               <a:rPr b="0" lang="en-IN" sz="1400" spc="-1" strike="noStrike">
                 <a:latin typeface="Times New Roman"/>
               </a:rPr>
@@ -350,7 +347,7 @@
         <p:spPr>
           <a:xfrm>
             <a:off x="380880" y="685800"/>
-            <a:ext cx="6095520" cy="3428640"/>
+            <a:ext cx="6095160" cy="3428280"/>
           </a:xfrm>
           <a:prstGeom prst="rect">
             <a:avLst/>
@@ -373,18 +370,18 @@
         <p:spPr>
           <a:xfrm>
             <a:off x="685800" y="4343400"/>
-            <a:ext cx="5486040" cy="4114440"/>
-          </a:xfrm>
-          <a:prstGeom prst="rect">
-            <a:avLst/>
-          </a:prstGeom>
-          <a:noFill/>
-          <a:ln w="0">
-            <a:noFill/>
-          </a:ln>
-        </p:spPr>
-        <p:txBody>
-          <a:bodyPr numCol="1" spcCol="0" anchor="t">
+            <a:ext cx="5485680" cy="4114080"/>
+          </a:xfrm>
+          <a:prstGeom prst="rect">
+            <a:avLst/>
+          </a:prstGeom>
+          <a:noFill/>
+          <a:ln w="0">
+            <a:noFill/>
+          </a:ln>
+        </p:spPr>
+        <p:txBody>
+          <a:bodyPr numCol="1" spcCol="0" lIns="0" rIns="0" tIns="0" bIns="0" anchor="t">
             <a:noAutofit/>
           </a:bodyPr>
           <a:p>
@@ -407,18 +404,18 @@
         <p:spPr>
           <a:xfrm>
             <a:off x="3884760" y="8685360"/>
-            <a:ext cx="2971440" cy="456840"/>
-          </a:xfrm>
-          <a:prstGeom prst="rect">
-            <a:avLst/>
-          </a:prstGeom>
-          <a:noFill/>
-          <a:ln w="0">
-            <a:noFill/>
-          </a:ln>
-        </p:spPr>
-        <p:txBody>
-          <a:bodyPr numCol="1" spcCol="0" anchor="b">
+            <a:ext cx="2971080" cy="456480"/>
+          </a:xfrm>
+          <a:prstGeom prst="rect">
+            <a:avLst/>
+          </a:prstGeom>
+          <a:noFill/>
+          <a:ln w="0">
+            <a:noFill/>
+          </a:ln>
+        </p:spPr>
+        <p:txBody>
+          <a:bodyPr numCol="1" spcCol="0" lIns="0" rIns="0" tIns="0" bIns="0" anchor="b">
             <a:noAutofit/>
           </a:bodyPr>
           <a:lstStyle>
@@ -439,7 +436,7 @@
               </a:lnSpc>
               <a:buNone/>
             </a:pPr>
-            <a:fld id="{9BD02503-E9B6-472D-8BA2-8AE82830F8E0}" type="slidenum">
+            <a:fld id="{DEAF4F63-7127-4137-A9C0-619308E5E47E}" type="slidenum">
               <a:rPr b="0" lang="en-US" sz="1200" spc="-1" strike="noStrike">
                 <a:latin typeface="Times New Roman"/>
               </a:rPr>
@@ -486,7 +483,7 @@
         <p:spPr>
           <a:xfrm>
             <a:off x="380880" y="685800"/>
-            <a:ext cx="6095520" cy="3428640"/>
+            <a:ext cx="6095160" cy="3428280"/>
           </a:xfrm>
           <a:prstGeom prst="rect">
             <a:avLst/>
@@ -509,18 +506,18 @@
         <p:spPr>
           <a:xfrm>
             <a:off x="685800" y="4343400"/>
-            <a:ext cx="5486040" cy="4114440"/>
-          </a:xfrm>
-          <a:prstGeom prst="rect">
-            <a:avLst/>
-          </a:prstGeom>
-          <a:noFill/>
-          <a:ln w="0">
-            <a:noFill/>
-          </a:ln>
-        </p:spPr>
-        <p:txBody>
-          <a:bodyPr numCol="1" spcCol="0" anchor="t">
+            <a:ext cx="5485680" cy="4114080"/>
+          </a:xfrm>
+          <a:prstGeom prst="rect">
+            <a:avLst/>
+          </a:prstGeom>
+          <a:noFill/>
+          <a:ln w="0">
+            <a:noFill/>
+          </a:ln>
+        </p:spPr>
+        <p:txBody>
+          <a:bodyPr numCol="1" spcCol="0" lIns="0" rIns="0" tIns="0" bIns="0" anchor="t">
             <a:noAutofit/>
           </a:bodyPr>
           <a:p>
@@ -543,18 +540,18 @@
         <p:spPr>
           <a:xfrm>
             <a:off x="3884760" y="8685360"/>
-            <a:ext cx="2971440" cy="456840"/>
-          </a:xfrm>
-          <a:prstGeom prst="rect">
-            <a:avLst/>
-          </a:prstGeom>
-          <a:noFill/>
-          <a:ln w="0">
-            <a:noFill/>
-          </a:ln>
-        </p:spPr>
-        <p:txBody>
-          <a:bodyPr numCol="1" spcCol="0" anchor="b">
+            <a:ext cx="2971080" cy="456480"/>
+          </a:xfrm>
+          <a:prstGeom prst="rect">
+            <a:avLst/>
+          </a:prstGeom>
+          <a:noFill/>
+          <a:ln w="0">
+            <a:noFill/>
+          </a:ln>
+        </p:spPr>
+        <p:txBody>
+          <a:bodyPr numCol="1" spcCol="0" lIns="0" rIns="0" tIns="0" bIns="0" anchor="b">
             <a:noAutofit/>
           </a:bodyPr>
           <a:lstStyle>
@@ -575,7 +572,7 @@
               </a:lnSpc>
               <a:buNone/>
             </a:pPr>
-            <a:fld id="{2DF48968-41FC-4870-8F34-DAA30156E6D3}" type="slidenum">
+            <a:fld id="{A4291344-1E84-4C4C-84AC-FCA0E565A5DC}" type="slidenum">
               <a:rPr b="0" lang="en-US" sz="1200" spc="-1" strike="noStrike">
                 <a:latin typeface="Times New Roman"/>
               </a:rPr>
@@ -622,7 +619,7 @@
         <p:spPr>
           <a:xfrm>
             <a:off x="380880" y="685800"/>
-            <a:ext cx="6095520" cy="3428640"/>
+            <a:ext cx="6095160" cy="3428280"/>
           </a:xfrm>
           <a:prstGeom prst="rect">
             <a:avLst/>
@@ -645,18 +642,18 @@
         <p:spPr>
           <a:xfrm>
             <a:off x="685800" y="4343400"/>
-            <a:ext cx="5486040" cy="4114440"/>
-          </a:xfrm>
-          <a:prstGeom prst="rect">
-            <a:avLst/>
-          </a:prstGeom>
-          <a:noFill/>
-          <a:ln w="0">
-            <a:noFill/>
-          </a:ln>
-        </p:spPr>
-        <p:txBody>
-          <a:bodyPr numCol="1" spcCol="0" anchor="t">
+            <a:ext cx="5485680" cy="4114080"/>
+          </a:xfrm>
+          <a:prstGeom prst="rect">
+            <a:avLst/>
+          </a:prstGeom>
+          <a:noFill/>
+          <a:ln w="0">
+            <a:noFill/>
+          </a:ln>
+        </p:spPr>
+        <p:txBody>
+          <a:bodyPr numCol="1" spcCol="0" lIns="0" rIns="0" tIns="0" bIns="0" anchor="t">
             <a:noAutofit/>
           </a:bodyPr>
           <a:p>
@@ -679,18 +676,18 @@
         <p:spPr>
           <a:xfrm>
             <a:off x="3884760" y="8685360"/>
-            <a:ext cx="2971440" cy="456840"/>
-          </a:xfrm>
-          <a:prstGeom prst="rect">
-            <a:avLst/>
-          </a:prstGeom>
-          <a:noFill/>
-          <a:ln w="0">
-            <a:noFill/>
-          </a:ln>
-        </p:spPr>
-        <p:txBody>
-          <a:bodyPr numCol="1" spcCol="0" anchor="b">
+            <a:ext cx="2971080" cy="456480"/>
+          </a:xfrm>
+          <a:prstGeom prst="rect">
+            <a:avLst/>
+          </a:prstGeom>
+          <a:noFill/>
+          <a:ln w="0">
+            <a:noFill/>
+          </a:ln>
+        </p:spPr>
+        <p:txBody>
+          <a:bodyPr numCol="1" spcCol="0" lIns="0" rIns="0" tIns="0" bIns="0" anchor="b">
             <a:noAutofit/>
           </a:bodyPr>
           <a:lstStyle>
@@ -721,7 +718,7 @@
                 <a:tab algn="l" pos="0"/>
               </a:tabLst>
             </a:pPr>
-            <a:fld id="{86409D48-38C0-4980-84CF-BF42F7522B8E}" type="slidenum">
+            <a:fld id="{2A14EAC9-B4F1-4AEA-8760-1C1146703B92}" type="slidenum">
               <a:rPr b="0" lang="en-US" sz="1200" spc="-1" strike="noStrike">
                 <a:solidFill>
                   <a:srgbClr val="000000"/>
@@ -772,7 +769,7 @@
         <p:spPr>
           <a:xfrm>
             <a:off x="380880" y="685800"/>
-            <a:ext cx="6095520" cy="3428640"/>
+            <a:ext cx="6095160" cy="3428280"/>
           </a:xfrm>
           <a:prstGeom prst="rect">
             <a:avLst/>
@@ -795,18 +792,18 @@
         <p:spPr>
           <a:xfrm>
             <a:off x="685800" y="4343400"/>
-            <a:ext cx="5486040" cy="4114440"/>
-          </a:xfrm>
-          <a:prstGeom prst="rect">
-            <a:avLst/>
-          </a:prstGeom>
-          <a:noFill/>
-          <a:ln w="0">
-            <a:noFill/>
-          </a:ln>
-        </p:spPr>
-        <p:txBody>
-          <a:bodyPr numCol="1" spcCol="0" anchor="t">
+            <a:ext cx="5485680" cy="4114080"/>
+          </a:xfrm>
+          <a:prstGeom prst="rect">
+            <a:avLst/>
+          </a:prstGeom>
+          <a:noFill/>
+          <a:ln w="0">
+            <a:noFill/>
+          </a:ln>
+        </p:spPr>
+        <p:txBody>
+          <a:bodyPr numCol="1" spcCol="0" lIns="0" rIns="0" tIns="0" bIns="0" anchor="t">
             <a:noAutofit/>
           </a:bodyPr>
           <a:p>
@@ -829,18 +826,18 @@
         <p:spPr>
           <a:xfrm>
             <a:off x="3884760" y="8685360"/>
-            <a:ext cx="2971440" cy="456840"/>
-          </a:xfrm>
-          <a:prstGeom prst="rect">
-            <a:avLst/>
-          </a:prstGeom>
-          <a:noFill/>
-          <a:ln w="0">
-            <a:noFill/>
-          </a:ln>
-        </p:spPr>
-        <p:txBody>
-          <a:bodyPr numCol="1" spcCol="0" anchor="b">
+            <a:ext cx="2971080" cy="456480"/>
+          </a:xfrm>
+          <a:prstGeom prst="rect">
+            <a:avLst/>
+          </a:prstGeom>
+          <a:noFill/>
+          <a:ln w="0">
+            <a:noFill/>
+          </a:ln>
+        </p:spPr>
+        <p:txBody>
+          <a:bodyPr numCol="1" spcCol="0" lIns="0" rIns="0" tIns="0" bIns="0" anchor="b">
             <a:noAutofit/>
           </a:bodyPr>
           <a:lstStyle>
@@ -871,7 +868,7 @@
                 <a:tab algn="l" pos="0"/>
               </a:tabLst>
             </a:pPr>
-            <a:fld id="{5266A0C6-05EE-4A7F-85C4-799225F16C67}" type="slidenum">
+            <a:fld id="{DF076DAD-EDDE-44A8-B600-5DC6702F93EE}" type="slidenum">
               <a:rPr b="0" lang="en-US" sz="1200" spc="-1" strike="noStrike">
                 <a:solidFill>
                   <a:srgbClr val="000000"/>
@@ -922,7 +919,7 @@
         <p:spPr>
           <a:xfrm>
             <a:off x="380880" y="685800"/>
-            <a:ext cx="6095520" cy="3428640"/>
+            <a:ext cx="6095160" cy="3428280"/>
           </a:xfrm>
           <a:prstGeom prst="rect">
             <a:avLst/>
@@ -945,18 +942,18 @@
         <p:spPr>
           <a:xfrm>
             <a:off x="685800" y="4343400"/>
-            <a:ext cx="5486040" cy="4114440"/>
-          </a:xfrm>
-          <a:prstGeom prst="rect">
-            <a:avLst/>
-          </a:prstGeom>
-          <a:noFill/>
-          <a:ln w="0">
-            <a:noFill/>
-          </a:ln>
-        </p:spPr>
-        <p:txBody>
-          <a:bodyPr numCol="1" spcCol="0" anchor="t">
+            <a:ext cx="5485680" cy="4114080"/>
+          </a:xfrm>
+          <a:prstGeom prst="rect">
+            <a:avLst/>
+          </a:prstGeom>
+          <a:noFill/>
+          <a:ln w="0">
+            <a:noFill/>
+          </a:ln>
+        </p:spPr>
+        <p:txBody>
+          <a:bodyPr numCol="1" spcCol="0" lIns="0" rIns="0" tIns="0" bIns="0" anchor="t">
             <a:noAutofit/>
           </a:bodyPr>
           <a:p>
@@ -979,18 +976,18 @@
         <p:spPr>
           <a:xfrm>
             <a:off x="3884760" y="8685360"/>
-            <a:ext cx="2971440" cy="456840"/>
-          </a:xfrm>
-          <a:prstGeom prst="rect">
-            <a:avLst/>
-          </a:prstGeom>
-          <a:noFill/>
-          <a:ln w="0">
-            <a:noFill/>
-          </a:ln>
-        </p:spPr>
-        <p:txBody>
-          <a:bodyPr numCol="1" spcCol="0" anchor="b">
+            <a:ext cx="2971080" cy="456480"/>
+          </a:xfrm>
+          <a:prstGeom prst="rect">
+            <a:avLst/>
+          </a:prstGeom>
+          <a:noFill/>
+          <a:ln w="0">
+            <a:noFill/>
+          </a:ln>
+        </p:spPr>
+        <p:txBody>
+          <a:bodyPr numCol="1" spcCol="0" lIns="0" rIns="0" tIns="0" bIns="0" anchor="b">
             <a:noAutofit/>
           </a:bodyPr>
           <a:lstStyle>
@@ -1021,7 +1018,7 @@
                 <a:tab algn="l" pos="0"/>
               </a:tabLst>
             </a:pPr>
-            <a:fld id="{018220F7-29ED-48F3-BEA4-43B9B4ED5454}" type="slidenum">
+            <a:fld id="{9FD06F02-50EA-4541-8F8E-D3548DD2BF83}" type="slidenum">
               <a:rPr b="0" lang="en-US" sz="1200" spc="-1" strike="noStrike">
                 <a:solidFill>
                   <a:srgbClr val="000000"/>
@@ -1072,7 +1069,7 @@
         <p:spPr>
           <a:xfrm>
             <a:off x="380880" y="685800"/>
-            <a:ext cx="6095520" cy="3428640"/>
+            <a:ext cx="6095160" cy="3428280"/>
           </a:xfrm>
           <a:prstGeom prst="rect">
             <a:avLst/>
@@ -1095,18 +1092,18 @@
         <p:spPr>
           <a:xfrm>
             <a:off x="685800" y="4343400"/>
-            <a:ext cx="5486040" cy="4114440"/>
-          </a:xfrm>
-          <a:prstGeom prst="rect">
-            <a:avLst/>
-          </a:prstGeom>
-          <a:noFill/>
-          <a:ln w="0">
-            <a:noFill/>
-          </a:ln>
-        </p:spPr>
-        <p:txBody>
-          <a:bodyPr numCol="1" spcCol="0" anchor="t">
+            <a:ext cx="5485680" cy="4114080"/>
+          </a:xfrm>
+          <a:prstGeom prst="rect">
+            <a:avLst/>
+          </a:prstGeom>
+          <a:noFill/>
+          <a:ln w="0">
+            <a:noFill/>
+          </a:ln>
+        </p:spPr>
+        <p:txBody>
+          <a:bodyPr numCol="1" spcCol="0" lIns="0" rIns="0" tIns="0" bIns="0" anchor="t">
             <a:noAutofit/>
           </a:bodyPr>
           <a:p>
@@ -1129,18 +1126,18 @@
         <p:spPr>
           <a:xfrm>
             <a:off x="3884760" y="8685360"/>
-            <a:ext cx="2971440" cy="456840"/>
-          </a:xfrm>
-          <a:prstGeom prst="rect">
-            <a:avLst/>
-          </a:prstGeom>
-          <a:noFill/>
-          <a:ln w="0">
-            <a:noFill/>
-          </a:ln>
-        </p:spPr>
-        <p:txBody>
-          <a:bodyPr numCol="1" spcCol="0" anchor="b">
+            <a:ext cx="2971080" cy="456480"/>
+          </a:xfrm>
+          <a:prstGeom prst="rect">
+            <a:avLst/>
+          </a:prstGeom>
+          <a:noFill/>
+          <a:ln w="0">
+            <a:noFill/>
+          </a:ln>
+        </p:spPr>
+        <p:txBody>
+          <a:bodyPr numCol="1" spcCol="0" lIns="0" rIns="0" tIns="0" bIns="0" anchor="b">
             <a:noAutofit/>
           </a:bodyPr>
           <a:lstStyle>
@@ -1171,7 +1168,7 @@
                 <a:tab algn="l" pos="0"/>
               </a:tabLst>
             </a:pPr>
-            <a:fld id="{5B9ED35B-D40D-4994-8308-50BDE18D443E}" type="slidenum">
+            <a:fld id="{0E4FCC4A-C798-4133-91DB-40A8CD33A432}" type="slidenum">
               <a:rPr b="0" lang="en-US" sz="1200" spc="-1" strike="noStrike">
                 <a:solidFill>
                   <a:srgbClr val="000000"/>
@@ -1216,7 +1213,7 @@
             <a:spLocks noGrp="1"/>
           </p:cNvSpPr>
           <p:nvPr>
-            <p:ph type="ftr" idx="2"/>
+            <p:ph type="ftr" idx="1"/>
           </p:nvPr>
         </p:nvSpPr>
         <p:spPr/>
@@ -1236,14 +1233,14 @@
             <a:spLocks noGrp="1"/>
           </p:cNvSpPr>
           <p:nvPr>
-            <p:ph type="sldNum" idx="3"/>
+            <p:ph type="sldNum" idx="2"/>
           </p:nvPr>
         </p:nvSpPr>
         <p:spPr/>
         <p:txBody>
           <a:bodyPr/>
           <a:p>
-            <a:fld id="{CD29EAA5-D74D-4AE4-8801-E024072DBFED}" type="slidenum">
+            <a:fld id="{65F7E310-6345-4BA7-996A-5B77E89F2564}" type="slidenum">
               <a:t>&lt;#&gt;</a:t>
             </a:fld>
           </a:p>
@@ -1256,7 +1253,7 @@
             <a:spLocks noGrp="1"/>
           </p:cNvSpPr>
           <p:nvPr>
-            <p:ph type="dt" idx="1"/>
+            <p:ph type="dt" idx="3"/>
           </p:nvPr>
         </p:nvSpPr>
         <p:spPr/>
@@ -1304,8 +1301,8 @@
         </p:nvSpPr>
         <p:spPr>
           <a:xfrm>
-            <a:off x="609480" y="-47520"/>
-            <a:ext cx="10972440" cy="1142640"/>
+            <a:off x="609480" y="273600"/>
+            <a:ext cx="10972440" cy="1144800"/>
           </a:xfrm>
           <a:prstGeom prst="rect">
             <a:avLst/>
@@ -1320,11 +1317,11 @@
             <a:noAutofit/>
           </a:bodyPr>
           <a:p>
-            <a:endParaRPr b="0" lang="en-US" sz="4400" spc="-1" strike="noStrike">
-              <a:solidFill>
-                <a:srgbClr val="000000"/>
-              </a:solidFill>
-              <a:latin typeface="Calibri"/>
+            <a:pPr algn="ctr">
+              <a:buNone/>
+            </a:pPr>
+            <a:endParaRPr b="0" lang="en-IN" sz="4400" spc="-1" strike="noStrike">
+              <a:latin typeface="Arial"/>
             </a:endParaRPr>
           </a:p>
         </p:txBody>
@@ -1341,8 +1338,8 @@
         </p:nvSpPr>
         <p:spPr>
           <a:xfrm>
-            <a:off x="609480" y="1095480"/>
-            <a:ext cx="10972440" cy="2399400"/>
+            <a:off x="609480" y="1604520"/>
+            <a:ext cx="10972440" cy="1896840"/>
           </a:xfrm>
           <a:prstGeom prst="rect">
             <a:avLst/>
@@ -1357,11 +1354,8 @@
             <a:normAutofit/>
           </a:bodyPr>
           <a:p>
-            <a:endParaRPr b="0" lang="en-US" sz="3200" spc="-1" strike="noStrike">
-              <a:solidFill>
-                <a:srgbClr val="000000"/>
-              </a:solidFill>
-              <a:latin typeface="TradeGothic"/>
+            <a:endParaRPr b="0" lang="en-IN" sz="3200" spc="-1" strike="noStrike">
+              <a:latin typeface="Arial"/>
             </a:endParaRPr>
           </a:p>
         </p:txBody>
@@ -1378,8 +1372,8 @@
         </p:nvSpPr>
         <p:spPr>
           <a:xfrm>
-            <a:off x="609480" y="3723120"/>
-            <a:ext cx="10972440" cy="2399400"/>
+            <a:off x="609480" y="3682080"/>
+            <a:ext cx="10972440" cy="1896840"/>
           </a:xfrm>
           <a:prstGeom prst="rect">
             <a:avLst/>
@@ -1394,11 +1388,8 @@
             <a:normAutofit/>
           </a:bodyPr>
           <a:p>
-            <a:endParaRPr b="0" lang="en-US" sz="3200" spc="-1" strike="noStrike">
-              <a:solidFill>
-                <a:srgbClr val="000000"/>
-              </a:solidFill>
-              <a:latin typeface="TradeGothic"/>
+            <a:endParaRPr b="0" lang="en-IN" sz="3200" spc="-1" strike="noStrike">
+              <a:latin typeface="Arial"/>
             </a:endParaRPr>
           </a:p>
         </p:txBody>
@@ -1410,7 +1401,7 @@
             <a:spLocks noGrp="1"/>
           </p:cNvSpPr>
           <p:nvPr>
-            <p:ph type="ftr" idx="2"/>
+            <p:ph type="ftr" idx="1"/>
           </p:nvPr>
         </p:nvSpPr>
         <p:spPr/>
@@ -1430,14 +1421,14 @@
             <a:spLocks noGrp="1"/>
           </p:cNvSpPr>
           <p:nvPr>
-            <p:ph type="sldNum" idx="3"/>
+            <p:ph type="sldNum" idx="2"/>
           </p:nvPr>
         </p:nvSpPr>
         <p:spPr/>
         <p:txBody>
           <a:bodyPr/>
           <a:p>
-            <a:fld id="{E49DF49F-3285-463E-A7C9-39127B0CFEC5}" type="slidenum">
+            <a:fld id="{B865A735-1ACD-4143-B5C3-80D2F6CF0583}" type="slidenum">
               <a:t>&lt;#&gt;</a:t>
             </a:fld>
           </a:p>
@@ -1450,7 +1441,7 @@
             <a:spLocks noGrp="1"/>
           </p:cNvSpPr>
           <p:nvPr>
-            <p:ph type="dt" idx="1"/>
+            <p:ph type="dt" idx="3"/>
           </p:nvPr>
         </p:nvSpPr>
         <p:spPr/>
@@ -1498,8 +1489,8 @@
         </p:nvSpPr>
         <p:spPr>
           <a:xfrm>
-            <a:off x="609480" y="-47520"/>
-            <a:ext cx="10972440" cy="1142640"/>
+            <a:off x="609480" y="273600"/>
+            <a:ext cx="10972440" cy="1144800"/>
           </a:xfrm>
           <a:prstGeom prst="rect">
             <a:avLst/>
@@ -1514,11 +1505,11 @@
             <a:noAutofit/>
           </a:bodyPr>
           <a:p>
-            <a:endParaRPr b="0" lang="en-US" sz="4400" spc="-1" strike="noStrike">
-              <a:solidFill>
-                <a:srgbClr val="000000"/>
-              </a:solidFill>
-              <a:latin typeface="Calibri"/>
+            <a:pPr algn="ctr">
+              <a:buNone/>
+            </a:pPr>
+            <a:endParaRPr b="0" lang="en-IN" sz="4400" spc="-1" strike="noStrike">
+              <a:latin typeface="Arial"/>
             </a:endParaRPr>
           </a:p>
         </p:txBody>
@@ -1535,8 +1526,8 @@
         </p:nvSpPr>
         <p:spPr>
           <a:xfrm>
-            <a:off x="609480" y="1095480"/>
-            <a:ext cx="5354280" cy="2399400"/>
+            <a:off x="609480" y="1604520"/>
+            <a:ext cx="5354280" cy="1896840"/>
           </a:xfrm>
           <a:prstGeom prst="rect">
             <a:avLst/>
@@ -1551,11 +1542,8 @@
             <a:normAutofit/>
           </a:bodyPr>
           <a:p>
-            <a:endParaRPr b="0" lang="en-US" sz="3200" spc="-1" strike="noStrike">
-              <a:solidFill>
-                <a:srgbClr val="000000"/>
-              </a:solidFill>
-              <a:latin typeface="TradeGothic"/>
+            <a:endParaRPr b="0" lang="en-IN" sz="3200" spc="-1" strike="noStrike">
+              <a:latin typeface="Arial"/>
             </a:endParaRPr>
           </a:p>
         </p:txBody>
@@ -1572,8 +1560,8 @@
         </p:nvSpPr>
         <p:spPr>
           <a:xfrm>
-            <a:off x="6231960" y="1095480"/>
-            <a:ext cx="5354280" cy="2399400"/>
+            <a:off x="6231960" y="1604520"/>
+            <a:ext cx="5354280" cy="1896840"/>
           </a:xfrm>
           <a:prstGeom prst="rect">
             <a:avLst/>
@@ -1588,11 +1576,8 @@
             <a:normAutofit/>
           </a:bodyPr>
           <a:p>
-            <a:endParaRPr b="0" lang="en-US" sz="3200" spc="-1" strike="noStrike">
-              <a:solidFill>
-                <a:srgbClr val="000000"/>
-              </a:solidFill>
-              <a:latin typeface="TradeGothic"/>
+            <a:endParaRPr b="0" lang="en-IN" sz="3200" spc="-1" strike="noStrike">
+              <a:latin typeface="Arial"/>
             </a:endParaRPr>
           </a:p>
         </p:txBody>
@@ -1609,8 +1594,8 @@
         </p:nvSpPr>
         <p:spPr>
           <a:xfrm>
-            <a:off x="609480" y="3723120"/>
-            <a:ext cx="5354280" cy="2399400"/>
+            <a:off x="609480" y="3682080"/>
+            <a:ext cx="5354280" cy="1896840"/>
           </a:xfrm>
           <a:prstGeom prst="rect">
             <a:avLst/>
@@ -1625,11 +1610,8 @@
             <a:normAutofit/>
           </a:bodyPr>
           <a:p>
-            <a:endParaRPr b="0" lang="en-US" sz="3200" spc="-1" strike="noStrike">
-              <a:solidFill>
-                <a:srgbClr val="000000"/>
-              </a:solidFill>
-              <a:latin typeface="TradeGothic"/>
+            <a:endParaRPr b="0" lang="en-IN" sz="3200" spc="-1" strike="noStrike">
+              <a:latin typeface="Arial"/>
             </a:endParaRPr>
           </a:p>
         </p:txBody>
@@ -1646,8 +1628,8 @@
         </p:nvSpPr>
         <p:spPr>
           <a:xfrm>
-            <a:off x="6231960" y="3723120"/>
-            <a:ext cx="5354280" cy="2399400"/>
+            <a:off x="6231960" y="3682080"/>
+            <a:ext cx="5354280" cy="1896840"/>
           </a:xfrm>
           <a:prstGeom prst="rect">
             <a:avLst/>
@@ -1662,11 +1644,8 @@
             <a:normAutofit/>
           </a:bodyPr>
           <a:p>
-            <a:endParaRPr b="0" lang="en-US" sz="3200" spc="-1" strike="noStrike">
-              <a:solidFill>
-                <a:srgbClr val="000000"/>
-              </a:solidFill>
-              <a:latin typeface="TradeGothic"/>
+            <a:endParaRPr b="0" lang="en-IN" sz="3200" spc="-1" strike="noStrike">
+              <a:latin typeface="Arial"/>
             </a:endParaRPr>
           </a:p>
         </p:txBody>
@@ -1678,7 +1657,7 @@
             <a:spLocks noGrp="1"/>
           </p:cNvSpPr>
           <p:nvPr>
-            <p:ph type="ftr" idx="2"/>
+            <p:ph type="ftr" idx="1"/>
           </p:nvPr>
         </p:nvSpPr>
         <p:spPr/>
@@ -1698,14 +1677,14 @@
             <a:spLocks noGrp="1"/>
           </p:cNvSpPr>
           <p:nvPr>
-            <p:ph type="sldNum" idx="3"/>
+            <p:ph type="sldNum" idx="2"/>
           </p:nvPr>
         </p:nvSpPr>
         <p:spPr/>
         <p:txBody>
           <a:bodyPr/>
           <a:p>
-            <a:fld id="{DC61C822-EB82-4567-B2B7-3D5EA0C0FFE1}" type="slidenum">
+            <a:fld id="{1FD41B61-CDA7-4431-BE0D-5B1B95FAF9D9}" type="slidenum">
               <a:t>&lt;#&gt;</a:t>
             </a:fld>
           </a:p>
@@ -1718,7 +1697,7 @@
             <a:spLocks noGrp="1"/>
           </p:cNvSpPr>
           <p:nvPr>
-            <p:ph type="dt" idx="1"/>
+            <p:ph type="dt" idx="3"/>
           </p:nvPr>
         </p:nvSpPr>
         <p:spPr/>
@@ -1766,8 +1745,8 @@
         </p:nvSpPr>
         <p:spPr>
           <a:xfrm>
-            <a:off x="609480" y="-47520"/>
-            <a:ext cx="10972440" cy="1142640"/>
+            <a:off x="609480" y="273600"/>
+            <a:ext cx="10972440" cy="1144800"/>
           </a:xfrm>
           <a:prstGeom prst="rect">
             <a:avLst/>
@@ -1782,11 +1761,11 @@
             <a:noAutofit/>
           </a:bodyPr>
           <a:p>
-            <a:endParaRPr b="0" lang="en-US" sz="4400" spc="-1" strike="noStrike">
-              <a:solidFill>
-                <a:srgbClr val="000000"/>
-              </a:solidFill>
-              <a:latin typeface="Calibri"/>
+            <a:pPr algn="ctr">
+              <a:buNone/>
+            </a:pPr>
+            <a:endParaRPr b="0" lang="en-IN" sz="4400" spc="-1" strike="noStrike">
+              <a:latin typeface="Arial"/>
             </a:endParaRPr>
           </a:p>
         </p:txBody>
@@ -1803,8 +1782,8 @@
         </p:nvSpPr>
         <p:spPr>
           <a:xfrm>
-            <a:off x="609480" y="1095480"/>
-            <a:ext cx="3533040" cy="2399400"/>
+            <a:off x="609480" y="1604520"/>
+            <a:ext cx="3533040" cy="1896840"/>
           </a:xfrm>
           <a:prstGeom prst="rect">
             <a:avLst/>
@@ -1819,11 +1798,8 @@
             <a:normAutofit/>
           </a:bodyPr>
           <a:p>
-            <a:endParaRPr b="0" lang="en-US" sz="3200" spc="-1" strike="noStrike">
-              <a:solidFill>
-                <a:srgbClr val="000000"/>
-              </a:solidFill>
-              <a:latin typeface="TradeGothic"/>
+            <a:endParaRPr b="0" lang="en-IN" sz="3200" spc="-1" strike="noStrike">
+              <a:latin typeface="Arial"/>
             </a:endParaRPr>
           </a:p>
         </p:txBody>
@@ -1840,8 +1816,8 @@
         </p:nvSpPr>
         <p:spPr>
           <a:xfrm>
-            <a:off x="4319640" y="1095480"/>
-            <a:ext cx="3533040" cy="2399400"/>
+            <a:off x="4319640" y="1604520"/>
+            <a:ext cx="3533040" cy="1896840"/>
           </a:xfrm>
           <a:prstGeom prst="rect">
             <a:avLst/>
@@ -1856,11 +1832,8 @@
             <a:normAutofit/>
           </a:bodyPr>
           <a:p>
-            <a:endParaRPr b="0" lang="en-US" sz="3200" spc="-1" strike="noStrike">
-              <a:solidFill>
-                <a:srgbClr val="000000"/>
-              </a:solidFill>
-              <a:latin typeface="TradeGothic"/>
+            <a:endParaRPr b="0" lang="en-IN" sz="3200" spc="-1" strike="noStrike">
+              <a:latin typeface="Arial"/>
             </a:endParaRPr>
           </a:p>
         </p:txBody>
@@ -1877,8 +1850,8 @@
         </p:nvSpPr>
         <p:spPr>
           <a:xfrm>
-            <a:off x="8029800" y="1095480"/>
-            <a:ext cx="3533040" cy="2399400"/>
+            <a:off x="8029800" y="1604520"/>
+            <a:ext cx="3533040" cy="1896840"/>
           </a:xfrm>
           <a:prstGeom prst="rect">
             <a:avLst/>
@@ -1893,11 +1866,8 @@
             <a:normAutofit/>
           </a:bodyPr>
           <a:p>
-            <a:endParaRPr b="0" lang="en-US" sz="3200" spc="-1" strike="noStrike">
-              <a:solidFill>
-                <a:srgbClr val="000000"/>
-              </a:solidFill>
-              <a:latin typeface="TradeGothic"/>
+            <a:endParaRPr b="0" lang="en-IN" sz="3200" spc="-1" strike="noStrike">
+              <a:latin typeface="Arial"/>
             </a:endParaRPr>
           </a:p>
         </p:txBody>
@@ -1914,8 +1884,8 @@
         </p:nvSpPr>
         <p:spPr>
           <a:xfrm>
-            <a:off x="609480" y="3723120"/>
-            <a:ext cx="3533040" cy="2399400"/>
+            <a:off x="609480" y="3682080"/>
+            <a:ext cx="3533040" cy="1896840"/>
           </a:xfrm>
           <a:prstGeom prst="rect">
             <a:avLst/>
@@ -1930,11 +1900,8 @@
             <a:normAutofit/>
           </a:bodyPr>
           <a:p>
-            <a:endParaRPr b="0" lang="en-US" sz="3200" spc="-1" strike="noStrike">
-              <a:solidFill>
-                <a:srgbClr val="000000"/>
-              </a:solidFill>
-              <a:latin typeface="TradeGothic"/>
+            <a:endParaRPr b="0" lang="en-IN" sz="3200" spc="-1" strike="noStrike">
+              <a:latin typeface="Arial"/>
             </a:endParaRPr>
           </a:p>
         </p:txBody>
@@ -1951,8 +1918,8 @@
         </p:nvSpPr>
         <p:spPr>
           <a:xfrm>
-            <a:off x="4319640" y="3723120"/>
-            <a:ext cx="3533040" cy="2399400"/>
+            <a:off x="4319640" y="3682080"/>
+            <a:ext cx="3533040" cy="1896840"/>
           </a:xfrm>
           <a:prstGeom prst="rect">
             <a:avLst/>
@@ -1967,11 +1934,8 @@
             <a:normAutofit/>
           </a:bodyPr>
           <a:p>
-            <a:endParaRPr b="0" lang="en-US" sz="3200" spc="-1" strike="noStrike">
-              <a:solidFill>
-                <a:srgbClr val="000000"/>
-              </a:solidFill>
-              <a:latin typeface="TradeGothic"/>
+            <a:endParaRPr b="0" lang="en-IN" sz="3200" spc="-1" strike="noStrike">
+              <a:latin typeface="Arial"/>
             </a:endParaRPr>
           </a:p>
         </p:txBody>
@@ -1988,8 +1952,8 @@
         </p:nvSpPr>
         <p:spPr>
           <a:xfrm>
-            <a:off x="8029800" y="3723120"/>
-            <a:ext cx="3533040" cy="2399400"/>
+            <a:off x="8029800" y="3682080"/>
+            <a:ext cx="3533040" cy="1896840"/>
           </a:xfrm>
           <a:prstGeom prst="rect">
             <a:avLst/>
@@ -2004,11 +1968,8 @@
             <a:normAutofit/>
           </a:bodyPr>
           <a:p>
-            <a:endParaRPr b="0" lang="en-US" sz="3200" spc="-1" strike="noStrike">
-              <a:solidFill>
-                <a:srgbClr val="000000"/>
-              </a:solidFill>
-              <a:latin typeface="TradeGothic"/>
+            <a:endParaRPr b="0" lang="en-IN" sz="3200" spc="-1" strike="noStrike">
+              <a:latin typeface="Arial"/>
             </a:endParaRPr>
           </a:p>
         </p:txBody>
@@ -2020,7 +1981,7 @@
             <a:spLocks noGrp="1"/>
           </p:cNvSpPr>
           <p:nvPr>
-            <p:ph type="ftr" idx="2"/>
+            <p:ph type="ftr" idx="1"/>
           </p:nvPr>
         </p:nvSpPr>
         <p:spPr/>
@@ -2040,14 +2001,14 @@
             <a:spLocks noGrp="1"/>
           </p:cNvSpPr>
           <p:nvPr>
-            <p:ph type="sldNum" idx="3"/>
+            <p:ph type="sldNum" idx="2"/>
           </p:nvPr>
         </p:nvSpPr>
         <p:spPr/>
         <p:txBody>
           <a:bodyPr/>
           <a:p>
-            <a:fld id="{A0ABA532-FDB8-49B8-8593-3A3112A18B2A}" type="slidenum">
+            <a:fld id="{B618DF0B-3F2E-4D0F-935D-A28F48B6BDFA}" type="slidenum">
               <a:t>&lt;#&gt;</a:t>
             </a:fld>
           </a:p>
@@ -2060,7 +2021,7 @@
             <a:spLocks noGrp="1"/>
           </p:cNvSpPr>
           <p:nvPr>
-            <p:ph type="dt" idx="1"/>
+            <p:ph type="dt" idx="3"/>
           </p:nvPr>
         </p:nvSpPr>
         <p:spPr/>
@@ -2103,7 +2064,7 @@
             <a:spLocks noGrp="1"/>
           </p:cNvSpPr>
           <p:nvPr>
-            <p:ph type="ftr" idx="5"/>
+            <p:ph type="ftr" idx="4"/>
           </p:nvPr>
         </p:nvSpPr>
         <p:spPr/>
@@ -2123,14 +2084,14 @@
             <a:spLocks noGrp="1"/>
           </p:cNvSpPr>
           <p:nvPr>
-            <p:ph type="sldNum" idx="6"/>
+            <p:ph type="sldNum" idx="5"/>
           </p:nvPr>
         </p:nvSpPr>
         <p:spPr/>
         <p:txBody>
           <a:bodyPr/>
           <a:p>
-            <a:fld id="{328C57C5-6FC6-4A13-99E5-7DD42F14602A}" type="slidenum">
+            <a:fld id="{2A28A85E-2714-4F97-A8E9-88140BD3E9C1}" type="slidenum">
               <a:t>&lt;#&gt;</a:t>
             </a:fld>
           </a:p>
@@ -2143,7 +2104,7 @@
             <a:spLocks noGrp="1"/>
           </p:cNvSpPr>
           <p:nvPr>
-            <p:ph type="dt" idx="4"/>
+            <p:ph type="dt" idx="6"/>
           </p:nvPr>
         </p:nvSpPr>
         <p:spPr/>
@@ -2191,8 +2152,8 @@
         </p:nvSpPr>
         <p:spPr>
           <a:xfrm>
-            <a:off x="609480" y="-47520"/>
-            <a:ext cx="10972440" cy="1142640"/>
+            <a:off x="609480" y="273600"/>
+            <a:ext cx="10972440" cy="1144800"/>
           </a:xfrm>
           <a:prstGeom prst="rect">
             <a:avLst/>
@@ -2207,11 +2168,11 @@
             <a:noAutofit/>
           </a:bodyPr>
           <a:p>
-            <a:endParaRPr b="0" lang="en-US" sz="4400" spc="-1" strike="noStrike">
-              <a:solidFill>
-                <a:srgbClr val="000000"/>
-              </a:solidFill>
-              <a:latin typeface="Calibri"/>
+            <a:pPr algn="ctr">
+              <a:buNone/>
+            </a:pPr>
+            <a:endParaRPr b="0" lang="en-IN" sz="4400" spc="-1" strike="noStrike">
+              <a:latin typeface="Arial"/>
             </a:endParaRPr>
           </a:p>
         </p:txBody>
@@ -2228,8 +2189,8 @@
         </p:nvSpPr>
         <p:spPr>
           <a:xfrm>
-            <a:off x="609480" y="1095480"/>
-            <a:ext cx="10972440" cy="5030280"/>
+            <a:off x="609480" y="1604520"/>
+            <a:ext cx="10972440" cy="3977280"/>
           </a:xfrm>
           <a:prstGeom prst="rect">
             <a:avLst/>
@@ -2260,7 +2221,7 @@
             <a:spLocks noGrp="1"/>
           </p:cNvSpPr>
           <p:nvPr>
-            <p:ph type="ftr" idx="5"/>
+            <p:ph type="ftr" idx="4"/>
           </p:nvPr>
         </p:nvSpPr>
         <p:spPr/>
@@ -2280,14 +2241,14 @@
             <a:spLocks noGrp="1"/>
           </p:cNvSpPr>
           <p:nvPr>
-            <p:ph type="sldNum" idx="6"/>
+            <p:ph type="sldNum" idx="5"/>
           </p:nvPr>
         </p:nvSpPr>
         <p:spPr/>
         <p:txBody>
           <a:bodyPr/>
           <a:p>
-            <a:fld id="{0CF7F4B5-E18B-4987-B445-A812F791271C}" type="slidenum">
+            <a:fld id="{4B1B2840-C184-453F-985B-2470A125B4F4}" type="slidenum">
               <a:t>&lt;#&gt;</a:t>
             </a:fld>
           </a:p>
@@ -2300,7 +2261,7 @@
             <a:spLocks noGrp="1"/>
           </p:cNvSpPr>
           <p:nvPr>
-            <p:ph type="dt" idx="4"/>
+            <p:ph type="dt" idx="6"/>
           </p:nvPr>
         </p:nvSpPr>
         <p:spPr/>
@@ -2348,8 +2309,8 @@
         </p:nvSpPr>
         <p:spPr>
           <a:xfrm>
-            <a:off x="609480" y="-47520"/>
-            <a:ext cx="10972440" cy="1142640"/>
+            <a:off x="609480" y="273600"/>
+            <a:ext cx="10972440" cy="1144800"/>
           </a:xfrm>
           <a:prstGeom prst="rect">
             <a:avLst/>
@@ -2364,11 +2325,11 @@
             <a:noAutofit/>
           </a:bodyPr>
           <a:p>
-            <a:endParaRPr b="0" lang="en-US" sz="4400" spc="-1" strike="noStrike">
-              <a:solidFill>
-                <a:srgbClr val="000000"/>
-              </a:solidFill>
-              <a:latin typeface="Calibri"/>
+            <a:pPr algn="ctr">
+              <a:buNone/>
+            </a:pPr>
+            <a:endParaRPr b="0" lang="en-IN" sz="4400" spc="-1" strike="noStrike">
+              <a:latin typeface="Arial"/>
             </a:endParaRPr>
           </a:p>
         </p:txBody>
@@ -2385,8 +2346,8 @@
         </p:nvSpPr>
         <p:spPr>
           <a:xfrm>
-            <a:off x="609480" y="1095480"/>
-            <a:ext cx="10972440" cy="5030280"/>
+            <a:off x="609480" y="1604520"/>
+            <a:ext cx="10972440" cy="3977280"/>
           </a:xfrm>
           <a:prstGeom prst="rect">
             <a:avLst/>
@@ -2401,11 +2362,8 @@
             <a:normAutofit/>
           </a:bodyPr>
           <a:p>
-            <a:endParaRPr b="0" lang="en-US" sz="3200" spc="-1" strike="noStrike">
-              <a:solidFill>
-                <a:srgbClr val="000000"/>
-              </a:solidFill>
-              <a:latin typeface="TradeGothic"/>
+            <a:endParaRPr b="0" lang="en-IN" sz="3200" spc="-1" strike="noStrike">
+              <a:latin typeface="Arial"/>
             </a:endParaRPr>
           </a:p>
         </p:txBody>
@@ -2417,7 +2375,7 @@
             <a:spLocks noGrp="1"/>
           </p:cNvSpPr>
           <p:nvPr>
-            <p:ph type="ftr" idx="5"/>
+            <p:ph type="ftr" idx="4"/>
           </p:nvPr>
         </p:nvSpPr>
         <p:spPr/>
@@ -2437,14 +2395,14 @@
             <a:spLocks noGrp="1"/>
           </p:cNvSpPr>
           <p:nvPr>
-            <p:ph type="sldNum" idx="6"/>
+            <p:ph type="sldNum" idx="5"/>
           </p:nvPr>
         </p:nvSpPr>
         <p:spPr/>
         <p:txBody>
           <a:bodyPr/>
           <a:p>
-            <a:fld id="{46484B1C-3A4C-47FA-81B8-4F036A221F9C}" type="slidenum">
+            <a:fld id="{62FDA0B4-6558-4A00-9E85-CD8012274FBE}" type="slidenum">
               <a:t>&lt;#&gt;</a:t>
             </a:fld>
           </a:p>
@@ -2457,7 +2415,7 @@
             <a:spLocks noGrp="1"/>
           </p:cNvSpPr>
           <p:nvPr>
-            <p:ph type="dt" idx="4"/>
+            <p:ph type="dt" idx="6"/>
           </p:nvPr>
         </p:nvSpPr>
         <p:spPr/>
@@ -2505,8 +2463,8 @@
         </p:nvSpPr>
         <p:spPr>
           <a:xfrm>
-            <a:off x="609480" y="-47520"/>
-            <a:ext cx="10972440" cy="1142640"/>
+            <a:off x="609480" y="273600"/>
+            <a:ext cx="10972440" cy="1144800"/>
           </a:xfrm>
           <a:prstGeom prst="rect">
             <a:avLst/>
@@ -2521,11 +2479,11 @@
             <a:noAutofit/>
           </a:bodyPr>
           <a:p>
-            <a:endParaRPr b="0" lang="en-US" sz="4400" spc="-1" strike="noStrike">
-              <a:solidFill>
-                <a:srgbClr val="000000"/>
-              </a:solidFill>
-              <a:latin typeface="Calibri"/>
+            <a:pPr algn="ctr">
+              <a:buNone/>
+            </a:pPr>
+            <a:endParaRPr b="0" lang="en-IN" sz="4400" spc="-1" strike="noStrike">
+              <a:latin typeface="Arial"/>
             </a:endParaRPr>
           </a:p>
         </p:txBody>
@@ -2542,8 +2500,8 @@
         </p:nvSpPr>
         <p:spPr>
           <a:xfrm>
-            <a:off x="609480" y="1095480"/>
-            <a:ext cx="5354280" cy="5030280"/>
+            <a:off x="609480" y="1604520"/>
+            <a:ext cx="5354280" cy="3977280"/>
           </a:xfrm>
           <a:prstGeom prst="rect">
             <a:avLst/>
@@ -2558,11 +2516,8 @@
             <a:normAutofit/>
           </a:bodyPr>
           <a:p>
-            <a:endParaRPr b="0" lang="en-US" sz="3200" spc="-1" strike="noStrike">
-              <a:solidFill>
-                <a:srgbClr val="000000"/>
-              </a:solidFill>
-              <a:latin typeface="TradeGothic"/>
+            <a:endParaRPr b="0" lang="en-IN" sz="3200" spc="-1" strike="noStrike">
+              <a:latin typeface="Arial"/>
             </a:endParaRPr>
           </a:p>
         </p:txBody>
@@ -2579,8 +2534,8 @@
         </p:nvSpPr>
         <p:spPr>
           <a:xfrm>
-            <a:off x="6231960" y="1095480"/>
-            <a:ext cx="5354280" cy="5030280"/>
+            <a:off x="6231960" y="1604520"/>
+            <a:ext cx="5354280" cy="3977280"/>
           </a:xfrm>
           <a:prstGeom prst="rect">
             <a:avLst/>
@@ -2595,11 +2550,8 @@
             <a:normAutofit/>
           </a:bodyPr>
           <a:p>
-            <a:endParaRPr b="0" lang="en-US" sz="3200" spc="-1" strike="noStrike">
-              <a:solidFill>
-                <a:srgbClr val="000000"/>
-              </a:solidFill>
-              <a:latin typeface="TradeGothic"/>
+            <a:endParaRPr b="0" lang="en-IN" sz="3200" spc="-1" strike="noStrike">
+              <a:latin typeface="Arial"/>
             </a:endParaRPr>
           </a:p>
         </p:txBody>
@@ -2611,7 +2563,7 @@
             <a:spLocks noGrp="1"/>
           </p:cNvSpPr>
           <p:nvPr>
-            <p:ph type="ftr" idx="5"/>
+            <p:ph type="ftr" idx="4"/>
           </p:nvPr>
         </p:nvSpPr>
         <p:spPr/>
@@ -2631,14 +2583,14 @@
             <a:spLocks noGrp="1"/>
           </p:cNvSpPr>
           <p:nvPr>
-            <p:ph type="sldNum" idx="6"/>
+            <p:ph type="sldNum" idx="5"/>
           </p:nvPr>
         </p:nvSpPr>
         <p:spPr/>
         <p:txBody>
           <a:bodyPr/>
           <a:p>
-            <a:fld id="{BCE24D71-74EC-4E74-BF6E-2274D38CF307}" type="slidenum">
+            <a:fld id="{18FE9E76-6990-40F3-81BC-B579DD1622BB}" type="slidenum">
               <a:t>&lt;#&gt;</a:t>
             </a:fld>
           </a:p>
@@ -2651,7 +2603,7 @@
             <a:spLocks noGrp="1"/>
           </p:cNvSpPr>
           <p:nvPr>
-            <p:ph type="dt" idx="4"/>
+            <p:ph type="dt" idx="6"/>
           </p:nvPr>
         </p:nvSpPr>
         <p:spPr/>
@@ -2699,8 +2651,8 @@
         </p:nvSpPr>
         <p:spPr>
           <a:xfrm>
-            <a:off x="609480" y="-47520"/>
-            <a:ext cx="10972440" cy="1142640"/>
+            <a:off x="609480" y="273600"/>
+            <a:ext cx="10972440" cy="1144800"/>
           </a:xfrm>
           <a:prstGeom prst="rect">
             <a:avLst/>
@@ -2715,11 +2667,11 @@
             <a:noAutofit/>
           </a:bodyPr>
           <a:p>
-            <a:endParaRPr b="0" lang="en-US" sz="4400" spc="-1" strike="noStrike">
-              <a:solidFill>
-                <a:srgbClr val="000000"/>
-              </a:solidFill>
-              <a:latin typeface="Calibri"/>
+            <a:pPr algn="ctr">
+              <a:buNone/>
+            </a:pPr>
+            <a:endParaRPr b="0" lang="en-IN" sz="4400" spc="-1" strike="noStrike">
+              <a:latin typeface="Arial"/>
             </a:endParaRPr>
           </a:p>
         </p:txBody>
@@ -2731,7 +2683,7 @@
             <a:spLocks noGrp="1"/>
           </p:cNvSpPr>
           <p:nvPr>
-            <p:ph type="ftr" idx="5"/>
+            <p:ph type="ftr" idx="4"/>
           </p:nvPr>
         </p:nvSpPr>
         <p:spPr/>
@@ -2751,14 +2703,14 @@
             <a:spLocks noGrp="1"/>
           </p:cNvSpPr>
           <p:nvPr>
-            <p:ph type="sldNum" idx="6"/>
+            <p:ph type="sldNum" idx="5"/>
           </p:nvPr>
         </p:nvSpPr>
         <p:spPr/>
         <p:txBody>
           <a:bodyPr/>
           <a:p>
-            <a:fld id="{9BD9849C-DF44-4788-9764-3268A89415CC}" type="slidenum">
+            <a:fld id="{FA39AD95-5F14-4A25-8E76-ED050B00D34B}" type="slidenum">
               <a:t>&lt;#&gt;</a:t>
             </a:fld>
           </a:p>
@@ -2771,7 +2723,7 @@
             <a:spLocks noGrp="1"/>
           </p:cNvSpPr>
           <p:nvPr>
-            <p:ph type="dt" idx="4"/>
+            <p:ph type="dt" idx="6"/>
           </p:nvPr>
         </p:nvSpPr>
         <p:spPr/>
@@ -2819,8 +2771,8 @@
         </p:nvSpPr>
         <p:spPr>
           <a:xfrm>
-            <a:off x="609480" y="-47520"/>
-            <a:ext cx="10972440" cy="5297760"/>
+            <a:off x="609480" y="273600"/>
+            <a:ext cx="10972440" cy="5307840"/>
           </a:xfrm>
           <a:prstGeom prst="rect">
             <a:avLst/>
@@ -2851,7 +2803,7 @@
             <a:spLocks noGrp="1"/>
           </p:cNvSpPr>
           <p:nvPr>
-            <p:ph type="ftr" idx="5"/>
+            <p:ph type="ftr" idx="4"/>
           </p:nvPr>
         </p:nvSpPr>
         <p:spPr/>
@@ -2871,14 +2823,14 @@
             <a:spLocks noGrp="1"/>
           </p:cNvSpPr>
           <p:nvPr>
-            <p:ph type="sldNum" idx="6"/>
+            <p:ph type="sldNum" idx="5"/>
           </p:nvPr>
         </p:nvSpPr>
         <p:spPr/>
         <p:txBody>
           <a:bodyPr/>
           <a:p>
-            <a:fld id="{EB269DE1-DFEA-484C-B866-AE52E955F266}" type="slidenum">
+            <a:fld id="{AB9D064C-A9E4-43FB-B542-1BDE50F9190E}" type="slidenum">
               <a:t>&lt;#&gt;</a:t>
             </a:fld>
           </a:p>
@@ -2891,7 +2843,7 @@
             <a:spLocks noGrp="1"/>
           </p:cNvSpPr>
           <p:nvPr>
-            <p:ph type="dt" idx="4"/>
+            <p:ph type="dt" idx="6"/>
           </p:nvPr>
         </p:nvSpPr>
         <p:spPr/>
@@ -2939,8 +2891,8 @@
         </p:nvSpPr>
         <p:spPr>
           <a:xfrm>
-            <a:off x="609480" y="-47520"/>
-            <a:ext cx="10972440" cy="1142640"/>
+            <a:off x="609480" y="273600"/>
+            <a:ext cx="10972440" cy="1144800"/>
           </a:xfrm>
           <a:prstGeom prst="rect">
             <a:avLst/>
@@ -2955,11 +2907,11 @@
             <a:noAutofit/>
           </a:bodyPr>
           <a:p>
-            <a:endParaRPr b="0" lang="en-US" sz="4400" spc="-1" strike="noStrike">
-              <a:solidFill>
-                <a:srgbClr val="000000"/>
-              </a:solidFill>
-              <a:latin typeface="Calibri"/>
+            <a:pPr algn="ctr">
+              <a:buNone/>
+            </a:pPr>
+            <a:endParaRPr b="0" lang="en-IN" sz="4400" spc="-1" strike="noStrike">
+              <a:latin typeface="Arial"/>
             </a:endParaRPr>
           </a:p>
         </p:txBody>
@@ -2976,8 +2928,8 @@
         </p:nvSpPr>
         <p:spPr>
           <a:xfrm>
-            <a:off x="609480" y="1095480"/>
-            <a:ext cx="5354280" cy="2399400"/>
+            <a:off x="609480" y="1604520"/>
+            <a:ext cx="5354280" cy="1896840"/>
           </a:xfrm>
           <a:prstGeom prst="rect">
             <a:avLst/>
@@ -2992,11 +2944,8 @@
             <a:normAutofit/>
           </a:bodyPr>
           <a:p>
-            <a:endParaRPr b="0" lang="en-US" sz="3200" spc="-1" strike="noStrike">
-              <a:solidFill>
-                <a:srgbClr val="000000"/>
-              </a:solidFill>
-              <a:latin typeface="TradeGothic"/>
+            <a:endParaRPr b="0" lang="en-IN" sz="3200" spc="-1" strike="noStrike">
+              <a:latin typeface="Arial"/>
             </a:endParaRPr>
           </a:p>
         </p:txBody>
@@ -3013,8 +2962,8 @@
         </p:nvSpPr>
         <p:spPr>
           <a:xfrm>
-            <a:off x="6231960" y="1095480"/>
-            <a:ext cx="5354280" cy="5030280"/>
+            <a:off x="6231960" y="1604520"/>
+            <a:ext cx="5354280" cy="3977280"/>
           </a:xfrm>
           <a:prstGeom prst="rect">
             <a:avLst/>
@@ -3029,11 +2978,8 @@
             <a:normAutofit/>
           </a:bodyPr>
           <a:p>
-            <a:endParaRPr b="0" lang="en-US" sz="3200" spc="-1" strike="noStrike">
-              <a:solidFill>
-                <a:srgbClr val="000000"/>
-              </a:solidFill>
-              <a:latin typeface="TradeGothic"/>
+            <a:endParaRPr b="0" lang="en-IN" sz="3200" spc="-1" strike="noStrike">
+              <a:latin typeface="Arial"/>
             </a:endParaRPr>
           </a:p>
         </p:txBody>
@@ -3050,8 +2996,8 @@
         </p:nvSpPr>
         <p:spPr>
           <a:xfrm>
-            <a:off x="609480" y="3723120"/>
-            <a:ext cx="5354280" cy="2399400"/>
+            <a:off x="609480" y="3682080"/>
+            <a:ext cx="5354280" cy="1896840"/>
           </a:xfrm>
           <a:prstGeom prst="rect">
             <a:avLst/>
@@ -3066,11 +3012,8 @@
             <a:normAutofit/>
           </a:bodyPr>
           <a:p>
-            <a:endParaRPr b="0" lang="en-US" sz="3200" spc="-1" strike="noStrike">
-              <a:solidFill>
-                <a:srgbClr val="000000"/>
-              </a:solidFill>
-              <a:latin typeface="TradeGothic"/>
+            <a:endParaRPr b="0" lang="en-IN" sz="3200" spc="-1" strike="noStrike">
+              <a:latin typeface="Arial"/>
             </a:endParaRPr>
           </a:p>
         </p:txBody>
@@ -3082,7 +3025,7 @@
             <a:spLocks noGrp="1"/>
           </p:cNvSpPr>
           <p:nvPr>
-            <p:ph type="ftr" idx="5"/>
+            <p:ph type="ftr" idx="4"/>
           </p:nvPr>
         </p:nvSpPr>
         <p:spPr/>
@@ -3102,14 +3045,14 @@
             <a:spLocks noGrp="1"/>
           </p:cNvSpPr>
           <p:nvPr>
-            <p:ph type="sldNum" idx="6"/>
+            <p:ph type="sldNum" idx="5"/>
           </p:nvPr>
         </p:nvSpPr>
         <p:spPr/>
         <p:txBody>
           <a:bodyPr/>
           <a:p>
-            <a:fld id="{61F3E934-7184-441E-9562-BB981D8153E5}" type="slidenum">
+            <a:fld id="{C9E3FC4E-D2A0-4412-AEB6-3847E4895D90}" type="slidenum">
               <a:t>&lt;#&gt;</a:t>
             </a:fld>
           </a:p>
@@ -3122,7 +3065,7 @@
             <a:spLocks noGrp="1"/>
           </p:cNvSpPr>
           <p:nvPr>
-            <p:ph type="dt" idx="4"/>
+            <p:ph type="dt" idx="6"/>
           </p:nvPr>
         </p:nvSpPr>
         <p:spPr/>
@@ -3170,8 +3113,8 @@
         </p:nvSpPr>
         <p:spPr>
           <a:xfrm>
-            <a:off x="609480" y="-47520"/>
-            <a:ext cx="10972440" cy="1142640"/>
+            <a:off x="609480" y="273600"/>
+            <a:ext cx="10972440" cy="1144800"/>
           </a:xfrm>
           <a:prstGeom prst="rect">
             <a:avLst/>
@@ -3186,11 +3129,11 @@
             <a:noAutofit/>
           </a:bodyPr>
           <a:p>
-            <a:endParaRPr b="0" lang="en-US" sz="4400" spc="-1" strike="noStrike">
-              <a:solidFill>
-                <a:srgbClr val="000000"/>
-              </a:solidFill>
-              <a:latin typeface="Calibri"/>
+            <a:pPr algn="ctr">
+              <a:buNone/>
+            </a:pPr>
+            <a:endParaRPr b="0" lang="en-IN" sz="4400" spc="-1" strike="noStrike">
+              <a:latin typeface="Arial"/>
             </a:endParaRPr>
           </a:p>
         </p:txBody>
@@ -3207,8 +3150,8 @@
         </p:nvSpPr>
         <p:spPr>
           <a:xfrm>
-            <a:off x="609480" y="1095480"/>
-            <a:ext cx="10972440" cy="5030280"/>
+            <a:off x="609480" y="1604520"/>
+            <a:ext cx="10972440" cy="3977280"/>
           </a:xfrm>
           <a:prstGeom prst="rect">
             <a:avLst/>
@@ -3239,7 +3182,7 @@
             <a:spLocks noGrp="1"/>
           </p:cNvSpPr>
           <p:nvPr>
-            <p:ph type="ftr" idx="2"/>
+            <p:ph type="ftr" idx="1"/>
           </p:nvPr>
         </p:nvSpPr>
         <p:spPr/>
@@ -3259,14 +3202,14 @@
             <a:spLocks noGrp="1"/>
           </p:cNvSpPr>
           <p:nvPr>
-            <p:ph type="sldNum" idx="3"/>
+            <p:ph type="sldNum" idx="2"/>
           </p:nvPr>
         </p:nvSpPr>
         <p:spPr/>
         <p:txBody>
           <a:bodyPr/>
           <a:p>
-            <a:fld id="{90072CE6-CA1E-4710-A51D-2A5BF8711227}" type="slidenum">
+            <a:fld id="{39CA47B4-CF1C-449F-B3CD-7F0BCA7A9304}" type="slidenum">
               <a:t>&lt;#&gt;</a:t>
             </a:fld>
           </a:p>
@@ -3279,7 +3222,7 @@
             <a:spLocks noGrp="1"/>
           </p:cNvSpPr>
           <p:nvPr>
-            <p:ph type="dt" idx="1"/>
+            <p:ph type="dt" idx="3"/>
           </p:nvPr>
         </p:nvSpPr>
         <p:spPr/>
@@ -3327,8 +3270,8 @@
         </p:nvSpPr>
         <p:spPr>
           <a:xfrm>
-            <a:off x="609480" y="-47520"/>
-            <a:ext cx="10972440" cy="1142640"/>
+            <a:off x="609480" y="273600"/>
+            <a:ext cx="10972440" cy="1144800"/>
           </a:xfrm>
           <a:prstGeom prst="rect">
             <a:avLst/>
@@ -3343,11 +3286,11 @@
             <a:noAutofit/>
           </a:bodyPr>
           <a:p>
-            <a:endParaRPr b="0" lang="en-US" sz="4400" spc="-1" strike="noStrike">
-              <a:solidFill>
-                <a:srgbClr val="000000"/>
-              </a:solidFill>
-              <a:latin typeface="Calibri"/>
+            <a:pPr algn="ctr">
+              <a:buNone/>
+            </a:pPr>
+            <a:endParaRPr b="0" lang="en-IN" sz="4400" spc="-1" strike="noStrike">
+              <a:latin typeface="Arial"/>
             </a:endParaRPr>
           </a:p>
         </p:txBody>
@@ -3364,8 +3307,8 @@
         </p:nvSpPr>
         <p:spPr>
           <a:xfrm>
-            <a:off x="609480" y="1095480"/>
-            <a:ext cx="5354280" cy="5030280"/>
+            <a:off x="609480" y="1604520"/>
+            <a:ext cx="5354280" cy="3977280"/>
           </a:xfrm>
           <a:prstGeom prst="rect">
             <a:avLst/>
@@ -3380,11 +3323,8 @@
             <a:normAutofit/>
           </a:bodyPr>
           <a:p>
-            <a:endParaRPr b="0" lang="en-US" sz="3200" spc="-1" strike="noStrike">
-              <a:solidFill>
-                <a:srgbClr val="000000"/>
-              </a:solidFill>
-              <a:latin typeface="TradeGothic"/>
+            <a:endParaRPr b="0" lang="en-IN" sz="3200" spc="-1" strike="noStrike">
+              <a:latin typeface="Arial"/>
             </a:endParaRPr>
           </a:p>
         </p:txBody>
@@ -3401,8 +3341,8 @@
         </p:nvSpPr>
         <p:spPr>
           <a:xfrm>
-            <a:off x="6231960" y="1095480"/>
-            <a:ext cx="5354280" cy="2399400"/>
+            <a:off x="6231960" y="1604520"/>
+            <a:ext cx="5354280" cy="1896840"/>
           </a:xfrm>
           <a:prstGeom prst="rect">
             <a:avLst/>
@@ -3417,11 +3357,8 @@
             <a:normAutofit/>
           </a:bodyPr>
           <a:p>
-            <a:endParaRPr b="0" lang="en-US" sz="3200" spc="-1" strike="noStrike">
-              <a:solidFill>
-                <a:srgbClr val="000000"/>
-              </a:solidFill>
-              <a:latin typeface="TradeGothic"/>
+            <a:endParaRPr b="0" lang="en-IN" sz="3200" spc="-1" strike="noStrike">
+              <a:latin typeface="Arial"/>
             </a:endParaRPr>
           </a:p>
         </p:txBody>
@@ -3438,8 +3375,8 @@
         </p:nvSpPr>
         <p:spPr>
           <a:xfrm>
-            <a:off x="6231960" y="3723120"/>
-            <a:ext cx="5354280" cy="2399400"/>
+            <a:off x="6231960" y="3682080"/>
+            <a:ext cx="5354280" cy="1896840"/>
           </a:xfrm>
           <a:prstGeom prst="rect">
             <a:avLst/>
@@ -3454,11 +3391,8 @@
             <a:normAutofit/>
           </a:bodyPr>
           <a:p>
-            <a:endParaRPr b="0" lang="en-US" sz="3200" spc="-1" strike="noStrike">
-              <a:solidFill>
-                <a:srgbClr val="000000"/>
-              </a:solidFill>
-              <a:latin typeface="TradeGothic"/>
+            <a:endParaRPr b="0" lang="en-IN" sz="3200" spc="-1" strike="noStrike">
+              <a:latin typeface="Arial"/>
             </a:endParaRPr>
           </a:p>
         </p:txBody>
@@ -3470,7 +3404,7 @@
             <a:spLocks noGrp="1"/>
           </p:cNvSpPr>
           <p:nvPr>
-            <p:ph type="ftr" idx="5"/>
+            <p:ph type="ftr" idx="4"/>
           </p:nvPr>
         </p:nvSpPr>
         <p:spPr/>
@@ -3490,14 +3424,14 @@
             <a:spLocks noGrp="1"/>
           </p:cNvSpPr>
           <p:nvPr>
-            <p:ph type="sldNum" idx="6"/>
+            <p:ph type="sldNum" idx="5"/>
           </p:nvPr>
         </p:nvSpPr>
         <p:spPr/>
         <p:txBody>
           <a:bodyPr/>
           <a:p>
-            <a:fld id="{7219F120-DAA0-48CA-94EF-BD6D7CF77B41}" type="slidenum">
+            <a:fld id="{1C743865-1505-4F78-AEF1-4676CE9B553D}" type="slidenum">
               <a:t>&lt;#&gt;</a:t>
             </a:fld>
           </a:p>
@@ -3510,7 +3444,7 @@
             <a:spLocks noGrp="1"/>
           </p:cNvSpPr>
           <p:nvPr>
-            <p:ph type="dt" idx="4"/>
+            <p:ph type="dt" idx="6"/>
           </p:nvPr>
         </p:nvSpPr>
         <p:spPr/>
@@ -3558,8 +3492,8 @@
         </p:nvSpPr>
         <p:spPr>
           <a:xfrm>
-            <a:off x="609480" y="-47520"/>
-            <a:ext cx="10972440" cy="1142640"/>
+            <a:off x="609480" y="273600"/>
+            <a:ext cx="10972440" cy="1144800"/>
           </a:xfrm>
           <a:prstGeom prst="rect">
             <a:avLst/>
@@ -3574,11 +3508,11 @@
             <a:noAutofit/>
           </a:bodyPr>
           <a:p>
-            <a:endParaRPr b="0" lang="en-US" sz="4400" spc="-1" strike="noStrike">
-              <a:solidFill>
-                <a:srgbClr val="000000"/>
-              </a:solidFill>
-              <a:latin typeface="Calibri"/>
+            <a:pPr algn="ctr">
+              <a:buNone/>
+            </a:pPr>
+            <a:endParaRPr b="0" lang="en-IN" sz="4400" spc="-1" strike="noStrike">
+              <a:latin typeface="Arial"/>
             </a:endParaRPr>
           </a:p>
         </p:txBody>
@@ -3595,8 +3529,8 @@
         </p:nvSpPr>
         <p:spPr>
           <a:xfrm>
-            <a:off x="609480" y="1095480"/>
-            <a:ext cx="5354280" cy="2399400"/>
+            <a:off x="609480" y="1604520"/>
+            <a:ext cx="5354280" cy="1896840"/>
           </a:xfrm>
           <a:prstGeom prst="rect">
             <a:avLst/>
@@ -3611,11 +3545,8 @@
             <a:normAutofit/>
           </a:bodyPr>
           <a:p>
-            <a:endParaRPr b="0" lang="en-US" sz="3200" spc="-1" strike="noStrike">
-              <a:solidFill>
-                <a:srgbClr val="000000"/>
-              </a:solidFill>
-              <a:latin typeface="TradeGothic"/>
+            <a:endParaRPr b="0" lang="en-IN" sz="3200" spc="-1" strike="noStrike">
+              <a:latin typeface="Arial"/>
             </a:endParaRPr>
           </a:p>
         </p:txBody>
@@ -3632,8 +3563,8 @@
         </p:nvSpPr>
         <p:spPr>
           <a:xfrm>
-            <a:off x="6231960" y="1095480"/>
-            <a:ext cx="5354280" cy="2399400"/>
+            <a:off x="6231960" y="1604520"/>
+            <a:ext cx="5354280" cy="1896840"/>
           </a:xfrm>
           <a:prstGeom prst="rect">
             <a:avLst/>
@@ -3648,11 +3579,8 @@
             <a:normAutofit/>
           </a:bodyPr>
           <a:p>
-            <a:endParaRPr b="0" lang="en-US" sz="3200" spc="-1" strike="noStrike">
-              <a:solidFill>
-                <a:srgbClr val="000000"/>
-              </a:solidFill>
-              <a:latin typeface="TradeGothic"/>
+            <a:endParaRPr b="0" lang="en-IN" sz="3200" spc="-1" strike="noStrike">
+              <a:latin typeface="Arial"/>
             </a:endParaRPr>
           </a:p>
         </p:txBody>
@@ -3669,8 +3597,8 @@
         </p:nvSpPr>
         <p:spPr>
           <a:xfrm>
-            <a:off x="609480" y="3723120"/>
-            <a:ext cx="10972440" cy="2399400"/>
+            <a:off x="609480" y="3682080"/>
+            <a:ext cx="10972440" cy="1896840"/>
           </a:xfrm>
           <a:prstGeom prst="rect">
             <a:avLst/>
@@ -3685,11 +3613,8 @@
             <a:normAutofit/>
           </a:bodyPr>
           <a:p>
-            <a:endParaRPr b="0" lang="en-US" sz="3200" spc="-1" strike="noStrike">
-              <a:solidFill>
-                <a:srgbClr val="000000"/>
-              </a:solidFill>
-              <a:latin typeface="TradeGothic"/>
+            <a:endParaRPr b="0" lang="en-IN" sz="3200" spc="-1" strike="noStrike">
+              <a:latin typeface="Arial"/>
             </a:endParaRPr>
           </a:p>
         </p:txBody>
@@ -3701,7 +3626,7 @@
             <a:spLocks noGrp="1"/>
           </p:cNvSpPr>
           <p:nvPr>
-            <p:ph type="ftr" idx="5"/>
+            <p:ph type="ftr" idx="4"/>
           </p:nvPr>
         </p:nvSpPr>
         <p:spPr/>
@@ -3721,14 +3646,14 @@
             <a:spLocks noGrp="1"/>
           </p:cNvSpPr>
           <p:nvPr>
-            <p:ph type="sldNum" idx="6"/>
+            <p:ph type="sldNum" idx="5"/>
           </p:nvPr>
         </p:nvSpPr>
         <p:spPr/>
         <p:txBody>
           <a:bodyPr/>
           <a:p>
-            <a:fld id="{3D8BB5AE-46F5-4382-9720-6BF4BEA9CDF1}" type="slidenum">
+            <a:fld id="{372BC844-5CE3-44ED-8521-9D1333FCABFA}" type="slidenum">
               <a:t>&lt;#&gt;</a:t>
             </a:fld>
           </a:p>
@@ -3741,7 +3666,7 @@
             <a:spLocks noGrp="1"/>
           </p:cNvSpPr>
           <p:nvPr>
-            <p:ph type="dt" idx="4"/>
+            <p:ph type="dt" idx="6"/>
           </p:nvPr>
         </p:nvSpPr>
         <p:spPr/>
@@ -3789,8 +3714,8 @@
         </p:nvSpPr>
         <p:spPr>
           <a:xfrm>
-            <a:off x="609480" y="-47520"/>
-            <a:ext cx="10972440" cy="1142640"/>
+            <a:off x="609480" y="273600"/>
+            <a:ext cx="10972440" cy="1144800"/>
           </a:xfrm>
           <a:prstGeom prst="rect">
             <a:avLst/>
@@ -3805,11 +3730,11 @@
             <a:noAutofit/>
           </a:bodyPr>
           <a:p>
-            <a:endParaRPr b="0" lang="en-US" sz="4400" spc="-1" strike="noStrike">
-              <a:solidFill>
-                <a:srgbClr val="000000"/>
-              </a:solidFill>
-              <a:latin typeface="Calibri"/>
+            <a:pPr algn="ctr">
+              <a:buNone/>
+            </a:pPr>
+            <a:endParaRPr b="0" lang="en-IN" sz="4400" spc="-1" strike="noStrike">
+              <a:latin typeface="Arial"/>
             </a:endParaRPr>
           </a:p>
         </p:txBody>
@@ -3826,8 +3751,8 @@
         </p:nvSpPr>
         <p:spPr>
           <a:xfrm>
-            <a:off x="609480" y="1095480"/>
-            <a:ext cx="10972440" cy="2399400"/>
+            <a:off x="609480" y="1604520"/>
+            <a:ext cx="10972440" cy="1896840"/>
           </a:xfrm>
           <a:prstGeom prst="rect">
             <a:avLst/>
@@ -3842,11 +3767,8 @@
             <a:normAutofit/>
           </a:bodyPr>
           <a:p>
-            <a:endParaRPr b="0" lang="en-US" sz="3200" spc="-1" strike="noStrike">
-              <a:solidFill>
-                <a:srgbClr val="000000"/>
-              </a:solidFill>
-              <a:latin typeface="TradeGothic"/>
+            <a:endParaRPr b="0" lang="en-IN" sz="3200" spc="-1" strike="noStrike">
+              <a:latin typeface="Arial"/>
             </a:endParaRPr>
           </a:p>
         </p:txBody>
@@ -3863,8 +3785,8 @@
         </p:nvSpPr>
         <p:spPr>
           <a:xfrm>
-            <a:off x="609480" y="3723120"/>
-            <a:ext cx="10972440" cy="2399400"/>
+            <a:off x="609480" y="3682080"/>
+            <a:ext cx="10972440" cy="1896840"/>
           </a:xfrm>
           <a:prstGeom prst="rect">
             <a:avLst/>
@@ -3879,11 +3801,8 @@
             <a:normAutofit/>
           </a:bodyPr>
           <a:p>
-            <a:endParaRPr b="0" lang="en-US" sz="3200" spc="-1" strike="noStrike">
-              <a:solidFill>
-                <a:srgbClr val="000000"/>
-              </a:solidFill>
-              <a:latin typeface="TradeGothic"/>
+            <a:endParaRPr b="0" lang="en-IN" sz="3200" spc="-1" strike="noStrike">
+              <a:latin typeface="Arial"/>
             </a:endParaRPr>
           </a:p>
         </p:txBody>
@@ -3895,7 +3814,7 @@
             <a:spLocks noGrp="1"/>
           </p:cNvSpPr>
           <p:nvPr>
-            <p:ph type="ftr" idx="5"/>
+            <p:ph type="ftr" idx="4"/>
           </p:nvPr>
         </p:nvSpPr>
         <p:spPr/>
@@ -3915,14 +3834,14 @@
             <a:spLocks noGrp="1"/>
           </p:cNvSpPr>
           <p:nvPr>
-            <p:ph type="sldNum" idx="6"/>
+            <p:ph type="sldNum" idx="5"/>
           </p:nvPr>
         </p:nvSpPr>
         <p:spPr/>
         <p:txBody>
           <a:bodyPr/>
           <a:p>
-            <a:fld id="{739B0B2A-A3F6-43CD-BCE1-3A505FEFF3D9}" type="slidenum">
+            <a:fld id="{034879EF-621C-46BC-A716-82794F1C06E3}" type="slidenum">
               <a:t>&lt;#&gt;</a:t>
             </a:fld>
           </a:p>
@@ -3935,7 +3854,7 @@
             <a:spLocks noGrp="1"/>
           </p:cNvSpPr>
           <p:nvPr>
-            <p:ph type="dt" idx="4"/>
+            <p:ph type="dt" idx="6"/>
           </p:nvPr>
         </p:nvSpPr>
         <p:spPr/>
@@ -3983,8 +3902,8 @@
         </p:nvSpPr>
         <p:spPr>
           <a:xfrm>
-            <a:off x="609480" y="-47520"/>
-            <a:ext cx="10972440" cy="1142640"/>
+            <a:off x="609480" y="273600"/>
+            <a:ext cx="10972440" cy="1144800"/>
           </a:xfrm>
           <a:prstGeom prst="rect">
             <a:avLst/>
@@ -3999,11 +3918,11 @@
             <a:noAutofit/>
           </a:bodyPr>
           <a:p>
-            <a:endParaRPr b="0" lang="en-US" sz="4400" spc="-1" strike="noStrike">
-              <a:solidFill>
-                <a:srgbClr val="000000"/>
-              </a:solidFill>
-              <a:latin typeface="Calibri"/>
+            <a:pPr algn="ctr">
+              <a:buNone/>
+            </a:pPr>
+            <a:endParaRPr b="0" lang="en-IN" sz="4400" spc="-1" strike="noStrike">
+              <a:latin typeface="Arial"/>
             </a:endParaRPr>
           </a:p>
         </p:txBody>
@@ -4020,8 +3939,8 @@
         </p:nvSpPr>
         <p:spPr>
           <a:xfrm>
-            <a:off x="609480" y="1095480"/>
-            <a:ext cx="5354280" cy="2399400"/>
+            <a:off x="609480" y="1604520"/>
+            <a:ext cx="5354280" cy="1896840"/>
           </a:xfrm>
           <a:prstGeom prst="rect">
             <a:avLst/>
@@ -4036,11 +3955,8 @@
             <a:normAutofit/>
           </a:bodyPr>
           <a:p>
-            <a:endParaRPr b="0" lang="en-US" sz="3200" spc="-1" strike="noStrike">
-              <a:solidFill>
-                <a:srgbClr val="000000"/>
-              </a:solidFill>
-              <a:latin typeface="TradeGothic"/>
+            <a:endParaRPr b="0" lang="en-IN" sz="3200" spc="-1" strike="noStrike">
+              <a:latin typeface="Arial"/>
             </a:endParaRPr>
           </a:p>
         </p:txBody>
@@ -4057,8 +3973,8 @@
         </p:nvSpPr>
         <p:spPr>
           <a:xfrm>
-            <a:off x="6231960" y="1095480"/>
-            <a:ext cx="5354280" cy="2399400"/>
+            <a:off x="6231960" y="1604520"/>
+            <a:ext cx="5354280" cy="1896840"/>
           </a:xfrm>
           <a:prstGeom prst="rect">
             <a:avLst/>
@@ -4073,11 +3989,8 @@
             <a:normAutofit/>
           </a:bodyPr>
           <a:p>
-            <a:endParaRPr b="0" lang="en-US" sz="3200" spc="-1" strike="noStrike">
-              <a:solidFill>
-                <a:srgbClr val="000000"/>
-              </a:solidFill>
-              <a:latin typeface="TradeGothic"/>
+            <a:endParaRPr b="0" lang="en-IN" sz="3200" spc="-1" strike="noStrike">
+              <a:latin typeface="Arial"/>
             </a:endParaRPr>
           </a:p>
         </p:txBody>
@@ -4094,8 +4007,8 @@
         </p:nvSpPr>
         <p:spPr>
           <a:xfrm>
-            <a:off x="609480" y="3723120"/>
-            <a:ext cx="5354280" cy="2399400"/>
+            <a:off x="609480" y="3682080"/>
+            <a:ext cx="5354280" cy="1896840"/>
           </a:xfrm>
           <a:prstGeom prst="rect">
             <a:avLst/>
@@ -4110,11 +4023,8 @@
             <a:normAutofit/>
           </a:bodyPr>
           <a:p>
-            <a:endParaRPr b="0" lang="en-US" sz="3200" spc="-1" strike="noStrike">
-              <a:solidFill>
-                <a:srgbClr val="000000"/>
-              </a:solidFill>
-              <a:latin typeface="TradeGothic"/>
+            <a:endParaRPr b="0" lang="en-IN" sz="3200" spc="-1" strike="noStrike">
+              <a:latin typeface="Arial"/>
             </a:endParaRPr>
           </a:p>
         </p:txBody>
@@ -4131,8 +4041,8 @@
         </p:nvSpPr>
         <p:spPr>
           <a:xfrm>
-            <a:off x="6231960" y="3723120"/>
-            <a:ext cx="5354280" cy="2399400"/>
+            <a:off x="6231960" y="3682080"/>
+            <a:ext cx="5354280" cy="1896840"/>
           </a:xfrm>
           <a:prstGeom prst="rect">
             <a:avLst/>
@@ -4147,11 +4057,8 @@
             <a:normAutofit/>
           </a:bodyPr>
           <a:p>
-            <a:endParaRPr b="0" lang="en-US" sz="3200" spc="-1" strike="noStrike">
-              <a:solidFill>
-                <a:srgbClr val="000000"/>
-              </a:solidFill>
-              <a:latin typeface="TradeGothic"/>
+            <a:endParaRPr b="0" lang="en-IN" sz="3200" spc="-1" strike="noStrike">
+              <a:latin typeface="Arial"/>
             </a:endParaRPr>
           </a:p>
         </p:txBody>
@@ -4163,7 +4070,7 @@
             <a:spLocks noGrp="1"/>
           </p:cNvSpPr>
           <p:nvPr>
-            <p:ph type="ftr" idx="5"/>
+            <p:ph type="ftr" idx="4"/>
           </p:nvPr>
         </p:nvSpPr>
         <p:spPr/>
@@ -4183,14 +4090,14 @@
             <a:spLocks noGrp="1"/>
           </p:cNvSpPr>
           <p:nvPr>
-            <p:ph type="sldNum" idx="6"/>
+            <p:ph type="sldNum" idx="5"/>
           </p:nvPr>
         </p:nvSpPr>
         <p:spPr/>
         <p:txBody>
           <a:bodyPr/>
           <a:p>
-            <a:fld id="{DB9628DA-2883-4937-9C6B-22517797C1D1}" type="slidenum">
+            <a:fld id="{99B8F268-907A-4752-AA29-D611D4940100}" type="slidenum">
               <a:t>&lt;#&gt;</a:t>
             </a:fld>
           </a:p>
@@ -4203,7 +4110,7 @@
             <a:spLocks noGrp="1"/>
           </p:cNvSpPr>
           <p:nvPr>
-            <p:ph type="dt" idx="4"/>
+            <p:ph type="dt" idx="6"/>
           </p:nvPr>
         </p:nvSpPr>
         <p:spPr/>
@@ -4251,8 +4158,8 @@
         </p:nvSpPr>
         <p:spPr>
           <a:xfrm>
-            <a:off x="609480" y="-47520"/>
-            <a:ext cx="10972440" cy="1142640"/>
+            <a:off x="609480" y="273600"/>
+            <a:ext cx="10972440" cy="1144800"/>
           </a:xfrm>
           <a:prstGeom prst="rect">
             <a:avLst/>
@@ -4267,11 +4174,11 @@
             <a:noAutofit/>
           </a:bodyPr>
           <a:p>
-            <a:endParaRPr b="0" lang="en-US" sz="4400" spc="-1" strike="noStrike">
-              <a:solidFill>
-                <a:srgbClr val="000000"/>
-              </a:solidFill>
-              <a:latin typeface="Calibri"/>
+            <a:pPr algn="ctr">
+              <a:buNone/>
+            </a:pPr>
+            <a:endParaRPr b="0" lang="en-IN" sz="4400" spc="-1" strike="noStrike">
+              <a:latin typeface="Arial"/>
             </a:endParaRPr>
           </a:p>
         </p:txBody>
@@ -4288,8 +4195,8 @@
         </p:nvSpPr>
         <p:spPr>
           <a:xfrm>
-            <a:off x="609480" y="1095480"/>
-            <a:ext cx="3533040" cy="2399400"/>
+            <a:off x="609480" y="1604520"/>
+            <a:ext cx="3533040" cy="1896840"/>
           </a:xfrm>
           <a:prstGeom prst="rect">
             <a:avLst/>
@@ -4304,11 +4211,8 @@
             <a:normAutofit/>
           </a:bodyPr>
           <a:p>
-            <a:endParaRPr b="0" lang="en-US" sz="3200" spc="-1" strike="noStrike">
-              <a:solidFill>
-                <a:srgbClr val="000000"/>
-              </a:solidFill>
-              <a:latin typeface="TradeGothic"/>
+            <a:endParaRPr b="0" lang="en-IN" sz="3200" spc="-1" strike="noStrike">
+              <a:latin typeface="Arial"/>
             </a:endParaRPr>
           </a:p>
         </p:txBody>
@@ -4325,8 +4229,8 @@
         </p:nvSpPr>
         <p:spPr>
           <a:xfrm>
-            <a:off x="4319640" y="1095480"/>
-            <a:ext cx="3533040" cy="2399400"/>
+            <a:off x="4319640" y="1604520"/>
+            <a:ext cx="3533040" cy="1896840"/>
           </a:xfrm>
           <a:prstGeom prst="rect">
             <a:avLst/>
@@ -4341,11 +4245,8 @@
             <a:normAutofit/>
           </a:bodyPr>
           <a:p>
-            <a:endParaRPr b="0" lang="en-US" sz="3200" spc="-1" strike="noStrike">
-              <a:solidFill>
-                <a:srgbClr val="000000"/>
-              </a:solidFill>
-              <a:latin typeface="TradeGothic"/>
+            <a:endParaRPr b="0" lang="en-IN" sz="3200" spc="-1" strike="noStrike">
+              <a:latin typeface="Arial"/>
             </a:endParaRPr>
           </a:p>
         </p:txBody>
@@ -4362,8 +4263,8 @@
         </p:nvSpPr>
         <p:spPr>
           <a:xfrm>
-            <a:off x="8029800" y="1095480"/>
-            <a:ext cx="3533040" cy="2399400"/>
+            <a:off x="8029800" y="1604520"/>
+            <a:ext cx="3533040" cy="1896840"/>
           </a:xfrm>
           <a:prstGeom prst="rect">
             <a:avLst/>
@@ -4378,11 +4279,8 @@
             <a:normAutofit/>
           </a:bodyPr>
           <a:p>
-            <a:endParaRPr b="0" lang="en-US" sz="3200" spc="-1" strike="noStrike">
-              <a:solidFill>
-                <a:srgbClr val="000000"/>
-              </a:solidFill>
-              <a:latin typeface="TradeGothic"/>
+            <a:endParaRPr b="0" lang="en-IN" sz="3200" spc="-1" strike="noStrike">
+              <a:latin typeface="Arial"/>
             </a:endParaRPr>
           </a:p>
         </p:txBody>
@@ -4399,8 +4297,8 @@
         </p:nvSpPr>
         <p:spPr>
           <a:xfrm>
-            <a:off x="609480" y="3723120"/>
-            <a:ext cx="3533040" cy="2399400"/>
+            <a:off x="609480" y="3682080"/>
+            <a:ext cx="3533040" cy="1896840"/>
           </a:xfrm>
           <a:prstGeom prst="rect">
             <a:avLst/>
@@ -4415,11 +4313,8 @@
             <a:normAutofit/>
           </a:bodyPr>
           <a:p>
-            <a:endParaRPr b="0" lang="en-US" sz="3200" spc="-1" strike="noStrike">
-              <a:solidFill>
-                <a:srgbClr val="000000"/>
-              </a:solidFill>
-              <a:latin typeface="TradeGothic"/>
+            <a:endParaRPr b="0" lang="en-IN" sz="3200" spc="-1" strike="noStrike">
+              <a:latin typeface="Arial"/>
             </a:endParaRPr>
           </a:p>
         </p:txBody>
@@ -4436,8 +4331,8 @@
         </p:nvSpPr>
         <p:spPr>
           <a:xfrm>
-            <a:off x="4319640" y="3723120"/>
-            <a:ext cx="3533040" cy="2399400"/>
+            <a:off x="4319640" y="3682080"/>
+            <a:ext cx="3533040" cy="1896840"/>
           </a:xfrm>
           <a:prstGeom prst="rect">
             <a:avLst/>
@@ -4452,11 +4347,8 @@
             <a:normAutofit/>
           </a:bodyPr>
           <a:p>
-            <a:endParaRPr b="0" lang="en-US" sz="3200" spc="-1" strike="noStrike">
-              <a:solidFill>
-                <a:srgbClr val="000000"/>
-              </a:solidFill>
-              <a:latin typeface="TradeGothic"/>
+            <a:endParaRPr b="0" lang="en-IN" sz="3200" spc="-1" strike="noStrike">
+              <a:latin typeface="Arial"/>
             </a:endParaRPr>
           </a:p>
         </p:txBody>
@@ -4473,8 +4365,8 @@
         </p:nvSpPr>
         <p:spPr>
           <a:xfrm>
-            <a:off x="8029800" y="3723120"/>
-            <a:ext cx="3533040" cy="2399400"/>
+            <a:off x="8029800" y="3682080"/>
+            <a:ext cx="3533040" cy="1896840"/>
           </a:xfrm>
           <a:prstGeom prst="rect">
             <a:avLst/>
@@ -4489,11 +4381,8 @@
             <a:normAutofit/>
           </a:bodyPr>
           <a:p>
-            <a:endParaRPr b="0" lang="en-US" sz="3200" spc="-1" strike="noStrike">
-              <a:solidFill>
-                <a:srgbClr val="000000"/>
-              </a:solidFill>
-              <a:latin typeface="TradeGothic"/>
+            <a:endParaRPr b="0" lang="en-IN" sz="3200" spc="-1" strike="noStrike">
+              <a:latin typeface="Arial"/>
             </a:endParaRPr>
           </a:p>
         </p:txBody>
@@ -4505,7 +4394,7 @@
             <a:spLocks noGrp="1"/>
           </p:cNvSpPr>
           <p:nvPr>
-            <p:ph type="ftr" idx="5"/>
+            <p:ph type="ftr" idx="4"/>
           </p:nvPr>
         </p:nvSpPr>
         <p:spPr/>
@@ -4525,14 +4414,14 @@
             <a:spLocks noGrp="1"/>
           </p:cNvSpPr>
           <p:nvPr>
-            <p:ph type="sldNum" idx="6"/>
+            <p:ph type="sldNum" idx="5"/>
           </p:nvPr>
         </p:nvSpPr>
         <p:spPr/>
         <p:txBody>
           <a:bodyPr/>
           <a:p>
-            <a:fld id="{B062455C-CB38-4CE4-896E-DC5CCCA0A389}" type="slidenum">
+            <a:fld id="{13911F7E-D669-4CCC-A452-552A3EA5309E}" type="slidenum">
               <a:t>&lt;#&gt;</a:t>
             </a:fld>
           </a:p>
@@ -4545,7 +4434,7 @@
             <a:spLocks noGrp="1"/>
           </p:cNvSpPr>
           <p:nvPr>
-            <p:ph type="dt" idx="4"/>
+            <p:ph type="dt" idx="6"/>
           </p:nvPr>
         </p:nvSpPr>
         <p:spPr/>
@@ -4593,8 +4482,8 @@
         </p:nvSpPr>
         <p:spPr>
           <a:xfrm>
-            <a:off x="609480" y="-47520"/>
-            <a:ext cx="10972440" cy="1142640"/>
+            <a:off x="609480" y="273600"/>
+            <a:ext cx="10972440" cy="1144800"/>
           </a:xfrm>
           <a:prstGeom prst="rect">
             <a:avLst/>
@@ -4609,11 +4498,11 @@
             <a:noAutofit/>
           </a:bodyPr>
           <a:p>
-            <a:endParaRPr b="0" lang="en-US" sz="4400" spc="-1" strike="noStrike">
-              <a:solidFill>
-                <a:srgbClr val="000000"/>
-              </a:solidFill>
-              <a:latin typeface="Calibri"/>
+            <a:pPr algn="ctr">
+              <a:buNone/>
+            </a:pPr>
+            <a:endParaRPr b="0" lang="en-IN" sz="4400" spc="-1" strike="noStrike">
+              <a:latin typeface="Arial"/>
             </a:endParaRPr>
           </a:p>
         </p:txBody>
@@ -4630,8 +4519,8 @@
         </p:nvSpPr>
         <p:spPr>
           <a:xfrm>
-            <a:off x="609480" y="1095480"/>
-            <a:ext cx="10972440" cy="5030280"/>
+            <a:off x="609480" y="1604520"/>
+            <a:ext cx="10972440" cy="3977280"/>
           </a:xfrm>
           <a:prstGeom prst="rect">
             <a:avLst/>
@@ -4646,11 +4535,8 @@
             <a:normAutofit/>
           </a:bodyPr>
           <a:p>
-            <a:endParaRPr b="0" lang="en-US" sz="3200" spc="-1" strike="noStrike">
-              <a:solidFill>
-                <a:srgbClr val="000000"/>
-              </a:solidFill>
-              <a:latin typeface="TradeGothic"/>
+            <a:endParaRPr b="0" lang="en-IN" sz="3200" spc="-1" strike="noStrike">
+              <a:latin typeface="Arial"/>
             </a:endParaRPr>
           </a:p>
         </p:txBody>
@@ -4662,7 +4548,7 @@
             <a:spLocks noGrp="1"/>
           </p:cNvSpPr>
           <p:nvPr>
-            <p:ph type="ftr" idx="2"/>
+            <p:ph type="ftr" idx="1"/>
           </p:nvPr>
         </p:nvSpPr>
         <p:spPr/>
@@ -4682,14 +4568,14 @@
             <a:spLocks noGrp="1"/>
           </p:cNvSpPr>
           <p:nvPr>
-            <p:ph type="sldNum" idx="3"/>
+            <p:ph type="sldNum" idx="2"/>
           </p:nvPr>
         </p:nvSpPr>
         <p:spPr/>
         <p:txBody>
           <a:bodyPr/>
           <a:p>
-            <a:fld id="{68787AD9-6EBD-4756-9B54-8126E58B3F0B}" type="slidenum">
+            <a:fld id="{171712D0-DEE9-4DC6-9712-772048DB594E}" type="slidenum">
               <a:t>&lt;#&gt;</a:t>
             </a:fld>
           </a:p>
@@ -4702,7 +4588,7 @@
             <a:spLocks noGrp="1"/>
           </p:cNvSpPr>
           <p:nvPr>
-            <p:ph type="dt" idx="1"/>
+            <p:ph type="dt" idx="3"/>
           </p:nvPr>
         </p:nvSpPr>
         <p:spPr/>
@@ -4750,8 +4636,8 @@
         </p:nvSpPr>
         <p:spPr>
           <a:xfrm>
-            <a:off x="609480" y="-47520"/>
-            <a:ext cx="10972440" cy="1142640"/>
+            <a:off x="609480" y="273600"/>
+            <a:ext cx="10972440" cy="1144800"/>
           </a:xfrm>
           <a:prstGeom prst="rect">
             <a:avLst/>
@@ -4766,11 +4652,11 @@
             <a:noAutofit/>
           </a:bodyPr>
           <a:p>
-            <a:endParaRPr b="0" lang="en-US" sz="4400" spc="-1" strike="noStrike">
-              <a:solidFill>
-                <a:srgbClr val="000000"/>
-              </a:solidFill>
-              <a:latin typeface="Calibri"/>
+            <a:pPr algn="ctr">
+              <a:buNone/>
+            </a:pPr>
+            <a:endParaRPr b="0" lang="en-IN" sz="4400" spc="-1" strike="noStrike">
+              <a:latin typeface="Arial"/>
             </a:endParaRPr>
           </a:p>
         </p:txBody>
@@ -4787,8 +4673,8 @@
         </p:nvSpPr>
         <p:spPr>
           <a:xfrm>
-            <a:off x="609480" y="1095480"/>
-            <a:ext cx="5354280" cy="5030280"/>
+            <a:off x="609480" y="1604520"/>
+            <a:ext cx="5354280" cy="3977280"/>
           </a:xfrm>
           <a:prstGeom prst="rect">
             <a:avLst/>
@@ -4803,11 +4689,8 @@
             <a:normAutofit/>
           </a:bodyPr>
           <a:p>
-            <a:endParaRPr b="0" lang="en-US" sz="3200" spc="-1" strike="noStrike">
-              <a:solidFill>
-                <a:srgbClr val="000000"/>
-              </a:solidFill>
-              <a:latin typeface="TradeGothic"/>
+            <a:endParaRPr b="0" lang="en-IN" sz="3200" spc="-1" strike="noStrike">
+              <a:latin typeface="Arial"/>
             </a:endParaRPr>
           </a:p>
         </p:txBody>
@@ -4824,8 +4707,8 @@
         </p:nvSpPr>
         <p:spPr>
           <a:xfrm>
-            <a:off x="6231960" y="1095480"/>
-            <a:ext cx="5354280" cy="5030280"/>
+            <a:off x="6231960" y="1604520"/>
+            <a:ext cx="5354280" cy="3977280"/>
           </a:xfrm>
           <a:prstGeom prst="rect">
             <a:avLst/>
@@ -4840,11 +4723,8 @@
             <a:normAutofit/>
           </a:bodyPr>
           <a:p>
-            <a:endParaRPr b="0" lang="en-US" sz="3200" spc="-1" strike="noStrike">
-              <a:solidFill>
-                <a:srgbClr val="000000"/>
-              </a:solidFill>
-              <a:latin typeface="TradeGothic"/>
+            <a:endParaRPr b="0" lang="en-IN" sz="3200" spc="-1" strike="noStrike">
+              <a:latin typeface="Arial"/>
             </a:endParaRPr>
           </a:p>
         </p:txBody>
@@ -4856,7 +4736,7 @@
             <a:spLocks noGrp="1"/>
           </p:cNvSpPr>
           <p:nvPr>
-            <p:ph type="ftr" idx="2"/>
+            <p:ph type="ftr" idx="1"/>
           </p:nvPr>
         </p:nvSpPr>
         <p:spPr/>
@@ -4876,14 +4756,14 @@
             <a:spLocks noGrp="1"/>
           </p:cNvSpPr>
           <p:nvPr>
-            <p:ph type="sldNum" idx="3"/>
+            <p:ph type="sldNum" idx="2"/>
           </p:nvPr>
         </p:nvSpPr>
         <p:spPr/>
         <p:txBody>
           <a:bodyPr/>
           <a:p>
-            <a:fld id="{0F16220A-C720-4438-ACB3-7CDE3C9FD861}" type="slidenum">
+            <a:fld id="{1C688A46-3DCD-4836-BA3C-CA6FB6406E78}" type="slidenum">
               <a:t>&lt;#&gt;</a:t>
             </a:fld>
           </a:p>
@@ -4896,7 +4776,7 @@
             <a:spLocks noGrp="1"/>
           </p:cNvSpPr>
           <p:nvPr>
-            <p:ph type="dt" idx="1"/>
+            <p:ph type="dt" idx="3"/>
           </p:nvPr>
         </p:nvSpPr>
         <p:spPr/>
@@ -4944,8 +4824,8 @@
         </p:nvSpPr>
         <p:spPr>
           <a:xfrm>
-            <a:off x="609480" y="-47520"/>
-            <a:ext cx="10972440" cy="1142640"/>
+            <a:off x="609480" y="273600"/>
+            <a:ext cx="10972440" cy="1144800"/>
           </a:xfrm>
           <a:prstGeom prst="rect">
             <a:avLst/>
@@ -4960,11 +4840,11 @@
             <a:noAutofit/>
           </a:bodyPr>
           <a:p>
-            <a:endParaRPr b="0" lang="en-US" sz="4400" spc="-1" strike="noStrike">
-              <a:solidFill>
-                <a:srgbClr val="000000"/>
-              </a:solidFill>
-              <a:latin typeface="Calibri"/>
+            <a:pPr algn="ctr">
+              <a:buNone/>
+            </a:pPr>
+            <a:endParaRPr b="0" lang="en-IN" sz="4400" spc="-1" strike="noStrike">
+              <a:latin typeface="Arial"/>
             </a:endParaRPr>
           </a:p>
         </p:txBody>
@@ -4976,7 +4856,7 @@
             <a:spLocks noGrp="1"/>
           </p:cNvSpPr>
           <p:nvPr>
-            <p:ph type="ftr" idx="2"/>
+            <p:ph type="ftr" idx="1"/>
           </p:nvPr>
         </p:nvSpPr>
         <p:spPr/>
@@ -4996,14 +4876,14 @@
             <a:spLocks noGrp="1"/>
           </p:cNvSpPr>
           <p:nvPr>
-            <p:ph type="sldNum" idx="3"/>
+            <p:ph type="sldNum" idx="2"/>
           </p:nvPr>
         </p:nvSpPr>
         <p:spPr/>
         <p:txBody>
           <a:bodyPr/>
           <a:p>
-            <a:fld id="{7EA632DE-3F16-488B-9F41-BE9EE911F21F}" type="slidenum">
+            <a:fld id="{AC9E3D16-EA35-42F4-B224-7AE590AB8BCE}" type="slidenum">
               <a:t>&lt;#&gt;</a:t>
             </a:fld>
           </a:p>
@@ -5016,7 +4896,7 @@
             <a:spLocks noGrp="1"/>
           </p:cNvSpPr>
           <p:nvPr>
-            <p:ph type="dt" idx="1"/>
+            <p:ph type="dt" idx="3"/>
           </p:nvPr>
         </p:nvSpPr>
         <p:spPr/>
@@ -5064,8 +4944,8 @@
         </p:nvSpPr>
         <p:spPr>
           <a:xfrm>
-            <a:off x="609480" y="-47520"/>
-            <a:ext cx="10972440" cy="5297760"/>
+            <a:off x="609480" y="273600"/>
+            <a:ext cx="10972440" cy="5307840"/>
           </a:xfrm>
           <a:prstGeom prst="rect">
             <a:avLst/>
@@ -5096,7 +4976,7 @@
             <a:spLocks noGrp="1"/>
           </p:cNvSpPr>
           <p:nvPr>
-            <p:ph type="ftr" idx="2"/>
+            <p:ph type="ftr" idx="1"/>
           </p:nvPr>
         </p:nvSpPr>
         <p:spPr/>
@@ -5116,14 +4996,14 @@
             <a:spLocks noGrp="1"/>
           </p:cNvSpPr>
           <p:nvPr>
-            <p:ph type="sldNum" idx="3"/>
+            <p:ph type="sldNum" idx="2"/>
           </p:nvPr>
         </p:nvSpPr>
         <p:spPr/>
         <p:txBody>
           <a:bodyPr/>
           <a:p>
-            <a:fld id="{42C4DB8E-5181-4FFB-808E-CE3702C1B818}" type="slidenum">
+            <a:fld id="{60A94C22-1398-4E50-A6F7-D9A1512ACE0E}" type="slidenum">
               <a:t>&lt;#&gt;</a:t>
             </a:fld>
           </a:p>
@@ -5136,7 +5016,7 @@
             <a:spLocks noGrp="1"/>
           </p:cNvSpPr>
           <p:nvPr>
-            <p:ph type="dt" idx="1"/>
+            <p:ph type="dt" idx="3"/>
           </p:nvPr>
         </p:nvSpPr>
         <p:spPr/>
@@ -5184,8 +5064,8 @@
         </p:nvSpPr>
         <p:spPr>
           <a:xfrm>
-            <a:off x="609480" y="-47520"/>
-            <a:ext cx="10972440" cy="1142640"/>
+            <a:off x="609480" y="273600"/>
+            <a:ext cx="10972440" cy="1144800"/>
           </a:xfrm>
           <a:prstGeom prst="rect">
             <a:avLst/>
@@ -5200,11 +5080,11 @@
             <a:noAutofit/>
           </a:bodyPr>
           <a:p>
-            <a:endParaRPr b="0" lang="en-US" sz="4400" spc="-1" strike="noStrike">
-              <a:solidFill>
-                <a:srgbClr val="000000"/>
-              </a:solidFill>
-              <a:latin typeface="Calibri"/>
+            <a:pPr algn="ctr">
+              <a:buNone/>
+            </a:pPr>
+            <a:endParaRPr b="0" lang="en-IN" sz="4400" spc="-1" strike="noStrike">
+              <a:latin typeface="Arial"/>
             </a:endParaRPr>
           </a:p>
         </p:txBody>
@@ -5221,8 +5101,8 @@
         </p:nvSpPr>
         <p:spPr>
           <a:xfrm>
-            <a:off x="609480" y="1095480"/>
-            <a:ext cx="5354280" cy="2399400"/>
+            <a:off x="609480" y="1604520"/>
+            <a:ext cx="5354280" cy="1896840"/>
           </a:xfrm>
           <a:prstGeom prst="rect">
             <a:avLst/>
@@ -5237,11 +5117,8 @@
             <a:normAutofit/>
           </a:bodyPr>
           <a:p>
-            <a:endParaRPr b="0" lang="en-US" sz="3200" spc="-1" strike="noStrike">
-              <a:solidFill>
-                <a:srgbClr val="000000"/>
-              </a:solidFill>
-              <a:latin typeface="TradeGothic"/>
+            <a:endParaRPr b="0" lang="en-IN" sz="3200" spc="-1" strike="noStrike">
+              <a:latin typeface="Arial"/>
             </a:endParaRPr>
           </a:p>
         </p:txBody>
@@ -5258,8 +5135,8 @@
         </p:nvSpPr>
         <p:spPr>
           <a:xfrm>
-            <a:off x="6231960" y="1095480"/>
-            <a:ext cx="5354280" cy="5030280"/>
+            <a:off x="6231960" y="1604520"/>
+            <a:ext cx="5354280" cy="3977280"/>
           </a:xfrm>
           <a:prstGeom prst="rect">
             <a:avLst/>
@@ -5274,11 +5151,8 @@
             <a:normAutofit/>
           </a:bodyPr>
           <a:p>
-            <a:endParaRPr b="0" lang="en-US" sz="3200" spc="-1" strike="noStrike">
-              <a:solidFill>
-                <a:srgbClr val="000000"/>
-              </a:solidFill>
-              <a:latin typeface="TradeGothic"/>
+            <a:endParaRPr b="0" lang="en-IN" sz="3200" spc="-1" strike="noStrike">
+              <a:latin typeface="Arial"/>
             </a:endParaRPr>
           </a:p>
         </p:txBody>
@@ -5295,8 +5169,8 @@
         </p:nvSpPr>
         <p:spPr>
           <a:xfrm>
-            <a:off x="609480" y="3723120"/>
-            <a:ext cx="5354280" cy="2399400"/>
+            <a:off x="609480" y="3682080"/>
+            <a:ext cx="5354280" cy="1896840"/>
           </a:xfrm>
           <a:prstGeom prst="rect">
             <a:avLst/>
@@ -5311,11 +5185,8 @@
             <a:normAutofit/>
           </a:bodyPr>
           <a:p>
-            <a:endParaRPr b="0" lang="en-US" sz="3200" spc="-1" strike="noStrike">
-              <a:solidFill>
-                <a:srgbClr val="000000"/>
-              </a:solidFill>
-              <a:latin typeface="TradeGothic"/>
+            <a:endParaRPr b="0" lang="en-IN" sz="3200" spc="-1" strike="noStrike">
+              <a:latin typeface="Arial"/>
             </a:endParaRPr>
           </a:p>
         </p:txBody>
@@ -5327,7 +5198,7 @@
             <a:spLocks noGrp="1"/>
           </p:cNvSpPr>
           <p:nvPr>
-            <p:ph type="ftr" idx="2"/>
+            <p:ph type="ftr" idx="1"/>
           </p:nvPr>
         </p:nvSpPr>
         <p:spPr/>
@@ -5347,14 +5218,14 @@
             <a:spLocks noGrp="1"/>
           </p:cNvSpPr>
           <p:nvPr>
-            <p:ph type="sldNum" idx="3"/>
+            <p:ph type="sldNum" idx="2"/>
           </p:nvPr>
         </p:nvSpPr>
         <p:spPr/>
         <p:txBody>
           <a:bodyPr/>
           <a:p>
-            <a:fld id="{C849D6D7-AA58-4399-99B3-EAAF22BF7E9D}" type="slidenum">
+            <a:fld id="{E8E8D7B0-6DF2-4131-BB4D-DA3E227741BF}" type="slidenum">
               <a:t>&lt;#&gt;</a:t>
             </a:fld>
           </a:p>
@@ -5367,7 +5238,7 @@
             <a:spLocks noGrp="1"/>
           </p:cNvSpPr>
           <p:nvPr>
-            <p:ph type="dt" idx="1"/>
+            <p:ph type="dt" idx="3"/>
           </p:nvPr>
         </p:nvSpPr>
         <p:spPr/>
@@ -5415,8 +5286,8 @@
         </p:nvSpPr>
         <p:spPr>
           <a:xfrm>
-            <a:off x="609480" y="-47520"/>
-            <a:ext cx="10972440" cy="1142640"/>
+            <a:off x="609480" y="273600"/>
+            <a:ext cx="10972440" cy="1144800"/>
           </a:xfrm>
           <a:prstGeom prst="rect">
             <a:avLst/>
@@ -5431,11 +5302,11 @@
             <a:noAutofit/>
           </a:bodyPr>
           <a:p>
-            <a:endParaRPr b="0" lang="en-US" sz="4400" spc="-1" strike="noStrike">
-              <a:solidFill>
-                <a:srgbClr val="000000"/>
-              </a:solidFill>
-              <a:latin typeface="Calibri"/>
+            <a:pPr algn="ctr">
+              <a:buNone/>
+            </a:pPr>
+            <a:endParaRPr b="0" lang="en-IN" sz="4400" spc="-1" strike="noStrike">
+              <a:latin typeface="Arial"/>
             </a:endParaRPr>
           </a:p>
         </p:txBody>
@@ -5452,8 +5323,8 @@
         </p:nvSpPr>
         <p:spPr>
           <a:xfrm>
-            <a:off x="609480" y="1095480"/>
-            <a:ext cx="5354280" cy="5030280"/>
+            <a:off x="609480" y="1604520"/>
+            <a:ext cx="5354280" cy="3977280"/>
           </a:xfrm>
           <a:prstGeom prst="rect">
             <a:avLst/>
@@ -5468,11 +5339,8 @@
             <a:normAutofit/>
           </a:bodyPr>
           <a:p>
-            <a:endParaRPr b="0" lang="en-US" sz="3200" spc="-1" strike="noStrike">
-              <a:solidFill>
-                <a:srgbClr val="000000"/>
-              </a:solidFill>
-              <a:latin typeface="TradeGothic"/>
+            <a:endParaRPr b="0" lang="en-IN" sz="3200" spc="-1" strike="noStrike">
+              <a:latin typeface="Arial"/>
             </a:endParaRPr>
           </a:p>
         </p:txBody>
@@ -5489,8 +5357,8 @@
         </p:nvSpPr>
         <p:spPr>
           <a:xfrm>
-            <a:off x="6231960" y="1095480"/>
-            <a:ext cx="5354280" cy="2399400"/>
+            <a:off x="6231960" y="1604520"/>
+            <a:ext cx="5354280" cy="1896840"/>
           </a:xfrm>
           <a:prstGeom prst="rect">
             <a:avLst/>
@@ -5505,11 +5373,8 @@
             <a:normAutofit/>
           </a:bodyPr>
           <a:p>
-            <a:endParaRPr b="0" lang="en-US" sz="3200" spc="-1" strike="noStrike">
-              <a:solidFill>
-                <a:srgbClr val="000000"/>
-              </a:solidFill>
-              <a:latin typeface="TradeGothic"/>
+            <a:endParaRPr b="0" lang="en-IN" sz="3200" spc="-1" strike="noStrike">
+              <a:latin typeface="Arial"/>
             </a:endParaRPr>
           </a:p>
         </p:txBody>
@@ -5526,8 +5391,8 @@
         </p:nvSpPr>
         <p:spPr>
           <a:xfrm>
-            <a:off x="6231960" y="3723120"/>
-            <a:ext cx="5354280" cy="2399400"/>
+            <a:off x="6231960" y="3682080"/>
+            <a:ext cx="5354280" cy="1896840"/>
           </a:xfrm>
           <a:prstGeom prst="rect">
             <a:avLst/>
@@ -5542,11 +5407,8 @@
             <a:normAutofit/>
           </a:bodyPr>
           <a:p>
-            <a:endParaRPr b="0" lang="en-US" sz="3200" spc="-1" strike="noStrike">
-              <a:solidFill>
-                <a:srgbClr val="000000"/>
-              </a:solidFill>
-              <a:latin typeface="TradeGothic"/>
+            <a:endParaRPr b="0" lang="en-IN" sz="3200" spc="-1" strike="noStrike">
+              <a:latin typeface="Arial"/>
             </a:endParaRPr>
           </a:p>
         </p:txBody>
@@ -5558,7 +5420,7 @@
             <a:spLocks noGrp="1"/>
           </p:cNvSpPr>
           <p:nvPr>
-            <p:ph type="ftr" idx="2"/>
+            <p:ph type="ftr" idx="1"/>
           </p:nvPr>
         </p:nvSpPr>
         <p:spPr/>
@@ -5578,14 +5440,14 @@
             <a:spLocks noGrp="1"/>
           </p:cNvSpPr>
           <p:nvPr>
-            <p:ph type="sldNum" idx="3"/>
+            <p:ph type="sldNum" idx="2"/>
           </p:nvPr>
         </p:nvSpPr>
         <p:spPr/>
         <p:txBody>
           <a:bodyPr/>
           <a:p>
-            <a:fld id="{CA68FD7B-E07E-4E70-9D66-44A01352B036}" type="slidenum">
+            <a:fld id="{2028CDAE-65B0-49FD-950A-E46AB06B6702}" type="slidenum">
               <a:t>&lt;#&gt;</a:t>
             </a:fld>
           </a:p>
@@ -5598,7 +5460,7 @@
             <a:spLocks noGrp="1"/>
           </p:cNvSpPr>
           <p:nvPr>
-            <p:ph type="dt" idx="1"/>
+            <p:ph type="dt" idx="3"/>
           </p:nvPr>
         </p:nvSpPr>
         <p:spPr/>
@@ -5646,8 +5508,8 @@
         </p:nvSpPr>
         <p:spPr>
           <a:xfrm>
-            <a:off x="609480" y="-47520"/>
-            <a:ext cx="10972440" cy="1142640"/>
+            <a:off x="609480" y="273600"/>
+            <a:ext cx="10972440" cy="1144800"/>
           </a:xfrm>
           <a:prstGeom prst="rect">
             <a:avLst/>
@@ -5662,11 +5524,11 @@
             <a:noAutofit/>
           </a:bodyPr>
           <a:p>
-            <a:endParaRPr b="0" lang="en-US" sz="4400" spc="-1" strike="noStrike">
-              <a:solidFill>
-                <a:srgbClr val="000000"/>
-              </a:solidFill>
-              <a:latin typeface="Calibri"/>
+            <a:pPr algn="ctr">
+              <a:buNone/>
+            </a:pPr>
+            <a:endParaRPr b="0" lang="en-IN" sz="4400" spc="-1" strike="noStrike">
+              <a:latin typeface="Arial"/>
             </a:endParaRPr>
           </a:p>
         </p:txBody>
@@ -5683,8 +5545,8 @@
         </p:nvSpPr>
         <p:spPr>
           <a:xfrm>
-            <a:off x="609480" y="1095480"/>
-            <a:ext cx="5354280" cy="2399400"/>
+            <a:off x="609480" y="1604520"/>
+            <a:ext cx="5354280" cy="1896840"/>
           </a:xfrm>
           <a:prstGeom prst="rect">
             <a:avLst/>
@@ -5699,11 +5561,8 @@
             <a:normAutofit/>
           </a:bodyPr>
           <a:p>
-            <a:endParaRPr b="0" lang="en-US" sz="3200" spc="-1" strike="noStrike">
-              <a:solidFill>
-                <a:srgbClr val="000000"/>
-              </a:solidFill>
-              <a:latin typeface="TradeGothic"/>
+            <a:endParaRPr b="0" lang="en-IN" sz="3200" spc="-1" strike="noStrike">
+              <a:latin typeface="Arial"/>
             </a:endParaRPr>
           </a:p>
         </p:txBody>
@@ -5720,8 +5579,8 @@
         </p:nvSpPr>
         <p:spPr>
           <a:xfrm>
-            <a:off x="6231960" y="1095480"/>
-            <a:ext cx="5354280" cy="2399400"/>
+            <a:off x="6231960" y="1604520"/>
+            <a:ext cx="5354280" cy="1896840"/>
           </a:xfrm>
           <a:prstGeom prst="rect">
             <a:avLst/>
@@ -5736,11 +5595,8 @@
             <a:normAutofit/>
           </a:bodyPr>
           <a:p>
-            <a:endParaRPr b="0" lang="en-US" sz="3200" spc="-1" strike="noStrike">
-              <a:solidFill>
-                <a:srgbClr val="000000"/>
-              </a:solidFill>
-              <a:latin typeface="TradeGothic"/>
+            <a:endParaRPr b="0" lang="en-IN" sz="3200" spc="-1" strike="noStrike">
+              <a:latin typeface="Arial"/>
             </a:endParaRPr>
           </a:p>
         </p:txBody>
@@ -5757,8 +5613,8 @@
         </p:nvSpPr>
         <p:spPr>
           <a:xfrm>
-            <a:off x="609480" y="3723120"/>
-            <a:ext cx="10972440" cy="2399400"/>
+            <a:off x="609480" y="3682080"/>
+            <a:ext cx="10972440" cy="1896840"/>
           </a:xfrm>
           <a:prstGeom prst="rect">
             <a:avLst/>
@@ -5773,11 +5629,8 @@
             <a:normAutofit/>
           </a:bodyPr>
           <a:p>
-            <a:endParaRPr b="0" lang="en-US" sz="3200" spc="-1" strike="noStrike">
-              <a:solidFill>
-                <a:srgbClr val="000000"/>
-              </a:solidFill>
-              <a:latin typeface="TradeGothic"/>
+            <a:endParaRPr b="0" lang="en-IN" sz="3200" spc="-1" strike="noStrike">
+              <a:latin typeface="Arial"/>
             </a:endParaRPr>
           </a:p>
         </p:txBody>
@@ -5789,7 +5642,7 @@
             <a:spLocks noGrp="1"/>
           </p:cNvSpPr>
           <p:nvPr>
-            <p:ph type="ftr" idx="2"/>
+            <p:ph type="ftr" idx="1"/>
           </p:nvPr>
         </p:nvSpPr>
         <p:spPr/>
@@ -5809,14 +5662,14 @@
             <a:spLocks noGrp="1"/>
           </p:cNvSpPr>
           <p:nvPr>
-            <p:ph type="sldNum" idx="3"/>
+            <p:ph type="sldNum" idx="2"/>
           </p:nvPr>
         </p:nvSpPr>
         <p:spPr/>
         <p:txBody>
           <a:bodyPr/>
           <a:p>
-            <a:fld id="{893F9722-C77F-4691-B409-3BA367D25FAA}" type="slidenum">
+            <a:fld id="{5A7865F5-3CB2-4AFF-ABFF-B9D14F74C928}" type="slidenum">
               <a:t>&lt;#&gt;</a:t>
             </a:fld>
           </a:p>
@@ -5829,7 +5682,7 @@
             <a:spLocks noGrp="1"/>
           </p:cNvSpPr>
           <p:nvPr>
-            <p:ph type="dt" idx="1"/>
+            <p:ph type="dt" idx="3"/>
           </p:nvPr>
         </p:nvSpPr>
         <p:spPr/>
@@ -5884,43 +5737,30 @@
         </p:nvSpPr>
         <p:spPr>
           <a:xfrm>
-            <a:off x="914400" y="2130480"/>
-            <a:ext cx="10362960" cy="1469520"/>
-          </a:xfrm>
-          <a:prstGeom prst="rect">
-            <a:avLst/>
-          </a:prstGeom>
-          <a:noFill/>
-          <a:ln w="9360">
-            <a:noFill/>
-          </a:ln>
-        </p:spPr>
-        <p:txBody>
-          <a:bodyPr numCol="1" spcCol="0" anchor="ctr">
+            <a:off x="609480" y="-47520"/>
+            <a:ext cx="10972080" cy="1142280"/>
+          </a:xfrm>
+          <a:prstGeom prst="rect">
+            <a:avLst/>
+          </a:prstGeom>
+          <a:noFill/>
+          <a:ln w="0">
+            <a:noFill/>
+          </a:ln>
+        </p:spPr>
+        <p:txBody>
+          <a:bodyPr numCol="1" spcCol="0" lIns="0" rIns="0" tIns="0" bIns="0" anchor="ctr">
             <a:noAutofit/>
           </a:bodyPr>
           <a:p>
-            <a:pPr algn="ctr">
-              <a:lnSpc>
-                <a:spcPct val="100000"/>
-              </a:lnSpc>
-              <a:buNone/>
-            </a:pPr>
-            <a:r>
-              <a:rPr b="0" lang="en-US" sz="4400" spc="-1" strike="noStrike">
-                <a:solidFill>
-                  <a:srgbClr val="000000"/>
-                </a:solidFill>
-                <a:latin typeface="TradeGothic"/>
-                <a:ea typeface="ＭＳ Ｐゴシック"/>
+            <a:r>
+              <a:rPr b="0" lang="en-IN" sz="1800" spc="-1" strike="noStrike">
+                <a:latin typeface="Arial"/>
               </a:rPr>
-              <a:t>Click to edit Master title style</a:t>
-            </a:r>
-            <a:endParaRPr b="0" lang="en-US" sz="4400" spc="-1" strike="noStrike">
-              <a:solidFill>
-                <a:srgbClr val="000000"/>
-              </a:solidFill>
-              <a:latin typeface="Calibri"/>
+              <a:t>Click to edit the title text format</a:t>
+            </a:r>
+            <a:endParaRPr b="0" lang="en-IN" sz="1800" spc="-1" strike="noStrike">
+              <a:latin typeface="Arial"/>
             </a:endParaRPr>
           </a:p>
         </p:txBody>
@@ -5932,89 +5772,24 @@
             <a:spLocks noGrp="1"/>
           </p:cNvSpPr>
           <p:nvPr>
-            <p:ph type="dt" idx="1"/>
-          </p:nvPr>
-        </p:nvSpPr>
-        <p:spPr>
-          <a:xfrm>
-            <a:off x="609480" y="6356520"/>
-            <a:ext cx="2844360" cy="364680"/>
-          </a:xfrm>
-          <a:prstGeom prst="rect">
-            <a:avLst/>
-          </a:prstGeom>
-          <a:noFill/>
-          <a:ln w="0">
-            <a:noFill/>
-          </a:ln>
-        </p:spPr>
-        <p:txBody>
-          <a:bodyPr numCol="1" spcCol="0" anchor="ctr">
-            <a:noAutofit/>
-          </a:bodyPr>
-          <a:lstStyle>
-            <a:lvl1pPr>
-              <a:lnSpc>
-                <a:spcPct val="100000"/>
-              </a:lnSpc>
-              <a:buNone/>
-              <a:defRPr b="0" lang="en-US" sz="1200" spc="-1" strike="noStrike">
-                <a:solidFill>
-                  <a:srgbClr val="898989"/>
-                </a:solidFill>
-                <a:latin typeface="TradeGothic"/>
-                <a:ea typeface="ＭＳ Ｐゴシック"/>
-              </a:defRPr>
-            </a:lvl1pPr>
-          </a:lstStyle>
-          <a:p>
-            <a:pPr>
-              <a:lnSpc>
-                <a:spcPct val="100000"/>
-              </a:lnSpc>
-              <a:buNone/>
-            </a:pPr>
-            <a:r>
-              <a:rPr b="0" lang="en-US" sz="1200" spc="-1" strike="noStrike">
-                <a:solidFill>
-                  <a:srgbClr val="898989"/>
-                </a:solidFill>
-                <a:latin typeface="TradeGothic"/>
-                <a:ea typeface="ＭＳ Ｐゴシック"/>
-              </a:rPr>
-              <a:t>&lt;date/time&gt;</a:t>
-            </a:r>
-            <a:endParaRPr b="0" lang="en-IN" sz="1200" spc="-1" strike="noStrike">
-              <a:latin typeface="Times New Roman"/>
-            </a:endParaRPr>
-          </a:p>
-        </p:txBody>
-      </p:sp>
-      <p:sp>
-        <p:nvSpPr>
-          <p:cNvPr id="2" name="PlaceHolder 3"/>
-          <p:cNvSpPr>
-            <a:spLocks noGrp="1"/>
-          </p:cNvSpPr>
-          <p:nvPr>
-            <p:ph type="ftr" idx="2"/>
+            <p:ph type="ftr" idx="1"/>
           </p:nvPr>
         </p:nvSpPr>
         <p:spPr>
           <a:xfrm>
             <a:off x="4165560" y="6356520"/>
-            <a:ext cx="3860280" cy="364680"/>
-          </a:xfrm>
-          <a:prstGeom prst="rect">
-            <a:avLst/>
-          </a:prstGeom>
-          <a:noFill/>
-          <a:ln w="0">
-            <a:noFill/>
-          </a:ln>
-        </p:spPr>
-        <p:txBody>
-          <a:bodyPr anchor="ctr">
+            <a:ext cx="3859920" cy="364320"/>
+          </a:xfrm>
+          <a:prstGeom prst="rect">
+            <a:avLst/>
+          </a:prstGeom>
+          <a:noFill/>
+          <a:ln w="0">
+            <a:noFill/>
+          </a:ln>
+        </p:spPr>
+        <p:txBody>
+          <a:bodyPr lIns="90000" rIns="90000" tIns="45000" bIns="45000" anchor="ctr">
             <a:noAutofit/>
           </a:bodyPr>
           <a:lstStyle>
@@ -6045,7 +5820,7 @@
                 </a:solidFill>
                 <a:latin typeface="TradeGothic"/>
               </a:rPr>
-              <a:t>&lt;footer&gt;</a:t>
+              <a:t> </a:t>
             </a:r>
             <a:endParaRPr b="0" lang="en-IN" sz="1200" spc="-1" strike="noStrike">
               <a:latin typeface="Times New Roman"/>
@@ -6055,29 +5830,29 @@
       </p:sp>
       <p:sp>
         <p:nvSpPr>
-          <p:cNvPr id="3" name="PlaceHolder 4"/>
-          <p:cNvSpPr>
-            <a:spLocks noGrp="1"/>
-          </p:cNvSpPr>
-          <p:nvPr>
-            <p:ph type="sldNum" idx="3"/>
+          <p:cNvPr id="2" name="PlaceHolder 3"/>
+          <p:cNvSpPr>
+            <a:spLocks noGrp="1"/>
+          </p:cNvSpPr>
+          <p:nvPr>
+            <p:ph type="sldNum" idx="2"/>
           </p:nvPr>
         </p:nvSpPr>
         <p:spPr>
           <a:xfrm>
             <a:off x="8737560" y="6356520"/>
-            <a:ext cx="2844360" cy="364680"/>
-          </a:xfrm>
-          <a:prstGeom prst="rect">
-            <a:avLst/>
-          </a:prstGeom>
-          <a:noFill/>
-          <a:ln w="0">
-            <a:noFill/>
-          </a:ln>
-        </p:spPr>
-        <p:txBody>
-          <a:bodyPr numCol="1" spcCol="0" anchor="ctr">
+            <a:ext cx="2844000" cy="364320"/>
+          </a:xfrm>
+          <a:prstGeom prst="rect">
+            <a:avLst/>
+          </a:prstGeom>
+          <a:noFill/>
+          <a:ln w="0">
+            <a:noFill/>
+          </a:ln>
+        </p:spPr>
+        <p:txBody>
+          <a:bodyPr numCol="1" spcCol="0" lIns="90000" rIns="90000" tIns="45000" bIns="45000" anchor="ctr">
             <a:noAutofit/>
           </a:bodyPr>
           <a:lstStyle>
@@ -6102,7 +5877,7 @@
               </a:lnSpc>
               <a:buNone/>
             </a:pPr>
-            <a:fld id="{7069CF47-5B22-43EF-8F3D-6519CDE3A339}" type="slidenum">
+            <a:fld id="{686C2D6F-984F-4F71-86CD-46E941E2763F}" type="slidenum">
               <a:rPr b="0" lang="en-US" sz="1200" spc="-1" strike="noStrike">
                 <a:solidFill>
                   <a:srgbClr val="898989"/>
@@ -6110,9 +5885,56 @@
                 <a:latin typeface="TradeGothic"/>
                 <a:ea typeface="ＭＳ Ｐゴシック"/>
               </a:rPr>
-              <a:t>&lt;number&gt;</a:t>
+              <a:t>1</a:t>
             </a:fld>
             <a:endParaRPr b="0" lang="en-IN" sz="1200" spc="-1" strike="noStrike">
+              <a:latin typeface="Times New Roman"/>
+            </a:endParaRPr>
+          </a:p>
+        </p:txBody>
+      </p:sp>
+      <p:sp>
+        <p:nvSpPr>
+          <p:cNvPr id="3" name="PlaceHolder 4"/>
+          <p:cNvSpPr>
+            <a:spLocks noGrp="1"/>
+          </p:cNvSpPr>
+          <p:nvPr>
+            <p:ph type="dt" idx="3"/>
+          </p:nvPr>
+        </p:nvSpPr>
+        <p:spPr>
+          <a:xfrm>
+            <a:off x="609480" y="6356520"/>
+            <a:ext cx="2844000" cy="364320"/>
+          </a:xfrm>
+          <a:prstGeom prst="rect">
+            <a:avLst/>
+          </a:prstGeom>
+          <a:noFill/>
+          <a:ln w="0">
+            <a:noFill/>
+          </a:ln>
+        </p:spPr>
+        <p:txBody>
+          <a:bodyPr numCol="1" spcCol="0" lIns="90000" rIns="90000" tIns="45000" bIns="45000" anchor="ctr">
+            <a:noAutofit/>
+          </a:bodyPr>
+          <a:lstStyle>
+            <a:lvl1pPr>
+              <a:defRPr b="0" lang="en-IN" sz="1400" spc="-1" strike="noStrike">
+                <a:latin typeface="Times New Roman"/>
+              </a:defRPr>
+            </a:lvl1pPr>
+          </a:lstStyle>
+          <a:p>
+            <a:r>
+              <a:rPr b="0" lang="en-IN" sz="1400" spc="-1" strike="noStrike">
+                <a:latin typeface="Times New Roman"/>
+              </a:rPr>
+              <a:t> </a:t>
+            </a:r>
+            <a:endParaRPr b="0" lang="en-IN" sz="1400" spc="-1" strike="noStrike">
               <a:latin typeface="Times New Roman"/>
             </a:endParaRPr>
           </a:p>
@@ -6158,19 +5980,13 @@
               <a:buChar char=""/>
             </a:pPr>
             <a:r>
-              <a:rPr b="0" lang="en-US" sz="3200" spc="-1" strike="noStrike">
-                <a:solidFill>
-                  <a:srgbClr val="000000"/>
-                </a:solidFill>
-                <a:latin typeface="TradeGothic"/>
+              <a:rPr b="0" lang="en-IN" sz="3200" spc="-1" strike="noStrike">
+                <a:latin typeface="Arial"/>
               </a:rPr>
               <a:t>Click to edit the outline text format</a:t>
             </a:r>
-            <a:endParaRPr b="0" lang="en-US" sz="3200" spc="-1" strike="noStrike">
-              <a:solidFill>
-                <a:srgbClr val="000000"/>
-              </a:solidFill>
-              <a:latin typeface="TradeGothic"/>
+            <a:endParaRPr b="0" lang="en-IN" sz="3200" spc="-1" strike="noStrike">
+              <a:latin typeface="Arial"/>
             </a:endParaRPr>
           </a:p>
           <a:p>
@@ -6186,19 +6002,13 @@
               <a:buChar char=""/>
             </a:pPr>
             <a:r>
-              <a:rPr b="0" lang="en-US" sz="2400" spc="-1" strike="noStrike">
-                <a:solidFill>
-                  <a:srgbClr val="000000"/>
-                </a:solidFill>
-                <a:latin typeface="TradeGothic"/>
+              <a:rPr b="0" lang="en-IN" sz="2800" spc="-1" strike="noStrike">
+                <a:latin typeface="Arial"/>
               </a:rPr>
               <a:t>Second Outline Level</a:t>
             </a:r>
-            <a:endParaRPr b="0" lang="en-US" sz="2400" spc="-1" strike="noStrike">
-              <a:solidFill>
-                <a:srgbClr val="000000"/>
-              </a:solidFill>
-              <a:latin typeface="TradeGothic"/>
+            <a:endParaRPr b="0" lang="en-IN" sz="2800" spc="-1" strike="noStrike">
+              <a:latin typeface="Arial"/>
             </a:endParaRPr>
           </a:p>
           <a:p>
@@ -6214,19 +6024,13 @@
               <a:buChar char=""/>
             </a:pPr>
             <a:r>
-              <a:rPr b="0" lang="en-US" sz="2000" spc="-1" strike="noStrike">
-                <a:solidFill>
-                  <a:srgbClr val="000000"/>
-                </a:solidFill>
-                <a:latin typeface="TradeGothic"/>
+              <a:rPr b="0" lang="en-IN" sz="2400" spc="-1" strike="noStrike">
+                <a:latin typeface="Arial"/>
               </a:rPr>
               <a:t>Third Outline Level</a:t>
             </a:r>
-            <a:endParaRPr b="0" lang="en-US" sz="2000" spc="-1" strike="noStrike">
-              <a:solidFill>
-                <a:srgbClr val="000000"/>
-              </a:solidFill>
-              <a:latin typeface="TradeGothic"/>
+            <a:endParaRPr b="0" lang="en-IN" sz="2400" spc="-1" strike="noStrike">
+              <a:latin typeface="Arial"/>
             </a:endParaRPr>
           </a:p>
           <a:p>
@@ -6242,19 +6046,13 @@
               <a:buChar char=""/>
             </a:pPr>
             <a:r>
-              <a:rPr b="0" lang="en-US" sz="2000" spc="-1" strike="noStrike">
-                <a:solidFill>
-                  <a:srgbClr val="000000"/>
-                </a:solidFill>
-                <a:latin typeface="TradeGothic"/>
+              <a:rPr b="0" lang="en-IN" sz="2000" spc="-1" strike="noStrike">
+                <a:latin typeface="Arial"/>
               </a:rPr>
               <a:t>Fourth Outline Level</a:t>
             </a:r>
-            <a:endParaRPr b="0" lang="en-US" sz="2000" spc="-1" strike="noStrike">
-              <a:solidFill>
-                <a:srgbClr val="000000"/>
-              </a:solidFill>
-              <a:latin typeface="TradeGothic"/>
+            <a:endParaRPr b="0" lang="en-IN" sz="2000" spc="-1" strike="noStrike">
+              <a:latin typeface="Arial"/>
             </a:endParaRPr>
           </a:p>
           <a:p>
@@ -6270,19 +6068,13 @@
               <a:buChar char=""/>
             </a:pPr>
             <a:r>
-              <a:rPr b="0" lang="en-US" sz="2000" spc="-1" strike="noStrike">
-                <a:solidFill>
-                  <a:srgbClr val="000000"/>
-                </a:solidFill>
-                <a:latin typeface="TradeGothic"/>
+              <a:rPr b="0" lang="en-IN" sz="2000" spc="-1" strike="noStrike">
+                <a:latin typeface="Arial"/>
               </a:rPr>
               <a:t>Fifth Outline Level</a:t>
             </a:r>
-            <a:endParaRPr b="0" lang="en-US" sz="2000" spc="-1" strike="noStrike">
-              <a:solidFill>
-                <a:srgbClr val="000000"/>
-              </a:solidFill>
-              <a:latin typeface="TradeGothic"/>
+            <a:endParaRPr b="0" lang="en-IN" sz="2000" spc="-1" strike="noStrike">
+              <a:latin typeface="Arial"/>
             </a:endParaRPr>
           </a:p>
           <a:p>
@@ -6298,19 +6090,13 @@
               <a:buChar char=""/>
             </a:pPr>
             <a:r>
-              <a:rPr b="0" lang="en-US" sz="2000" spc="-1" strike="noStrike">
-                <a:solidFill>
-                  <a:srgbClr val="000000"/>
-                </a:solidFill>
-                <a:latin typeface="TradeGothic"/>
+              <a:rPr b="0" lang="en-IN" sz="2000" spc="-1" strike="noStrike">
+                <a:latin typeface="Arial"/>
               </a:rPr>
               <a:t>Sixth Outline Level</a:t>
             </a:r>
-            <a:endParaRPr b="0" lang="en-US" sz="2000" spc="-1" strike="noStrike">
-              <a:solidFill>
-                <a:srgbClr val="000000"/>
-              </a:solidFill>
-              <a:latin typeface="TradeGothic"/>
+            <a:endParaRPr b="0" lang="en-IN" sz="2000" spc="-1" strike="noStrike">
+              <a:latin typeface="Arial"/>
             </a:endParaRPr>
           </a:p>
           <a:p>
@@ -6326,19 +6112,13 @@
               <a:buChar char=""/>
             </a:pPr>
             <a:r>
-              <a:rPr b="0" lang="en-US" sz="2000" spc="-1" strike="noStrike">
-                <a:solidFill>
-                  <a:srgbClr val="000000"/>
-                </a:solidFill>
-                <a:latin typeface="TradeGothic"/>
+              <a:rPr b="0" lang="en-IN" sz="2000" spc="-1" strike="noStrike">
+                <a:latin typeface="Arial"/>
               </a:rPr>
               <a:t>Seventh Outline Level</a:t>
             </a:r>
-            <a:endParaRPr b="0" lang="en-US" sz="2000" spc="-1" strike="noStrike">
-              <a:solidFill>
-                <a:srgbClr val="000000"/>
-              </a:solidFill>
-              <a:latin typeface="TradeGothic"/>
+            <a:endParaRPr b="0" lang="en-IN" sz="2000" spc="-1" strike="noStrike">
+              <a:latin typeface="Arial"/>
             </a:endParaRPr>
           </a:p>
         </p:txBody>
@@ -6394,326 +6174,24 @@
             <a:spLocks noGrp="1"/>
           </p:cNvSpPr>
           <p:nvPr>
-            <p:ph type="title"/>
-          </p:nvPr>
-        </p:nvSpPr>
-        <p:spPr>
-          <a:xfrm>
-            <a:off x="609480" y="-47520"/>
-            <a:ext cx="10972440" cy="1142640"/>
-          </a:xfrm>
-          <a:prstGeom prst="rect">
-            <a:avLst/>
-          </a:prstGeom>
-          <a:noFill/>
-          <a:ln w="9360">
-            <a:noFill/>
-          </a:ln>
-        </p:spPr>
-        <p:txBody>
-          <a:bodyPr numCol="1" spcCol="0" anchor="ctr">
-            <a:noAutofit/>
-          </a:bodyPr>
-          <a:p>
-            <a:pPr algn="ctr">
-              <a:lnSpc>
-                <a:spcPct val="100000"/>
-              </a:lnSpc>
-              <a:buNone/>
-            </a:pPr>
-            <a:r>
-              <a:rPr b="0" lang="en-US" sz="4400" spc="-1" strike="noStrike">
-                <a:solidFill>
-                  <a:srgbClr val="000000"/>
-                </a:solidFill>
-                <a:latin typeface="TradeGothic"/>
-                <a:ea typeface="ＭＳ Ｐゴシック"/>
-              </a:rPr>
-              <a:t>Click to edit Master title style</a:t>
-            </a:r>
-            <a:endParaRPr b="0" lang="en-US" sz="4400" spc="-1" strike="noStrike">
-              <a:solidFill>
-                <a:srgbClr val="000000"/>
-              </a:solidFill>
-              <a:latin typeface="Calibri"/>
-            </a:endParaRPr>
-          </a:p>
-        </p:txBody>
-      </p:sp>
-      <p:sp>
-        <p:nvSpPr>
-          <p:cNvPr id="42" name="PlaceHolder 2"/>
-          <p:cNvSpPr>
-            <a:spLocks noGrp="1"/>
-          </p:cNvSpPr>
-          <p:nvPr>
-            <p:ph type="body"/>
-          </p:nvPr>
-        </p:nvSpPr>
-        <p:spPr>
-          <a:xfrm>
-            <a:off x="609480" y="1095480"/>
-            <a:ext cx="10972440" cy="5030280"/>
-          </a:xfrm>
-          <a:prstGeom prst="rect">
-            <a:avLst/>
-          </a:prstGeom>
-          <a:noFill/>
-          <a:ln w="9360">
-            <a:noFill/>
-          </a:ln>
-        </p:spPr>
-        <p:txBody>
-          <a:bodyPr numCol="1" spcCol="0" anchor="t">
-            <a:noAutofit/>
-          </a:bodyPr>
-          <a:p>
-            <a:pPr marL="343080" indent="-343080">
-              <a:lnSpc>
-                <a:spcPct val="100000"/>
-              </a:lnSpc>
-              <a:spcBef>
-                <a:spcPts val="641"/>
-              </a:spcBef>
-              <a:buClr>
-                <a:srgbClr val="000000"/>
-              </a:buClr>
-              <a:buFont typeface="Arial"/>
-              <a:buChar char="•"/>
-            </a:pPr>
-            <a:r>
-              <a:rPr b="0" lang="en-US" sz="3200" spc="-1" strike="noStrike">
-                <a:solidFill>
-                  <a:srgbClr val="000000"/>
-                </a:solidFill>
-                <a:latin typeface="TradeGothic"/>
-                <a:ea typeface="ＭＳ Ｐゴシック"/>
-              </a:rPr>
-              <a:t>Click to edit Master text styles</a:t>
-            </a:r>
-            <a:endParaRPr b="0" lang="en-US" sz="3200" spc="-1" strike="noStrike">
-              <a:solidFill>
-                <a:srgbClr val="000000"/>
-              </a:solidFill>
-              <a:latin typeface="TradeGothic"/>
-            </a:endParaRPr>
-          </a:p>
-          <a:p>
-            <a:pPr lvl="1" marL="743040" indent="-285840">
-              <a:lnSpc>
-                <a:spcPct val="100000"/>
-              </a:lnSpc>
-              <a:spcBef>
-                <a:spcPts val="561"/>
-              </a:spcBef>
-              <a:buClr>
-                <a:srgbClr val="000000"/>
-              </a:buClr>
-              <a:buFont typeface="Arial"/>
-              <a:buChar char="–"/>
-            </a:pPr>
-            <a:r>
-              <a:rPr b="0" lang="en-US" sz="2800" spc="-1" strike="noStrike">
-                <a:solidFill>
-                  <a:srgbClr val="000000"/>
-                </a:solidFill>
-                <a:latin typeface="TradeGothic"/>
-                <a:ea typeface="ＭＳ Ｐゴシック"/>
-              </a:rPr>
-              <a:t>Second level</a:t>
-            </a:r>
-            <a:endParaRPr b="0" lang="en-US" sz="2800" spc="-1" strike="noStrike">
-              <a:solidFill>
-                <a:srgbClr val="000000"/>
-              </a:solidFill>
-              <a:latin typeface="TradeGothic"/>
-            </a:endParaRPr>
-          </a:p>
-          <a:p>
-            <a:pPr lvl="2" marL="1143000" indent="-228600">
-              <a:lnSpc>
-                <a:spcPct val="100000"/>
-              </a:lnSpc>
-              <a:spcBef>
-                <a:spcPts val="479"/>
-              </a:spcBef>
-              <a:buClr>
-                <a:srgbClr val="000000"/>
-              </a:buClr>
-              <a:buFont typeface="Arial"/>
-              <a:buChar char="•"/>
-            </a:pPr>
-            <a:r>
-              <a:rPr b="0" lang="en-US" sz="2400" spc="-1" strike="noStrike">
-                <a:solidFill>
-                  <a:srgbClr val="000000"/>
-                </a:solidFill>
-                <a:latin typeface="TradeGothic"/>
-                <a:ea typeface="ＭＳ Ｐゴシック"/>
-              </a:rPr>
-              <a:t>Third level</a:t>
-            </a:r>
-            <a:endParaRPr b="0" lang="en-US" sz="2400" spc="-1" strike="noStrike">
-              <a:solidFill>
-                <a:srgbClr val="000000"/>
-              </a:solidFill>
-              <a:latin typeface="TradeGothic"/>
-            </a:endParaRPr>
-          </a:p>
-          <a:p>
-            <a:pPr lvl="3" marL="1600200" indent="-228600">
-              <a:lnSpc>
-                <a:spcPct val="100000"/>
-              </a:lnSpc>
-              <a:spcBef>
-                <a:spcPts val="400"/>
-              </a:spcBef>
-              <a:buClr>
-                <a:srgbClr val="000000"/>
-              </a:buClr>
-              <a:buFont typeface="Arial"/>
-              <a:buChar char="–"/>
-            </a:pPr>
-            <a:r>
-              <a:rPr b="0" lang="en-US" sz="2000" spc="-1" strike="noStrike">
-                <a:solidFill>
-                  <a:srgbClr val="000000"/>
-                </a:solidFill>
-                <a:latin typeface="TradeGothic"/>
-                <a:ea typeface="ＭＳ Ｐゴシック"/>
-              </a:rPr>
-              <a:t>Fourth level</a:t>
-            </a:r>
-            <a:endParaRPr b="0" lang="en-US" sz="2000" spc="-1" strike="noStrike">
-              <a:solidFill>
-                <a:srgbClr val="000000"/>
-              </a:solidFill>
-              <a:latin typeface="TradeGothic"/>
-            </a:endParaRPr>
-          </a:p>
-          <a:p>
-            <a:pPr lvl="4" marL="2057400" indent="-228600">
-              <a:lnSpc>
-                <a:spcPct val="100000"/>
-              </a:lnSpc>
-              <a:spcBef>
-                <a:spcPts val="400"/>
-              </a:spcBef>
-              <a:buClr>
-                <a:srgbClr val="000000"/>
-              </a:buClr>
-              <a:buFont typeface="Arial"/>
-              <a:buChar char="»"/>
-            </a:pPr>
-            <a:r>
-              <a:rPr b="0" lang="en-US" sz="2000" spc="-1" strike="noStrike">
-                <a:solidFill>
-                  <a:srgbClr val="000000"/>
-                </a:solidFill>
-                <a:latin typeface="TradeGothic"/>
-                <a:ea typeface="ＭＳ Ｐゴシック"/>
-              </a:rPr>
-              <a:t>Fifth level</a:t>
-            </a:r>
-            <a:endParaRPr b="0" lang="en-US" sz="2000" spc="-1" strike="noStrike">
-              <a:solidFill>
-                <a:srgbClr val="000000"/>
-              </a:solidFill>
-              <a:latin typeface="TradeGothic"/>
-            </a:endParaRPr>
-          </a:p>
-        </p:txBody>
-      </p:sp>
-      <p:sp>
-        <p:nvSpPr>
-          <p:cNvPr id="43" name="PlaceHolder 3"/>
-          <p:cNvSpPr>
-            <a:spLocks noGrp="1"/>
-          </p:cNvSpPr>
-          <p:nvPr>
-            <p:ph type="dt" idx="4"/>
-          </p:nvPr>
-        </p:nvSpPr>
-        <p:spPr>
-          <a:xfrm>
-            <a:off x="609480" y="6356520"/>
-            <a:ext cx="2844360" cy="364680"/>
-          </a:xfrm>
-          <a:prstGeom prst="rect">
-            <a:avLst/>
-          </a:prstGeom>
-          <a:noFill/>
-          <a:ln w="0">
-            <a:noFill/>
-          </a:ln>
-        </p:spPr>
-        <p:txBody>
-          <a:bodyPr numCol="1" spcCol="0" anchor="ctr">
-            <a:noAutofit/>
-          </a:bodyPr>
-          <a:lstStyle>
-            <a:lvl1pPr>
-              <a:lnSpc>
-                <a:spcPct val="100000"/>
-              </a:lnSpc>
-              <a:buNone/>
-              <a:defRPr b="0" lang="en-US" sz="1200" spc="-1" strike="noStrike">
-                <a:solidFill>
-                  <a:srgbClr val="898989"/>
-                </a:solidFill>
-                <a:latin typeface="TradeGothic"/>
-                <a:ea typeface="ＭＳ Ｐゴシック"/>
-              </a:defRPr>
-            </a:lvl1pPr>
-          </a:lstStyle>
-          <a:p>
-            <a:pPr>
-              <a:lnSpc>
-                <a:spcPct val="100000"/>
-              </a:lnSpc>
-              <a:buNone/>
-            </a:pPr>
-            <a:r>
-              <a:rPr b="0" lang="en-US" sz="1200" spc="-1" strike="noStrike">
-                <a:solidFill>
-                  <a:srgbClr val="898989"/>
-                </a:solidFill>
-                <a:latin typeface="TradeGothic"/>
-                <a:ea typeface="ＭＳ Ｐゴシック"/>
-              </a:rPr>
-              <a:t>&lt;date/time&gt;</a:t>
-            </a:r>
-            <a:endParaRPr b="0" lang="en-IN" sz="1200" spc="-1" strike="noStrike">
-              <a:latin typeface="Times New Roman"/>
-            </a:endParaRPr>
-          </a:p>
-        </p:txBody>
-      </p:sp>
-      <p:sp>
-        <p:nvSpPr>
-          <p:cNvPr id="44" name="PlaceHolder 4"/>
-          <p:cNvSpPr>
-            <a:spLocks noGrp="1"/>
-          </p:cNvSpPr>
-          <p:nvPr>
-            <p:ph type="ftr" idx="5"/>
+            <p:ph type="ftr" idx="4"/>
           </p:nvPr>
         </p:nvSpPr>
         <p:spPr>
           <a:xfrm>
             <a:off x="4165560" y="6356520"/>
-            <a:ext cx="3860280" cy="364680"/>
-          </a:xfrm>
-          <a:prstGeom prst="rect">
-            <a:avLst/>
-          </a:prstGeom>
-          <a:noFill/>
-          <a:ln w="0">
-            <a:noFill/>
-          </a:ln>
-        </p:spPr>
-        <p:txBody>
-          <a:bodyPr anchor="ctr">
+            <a:ext cx="3859920" cy="364320"/>
+          </a:xfrm>
+          <a:prstGeom prst="rect">
+            <a:avLst/>
+          </a:prstGeom>
+          <a:noFill/>
+          <a:ln w="0">
+            <a:noFill/>
+          </a:ln>
+        </p:spPr>
+        <p:txBody>
+          <a:bodyPr lIns="90000" rIns="90000" tIns="45000" bIns="45000" anchor="ctr">
             <a:noAutofit/>
           </a:bodyPr>
           <a:lstStyle>
@@ -6754,29 +6232,29 @@
       </p:sp>
       <p:sp>
         <p:nvSpPr>
-          <p:cNvPr id="45" name="PlaceHolder 5"/>
-          <p:cNvSpPr>
-            <a:spLocks noGrp="1"/>
-          </p:cNvSpPr>
-          <p:nvPr>
-            <p:ph type="sldNum" idx="6"/>
+          <p:cNvPr id="42" name="PlaceHolder 2"/>
+          <p:cNvSpPr>
+            <a:spLocks noGrp="1"/>
+          </p:cNvSpPr>
+          <p:nvPr>
+            <p:ph type="sldNum" idx="5"/>
           </p:nvPr>
         </p:nvSpPr>
         <p:spPr>
           <a:xfrm>
             <a:off x="8737560" y="6356520"/>
-            <a:ext cx="2844360" cy="364680"/>
-          </a:xfrm>
-          <a:prstGeom prst="rect">
-            <a:avLst/>
-          </a:prstGeom>
-          <a:noFill/>
-          <a:ln w="0">
-            <a:noFill/>
-          </a:ln>
-        </p:spPr>
-        <p:txBody>
-          <a:bodyPr numCol="1" spcCol="0" anchor="ctr">
+            <a:ext cx="2844000" cy="364320"/>
+          </a:xfrm>
+          <a:prstGeom prst="rect">
+            <a:avLst/>
+          </a:prstGeom>
+          <a:noFill/>
+          <a:ln w="0">
+            <a:noFill/>
+          </a:ln>
+        </p:spPr>
+        <p:txBody>
+          <a:bodyPr numCol="1" spcCol="0" lIns="90000" rIns="90000" tIns="45000" bIns="45000" anchor="ctr">
             <a:noAutofit/>
           </a:bodyPr>
           <a:lstStyle>
@@ -6801,7 +6279,7 @@
               </a:lnSpc>
               <a:buNone/>
             </a:pPr>
-            <a:fld id="{D19AFEFC-D5DC-4025-80CB-AD5546D0187D}" type="slidenum">
+            <a:fld id="{F66C883F-2368-4309-B9B6-329B92DB16E3}" type="slidenum">
               <a:rPr b="0" lang="en-US" sz="1200" spc="-1" strike="noStrike">
                 <a:solidFill>
                   <a:srgbClr val="898989"/>
@@ -6813,6 +6291,279 @@
             </a:fld>
             <a:endParaRPr b="0" lang="en-IN" sz="1200" spc="-1" strike="noStrike">
               <a:latin typeface="Times New Roman"/>
+            </a:endParaRPr>
+          </a:p>
+        </p:txBody>
+      </p:sp>
+      <p:sp>
+        <p:nvSpPr>
+          <p:cNvPr id="43" name="PlaceHolder 3"/>
+          <p:cNvSpPr>
+            <a:spLocks noGrp="1"/>
+          </p:cNvSpPr>
+          <p:nvPr>
+            <p:ph type="dt" idx="6"/>
+          </p:nvPr>
+        </p:nvSpPr>
+        <p:spPr>
+          <a:xfrm>
+            <a:off x="609480" y="6356520"/>
+            <a:ext cx="2844000" cy="364320"/>
+          </a:xfrm>
+          <a:prstGeom prst="rect">
+            <a:avLst/>
+          </a:prstGeom>
+          <a:noFill/>
+          <a:ln w="0">
+            <a:noFill/>
+          </a:ln>
+        </p:spPr>
+        <p:txBody>
+          <a:bodyPr numCol="1" spcCol="0" lIns="90000" rIns="90000" tIns="45000" bIns="45000" anchor="ctr">
+            <a:noAutofit/>
+          </a:bodyPr>
+          <a:lstStyle>
+            <a:lvl1pPr>
+              <a:defRPr b="0" lang="en-IN" sz="1400" spc="-1" strike="noStrike">
+                <a:latin typeface="Times New Roman"/>
+              </a:defRPr>
+            </a:lvl1pPr>
+          </a:lstStyle>
+          <a:p>
+            <a:r>
+              <a:rPr b="0" lang="en-IN" sz="1400" spc="-1" strike="noStrike">
+                <a:latin typeface="Times New Roman"/>
+              </a:rPr>
+              <a:t>&lt;date/time&gt;</a:t>
+            </a:r>
+            <a:endParaRPr b="0" lang="en-IN" sz="1400" spc="-1" strike="noStrike">
+              <a:latin typeface="Times New Roman"/>
+            </a:endParaRPr>
+          </a:p>
+        </p:txBody>
+      </p:sp>
+      <p:sp>
+        <p:nvSpPr>
+          <p:cNvPr id="44" name="PlaceHolder 4"/>
+          <p:cNvSpPr>
+            <a:spLocks noGrp="1"/>
+          </p:cNvSpPr>
+          <p:nvPr>
+            <p:ph type="title"/>
+          </p:nvPr>
+        </p:nvSpPr>
+        <p:spPr>
+          <a:xfrm>
+            <a:off x="609480" y="273600"/>
+            <a:ext cx="10972440" cy="1144800"/>
+          </a:xfrm>
+          <a:prstGeom prst="rect">
+            <a:avLst/>
+          </a:prstGeom>
+          <a:noFill/>
+          <a:ln w="0">
+            <a:noFill/>
+          </a:ln>
+        </p:spPr>
+        <p:txBody>
+          <a:bodyPr lIns="0" rIns="0" tIns="0" bIns="0" anchor="ctr">
+            <a:noAutofit/>
+          </a:bodyPr>
+          <a:p>
+            <a:pPr algn="ctr">
+              <a:buNone/>
+            </a:pPr>
+            <a:r>
+              <a:rPr b="0" lang="en-IN" sz="4400" spc="-1" strike="noStrike">
+                <a:latin typeface="Arial"/>
+              </a:rPr>
+              <a:t>Click to edit the title text format</a:t>
+            </a:r>
+            <a:endParaRPr b="0" lang="en-IN" sz="4400" spc="-1" strike="noStrike">
+              <a:latin typeface="Arial"/>
+            </a:endParaRPr>
+          </a:p>
+        </p:txBody>
+      </p:sp>
+      <p:sp>
+        <p:nvSpPr>
+          <p:cNvPr id="45" name="PlaceHolder 5"/>
+          <p:cNvSpPr>
+            <a:spLocks noGrp="1"/>
+          </p:cNvSpPr>
+          <p:nvPr>
+            <p:ph type="body"/>
+          </p:nvPr>
+        </p:nvSpPr>
+        <p:spPr>
+          <a:xfrm>
+            <a:off x="609480" y="1604520"/>
+            <a:ext cx="10972440" cy="3977280"/>
+          </a:xfrm>
+          <a:prstGeom prst="rect">
+            <a:avLst/>
+          </a:prstGeom>
+          <a:noFill/>
+          <a:ln w="0">
+            <a:noFill/>
+          </a:ln>
+        </p:spPr>
+        <p:txBody>
+          <a:bodyPr lIns="0" rIns="0" tIns="0" bIns="0" anchor="t">
+            <a:normAutofit/>
+          </a:bodyPr>
+          <a:p>
+            <a:pPr marL="432000" indent="-324000">
+              <a:spcBef>
+                <a:spcPts val="1417"/>
+              </a:spcBef>
+              <a:buClr>
+                <a:srgbClr val="000000"/>
+              </a:buClr>
+              <a:buSzPct val="45000"/>
+              <a:buFont typeface="Wingdings" charset="2"/>
+              <a:buChar char=""/>
+            </a:pPr>
+            <a:r>
+              <a:rPr b="0" lang="en-IN" sz="3200" spc="-1" strike="noStrike">
+                <a:latin typeface="Arial"/>
+              </a:rPr>
+              <a:t>Click to edit the outline text format</a:t>
+            </a:r>
+            <a:endParaRPr b="0" lang="en-IN" sz="3200" spc="-1" strike="noStrike">
+              <a:latin typeface="Arial"/>
+            </a:endParaRPr>
+          </a:p>
+          <a:p>
+            <a:pPr lvl="1" marL="864000" indent="-324000">
+              <a:spcBef>
+                <a:spcPts val="1134"/>
+              </a:spcBef>
+              <a:buClr>
+                <a:srgbClr val="000000"/>
+              </a:buClr>
+              <a:buSzPct val="75000"/>
+              <a:buFont typeface="Symbol" charset="2"/>
+              <a:buChar char=""/>
+            </a:pPr>
+            <a:r>
+              <a:rPr b="0" lang="en-IN" sz="2800" spc="-1" strike="noStrike">
+                <a:latin typeface="Arial"/>
+              </a:rPr>
+              <a:t>Second Outline Level</a:t>
+            </a:r>
+            <a:endParaRPr b="0" lang="en-IN" sz="2800" spc="-1" strike="noStrike">
+              <a:latin typeface="Arial"/>
+            </a:endParaRPr>
+          </a:p>
+          <a:p>
+            <a:pPr lvl="2" marL="1296000" indent="-288000">
+              <a:spcBef>
+                <a:spcPts val="850"/>
+              </a:spcBef>
+              <a:buClr>
+                <a:srgbClr val="000000"/>
+              </a:buClr>
+              <a:buSzPct val="45000"/>
+              <a:buFont typeface="Wingdings" charset="2"/>
+              <a:buChar char=""/>
+            </a:pPr>
+            <a:r>
+              <a:rPr b="0" lang="en-IN" sz="2400" spc="-1" strike="noStrike">
+                <a:latin typeface="Arial"/>
+              </a:rPr>
+              <a:t>Third Outline Level</a:t>
+            </a:r>
+            <a:endParaRPr b="0" lang="en-IN" sz="2400" spc="-1" strike="noStrike">
+              <a:latin typeface="Arial"/>
+            </a:endParaRPr>
+          </a:p>
+          <a:p>
+            <a:pPr lvl="3" marL="1728000" indent="-216000">
+              <a:spcBef>
+                <a:spcPts val="567"/>
+              </a:spcBef>
+              <a:buClr>
+                <a:srgbClr val="000000"/>
+              </a:buClr>
+              <a:buSzPct val="75000"/>
+              <a:buFont typeface="Symbol" charset="2"/>
+              <a:buChar char=""/>
+            </a:pPr>
+            <a:r>
+              <a:rPr b="0" lang="en-IN" sz="2000" spc="-1" strike="noStrike">
+                <a:latin typeface="Arial"/>
+              </a:rPr>
+              <a:t>Fourth Outline Level</a:t>
+            </a:r>
+            <a:endParaRPr b="0" lang="en-IN" sz="2000" spc="-1" strike="noStrike">
+              <a:latin typeface="Arial"/>
+            </a:endParaRPr>
+          </a:p>
+          <a:p>
+            <a:pPr lvl="4" marL="2160000" indent="-216000">
+              <a:spcBef>
+                <a:spcPts val="283"/>
+              </a:spcBef>
+              <a:buClr>
+                <a:srgbClr val="000000"/>
+              </a:buClr>
+              <a:buSzPct val="45000"/>
+              <a:buFont typeface="Wingdings" charset="2"/>
+              <a:buChar char=""/>
+            </a:pPr>
+            <a:r>
+              <a:rPr b="0" lang="en-IN" sz="2000" spc="-1" strike="noStrike">
+                <a:latin typeface="Arial"/>
+              </a:rPr>
+              <a:t>Fifth Outline Level</a:t>
+            </a:r>
+            <a:endParaRPr b="0" lang="en-IN" sz="2000" spc="-1" strike="noStrike">
+              <a:latin typeface="Arial"/>
+            </a:endParaRPr>
+          </a:p>
+          <a:p>
+            <a:pPr lvl="5" marL="2592000" indent="-216000">
+              <a:spcBef>
+                <a:spcPts val="283"/>
+              </a:spcBef>
+              <a:buClr>
+                <a:srgbClr val="000000"/>
+              </a:buClr>
+              <a:buSzPct val="45000"/>
+              <a:buFont typeface="Wingdings" charset="2"/>
+              <a:buChar char=""/>
+            </a:pPr>
+            <a:r>
+              <a:rPr b="0" lang="en-IN" sz="2000" spc="-1" strike="noStrike">
+                <a:latin typeface="Arial"/>
+              </a:rPr>
+              <a:t>Sixth Outline Level</a:t>
+            </a:r>
+            <a:endParaRPr b="0" lang="en-IN" sz="2000" spc="-1" strike="noStrike">
+              <a:latin typeface="Arial"/>
+            </a:endParaRPr>
+          </a:p>
+          <a:p>
+            <a:pPr lvl="6" marL="3024000" indent="-216000">
+              <a:spcBef>
+                <a:spcPts val="283"/>
+              </a:spcBef>
+              <a:buClr>
+                <a:srgbClr val="000000"/>
+              </a:buClr>
+              <a:buSzPct val="45000"/>
+              <a:buFont typeface="Wingdings" charset="2"/>
+              <a:buChar char=""/>
+            </a:pPr>
+            <a:r>
+              <a:rPr b="0" lang="en-IN" sz="2000" spc="-1" strike="noStrike">
+                <a:latin typeface="Arial"/>
+              </a:rPr>
+              <a:t>Seventh Outline Level</a:t>
+            </a:r>
+            <a:endParaRPr b="0" lang="en-IN" sz="2000" spc="-1" strike="noStrike">
+              <a:latin typeface="Arial"/>
             </a:endParaRPr>
           </a:p>
         </p:txBody>
@@ -6870,7 +6621,7 @@
         <p:spPr>
           <a:xfrm>
             <a:off x="1523880" y="0"/>
-            <a:ext cx="9143640" cy="6857640"/>
+            <a:ext cx="9143280" cy="6857280"/>
           </a:xfrm>
           <a:prstGeom prst="rect">
             <a:avLst/>
@@ -6906,7 +6657,7 @@
         <p:spPr>
           <a:xfrm>
             <a:off x="5656680" y="851400"/>
-            <a:ext cx="4638240" cy="5154480"/>
+            <a:ext cx="4637880" cy="5154120"/>
           </a:xfrm>
           <a:custGeom>
             <a:avLst/>
@@ -7288,7 +7039,7 @@
         <p:spPr>
           <a:xfrm>
             <a:off x="6854760" y="1715760"/>
-            <a:ext cx="3203280" cy="3425760"/>
+            <a:ext cx="3202920" cy="3425400"/>
           </a:xfrm>
           <a:prstGeom prst="rect">
             <a:avLst/>
@@ -7311,7 +7062,7 @@
         <p:spPr>
           <a:xfrm>
             <a:off x="1245600" y="648720"/>
-            <a:ext cx="8534160" cy="1752120"/>
+            <a:ext cx="8533800" cy="1751760"/>
           </a:xfrm>
           <a:prstGeom prst="rect">
             <a:avLst/>
@@ -7322,7 +7073,7 @@
           </a:ln>
         </p:spPr>
         <p:txBody>
-          <a:bodyPr numCol="1" spcCol="0" anchor="t">
+          <a:bodyPr numCol="1" spcCol="0" lIns="0" rIns="0" tIns="0" bIns="0" anchor="t">
             <a:noAutofit/>
           </a:bodyPr>
           <a:p>
@@ -7384,7 +7135,7 @@
         <p:spPr>
           <a:xfrm>
             <a:off x="331200" y="-526680"/>
-            <a:ext cx="10362960" cy="2076120"/>
+            <a:ext cx="10362600" cy="2075760"/>
           </a:xfrm>
           <a:prstGeom prst="rect">
             <a:avLst/>
@@ -7395,7 +7146,7 @@
           </a:ln>
         </p:spPr>
         <p:txBody>
-          <a:bodyPr numCol="1" spcCol="0" anchor="ctr">
+          <a:bodyPr numCol="1" spcCol="0" lIns="0" rIns="0" tIns="0" bIns="0" anchor="ctr">
             <a:noAutofit/>
           </a:bodyPr>
           <a:p>
@@ -7415,11 +7166,8 @@
               </a:rPr>
               <a:t>SMART INDIA HACKATHON 2026</a:t>
             </a:r>
-            <a:endParaRPr b="0" lang="en-US" sz="4000" spc="-1" strike="noStrike">
-              <a:solidFill>
-                <a:srgbClr val="000000"/>
-              </a:solidFill>
-              <a:latin typeface="Calibri"/>
+            <a:endParaRPr b="0" lang="en-IN" sz="4000" spc="-1" strike="noStrike">
+              <a:latin typeface="Arial"/>
             </a:endParaRPr>
           </a:p>
         </p:txBody>
@@ -7432,8 +7180,8 @@
         </p:nvSpPr>
         <p:spPr>
           <a:xfrm>
-            <a:off x="331200" y="2076480"/>
-            <a:ext cx="5924160" cy="4753080"/>
+            <a:off x="-267120" y="2446920"/>
+            <a:ext cx="5923800" cy="4753080"/>
           </a:xfrm>
           <a:prstGeom prst="rect">
             <a:avLst/>
@@ -7483,7 +7231,7 @@
                 <a:latin typeface="Arial"/>
                 <a:ea typeface="ＭＳ Ｐゴシック"/>
               </a:rPr>
-              <a:t>Problem Statement ID –</a:t>
+              <a:t>Problem Statement ID –hello</a:t>
             </a:r>
             <a:endParaRPr b="0" lang="en-IN" sz="2400" spc="-1" strike="noStrike">
               <a:latin typeface="Arial"/>
@@ -7629,7 +7377,7 @@
         <p:spPr>
           <a:xfrm>
             <a:off x="9780120" y="1440"/>
-            <a:ext cx="2249640" cy="1062000"/>
+            <a:ext cx="2249280" cy="1061640"/>
           </a:xfrm>
           <a:prstGeom prst="rect">
             <a:avLst/>
@@ -7678,7 +7426,7 @@
         <p:spPr>
           <a:xfrm>
             <a:off x="0" y="6354720"/>
-            <a:ext cx="12191760" cy="502920"/>
+            <a:ext cx="12191400" cy="502560"/>
           </a:xfrm>
           <a:prstGeom prst="rect">
             <a:avLst/>
@@ -7717,7 +7465,7 @@
         <p:spPr>
           <a:xfrm>
             <a:off x="182880" y="0"/>
-            <a:ext cx="10972440" cy="1142640"/>
+            <a:ext cx="10972080" cy="1142280"/>
           </a:xfrm>
           <a:prstGeom prst="rect">
             <a:avLst/>
@@ -7728,7 +7476,7 @@
           </a:ln>
         </p:spPr>
         <p:txBody>
-          <a:bodyPr numCol="1" spcCol="0" anchor="ctr">
+          <a:bodyPr numCol="1" spcCol="0" lIns="90000" rIns="90000" tIns="45000" bIns="45000" anchor="ctr">
             <a:noAutofit/>
           </a:bodyPr>
           <a:p>
@@ -7751,11 +7499,8 @@
               </a:rPr>
               <a:t>IDEA TITLE</a:t>
             </a:r>
-            <a:endParaRPr b="0" lang="en-US" sz="3600" spc="-1" strike="noStrike">
-              <a:solidFill>
-                <a:srgbClr val="000000"/>
-              </a:solidFill>
-              <a:latin typeface="Calibri"/>
+            <a:endParaRPr b="0" lang="en-IN" sz="3600" spc="-1" strike="noStrike">
+              <a:latin typeface="Arial"/>
             </a:endParaRPr>
           </a:p>
         </p:txBody>
@@ -7769,7 +7514,7 @@
         <p:spPr>
           <a:xfrm>
             <a:off x="0" y="2064960"/>
-            <a:ext cx="12191760" cy="2466720"/>
+            <a:ext cx="12191400" cy="2466720"/>
           </a:xfrm>
           <a:prstGeom prst="rect">
             <a:avLst/>
@@ -7937,18 +7682,18 @@
         <p:spPr>
           <a:xfrm>
             <a:off x="8737560" y="6356520"/>
-            <a:ext cx="2844360" cy="364680"/>
-          </a:xfrm>
-          <a:prstGeom prst="rect">
-            <a:avLst/>
-          </a:prstGeom>
-          <a:noFill/>
-          <a:ln w="0">
-            <a:noFill/>
-          </a:ln>
-        </p:spPr>
-        <p:txBody>
-          <a:bodyPr numCol="1" spcCol="0" anchor="ctr">
+            <a:ext cx="2844000" cy="364320"/>
+          </a:xfrm>
+          <a:prstGeom prst="rect">
+            <a:avLst/>
+          </a:prstGeom>
+          <a:noFill/>
+          <a:ln w="0">
+            <a:noFill/>
+          </a:ln>
+        </p:spPr>
+        <p:txBody>
+          <a:bodyPr numCol="1" spcCol="0" lIns="90000" rIns="90000" tIns="45000" bIns="45000" anchor="ctr">
             <a:noAutofit/>
           </a:bodyPr>
           <a:lstStyle>
@@ -7973,7 +7718,7 @@
               </a:lnSpc>
               <a:buNone/>
             </a:pPr>
-            <a:fld id="{9E43489B-27FB-498E-8795-1C02561763F1}" type="slidenum">
+            <a:fld id="{00D9E125-287B-480D-844E-F98713414818}" type="slidenum">
               <a:rPr b="1" lang="en-US" sz="1200" spc="-1" strike="noStrike">
                 <a:solidFill>
                   <a:srgbClr val="ffffff"/>
@@ -8002,18 +7747,18 @@
         <p:spPr>
           <a:xfrm>
             <a:off x="4648320" y="6356520"/>
-            <a:ext cx="3203640" cy="364680"/>
-          </a:xfrm>
-          <a:prstGeom prst="rect">
-            <a:avLst/>
-          </a:prstGeom>
-          <a:noFill/>
-          <a:ln w="0">
-            <a:noFill/>
-          </a:ln>
-        </p:spPr>
-        <p:txBody>
-          <a:bodyPr anchor="ctr">
+            <a:ext cx="3203280" cy="364320"/>
+          </a:xfrm>
+          <a:prstGeom prst="rect">
+            <a:avLst/>
+          </a:prstGeom>
+          <a:noFill/>
+          <a:ln w="0">
+            <a:noFill/>
+          </a:ln>
+        </p:spPr>
+        <p:txBody>
+          <a:bodyPr lIns="90000" rIns="90000" tIns="45000" bIns="45000" anchor="ctr">
             <a:noAutofit/>
           </a:bodyPr>
           <a:lstStyle>
@@ -8061,7 +7806,7 @@
         <p:spPr>
           <a:xfrm>
             <a:off x="329760" y="252360"/>
-            <a:ext cx="1251360" cy="807120"/>
+            <a:ext cx="1251000" cy="806760"/>
           </a:xfrm>
           <a:prstGeom prst="ellipse">
             <a:avLst/>
@@ -8128,7 +7873,7 @@
         <p:spPr>
           <a:xfrm>
             <a:off x="9780120" y="1440"/>
-            <a:ext cx="2249640" cy="1062000"/>
+            <a:ext cx="2249280" cy="1061640"/>
           </a:xfrm>
           <a:prstGeom prst="rect">
             <a:avLst/>
@@ -8177,7 +7922,7 @@
         <p:spPr>
           <a:xfrm>
             <a:off x="0" y="6354720"/>
-            <a:ext cx="12191760" cy="502920"/>
+            <a:ext cx="12191400" cy="502560"/>
           </a:xfrm>
           <a:prstGeom prst="rect">
             <a:avLst/>
@@ -8216,7 +7961,7 @@
         <p:spPr>
           <a:xfrm>
             <a:off x="609480" y="-47520"/>
-            <a:ext cx="10972440" cy="1142640"/>
+            <a:ext cx="10972080" cy="1142280"/>
           </a:xfrm>
           <a:prstGeom prst="rect">
             <a:avLst/>
@@ -8227,7 +7972,7 @@
           </a:ln>
         </p:spPr>
         <p:txBody>
-          <a:bodyPr numCol="1" spcCol="0" anchor="ctr">
+          <a:bodyPr numCol="1" spcCol="0" lIns="90000" rIns="90000" tIns="45000" bIns="45000" anchor="ctr">
             <a:noAutofit/>
           </a:bodyPr>
           <a:p>
@@ -8247,11 +7992,8 @@
               </a:rPr>
               <a:t>TECHNICAL APPROACH</a:t>
             </a:r>
-            <a:endParaRPr b="0" lang="en-US" sz="3600" spc="-1" strike="noStrike">
-              <a:solidFill>
-                <a:srgbClr val="000000"/>
-              </a:solidFill>
-              <a:latin typeface="Calibri"/>
+            <a:endParaRPr b="0" lang="en-IN" sz="3600" spc="-1" strike="noStrike">
+              <a:latin typeface="Arial"/>
             </a:endParaRPr>
           </a:p>
         </p:txBody>
@@ -8265,7 +8007,7 @@
         <p:spPr>
           <a:xfrm>
             <a:off x="609480" y="2533680"/>
-            <a:ext cx="9384840" cy="1796040"/>
+            <a:ext cx="9384480" cy="1796040"/>
           </a:xfrm>
           <a:prstGeom prst="rect">
             <a:avLst/>
@@ -8350,18 +8092,18 @@
         <p:spPr>
           <a:xfrm>
             <a:off x="8737560" y="6356520"/>
-            <a:ext cx="2844360" cy="364680"/>
-          </a:xfrm>
-          <a:prstGeom prst="rect">
-            <a:avLst/>
-          </a:prstGeom>
-          <a:noFill/>
-          <a:ln w="0">
-            <a:noFill/>
-          </a:ln>
-        </p:spPr>
-        <p:txBody>
-          <a:bodyPr numCol="1" spcCol="0" anchor="ctr">
+            <a:ext cx="2844000" cy="364320"/>
+          </a:xfrm>
+          <a:prstGeom prst="rect">
+            <a:avLst/>
+          </a:prstGeom>
+          <a:noFill/>
+          <a:ln w="0">
+            <a:noFill/>
+          </a:ln>
+        </p:spPr>
+        <p:txBody>
+          <a:bodyPr numCol="1" spcCol="0" lIns="90000" rIns="90000" tIns="45000" bIns="45000" anchor="ctr">
             <a:noAutofit/>
           </a:bodyPr>
           <a:lstStyle>
@@ -8386,7 +8128,7 @@
               </a:lnSpc>
               <a:buNone/>
             </a:pPr>
-            <a:fld id="{01BB408C-2830-4462-AB85-262E5B5D8DBE}" type="slidenum">
+            <a:fld id="{A9F5B8B2-0A9F-46A6-95E2-0DA923BB5324}" type="slidenum">
               <a:rPr b="1" lang="en-US" sz="1200" spc="-1" strike="noStrike">
                 <a:solidFill>
                   <a:srgbClr val="ffffff"/>
@@ -8415,18 +8157,18 @@
         <p:spPr>
           <a:xfrm>
             <a:off x="4648320" y="6356520"/>
-            <a:ext cx="3203640" cy="364680"/>
-          </a:xfrm>
-          <a:prstGeom prst="rect">
-            <a:avLst/>
-          </a:prstGeom>
-          <a:noFill/>
-          <a:ln w="0">
-            <a:noFill/>
-          </a:ln>
-        </p:spPr>
-        <p:txBody>
-          <a:bodyPr anchor="ctr">
+            <a:ext cx="3203280" cy="364320"/>
+          </a:xfrm>
+          <a:prstGeom prst="rect">
+            <a:avLst/>
+          </a:prstGeom>
+          <a:noFill/>
+          <a:ln w="0">
+            <a:noFill/>
+          </a:ln>
+        </p:spPr>
+        <p:txBody>
+          <a:bodyPr lIns="90000" rIns="90000" tIns="45000" bIns="45000" anchor="ctr">
             <a:noAutofit/>
           </a:bodyPr>
           <a:lstStyle>
@@ -8474,7 +8216,7 @@
         <p:spPr>
           <a:xfrm>
             <a:off x="329760" y="252360"/>
-            <a:ext cx="1251360" cy="807120"/>
+            <a:ext cx="1251000" cy="806760"/>
           </a:xfrm>
           <a:prstGeom prst="ellipse">
             <a:avLst/>
@@ -8541,7 +8283,7 @@
         <p:spPr>
           <a:xfrm>
             <a:off x="9780120" y="1440"/>
-            <a:ext cx="2249640" cy="1062000"/>
+            <a:ext cx="2249280" cy="1061640"/>
           </a:xfrm>
           <a:prstGeom prst="rect">
             <a:avLst/>
@@ -8590,7 +8332,7 @@
         <p:spPr>
           <a:xfrm>
             <a:off x="0" y="6354720"/>
-            <a:ext cx="12191760" cy="502920"/>
+            <a:ext cx="12191400" cy="502560"/>
           </a:xfrm>
           <a:prstGeom prst="rect">
             <a:avLst/>
@@ -8629,7 +8371,7 @@
         <p:spPr>
           <a:xfrm>
             <a:off x="609480" y="-47520"/>
-            <a:ext cx="10972440" cy="1142640"/>
+            <a:ext cx="10972080" cy="1142280"/>
           </a:xfrm>
           <a:prstGeom prst="rect">
             <a:avLst/>
@@ -8640,7 +8382,7 @@
           </a:ln>
         </p:spPr>
         <p:txBody>
-          <a:bodyPr numCol="1" spcCol="0" anchor="ctr">
+          <a:bodyPr numCol="1" spcCol="0" lIns="90000" rIns="90000" tIns="45000" bIns="45000" anchor="ctr">
             <a:noAutofit/>
           </a:bodyPr>
           <a:p>
@@ -8660,11 +8402,8 @@
               </a:rPr>
               <a:t>FEASIBILITY AND VIABILITY</a:t>
             </a:r>
-            <a:endParaRPr b="0" lang="en-US" sz="3600" spc="-1" strike="noStrike">
-              <a:solidFill>
-                <a:srgbClr val="000000"/>
-              </a:solidFill>
-              <a:latin typeface="Calibri"/>
+            <a:endParaRPr b="0" lang="en-IN" sz="3600" spc="-1" strike="noStrike">
+              <a:latin typeface="Arial"/>
             </a:endParaRPr>
           </a:p>
         </p:txBody>
@@ -8678,7 +8417,7 @@
         <p:spPr>
           <a:xfrm>
             <a:off x="609480" y="2533680"/>
-            <a:ext cx="9384840" cy="1369440"/>
+            <a:ext cx="9384480" cy="1369440"/>
           </a:xfrm>
           <a:prstGeom prst="rect">
             <a:avLst/>
@@ -8788,18 +8527,18 @@
         <p:spPr>
           <a:xfrm>
             <a:off x="8737560" y="6356520"/>
-            <a:ext cx="2844360" cy="364680"/>
-          </a:xfrm>
-          <a:prstGeom prst="rect">
-            <a:avLst/>
-          </a:prstGeom>
-          <a:noFill/>
-          <a:ln w="0">
-            <a:noFill/>
-          </a:ln>
-        </p:spPr>
-        <p:txBody>
-          <a:bodyPr numCol="1" spcCol="0" anchor="ctr">
+            <a:ext cx="2844000" cy="364320"/>
+          </a:xfrm>
+          <a:prstGeom prst="rect">
+            <a:avLst/>
+          </a:prstGeom>
+          <a:noFill/>
+          <a:ln w="0">
+            <a:noFill/>
+          </a:ln>
+        </p:spPr>
+        <p:txBody>
+          <a:bodyPr numCol="1" spcCol="0" lIns="90000" rIns="90000" tIns="45000" bIns="45000" anchor="ctr">
             <a:noAutofit/>
           </a:bodyPr>
           <a:lstStyle>
@@ -8830,7 +8569,7 @@
                 <a:tab algn="l" pos="0"/>
               </a:tabLst>
             </a:pPr>
-            <a:fld id="{FB16C4EB-3E1A-4C5C-AE29-A303AAE2E040}" type="slidenum">
+            <a:fld id="{097693EE-CEEE-4A5E-A0BE-F807D81B4391}" type="slidenum">
               <a:rPr b="1" lang="en-US" sz="1200" spc="-1" strike="noStrike">
                 <a:solidFill>
                   <a:srgbClr val="ffffff"/>
@@ -8859,18 +8598,18 @@
         <p:spPr>
           <a:xfrm>
             <a:off x="4648320" y="6356520"/>
-            <a:ext cx="3203640" cy="364680"/>
-          </a:xfrm>
-          <a:prstGeom prst="rect">
-            <a:avLst/>
-          </a:prstGeom>
-          <a:noFill/>
-          <a:ln w="0">
-            <a:noFill/>
-          </a:ln>
-        </p:spPr>
-        <p:txBody>
-          <a:bodyPr anchor="ctr">
+            <a:ext cx="3203280" cy="364320"/>
+          </a:xfrm>
+          <a:prstGeom prst="rect">
+            <a:avLst/>
+          </a:prstGeom>
+          <a:noFill/>
+          <a:ln w="0">
+            <a:noFill/>
+          </a:ln>
+        </p:spPr>
+        <p:txBody>
+          <a:bodyPr lIns="90000" rIns="90000" tIns="45000" bIns="45000" anchor="ctr">
             <a:noAutofit/>
           </a:bodyPr>
           <a:lstStyle>
@@ -8924,7 +8663,7 @@
         <p:spPr>
           <a:xfrm>
             <a:off x="329760" y="252360"/>
-            <a:ext cx="1251360" cy="807120"/>
+            <a:ext cx="1251000" cy="806760"/>
           </a:xfrm>
           <a:prstGeom prst="ellipse">
             <a:avLst/>
@@ -8991,7 +8730,7 @@
         <p:spPr>
           <a:xfrm>
             <a:off x="9780120" y="1440"/>
-            <a:ext cx="2249640" cy="1062000"/>
+            <a:ext cx="2249280" cy="1061640"/>
           </a:xfrm>
           <a:prstGeom prst="rect">
             <a:avLst/>
@@ -9040,7 +8779,7 @@
         <p:spPr>
           <a:xfrm>
             <a:off x="0" y="6354720"/>
-            <a:ext cx="12191760" cy="502920"/>
+            <a:ext cx="12191400" cy="502560"/>
           </a:xfrm>
           <a:prstGeom prst="rect">
             <a:avLst/>
@@ -9079,7 +8818,7 @@
         <p:spPr>
           <a:xfrm>
             <a:off x="609480" y="-47520"/>
-            <a:ext cx="10972440" cy="1142640"/>
+            <a:ext cx="10972080" cy="1142280"/>
           </a:xfrm>
           <a:prstGeom prst="rect">
             <a:avLst/>
@@ -9090,7 +8829,7 @@
           </a:ln>
         </p:spPr>
         <p:txBody>
-          <a:bodyPr numCol="1" spcCol="0" anchor="ctr">
+          <a:bodyPr numCol="1" spcCol="0" lIns="90000" rIns="90000" tIns="45000" bIns="45000" anchor="ctr">
             <a:noAutofit/>
           </a:bodyPr>
           <a:p>
@@ -9110,11 +8849,8 @@
               </a:rPr>
               <a:t>IMPACT AND BENEFITS</a:t>
             </a:r>
-            <a:endParaRPr b="0" lang="en-US" sz="3600" spc="-1" strike="noStrike">
-              <a:solidFill>
-                <a:srgbClr val="000000"/>
-              </a:solidFill>
-              <a:latin typeface="Calibri"/>
+            <a:endParaRPr b="0" lang="en-IN" sz="3600" spc="-1" strike="noStrike">
+              <a:latin typeface="Arial"/>
             </a:endParaRPr>
           </a:p>
         </p:txBody>
@@ -9128,7 +8864,7 @@
         <p:spPr>
           <a:xfrm>
             <a:off x="609480" y="2533680"/>
-            <a:ext cx="9384840" cy="1369440"/>
+            <a:ext cx="9384480" cy="1369440"/>
           </a:xfrm>
           <a:prstGeom prst="rect">
             <a:avLst/>
@@ -9213,18 +8949,18 @@
         <p:spPr>
           <a:xfrm>
             <a:off x="8737560" y="6356520"/>
-            <a:ext cx="2844360" cy="364680"/>
-          </a:xfrm>
-          <a:prstGeom prst="rect">
-            <a:avLst/>
-          </a:prstGeom>
-          <a:noFill/>
-          <a:ln w="0">
-            <a:noFill/>
-          </a:ln>
-        </p:spPr>
-        <p:txBody>
-          <a:bodyPr numCol="1" spcCol="0" anchor="ctr">
+            <a:ext cx="2844000" cy="364320"/>
+          </a:xfrm>
+          <a:prstGeom prst="rect">
+            <a:avLst/>
+          </a:prstGeom>
+          <a:noFill/>
+          <a:ln w="0">
+            <a:noFill/>
+          </a:ln>
+        </p:spPr>
+        <p:txBody>
+          <a:bodyPr numCol="1" spcCol="0" lIns="90000" rIns="90000" tIns="45000" bIns="45000" anchor="ctr">
             <a:noAutofit/>
           </a:bodyPr>
           <a:lstStyle>
@@ -9255,7 +8991,7 @@
                 <a:tab algn="l" pos="0"/>
               </a:tabLst>
             </a:pPr>
-            <a:fld id="{FF3A33B7-CA07-4CF3-AABC-D69FDCA0AE8C}" type="slidenum">
+            <a:fld id="{9F5A9CC5-A8F1-498D-A163-D390EB6C17B3}" type="slidenum">
               <a:rPr b="1" lang="en-US" sz="1200" spc="-1" strike="noStrike">
                 <a:solidFill>
                   <a:srgbClr val="ffffff"/>
@@ -9284,18 +9020,18 @@
         <p:spPr>
           <a:xfrm>
             <a:off x="4648320" y="6356520"/>
-            <a:ext cx="3203640" cy="364680"/>
-          </a:xfrm>
-          <a:prstGeom prst="rect">
-            <a:avLst/>
-          </a:prstGeom>
-          <a:noFill/>
-          <a:ln w="0">
-            <a:noFill/>
-          </a:ln>
-        </p:spPr>
-        <p:txBody>
-          <a:bodyPr anchor="ctr">
+            <a:ext cx="3203280" cy="364320"/>
+          </a:xfrm>
+          <a:prstGeom prst="rect">
+            <a:avLst/>
+          </a:prstGeom>
+          <a:noFill/>
+          <a:ln w="0">
+            <a:noFill/>
+          </a:ln>
+        </p:spPr>
+        <p:txBody>
+          <a:bodyPr lIns="90000" rIns="90000" tIns="45000" bIns="45000" anchor="ctr">
             <a:noAutofit/>
           </a:bodyPr>
           <a:lstStyle>
@@ -9349,7 +9085,7 @@
         <p:spPr>
           <a:xfrm>
             <a:off x="329760" y="252360"/>
-            <a:ext cx="1251360" cy="807120"/>
+            <a:ext cx="1251000" cy="806760"/>
           </a:xfrm>
           <a:prstGeom prst="ellipse">
             <a:avLst/>
@@ -9416,7 +9152,7 @@
         <p:spPr>
           <a:xfrm>
             <a:off x="9780120" y="1440"/>
-            <a:ext cx="2249640" cy="1062000"/>
+            <a:ext cx="2249280" cy="1061640"/>
           </a:xfrm>
           <a:prstGeom prst="rect">
             <a:avLst/>
@@ -9465,7 +9201,7 @@
         <p:spPr>
           <a:xfrm>
             <a:off x="0" y="6354720"/>
-            <a:ext cx="12191760" cy="502920"/>
+            <a:ext cx="12191400" cy="502560"/>
           </a:xfrm>
           <a:prstGeom prst="rect">
             <a:avLst/>
@@ -9504,7 +9240,7 @@
         <p:spPr>
           <a:xfrm>
             <a:off x="609480" y="-47520"/>
-            <a:ext cx="10972440" cy="1142640"/>
+            <a:ext cx="10972080" cy="1142280"/>
           </a:xfrm>
           <a:prstGeom prst="rect">
             <a:avLst/>
@@ -9515,7 +9251,7 @@
           </a:ln>
         </p:spPr>
         <p:txBody>
-          <a:bodyPr numCol="1" spcCol="0" anchor="ctr">
+          <a:bodyPr numCol="1" spcCol="0" lIns="90000" rIns="90000" tIns="45000" bIns="45000" anchor="ctr">
             <a:noAutofit/>
           </a:bodyPr>
           <a:p>
@@ -9535,11 +9271,8 @@
               </a:rPr>
               <a:t>RESEARCH  AND REFERENCES</a:t>
             </a:r>
-            <a:endParaRPr b="0" lang="en-US" sz="3600" spc="-1" strike="noStrike">
-              <a:solidFill>
-                <a:srgbClr val="000000"/>
-              </a:solidFill>
-              <a:latin typeface="Calibri"/>
+            <a:endParaRPr b="0" lang="en-IN" sz="3600" spc="-1" strike="noStrike">
+              <a:latin typeface="Arial"/>
             </a:endParaRPr>
           </a:p>
         </p:txBody>
@@ -9553,7 +9286,7 @@
         <p:spPr>
           <a:xfrm>
             <a:off x="609480" y="2795400"/>
-            <a:ext cx="9384840" cy="516240"/>
+            <a:ext cx="9384480" cy="516240"/>
           </a:xfrm>
           <a:prstGeom prst="rect">
             <a:avLst/>
@@ -9613,18 +9346,18 @@
         <p:spPr>
           <a:xfrm>
             <a:off x="8737560" y="6356520"/>
-            <a:ext cx="2844360" cy="364680"/>
-          </a:xfrm>
-          <a:prstGeom prst="rect">
-            <a:avLst/>
-          </a:prstGeom>
-          <a:noFill/>
-          <a:ln w="0">
-            <a:noFill/>
-          </a:ln>
-        </p:spPr>
-        <p:txBody>
-          <a:bodyPr numCol="1" spcCol="0" anchor="ctr">
+            <a:ext cx="2844000" cy="364320"/>
+          </a:xfrm>
+          <a:prstGeom prst="rect">
+            <a:avLst/>
+          </a:prstGeom>
+          <a:noFill/>
+          <a:ln w="0">
+            <a:noFill/>
+          </a:ln>
+        </p:spPr>
+        <p:txBody>
+          <a:bodyPr numCol="1" spcCol="0" lIns="90000" rIns="90000" tIns="45000" bIns="45000" anchor="ctr">
             <a:noAutofit/>
           </a:bodyPr>
           <a:lstStyle>
@@ -9655,7 +9388,7 @@
                 <a:tab algn="l" pos="0"/>
               </a:tabLst>
             </a:pPr>
-            <a:fld id="{46CB3F99-4B05-42FC-A67E-F1C5EBD31FF9}" type="slidenum">
+            <a:fld id="{E9691297-C733-46DE-92D3-A0DC007ABC93}" type="slidenum">
               <a:rPr b="1" lang="en-US" sz="1200" spc="-1" strike="noStrike">
                 <a:solidFill>
                   <a:srgbClr val="ffffff"/>
@@ -9684,18 +9417,18 @@
         <p:spPr>
           <a:xfrm>
             <a:off x="4648320" y="6356520"/>
-            <a:ext cx="3203640" cy="364680"/>
-          </a:xfrm>
-          <a:prstGeom prst="rect">
-            <a:avLst/>
-          </a:prstGeom>
-          <a:noFill/>
-          <a:ln w="0">
-            <a:noFill/>
-          </a:ln>
-        </p:spPr>
-        <p:txBody>
-          <a:bodyPr anchor="ctr">
+            <a:ext cx="3203280" cy="364320"/>
+          </a:xfrm>
+          <a:prstGeom prst="rect">
+            <a:avLst/>
+          </a:prstGeom>
+          <a:noFill/>
+          <a:ln w="0">
+            <a:noFill/>
+          </a:ln>
+        </p:spPr>
+        <p:txBody>
+          <a:bodyPr lIns="90000" rIns="90000" tIns="45000" bIns="45000" anchor="ctr">
             <a:noAutofit/>
           </a:bodyPr>
           <a:lstStyle>
@@ -9749,7 +9482,7 @@
         <p:spPr>
           <a:xfrm>
             <a:off x="329760" y="252360"/>
-            <a:ext cx="1251360" cy="807120"/>
+            <a:ext cx="1251000" cy="806760"/>
           </a:xfrm>
           <a:prstGeom prst="ellipse">
             <a:avLst/>
@@ -9816,7 +9549,7 @@
         <p:spPr>
           <a:xfrm>
             <a:off x="9780120" y="1440"/>
-            <a:ext cx="2249640" cy="1062000"/>
+            <a:ext cx="2249280" cy="1061640"/>
           </a:xfrm>
           <a:prstGeom prst="rect">
             <a:avLst/>
@@ -9865,7 +9598,7 @@
         <p:spPr>
           <a:xfrm>
             <a:off x="0" y="6354720"/>
-            <a:ext cx="12191760" cy="502920"/>
+            <a:ext cx="12191400" cy="502560"/>
           </a:xfrm>
           <a:prstGeom prst="rect">
             <a:avLst/>
@@ -9904,18 +9637,18 @@
         <p:spPr>
           <a:xfrm>
             <a:off x="8737560" y="6356520"/>
-            <a:ext cx="2844360" cy="364680"/>
-          </a:xfrm>
-          <a:prstGeom prst="rect">
-            <a:avLst/>
-          </a:prstGeom>
-          <a:noFill/>
-          <a:ln w="0">
-            <a:noFill/>
-          </a:ln>
-        </p:spPr>
-        <p:txBody>
-          <a:bodyPr numCol="1" spcCol="0" anchor="ctr">
+            <a:ext cx="2844000" cy="364320"/>
+          </a:xfrm>
+          <a:prstGeom prst="rect">
+            <a:avLst/>
+          </a:prstGeom>
+          <a:noFill/>
+          <a:ln w="0">
+            <a:noFill/>
+          </a:ln>
+        </p:spPr>
+        <p:txBody>
+          <a:bodyPr numCol="1" spcCol="0" lIns="90000" rIns="90000" tIns="45000" bIns="45000" anchor="ctr">
             <a:noAutofit/>
           </a:bodyPr>
           <a:lstStyle>
@@ -9946,7 +9679,7 @@
                 <a:tab algn="l" pos="0"/>
               </a:tabLst>
             </a:pPr>
-            <a:fld id="{30A01578-89B3-4D34-81AC-93382AA0F4AE}" type="slidenum">
+            <a:fld id="{D09B2206-7291-430D-9054-CC98CCCB011F}" type="slidenum">
               <a:rPr b="1" lang="en-US" sz="1200" spc="-1" strike="noStrike">
                 <a:solidFill>
                   <a:srgbClr val="ffffff"/>
@@ -9975,18 +9708,18 @@
         <p:spPr>
           <a:xfrm>
             <a:off x="4648320" y="6356520"/>
-            <a:ext cx="3203640" cy="364680"/>
-          </a:xfrm>
-          <a:prstGeom prst="rect">
-            <a:avLst/>
-          </a:prstGeom>
-          <a:noFill/>
-          <a:ln w="0">
-            <a:noFill/>
-          </a:ln>
-        </p:spPr>
-        <p:txBody>
-          <a:bodyPr anchor="ctr">
+            <a:ext cx="3203280" cy="364320"/>
+          </a:xfrm>
+          <a:prstGeom prst="rect">
+            <a:avLst/>
+          </a:prstGeom>
+          <a:noFill/>
+          <a:ln w="0">
+            <a:noFill/>
+          </a:ln>
+        </p:spPr>
+        <p:txBody>
+          <a:bodyPr lIns="90000" rIns="90000" tIns="45000" bIns="45000" anchor="ctr">
             <a:noAutofit/>
           </a:bodyPr>
           <a:lstStyle>
@@ -10040,7 +9773,7 @@
         <p:spPr>
           <a:xfrm>
             <a:off x="0" y="1791000"/>
-            <a:ext cx="12191760" cy="4318920"/>
+            <a:ext cx="12191400" cy="4318560"/>
           </a:xfrm>
           <a:prstGeom prst="round2DiagRect">
             <a:avLst>
@@ -10090,7 +9823,7 @@
         <p:spPr>
           <a:xfrm>
             <a:off x="367920" y="1915560"/>
-            <a:ext cx="11764440" cy="4070160"/>
+            <a:ext cx="11764080" cy="4069800"/>
           </a:xfrm>
           <a:prstGeom prst="rect">
             <a:avLst/>
@@ -10107,7 +9840,7 @@
           <a:fontRef idx="minor"/>
         </p:style>
         <p:txBody>
-          <a:bodyPr anchor="t">
+          <a:bodyPr lIns="90000" rIns="90000" tIns="45000" bIns="45000" anchor="t">
             <a:noAutofit/>
           </a:bodyPr>
           <a:p>
@@ -10313,7 +10046,7 @@
             </a:endParaRPr>
           </a:p>
           <a:p>
-            <a:pPr algn="just">
+            <a:pPr marL="514440" indent="-349920" algn="just">
               <a:lnSpc>
                 <a:spcPct val="90000"/>
               </a:lnSpc>
@@ -10367,7 +10100,7 @@
         <p:spPr>
           <a:xfrm>
             <a:off x="1393200" y="106920"/>
-            <a:ext cx="8410320" cy="638280"/>
+            <a:ext cx="8409960" cy="638280"/>
           </a:xfrm>
           <a:prstGeom prst="rect">
             <a:avLst/>
@@ -10419,7 +10152,7 @@
         <p:spPr>
           <a:xfrm>
             <a:off x="602280" y="1181880"/>
-            <a:ext cx="9557280" cy="336240"/>
+            <a:ext cx="9556920" cy="336240"/>
           </a:xfrm>
           <a:prstGeom prst="rect">
             <a:avLst/>
@@ -10478,7 +10211,7 @@
         <p:spPr>
           <a:xfrm>
             <a:off x="9780120" y="1440"/>
-            <a:ext cx="2249640" cy="1062000"/>
+            <a:ext cx="2249280" cy="1061640"/>
           </a:xfrm>
           <a:prstGeom prst="rect">
             <a:avLst/>

--- a/SIH26036-presentation.pptx
+++ b/SIH26036-presentation.pptx
@@ -299,7 +299,7 @@
             <a:pPr algn="r">
               <a:buNone/>
             </a:pPr>
-            <a:fld id="{732469A8-E0D8-4322-A5D2-BDFDFB79A810}" type="slidenum">
+            <a:fld id="{2CBEB42E-CD77-46CD-8EB9-D861ACD354C3}" type="slidenum">
               <a:rPr b="0" lang="en-IN" sz="1400" spc="-1" strike="noStrike">
                 <a:latin typeface="Times New Roman"/>
               </a:rPr>
@@ -347,7 +347,7 @@
         <p:spPr>
           <a:xfrm>
             <a:off x="380880" y="685800"/>
-            <a:ext cx="6095160" cy="3428280"/>
+            <a:ext cx="6094800" cy="3427920"/>
           </a:xfrm>
           <a:prstGeom prst="rect">
             <a:avLst/>
@@ -370,7 +370,7 @@
         <p:spPr>
           <a:xfrm>
             <a:off x="685800" y="4343400"/>
-            <a:ext cx="5485680" cy="4114080"/>
+            <a:ext cx="5485320" cy="4113720"/>
           </a:xfrm>
           <a:prstGeom prst="rect">
             <a:avLst/>
@@ -404,7 +404,7 @@
         <p:spPr>
           <a:xfrm>
             <a:off x="3884760" y="8685360"/>
-            <a:ext cx="2971080" cy="456480"/>
+            <a:ext cx="2970720" cy="456120"/>
           </a:xfrm>
           <a:prstGeom prst="rect">
             <a:avLst/>
@@ -436,7 +436,7 @@
               </a:lnSpc>
               <a:buNone/>
             </a:pPr>
-            <a:fld id="{DEAF4F63-7127-4137-A9C0-619308E5E47E}" type="slidenum">
+            <a:fld id="{ED7852B1-F119-4FEE-AC10-03D9BEF07B87}" type="slidenum">
               <a:rPr b="0" lang="en-US" sz="1200" spc="-1" strike="noStrike">
                 <a:latin typeface="Times New Roman"/>
               </a:rPr>
@@ -483,7 +483,7 @@
         <p:spPr>
           <a:xfrm>
             <a:off x="380880" y="685800"/>
-            <a:ext cx="6095160" cy="3428280"/>
+            <a:ext cx="6094800" cy="3427920"/>
           </a:xfrm>
           <a:prstGeom prst="rect">
             <a:avLst/>
@@ -506,7 +506,7 @@
         <p:spPr>
           <a:xfrm>
             <a:off x="685800" y="4343400"/>
-            <a:ext cx="5485680" cy="4114080"/>
+            <a:ext cx="5485320" cy="4113720"/>
           </a:xfrm>
           <a:prstGeom prst="rect">
             <a:avLst/>
@@ -540,7 +540,7 @@
         <p:spPr>
           <a:xfrm>
             <a:off x="3884760" y="8685360"/>
-            <a:ext cx="2971080" cy="456480"/>
+            <a:ext cx="2970720" cy="456120"/>
           </a:xfrm>
           <a:prstGeom prst="rect">
             <a:avLst/>
@@ -572,7 +572,7 @@
               </a:lnSpc>
               <a:buNone/>
             </a:pPr>
-            <a:fld id="{A4291344-1E84-4C4C-84AC-FCA0E565A5DC}" type="slidenum">
+            <a:fld id="{EE8B9DF8-E473-44D2-8239-4CBA2E51694C}" type="slidenum">
               <a:rPr b="0" lang="en-US" sz="1200" spc="-1" strike="noStrike">
                 <a:latin typeface="Times New Roman"/>
               </a:rPr>
@@ -619,7 +619,7 @@
         <p:spPr>
           <a:xfrm>
             <a:off x="380880" y="685800"/>
-            <a:ext cx="6095160" cy="3428280"/>
+            <a:ext cx="6094800" cy="3427920"/>
           </a:xfrm>
           <a:prstGeom prst="rect">
             <a:avLst/>
@@ -642,7 +642,7 @@
         <p:spPr>
           <a:xfrm>
             <a:off x="685800" y="4343400"/>
-            <a:ext cx="5485680" cy="4114080"/>
+            <a:ext cx="5485320" cy="4113720"/>
           </a:xfrm>
           <a:prstGeom prst="rect">
             <a:avLst/>
@@ -676,7 +676,7 @@
         <p:spPr>
           <a:xfrm>
             <a:off x="3884760" y="8685360"/>
-            <a:ext cx="2971080" cy="456480"/>
+            <a:ext cx="2970720" cy="456120"/>
           </a:xfrm>
           <a:prstGeom prst="rect">
             <a:avLst/>
@@ -718,7 +718,7 @@
                 <a:tab algn="l" pos="0"/>
               </a:tabLst>
             </a:pPr>
-            <a:fld id="{2A14EAC9-B4F1-4AEA-8760-1C1146703B92}" type="slidenum">
+            <a:fld id="{8CC99B75-6C98-4613-95A4-A630DE0C91BD}" type="slidenum">
               <a:rPr b="0" lang="en-US" sz="1200" spc="-1" strike="noStrike">
                 <a:solidFill>
                   <a:srgbClr val="000000"/>
@@ -769,7 +769,7 @@
         <p:spPr>
           <a:xfrm>
             <a:off x="380880" y="685800"/>
-            <a:ext cx="6095160" cy="3428280"/>
+            <a:ext cx="6094800" cy="3427920"/>
           </a:xfrm>
           <a:prstGeom prst="rect">
             <a:avLst/>
@@ -792,7 +792,7 @@
         <p:spPr>
           <a:xfrm>
             <a:off x="685800" y="4343400"/>
-            <a:ext cx="5485680" cy="4114080"/>
+            <a:ext cx="5485320" cy="4113720"/>
           </a:xfrm>
           <a:prstGeom prst="rect">
             <a:avLst/>
@@ -826,7 +826,7 @@
         <p:spPr>
           <a:xfrm>
             <a:off x="3884760" y="8685360"/>
-            <a:ext cx="2971080" cy="456480"/>
+            <a:ext cx="2970720" cy="456120"/>
           </a:xfrm>
           <a:prstGeom prst="rect">
             <a:avLst/>
@@ -868,7 +868,7 @@
                 <a:tab algn="l" pos="0"/>
               </a:tabLst>
             </a:pPr>
-            <a:fld id="{DF076DAD-EDDE-44A8-B600-5DC6702F93EE}" type="slidenum">
+            <a:fld id="{4B561FAB-3F60-472F-BE96-6E85CBF84C7D}" type="slidenum">
               <a:rPr b="0" lang="en-US" sz="1200" spc="-1" strike="noStrike">
                 <a:solidFill>
                   <a:srgbClr val="000000"/>
@@ -919,7 +919,7 @@
         <p:spPr>
           <a:xfrm>
             <a:off x="380880" y="685800"/>
-            <a:ext cx="6095160" cy="3428280"/>
+            <a:ext cx="6094800" cy="3427920"/>
           </a:xfrm>
           <a:prstGeom prst="rect">
             <a:avLst/>
@@ -942,7 +942,7 @@
         <p:spPr>
           <a:xfrm>
             <a:off x="685800" y="4343400"/>
-            <a:ext cx="5485680" cy="4114080"/>
+            <a:ext cx="5485320" cy="4113720"/>
           </a:xfrm>
           <a:prstGeom prst="rect">
             <a:avLst/>
@@ -976,7 +976,7 @@
         <p:spPr>
           <a:xfrm>
             <a:off x="3884760" y="8685360"/>
-            <a:ext cx="2971080" cy="456480"/>
+            <a:ext cx="2970720" cy="456120"/>
           </a:xfrm>
           <a:prstGeom prst="rect">
             <a:avLst/>
@@ -1018,7 +1018,7 @@
                 <a:tab algn="l" pos="0"/>
               </a:tabLst>
             </a:pPr>
-            <a:fld id="{9FD06F02-50EA-4541-8F8E-D3548DD2BF83}" type="slidenum">
+            <a:fld id="{267E55A3-0822-4D0C-B4BC-7CC6E9F3389D}" type="slidenum">
               <a:rPr b="0" lang="en-US" sz="1200" spc="-1" strike="noStrike">
                 <a:solidFill>
                   <a:srgbClr val="000000"/>
@@ -1069,7 +1069,7 @@
         <p:spPr>
           <a:xfrm>
             <a:off x="380880" y="685800"/>
-            <a:ext cx="6095160" cy="3428280"/>
+            <a:ext cx="6094800" cy="3427920"/>
           </a:xfrm>
           <a:prstGeom prst="rect">
             <a:avLst/>
@@ -1092,7 +1092,7 @@
         <p:spPr>
           <a:xfrm>
             <a:off x="685800" y="4343400"/>
-            <a:ext cx="5485680" cy="4114080"/>
+            <a:ext cx="5485320" cy="4113720"/>
           </a:xfrm>
           <a:prstGeom prst="rect">
             <a:avLst/>
@@ -1126,7 +1126,7 @@
         <p:spPr>
           <a:xfrm>
             <a:off x="3884760" y="8685360"/>
-            <a:ext cx="2971080" cy="456480"/>
+            <a:ext cx="2970720" cy="456120"/>
           </a:xfrm>
           <a:prstGeom prst="rect">
             <a:avLst/>
@@ -1168,7 +1168,7 @@
                 <a:tab algn="l" pos="0"/>
               </a:tabLst>
             </a:pPr>
-            <a:fld id="{0E4FCC4A-C798-4133-91DB-40A8CD33A432}" type="slidenum">
+            <a:fld id="{17DC6A1F-7929-4484-9330-67703A7FADF1}" type="slidenum">
               <a:rPr b="0" lang="en-US" sz="1200" spc="-1" strike="noStrike">
                 <a:solidFill>
                   <a:srgbClr val="000000"/>
@@ -1240,7 +1240,7 @@
         <p:txBody>
           <a:bodyPr/>
           <a:p>
-            <a:fld id="{65F7E310-6345-4BA7-996A-5B77E89F2564}" type="slidenum">
+            <a:fld id="{22C34302-17A9-4E36-9CEF-E67E70B1CFFA}" type="slidenum">
               <a:t>&lt;#&gt;</a:t>
             </a:fld>
           </a:p>
@@ -1428,7 +1428,7 @@
         <p:txBody>
           <a:bodyPr/>
           <a:p>
-            <a:fld id="{B865A735-1ACD-4143-B5C3-80D2F6CF0583}" type="slidenum">
+            <a:fld id="{B7DF235F-9E31-4721-AF82-380EA50A32EF}" type="slidenum">
               <a:t>&lt;#&gt;</a:t>
             </a:fld>
           </a:p>
@@ -1684,7 +1684,7 @@
         <p:txBody>
           <a:bodyPr/>
           <a:p>
-            <a:fld id="{1FD41B61-CDA7-4431-BE0D-5B1B95FAF9D9}" type="slidenum">
+            <a:fld id="{C70F871E-100D-410B-8A63-4702E0C9C6FD}" type="slidenum">
               <a:t>&lt;#&gt;</a:t>
             </a:fld>
           </a:p>
@@ -2008,7 +2008,7 @@
         <p:txBody>
           <a:bodyPr/>
           <a:p>
-            <a:fld id="{B618DF0B-3F2E-4D0F-935D-A28F48B6BDFA}" type="slidenum">
+            <a:fld id="{17F705E9-0577-4474-8CD2-6319FE07C2D4}" type="slidenum">
               <a:t>&lt;#&gt;</a:t>
             </a:fld>
           </a:p>
@@ -2091,7 +2091,7 @@
         <p:txBody>
           <a:bodyPr/>
           <a:p>
-            <a:fld id="{2A28A85E-2714-4F97-A8E9-88140BD3E9C1}" type="slidenum">
+            <a:fld id="{A169EF6E-70DC-4EF8-9159-DE0428DCF5B4}" type="slidenum">
               <a:t>&lt;#&gt;</a:t>
             </a:fld>
           </a:p>
@@ -2248,7 +2248,7 @@
         <p:txBody>
           <a:bodyPr/>
           <a:p>
-            <a:fld id="{4B1B2840-C184-453F-985B-2470A125B4F4}" type="slidenum">
+            <a:fld id="{D0C06266-91ED-42C6-B0FB-0703F9FF5056}" type="slidenum">
               <a:t>&lt;#&gt;</a:t>
             </a:fld>
           </a:p>
@@ -2402,7 +2402,7 @@
         <p:txBody>
           <a:bodyPr/>
           <a:p>
-            <a:fld id="{62FDA0B4-6558-4A00-9E85-CD8012274FBE}" type="slidenum">
+            <a:fld id="{89106F82-924C-472C-8FE8-9295A1D58FCE}" type="slidenum">
               <a:t>&lt;#&gt;</a:t>
             </a:fld>
           </a:p>
@@ -2590,7 +2590,7 @@
         <p:txBody>
           <a:bodyPr/>
           <a:p>
-            <a:fld id="{18FE9E76-6990-40F3-81BC-B579DD1622BB}" type="slidenum">
+            <a:fld id="{9565E24A-B90A-461E-95AD-0B78A8A97E56}" type="slidenum">
               <a:t>&lt;#&gt;</a:t>
             </a:fld>
           </a:p>
@@ -2710,7 +2710,7 @@
         <p:txBody>
           <a:bodyPr/>
           <a:p>
-            <a:fld id="{FA39AD95-5F14-4A25-8E76-ED050B00D34B}" type="slidenum">
+            <a:fld id="{6FEB2857-E0C9-4A76-92A2-2A1DF4045005}" type="slidenum">
               <a:t>&lt;#&gt;</a:t>
             </a:fld>
           </a:p>
@@ -2830,7 +2830,7 @@
         <p:txBody>
           <a:bodyPr/>
           <a:p>
-            <a:fld id="{AB9D064C-A9E4-43FB-B542-1BDE50F9190E}" type="slidenum">
+            <a:fld id="{5E1DC8DE-FBAA-4CC1-842C-B06D054242F5}" type="slidenum">
               <a:t>&lt;#&gt;</a:t>
             </a:fld>
           </a:p>
@@ -3052,7 +3052,7 @@
         <p:txBody>
           <a:bodyPr/>
           <a:p>
-            <a:fld id="{C9E3FC4E-D2A0-4412-AEB6-3847E4895D90}" type="slidenum">
+            <a:fld id="{7DEA52B8-4F1E-4483-BF3B-283CD622EF44}" type="slidenum">
               <a:t>&lt;#&gt;</a:t>
             </a:fld>
           </a:p>
@@ -3209,7 +3209,7 @@
         <p:txBody>
           <a:bodyPr/>
           <a:p>
-            <a:fld id="{39CA47B4-CF1C-449F-B3CD-7F0BCA7A9304}" type="slidenum">
+            <a:fld id="{9ED0991D-C8B3-480D-934D-4090E60542EF}" type="slidenum">
               <a:t>&lt;#&gt;</a:t>
             </a:fld>
           </a:p>
@@ -3431,7 +3431,7 @@
         <p:txBody>
           <a:bodyPr/>
           <a:p>
-            <a:fld id="{1C743865-1505-4F78-AEF1-4676CE9B553D}" type="slidenum">
+            <a:fld id="{94CBDFA4-0A26-4FFB-BEDC-1AE0DD027EE5}" type="slidenum">
               <a:t>&lt;#&gt;</a:t>
             </a:fld>
           </a:p>
@@ -3653,7 +3653,7 @@
         <p:txBody>
           <a:bodyPr/>
           <a:p>
-            <a:fld id="{372BC844-5CE3-44ED-8521-9D1333FCABFA}" type="slidenum">
+            <a:fld id="{7A7745DA-F0BF-4E10-9BB6-8FD3A897065B}" type="slidenum">
               <a:t>&lt;#&gt;</a:t>
             </a:fld>
           </a:p>
@@ -3841,7 +3841,7 @@
         <p:txBody>
           <a:bodyPr/>
           <a:p>
-            <a:fld id="{034879EF-621C-46BC-A716-82794F1C06E3}" type="slidenum">
+            <a:fld id="{8074E612-90C9-46DD-AC26-2090A9C5358C}" type="slidenum">
               <a:t>&lt;#&gt;</a:t>
             </a:fld>
           </a:p>
@@ -4097,7 +4097,7 @@
         <p:txBody>
           <a:bodyPr/>
           <a:p>
-            <a:fld id="{99B8F268-907A-4752-AA29-D611D4940100}" type="slidenum">
+            <a:fld id="{1BBF0C62-9994-4B0D-B5EE-AFCC93A1BDDB}" type="slidenum">
               <a:t>&lt;#&gt;</a:t>
             </a:fld>
           </a:p>
@@ -4421,7 +4421,7 @@
         <p:txBody>
           <a:bodyPr/>
           <a:p>
-            <a:fld id="{13911F7E-D669-4CCC-A452-552A3EA5309E}" type="slidenum">
+            <a:fld id="{7676D1E2-BD9A-48C5-83DF-0CA18D7E0A49}" type="slidenum">
               <a:t>&lt;#&gt;</a:t>
             </a:fld>
           </a:p>
@@ -4575,7 +4575,7 @@
         <p:txBody>
           <a:bodyPr/>
           <a:p>
-            <a:fld id="{171712D0-DEE9-4DC6-9712-772048DB594E}" type="slidenum">
+            <a:fld id="{89E3D7E6-88C1-435E-A047-EFA036103880}" type="slidenum">
               <a:t>&lt;#&gt;</a:t>
             </a:fld>
           </a:p>
@@ -4763,7 +4763,7 @@
         <p:txBody>
           <a:bodyPr/>
           <a:p>
-            <a:fld id="{1C688A46-3DCD-4836-BA3C-CA6FB6406E78}" type="slidenum">
+            <a:fld id="{57EC3FC0-A8A5-4587-9E68-4851DB7415AF}" type="slidenum">
               <a:t>&lt;#&gt;</a:t>
             </a:fld>
           </a:p>
@@ -4883,7 +4883,7 @@
         <p:txBody>
           <a:bodyPr/>
           <a:p>
-            <a:fld id="{AC9E3D16-EA35-42F4-B224-7AE590AB8BCE}" type="slidenum">
+            <a:fld id="{9CBAA6F9-139B-4AD2-9E92-94E1F194E096}" type="slidenum">
               <a:t>&lt;#&gt;</a:t>
             </a:fld>
           </a:p>
@@ -5003,7 +5003,7 @@
         <p:txBody>
           <a:bodyPr/>
           <a:p>
-            <a:fld id="{60A94C22-1398-4E50-A6F7-D9A1512ACE0E}" type="slidenum">
+            <a:fld id="{FC01A44D-B6D3-4946-88C3-23BBE3BEAC6D}" type="slidenum">
               <a:t>&lt;#&gt;</a:t>
             </a:fld>
           </a:p>
@@ -5225,7 +5225,7 @@
         <p:txBody>
           <a:bodyPr/>
           <a:p>
-            <a:fld id="{E8E8D7B0-6DF2-4131-BB4D-DA3E227741BF}" type="slidenum">
+            <a:fld id="{C954F9EB-528D-4396-86F9-5C9EC37DFACD}" type="slidenum">
               <a:t>&lt;#&gt;</a:t>
             </a:fld>
           </a:p>
@@ -5447,7 +5447,7 @@
         <p:txBody>
           <a:bodyPr/>
           <a:p>
-            <a:fld id="{2028CDAE-65B0-49FD-950A-E46AB06B6702}" type="slidenum">
+            <a:fld id="{E10A2A16-47CD-474A-AAC8-9B701937A53D}" type="slidenum">
               <a:t>&lt;#&gt;</a:t>
             </a:fld>
           </a:p>
@@ -5669,7 +5669,7 @@
         <p:txBody>
           <a:bodyPr/>
           <a:p>
-            <a:fld id="{5A7865F5-3CB2-4AFF-ABFF-B9D14F74C928}" type="slidenum">
+            <a:fld id="{C927F91B-478E-46DB-A81F-A683D8E8A74F}" type="slidenum">
               <a:t>&lt;#&gt;</a:t>
             </a:fld>
           </a:p>
@@ -5737,8 +5737,8 @@
         </p:nvSpPr>
         <p:spPr>
           <a:xfrm>
-            <a:off x="609480" y="-47520"/>
-            <a:ext cx="10972080" cy="1142280"/>
+            <a:off x="609480" y="273600"/>
+            <a:ext cx="10972080" cy="1144440"/>
           </a:xfrm>
           <a:prstGeom prst="rect">
             <a:avLst/>
@@ -5772,13 +5772,196 @@
             <a:spLocks noGrp="1"/>
           </p:cNvSpPr>
           <p:nvPr>
+            <p:ph type="body"/>
+          </p:nvPr>
+        </p:nvSpPr>
+        <p:spPr>
+          <a:xfrm>
+            <a:off x="609480" y="1604520"/>
+            <a:ext cx="10972080" cy="3976920"/>
+          </a:xfrm>
+          <a:prstGeom prst="rect">
+            <a:avLst/>
+          </a:prstGeom>
+          <a:noFill/>
+          <a:ln w="0">
+            <a:noFill/>
+          </a:ln>
+        </p:spPr>
+        <p:txBody>
+          <a:bodyPr lIns="0" rIns="0" tIns="0" bIns="0" anchor="t">
+            <a:normAutofit/>
+          </a:bodyPr>
+          <a:p>
+            <a:pPr marL="432000" indent="-324000">
+              <a:spcBef>
+                <a:spcPts val="1417"/>
+              </a:spcBef>
+              <a:buClr>
+                <a:srgbClr val="000000"/>
+              </a:buClr>
+              <a:buSzPct val="45000"/>
+              <a:buFont typeface="Wingdings" charset="2"/>
+              <a:buChar char=""/>
+            </a:pPr>
+            <a:r>
+              <a:rPr b="0" lang="en-IN" sz="1800" spc="-1" strike="noStrike">
+                <a:latin typeface="Arial"/>
+              </a:rPr>
+              <a:t>Click to edit the outline text format</a:t>
+            </a:r>
+            <a:endParaRPr b="0" lang="en-IN" sz="1800" spc="-1" strike="noStrike">
+              <a:latin typeface="Arial"/>
+            </a:endParaRPr>
+          </a:p>
+          <a:p>
+            <a:pPr lvl="1" marL="864000" indent="-324000">
+              <a:spcBef>
+                <a:spcPts val="1134"/>
+              </a:spcBef>
+              <a:buClr>
+                <a:srgbClr val="000000"/>
+              </a:buClr>
+              <a:buSzPct val="75000"/>
+              <a:buFont typeface="Symbol" charset="2"/>
+              <a:buChar char=""/>
+            </a:pPr>
+            <a:r>
+              <a:rPr b="0" lang="en-IN" sz="1800" spc="-1" strike="noStrike">
+                <a:latin typeface="Arial"/>
+              </a:rPr>
+              <a:t>Second Outline Level</a:t>
+            </a:r>
+            <a:endParaRPr b="0" lang="en-IN" sz="1800" spc="-1" strike="noStrike">
+              <a:latin typeface="Arial"/>
+            </a:endParaRPr>
+          </a:p>
+          <a:p>
+            <a:pPr lvl="2" marL="1296000" indent="-288000">
+              <a:spcBef>
+                <a:spcPts val="850"/>
+              </a:spcBef>
+              <a:buClr>
+                <a:srgbClr val="000000"/>
+              </a:buClr>
+              <a:buSzPct val="45000"/>
+              <a:buFont typeface="Wingdings" charset="2"/>
+              <a:buChar char=""/>
+            </a:pPr>
+            <a:r>
+              <a:rPr b="0" lang="en-IN" sz="1800" spc="-1" strike="noStrike">
+                <a:latin typeface="Arial"/>
+              </a:rPr>
+              <a:t>Third Outline Level</a:t>
+            </a:r>
+            <a:endParaRPr b="0" lang="en-IN" sz="1800" spc="-1" strike="noStrike">
+              <a:latin typeface="Arial"/>
+            </a:endParaRPr>
+          </a:p>
+          <a:p>
+            <a:pPr lvl="3" marL="1728000" indent="-216000">
+              <a:spcBef>
+                <a:spcPts val="567"/>
+              </a:spcBef>
+              <a:buClr>
+                <a:srgbClr val="000000"/>
+              </a:buClr>
+              <a:buSzPct val="75000"/>
+              <a:buFont typeface="Symbol" charset="2"/>
+              <a:buChar char=""/>
+            </a:pPr>
+            <a:r>
+              <a:rPr b="0" lang="en-IN" sz="1800" spc="-1" strike="noStrike">
+                <a:latin typeface="Arial"/>
+              </a:rPr>
+              <a:t>Fourth Outline Level</a:t>
+            </a:r>
+            <a:endParaRPr b="0" lang="en-IN" sz="1800" spc="-1" strike="noStrike">
+              <a:latin typeface="Arial"/>
+            </a:endParaRPr>
+          </a:p>
+          <a:p>
+            <a:pPr lvl="4" marL="2160000" indent="-216000">
+              <a:spcBef>
+                <a:spcPts val="283"/>
+              </a:spcBef>
+              <a:buClr>
+                <a:srgbClr val="000000"/>
+              </a:buClr>
+              <a:buSzPct val="45000"/>
+              <a:buFont typeface="Wingdings" charset="2"/>
+              <a:buChar char=""/>
+            </a:pPr>
+            <a:r>
+              <a:rPr b="0" lang="en-IN" sz="1800" spc="-1" strike="noStrike">
+                <a:latin typeface="Arial"/>
+              </a:rPr>
+              <a:t>Fifth Outline Level</a:t>
+            </a:r>
+            <a:endParaRPr b="0" lang="en-IN" sz="1800" spc="-1" strike="noStrike">
+              <a:latin typeface="Arial"/>
+            </a:endParaRPr>
+          </a:p>
+          <a:p>
+            <a:pPr lvl="5" marL="2592000" indent="-216000">
+              <a:spcBef>
+                <a:spcPts val="283"/>
+              </a:spcBef>
+              <a:buClr>
+                <a:srgbClr val="000000"/>
+              </a:buClr>
+              <a:buSzPct val="45000"/>
+              <a:buFont typeface="Wingdings" charset="2"/>
+              <a:buChar char=""/>
+            </a:pPr>
+            <a:r>
+              <a:rPr b="0" lang="en-IN" sz="1800" spc="-1" strike="noStrike">
+                <a:latin typeface="Arial"/>
+              </a:rPr>
+              <a:t>Sixth Outline Level</a:t>
+            </a:r>
+            <a:endParaRPr b="0" lang="en-IN" sz="1800" spc="-1" strike="noStrike">
+              <a:latin typeface="Arial"/>
+            </a:endParaRPr>
+          </a:p>
+          <a:p>
+            <a:pPr lvl="6" marL="3024000" indent="-216000">
+              <a:spcBef>
+                <a:spcPts val="283"/>
+              </a:spcBef>
+              <a:buClr>
+                <a:srgbClr val="000000"/>
+              </a:buClr>
+              <a:buSzPct val="45000"/>
+              <a:buFont typeface="Wingdings" charset="2"/>
+              <a:buChar char=""/>
+            </a:pPr>
+            <a:r>
+              <a:rPr b="0" lang="en-IN" sz="1800" spc="-1" strike="noStrike">
+                <a:latin typeface="Arial"/>
+              </a:rPr>
+              <a:t>Seventh Outline Level</a:t>
+            </a:r>
+            <a:endParaRPr b="0" lang="en-IN" sz="1800" spc="-1" strike="noStrike">
+              <a:latin typeface="Arial"/>
+            </a:endParaRPr>
+          </a:p>
+        </p:txBody>
+      </p:sp>
+      <p:sp>
+        <p:nvSpPr>
+          <p:cNvPr id="2" name="PlaceHolder 3"/>
+          <p:cNvSpPr>
+            <a:spLocks noGrp="1"/>
+          </p:cNvSpPr>
+          <p:nvPr>
             <p:ph type="ftr" idx="1"/>
           </p:nvPr>
         </p:nvSpPr>
         <p:spPr>
           <a:xfrm>
             <a:off x="4165560" y="6356520"/>
-            <a:ext cx="3859920" cy="364320"/>
+            <a:ext cx="3859560" cy="363960"/>
           </a:xfrm>
           <a:prstGeom prst="rect">
             <a:avLst/>
@@ -5820,7 +6003,7 @@
                 </a:solidFill>
                 <a:latin typeface="TradeGothic"/>
               </a:rPr>
-              <a:t> </a:t>
+              <a:t>&lt;footer&gt;</a:t>
             </a:r>
             <a:endParaRPr b="0" lang="en-IN" sz="1200" spc="-1" strike="noStrike">
               <a:latin typeface="Times New Roman"/>
@@ -5830,7 +6013,7 @@
       </p:sp>
       <p:sp>
         <p:nvSpPr>
-          <p:cNvPr id="2" name="PlaceHolder 3"/>
+          <p:cNvPr id="3" name="PlaceHolder 4"/>
           <p:cNvSpPr>
             <a:spLocks noGrp="1"/>
           </p:cNvSpPr>
@@ -5841,7 +6024,7 @@
         <p:spPr>
           <a:xfrm>
             <a:off x="8737560" y="6356520"/>
-            <a:ext cx="2844000" cy="364320"/>
+            <a:ext cx="2843640" cy="363960"/>
           </a:xfrm>
           <a:prstGeom prst="rect">
             <a:avLst/>
@@ -5877,7 +6060,7 @@
               </a:lnSpc>
               <a:buNone/>
             </a:pPr>
-            <a:fld id="{686C2D6F-984F-4F71-86CD-46E941E2763F}" type="slidenum">
+            <a:fld id="{115B815A-1294-44B3-8D0D-C1619A2BF932}" type="slidenum">
               <a:rPr b="0" lang="en-US" sz="1200" spc="-1" strike="noStrike">
                 <a:solidFill>
                   <a:srgbClr val="898989"/>
@@ -5885,7 +6068,7 @@
                 <a:latin typeface="TradeGothic"/>
                 <a:ea typeface="ＭＳ Ｐゴシック"/>
               </a:rPr>
-              <a:t>1</a:t>
+              <a:t>&lt;number&gt;</a:t>
             </a:fld>
             <a:endParaRPr b="0" lang="en-IN" sz="1200" spc="-1" strike="noStrike">
               <a:latin typeface="Times New Roman"/>
@@ -5895,7 +6078,7 @@
       </p:sp>
       <p:sp>
         <p:nvSpPr>
-          <p:cNvPr id="3" name="PlaceHolder 4"/>
+          <p:cNvPr id="4" name="PlaceHolder 5"/>
           <p:cNvSpPr>
             <a:spLocks noGrp="1"/>
           </p:cNvSpPr>
@@ -5906,7 +6089,7 @@
         <p:spPr>
           <a:xfrm>
             <a:off x="609480" y="6356520"/>
-            <a:ext cx="2844000" cy="364320"/>
+            <a:ext cx="2843640" cy="363960"/>
           </a:xfrm>
           <a:prstGeom prst="rect">
             <a:avLst/>
@@ -5932,193 +6115,10 @@
               <a:rPr b="0" lang="en-IN" sz="1400" spc="-1" strike="noStrike">
                 <a:latin typeface="Times New Roman"/>
               </a:rPr>
-              <a:t> </a:t>
+              <a:t>&lt;date/time&gt;</a:t>
             </a:r>
             <a:endParaRPr b="0" lang="en-IN" sz="1400" spc="-1" strike="noStrike">
               <a:latin typeface="Times New Roman"/>
-            </a:endParaRPr>
-          </a:p>
-        </p:txBody>
-      </p:sp>
-      <p:sp>
-        <p:nvSpPr>
-          <p:cNvPr id="4" name="PlaceHolder 5"/>
-          <p:cNvSpPr>
-            <a:spLocks noGrp="1"/>
-          </p:cNvSpPr>
-          <p:nvPr>
-            <p:ph type="body"/>
-          </p:nvPr>
-        </p:nvSpPr>
-        <p:spPr>
-          <a:xfrm>
-            <a:off x="609480" y="1604520"/>
-            <a:ext cx="10972440" cy="3977280"/>
-          </a:xfrm>
-          <a:prstGeom prst="rect">
-            <a:avLst/>
-          </a:prstGeom>
-          <a:noFill/>
-          <a:ln w="0">
-            <a:noFill/>
-          </a:ln>
-        </p:spPr>
-        <p:txBody>
-          <a:bodyPr lIns="0" rIns="0" tIns="0" bIns="0" anchor="t">
-            <a:normAutofit/>
-          </a:bodyPr>
-          <a:p>
-            <a:pPr marL="432000" indent="-324000">
-              <a:spcBef>
-                <a:spcPts val="1417"/>
-              </a:spcBef>
-              <a:buClr>
-                <a:srgbClr val="000000"/>
-              </a:buClr>
-              <a:buSzPct val="45000"/>
-              <a:buFont typeface="Wingdings" charset="2"/>
-              <a:buChar char=""/>
-            </a:pPr>
-            <a:r>
-              <a:rPr b="0" lang="en-IN" sz="3200" spc="-1" strike="noStrike">
-                <a:latin typeface="Arial"/>
-              </a:rPr>
-              <a:t>Click to edit the outline text format</a:t>
-            </a:r>
-            <a:endParaRPr b="0" lang="en-IN" sz="3200" spc="-1" strike="noStrike">
-              <a:latin typeface="Arial"/>
-            </a:endParaRPr>
-          </a:p>
-          <a:p>
-            <a:pPr lvl="1" marL="864000" indent="-324000">
-              <a:spcBef>
-                <a:spcPts val="1134"/>
-              </a:spcBef>
-              <a:buClr>
-                <a:srgbClr val="000000"/>
-              </a:buClr>
-              <a:buSzPct val="75000"/>
-              <a:buFont typeface="Symbol" charset="2"/>
-              <a:buChar char=""/>
-            </a:pPr>
-            <a:r>
-              <a:rPr b="0" lang="en-IN" sz="2800" spc="-1" strike="noStrike">
-                <a:latin typeface="Arial"/>
-              </a:rPr>
-              <a:t>Second Outline Level</a:t>
-            </a:r>
-            <a:endParaRPr b="0" lang="en-IN" sz="2800" spc="-1" strike="noStrike">
-              <a:latin typeface="Arial"/>
-            </a:endParaRPr>
-          </a:p>
-          <a:p>
-            <a:pPr lvl="2" marL="1296000" indent="-288000">
-              <a:spcBef>
-                <a:spcPts val="850"/>
-              </a:spcBef>
-              <a:buClr>
-                <a:srgbClr val="000000"/>
-              </a:buClr>
-              <a:buSzPct val="45000"/>
-              <a:buFont typeface="Wingdings" charset="2"/>
-              <a:buChar char=""/>
-            </a:pPr>
-            <a:r>
-              <a:rPr b="0" lang="en-IN" sz="2400" spc="-1" strike="noStrike">
-                <a:latin typeface="Arial"/>
-              </a:rPr>
-              <a:t>Third Outline Level</a:t>
-            </a:r>
-            <a:endParaRPr b="0" lang="en-IN" sz="2400" spc="-1" strike="noStrike">
-              <a:latin typeface="Arial"/>
-            </a:endParaRPr>
-          </a:p>
-          <a:p>
-            <a:pPr lvl="3" marL="1728000" indent="-216000">
-              <a:spcBef>
-                <a:spcPts val="567"/>
-              </a:spcBef>
-              <a:buClr>
-                <a:srgbClr val="000000"/>
-              </a:buClr>
-              <a:buSzPct val="75000"/>
-              <a:buFont typeface="Symbol" charset="2"/>
-              <a:buChar char=""/>
-            </a:pPr>
-            <a:r>
-              <a:rPr b="0" lang="en-IN" sz="2000" spc="-1" strike="noStrike">
-                <a:latin typeface="Arial"/>
-              </a:rPr>
-              <a:t>Fourth Outline Level</a:t>
-            </a:r>
-            <a:endParaRPr b="0" lang="en-IN" sz="2000" spc="-1" strike="noStrike">
-              <a:latin typeface="Arial"/>
-            </a:endParaRPr>
-          </a:p>
-          <a:p>
-            <a:pPr lvl="4" marL="2160000" indent="-216000">
-              <a:spcBef>
-                <a:spcPts val="283"/>
-              </a:spcBef>
-              <a:buClr>
-                <a:srgbClr val="000000"/>
-              </a:buClr>
-              <a:buSzPct val="45000"/>
-              <a:buFont typeface="Wingdings" charset="2"/>
-              <a:buChar char=""/>
-            </a:pPr>
-            <a:r>
-              <a:rPr b="0" lang="en-IN" sz="2000" spc="-1" strike="noStrike">
-                <a:latin typeface="Arial"/>
-              </a:rPr>
-              <a:t>Fifth Outline Level</a:t>
-            </a:r>
-            <a:endParaRPr b="0" lang="en-IN" sz="2000" spc="-1" strike="noStrike">
-              <a:latin typeface="Arial"/>
-            </a:endParaRPr>
-          </a:p>
-          <a:p>
-            <a:pPr lvl="5" marL="2592000" indent="-216000">
-              <a:spcBef>
-                <a:spcPts val="283"/>
-              </a:spcBef>
-              <a:buClr>
-                <a:srgbClr val="000000"/>
-              </a:buClr>
-              <a:buSzPct val="45000"/>
-              <a:buFont typeface="Wingdings" charset="2"/>
-              <a:buChar char=""/>
-            </a:pPr>
-            <a:r>
-              <a:rPr b="0" lang="en-IN" sz="2000" spc="-1" strike="noStrike">
-                <a:latin typeface="Arial"/>
-              </a:rPr>
-              <a:t>Sixth Outline Level</a:t>
-            </a:r>
-            <a:endParaRPr b="0" lang="en-IN" sz="2000" spc="-1" strike="noStrike">
-              <a:latin typeface="Arial"/>
-            </a:endParaRPr>
-          </a:p>
-          <a:p>
-            <a:pPr lvl="6" marL="3024000" indent="-216000">
-              <a:spcBef>
-                <a:spcPts val="283"/>
-              </a:spcBef>
-              <a:buClr>
-                <a:srgbClr val="000000"/>
-              </a:buClr>
-              <a:buSzPct val="45000"/>
-              <a:buFont typeface="Wingdings" charset="2"/>
-              <a:buChar char=""/>
-            </a:pPr>
-            <a:r>
-              <a:rPr b="0" lang="en-IN" sz="2000" spc="-1" strike="noStrike">
-                <a:latin typeface="Arial"/>
-              </a:rPr>
-              <a:t>Seventh Outline Level</a:t>
-            </a:r>
-            <a:endParaRPr b="0" lang="en-IN" sz="2000" spc="-1" strike="noStrike">
-              <a:latin typeface="Arial"/>
             </a:endParaRPr>
           </a:p>
         </p:txBody>
@@ -6180,7 +6180,7 @@
         <p:spPr>
           <a:xfrm>
             <a:off x="4165560" y="6356520"/>
-            <a:ext cx="3859920" cy="364320"/>
+            <a:ext cx="3859560" cy="363960"/>
           </a:xfrm>
           <a:prstGeom prst="rect">
             <a:avLst/>
@@ -6243,7 +6243,7 @@
         <p:spPr>
           <a:xfrm>
             <a:off x="8737560" y="6356520"/>
-            <a:ext cx="2844000" cy="364320"/>
+            <a:ext cx="2843640" cy="363960"/>
           </a:xfrm>
           <a:prstGeom prst="rect">
             <a:avLst/>
@@ -6279,7 +6279,7 @@
               </a:lnSpc>
               <a:buNone/>
             </a:pPr>
-            <a:fld id="{F66C883F-2368-4309-B9B6-329B92DB16E3}" type="slidenum">
+            <a:fld id="{1D8BBF78-1F55-41D1-BE4B-EA4AB89958BD}" type="slidenum">
               <a:rPr b="0" lang="en-US" sz="1200" spc="-1" strike="noStrike">
                 <a:solidFill>
                   <a:srgbClr val="898989"/>
@@ -6308,7 +6308,7 @@
         <p:spPr>
           <a:xfrm>
             <a:off x="609480" y="6356520"/>
-            <a:ext cx="2844000" cy="364320"/>
+            <a:ext cx="2843640" cy="363960"/>
           </a:xfrm>
           <a:prstGeom prst="rect">
             <a:avLst/>
@@ -6621,7 +6621,7 @@
         <p:spPr>
           <a:xfrm>
             <a:off x="1523880" y="0"/>
-            <a:ext cx="9143280" cy="6857280"/>
+            <a:ext cx="9142920" cy="6856920"/>
           </a:xfrm>
           <a:prstGeom prst="rect">
             <a:avLst/>
@@ -6657,7 +6657,7 @@
         <p:spPr>
           <a:xfrm>
             <a:off x="5656680" y="851400"/>
-            <a:ext cx="4637880" cy="5154120"/>
+            <a:ext cx="4637520" cy="5153760"/>
           </a:xfrm>
           <a:custGeom>
             <a:avLst/>
@@ -7039,7 +7039,7 @@
         <p:spPr>
           <a:xfrm>
             <a:off x="6854760" y="1715760"/>
-            <a:ext cx="3202920" cy="3425400"/>
+            <a:ext cx="3202560" cy="3425040"/>
           </a:xfrm>
           <a:prstGeom prst="rect">
             <a:avLst/>
@@ -7062,7 +7062,7 @@
         <p:spPr>
           <a:xfrm>
             <a:off x="1245600" y="648720"/>
-            <a:ext cx="8533800" cy="1751760"/>
+            <a:ext cx="8533440" cy="1751400"/>
           </a:xfrm>
           <a:prstGeom prst="rect">
             <a:avLst/>
@@ -7135,7 +7135,7 @@
         <p:spPr>
           <a:xfrm>
             <a:off x="331200" y="-526680"/>
-            <a:ext cx="10362600" cy="2075760"/>
+            <a:ext cx="10362240" cy="2075400"/>
           </a:xfrm>
           <a:prstGeom prst="rect">
             <a:avLst/>
@@ -7181,7 +7181,7 @@
         <p:spPr>
           <a:xfrm>
             <a:off x="-267120" y="2446920"/>
-            <a:ext cx="5923800" cy="4753080"/>
+            <a:ext cx="5923440" cy="4753080"/>
           </a:xfrm>
           <a:prstGeom prst="rect">
             <a:avLst/>
@@ -7231,7 +7231,7 @@
                 <a:latin typeface="Arial"/>
                 <a:ea typeface="ＭＳ Ｐゴシック"/>
               </a:rPr>
-              <a:t>Problem Statement ID –hello</a:t>
+              <a:t>Problem Statement ID –</a:t>
             </a:r>
             <a:endParaRPr b="0" lang="en-IN" sz="2400" spc="-1" strike="noStrike">
               <a:latin typeface="Arial"/>
@@ -7377,7 +7377,7 @@
         <p:spPr>
           <a:xfrm>
             <a:off x="9780120" y="1440"/>
-            <a:ext cx="2249280" cy="1061640"/>
+            <a:ext cx="2248920" cy="1061280"/>
           </a:xfrm>
           <a:prstGeom prst="rect">
             <a:avLst/>
@@ -7426,7 +7426,7 @@
         <p:spPr>
           <a:xfrm>
             <a:off x="0" y="6354720"/>
-            <a:ext cx="12191400" cy="502560"/>
+            <a:ext cx="12191040" cy="502200"/>
           </a:xfrm>
           <a:prstGeom prst="rect">
             <a:avLst/>
@@ -7465,7 +7465,7 @@
         <p:spPr>
           <a:xfrm>
             <a:off x="182880" y="0"/>
-            <a:ext cx="10972080" cy="1142280"/>
+            <a:ext cx="10971720" cy="1141920"/>
           </a:xfrm>
           <a:prstGeom prst="rect">
             <a:avLst/>
@@ -7513,8 +7513,8 @@
         </p:nvSpPr>
         <p:spPr>
           <a:xfrm>
-            <a:off x="0" y="2064960"/>
-            <a:ext cx="12191400" cy="2466720"/>
+            <a:off x="72000" y="2064960"/>
+            <a:ext cx="12191040" cy="2466720"/>
           </a:xfrm>
           <a:prstGeom prst="rect">
             <a:avLst/>
@@ -7682,7 +7682,7 @@
         <p:spPr>
           <a:xfrm>
             <a:off x="8737560" y="6356520"/>
-            <a:ext cx="2844000" cy="364320"/>
+            <a:ext cx="2843640" cy="363960"/>
           </a:xfrm>
           <a:prstGeom prst="rect">
             <a:avLst/>
@@ -7718,7 +7718,7 @@
               </a:lnSpc>
               <a:buNone/>
             </a:pPr>
-            <a:fld id="{00D9E125-287B-480D-844E-F98713414818}" type="slidenum">
+            <a:fld id="{E724714D-8E22-4202-98AC-5DF8C75C506D}" type="slidenum">
               <a:rPr b="1" lang="en-US" sz="1200" spc="-1" strike="noStrike">
                 <a:solidFill>
                   <a:srgbClr val="ffffff"/>
@@ -7747,7 +7747,7 @@
         <p:spPr>
           <a:xfrm>
             <a:off x="4648320" y="6356520"/>
-            <a:ext cx="3203280" cy="364320"/>
+            <a:ext cx="3202920" cy="363960"/>
           </a:xfrm>
           <a:prstGeom prst="rect">
             <a:avLst/>
@@ -7806,7 +7806,7 @@
         <p:spPr>
           <a:xfrm>
             <a:off x="329760" y="252360"/>
-            <a:ext cx="1251000" cy="806760"/>
+            <a:ext cx="1250640" cy="806400"/>
           </a:xfrm>
           <a:prstGeom prst="ellipse">
             <a:avLst/>
@@ -7873,7 +7873,7 @@
         <p:spPr>
           <a:xfrm>
             <a:off x="9780120" y="1440"/>
-            <a:ext cx="2249280" cy="1061640"/>
+            <a:ext cx="2248920" cy="1061280"/>
           </a:xfrm>
           <a:prstGeom prst="rect">
             <a:avLst/>
@@ -7922,7 +7922,7 @@
         <p:spPr>
           <a:xfrm>
             <a:off x="0" y="6354720"/>
-            <a:ext cx="12191400" cy="502560"/>
+            <a:ext cx="12191040" cy="502200"/>
           </a:xfrm>
           <a:prstGeom prst="rect">
             <a:avLst/>
@@ -7961,7 +7961,7 @@
         <p:spPr>
           <a:xfrm>
             <a:off x="609480" y="-47520"/>
-            <a:ext cx="10972080" cy="1142280"/>
+            <a:ext cx="10971720" cy="1141920"/>
           </a:xfrm>
           <a:prstGeom prst="rect">
             <a:avLst/>
@@ -8007,7 +8007,7 @@
         <p:spPr>
           <a:xfrm>
             <a:off x="609480" y="2533680"/>
-            <a:ext cx="9384480" cy="1796040"/>
+            <a:ext cx="9384120" cy="1796040"/>
           </a:xfrm>
           <a:prstGeom prst="rect">
             <a:avLst/>
@@ -8092,7 +8092,7 @@
         <p:spPr>
           <a:xfrm>
             <a:off x="8737560" y="6356520"/>
-            <a:ext cx="2844000" cy="364320"/>
+            <a:ext cx="2843640" cy="363960"/>
           </a:xfrm>
           <a:prstGeom prst="rect">
             <a:avLst/>
@@ -8128,7 +8128,7 @@
               </a:lnSpc>
               <a:buNone/>
             </a:pPr>
-            <a:fld id="{A9F5B8B2-0A9F-46A6-95E2-0DA923BB5324}" type="slidenum">
+            <a:fld id="{5E40592A-E24F-4933-9F1B-02287B018DDB}" type="slidenum">
               <a:rPr b="1" lang="en-US" sz="1200" spc="-1" strike="noStrike">
                 <a:solidFill>
                   <a:srgbClr val="ffffff"/>
@@ -8157,7 +8157,7 @@
         <p:spPr>
           <a:xfrm>
             <a:off x="4648320" y="6356520"/>
-            <a:ext cx="3203280" cy="364320"/>
+            <a:ext cx="3202920" cy="363960"/>
           </a:xfrm>
           <a:prstGeom prst="rect">
             <a:avLst/>
@@ -8216,7 +8216,7 @@
         <p:spPr>
           <a:xfrm>
             <a:off x="329760" y="252360"/>
-            <a:ext cx="1251000" cy="806760"/>
+            <a:ext cx="1250640" cy="806400"/>
           </a:xfrm>
           <a:prstGeom prst="ellipse">
             <a:avLst/>
@@ -8283,7 +8283,7 @@
         <p:spPr>
           <a:xfrm>
             <a:off x="9780120" y="1440"/>
-            <a:ext cx="2249280" cy="1061640"/>
+            <a:ext cx="2248920" cy="1061280"/>
           </a:xfrm>
           <a:prstGeom prst="rect">
             <a:avLst/>
@@ -8332,7 +8332,7 @@
         <p:spPr>
           <a:xfrm>
             <a:off x="0" y="6354720"/>
-            <a:ext cx="12191400" cy="502560"/>
+            <a:ext cx="12191040" cy="502200"/>
           </a:xfrm>
           <a:prstGeom prst="rect">
             <a:avLst/>
@@ -8371,7 +8371,7 @@
         <p:spPr>
           <a:xfrm>
             <a:off x="609480" y="-47520"/>
-            <a:ext cx="10972080" cy="1142280"/>
+            <a:ext cx="10971720" cy="1141920"/>
           </a:xfrm>
           <a:prstGeom prst="rect">
             <a:avLst/>
@@ -8417,7 +8417,7 @@
         <p:spPr>
           <a:xfrm>
             <a:off x="609480" y="2533680"/>
-            <a:ext cx="9384480" cy="1369440"/>
+            <a:ext cx="9384120" cy="1369440"/>
           </a:xfrm>
           <a:prstGeom prst="rect">
             <a:avLst/>
@@ -8527,7 +8527,7 @@
         <p:spPr>
           <a:xfrm>
             <a:off x="8737560" y="6356520"/>
-            <a:ext cx="2844000" cy="364320"/>
+            <a:ext cx="2843640" cy="363960"/>
           </a:xfrm>
           <a:prstGeom prst="rect">
             <a:avLst/>
@@ -8569,7 +8569,7 @@
                 <a:tab algn="l" pos="0"/>
               </a:tabLst>
             </a:pPr>
-            <a:fld id="{097693EE-CEEE-4A5E-A0BE-F807D81B4391}" type="slidenum">
+            <a:fld id="{62A89959-386E-45D0-B9C4-6D90C6F01CF8}" type="slidenum">
               <a:rPr b="1" lang="en-US" sz="1200" spc="-1" strike="noStrike">
                 <a:solidFill>
                   <a:srgbClr val="ffffff"/>
@@ -8598,7 +8598,7 @@
         <p:spPr>
           <a:xfrm>
             <a:off x="4648320" y="6356520"/>
-            <a:ext cx="3203280" cy="364320"/>
+            <a:ext cx="3202920" cy="363960"/>
           </a:xfrm>
           <a:prstGeom prst="rect">
             <a:avLst/>
@@ -8663,7 +8663,7 @@
         <p:spPr>
           <a:xfrm>
             <a:off x="329760" y="252360"/>
-            <a:ext cx="1251000" cy="806760"/>
+            <a:ext cx="1250640" cy="806400"/>
           </a:xfrm>
           <a:prstGeom prst="ellipse">
             <a:avLst/>
@@ -8730,7 +8730,7 @@
         <p:spPr>
           <a:xfrm>
             <a:off x="9780120" y="1440"/>
-            <a:ext cx="2249280" cy="1061640"/>
+            <a:ext cx="2248920" cy="1061280"/>
           </a:xfrm>
           <a:prstGeom prst="rect">
             <a:avLst/>
@@ -8779,7 +8779,7 @@
         <p:spPr>
           <a:xfrm>
             <a:off x="0" y="6354720"/>
-            <a:ext cx="12191400" cy="502560"/>
+            <a:ext cx="12191040" cy="502200"/>
           </a:xfrm>
           <a:prstGeom prst="rect">
             <a:avLst/>
@@ -8818,7 +8818,7 @@
         <p:spPr>
           <a:xfrm>
             <a:off x="609480" y="-47520"/>
-            <a:ext cx="10972080" cy="1142280"/>
+            <a:ext cx="10971720" cy="1141920"/>
           </a:xfrm>
           <a:prstGeom prst="rect">
             <a:avLst/>
@@ -8864,7 +8864,7 @@
         <p:spPr>
           <a:xfrm>
             <a:off x="609480" y="2533680"/>
-            <a:ext cx="9384480" cy="1369440"/>
+            <a:ext cx="9384120" cy="1369440"/>
           </a:xfrm>
           <a:prstGeom prst="rect">
             <a:avLst/>
@@ -8949,7 +8949,7 @@
         <p:spPr>
           <a:xfrm>
             <a:off x="8737560" y="6356520"/>
-            <a:ext cx="2844000" cy="364320"/>
+            <a:ext cx="2843640" cy="363960"/>
           </a:xfrm>
           <a:prstGeom prst="rect">
             <a:avLst/>
@@ -8991,7 +8991,7 @@
                 <a:tab algn="l" pos="0"/>
               </a:tabLst>
             </a:pPr>
-            <a:fld id="{9F5A9CC5-A8F1-498D-A163-D390EB6C17B3}" type="slidenum">
+            <a:fld id="{DE00E229-B67D-4BF6-BC59-7375C5A8ADD5}" type="slidenum">
               <a:rPr b="1" lang="en-US" sz="1200" spc="-1" strike="noStrike">
                 <a:solidFill>
                   <a:srgbClr val="ffffff"/>
@@ -9020,7 +9020,7 @@
         <p:spPr>
           <a:xfrm>
             <a:off x="4648320" y="6356520"/>
-            <a:ext cx="3203280" cy="364320"/>
+            <a:ext cx="3202920" cy="363960"/>
           </a:xfrm>
           <a:prstGeom prst="rect">
             <a:avLst/>
@@ -9085,7 +9085,7 @@
         <p:spPr>
           <a:xfrm>
             <a:off x="329760" y="252360"/>
-            <a:ext cx="1251000" cy="806760"/>
+            <a:ext cx="1250640" cy="806400"/>
           </a:xfrm>
           <a:prstGeom prst="ellipse">
             <a:avLst/>
@@ -9152,7 +9152,7 @@
         <p:spPr>
           <a:xfrm>
             <a:off x="9780120" y="1440"/>
-            <a:ext cx="2249280" cy="1061640"/>
+            <a:ext cx="2248920" cy="1061280"/>
           </a:xfrm>
           <a:prstGeom prst="rect">
             <a:avLst/>
@@ -9201,7 +9201,7 @@
         <p:spPr>
           <a:xfrm>
             <a:off x="0" y="6354720"/>
-            <a:ext cx="12191400" cy="502560"/>
+            <a:ext cx="12191040" cy="502200"/>
           </a:xfrm>
           <a:prstGeom prst="rect">
             <a:avLst/>
@@ -9240,7 +9240,7 @@
         <p:spPr>
           <a:xfrm>
             <a:off x="609480" y="-47520"/>
-            <a:ext cx="10972080" cy="1142280"/>
+            <a:ext cx="10971720" cy="1141920"/>
           </a:xfrm>
           <a:prstGeom prst="rect">
             <a:avLst/>
@@ -9286,7 +9286,7 @@
         <p:spPr>
           <a:xfrm>
             <a:off x="609480" y="2795400"/>
-            <a:ext cx="9384480" cy="516240"/>
+            <a:ext cx="9384120" cy="516240"/>
           </a:xfrm>
           <a:prstGeom prst="rect">
             <a:avLst/>
@@ -9346,7 +9346,7 @@
         <p:spPr>
           <a:xfrm>
             <a:off x="8737560" y="6356520"/>
-            <a:ext cx="2844000" cy="364320"/>
+            <a:ext cx="2843640" cy="363960"/>
           </a:xfrm>
           <a:prstGeom prst="rect">
             <a:avLst/>
@@ -9388,7 +9388,7 @@
                 <a:tab algn="l" pos="0"/>
               </a:tabLst>
             </a:pPr>
-            <a:fld id="{E9691297-C733-46DE-92D3-A0DC007ABC93}" type="slidenum">
+            <a:fld id="{39C1B53E-3607-443E-82A1-A61E50045F9D}" type="slidenum">
               <a:rPr b="1" lang="en-US" sz="1200" spc="-1" strike="noStrike">
                 <a:solidFill>
                   <a:srgbClr val="ffffff"/>
@@ -9417,7 +9417,7 @@
         <p:spPr>
           <a:xfrm>
             <a:off x="4648320" y="6356520"/>
-            <a:ext cx="3203280" cy="364320"/>
+            <a:ext cx="3202920" cy="363960"/>
           </a:xfrm>
           <a:prstGeom prst="rect">
             <a:avLst/>
@@ -9482,7 +9482,7 @@
         <p:spPr>
           <a:xfrm>
             <a:off x="329760" y="252360"/>
-            <a:ext cx="1251000" cy="806760"/>
+            <a:ext cx="1250640" cy="806400"/>
           </a:xfrm>
           <a:prstGeom prst="ellipse">
             <a:avLst/>
@@ -9549,7 +9549,7 @@
         <p:spPr>
           <a:xfrm>
             <a:off x="9780120" y="1440"/>
-            <a:ext cx="2249280" cy="1061640"/>
+            <a:ext cx="2248920" cy="1061280"/>
           </a:xfrm>
           <a:prstGeom prst="rect">
             <a:avLst/>
@@ -9598,7 +9598,7 @@
         <p:spPr>
           <a:xfrm>
             <a:off x="0" y="6354720"/>
-            <a:ext cx="12191400" cy="502560"/>
+            <a:ext cx="12191040" cy="502200"/>
           </a:xfrm>
           <a:prstGeom prst="rect">
             <a:avLst/>
@@ -9637,7 +9637,7 @@
         <p:spPr>
           <a:xfrm>
             <a:off x="8737560" y="6356520"/>
-            <a:ext cx="2844000" cy="364320"/>
+            <a:ext cx="2843640" cy="363960"/>
           </a:xfrm>
           <a:prstGeom prst="rect">
             <a:avLst/>
@@ -9679,7 +9679,7 @@
                 <a:tab algn="l" pos="0"/>
               </a:tabLst>
             </a:pPr>
-            <a:fld id="{D09B2206-7291-430D-9054-CC98CCCB011F}" type="slidenum">
+            <a:fld id="{F5D5CD68-9D8C-473A-8D66-F3E46334690C}" type="slidenum">
               <a:rPr b="1" lang="en-US" sz="1200" spc="-1" strike="noStrike">
                 <a:solidFill>
                   <a:srgbClr val="ffffff"/>
@@ -9708,7 +9708,7 @@
         <p:spPr>
           <a:xfrm>
             <a:off x="4648320" y="6356520"/>
-            <a:ext cx="3203280" cy="364320"/>
+            <a:ext cx="3202920" cy="363960"/>
           </a:xfrm>
           <a:prstGeom prst="rect">
             <a:avLst/>
@@ -9773,7 +9773,7 @@
         <p:spPr>
           <a:xfrm>
             <a:off x="0" y="1791000"/>
-            <a:ext cx="12191400" cy="4318560"/>
+            <a:ext cx="12191040" cy="4318200"/>
           </a:xfrm>
           <a:prstGeom prst="round2DiagRect">
             <a:avLst>
@@ -9823,7 +9823,7 @@
         <p:spPr>
           <a:xfrm>
             <a:off x="367920" y="1915560"/>
-            <a:ext cx="11764080" cy="4069800"/>
+            <a:ext cx="11763720" cy="4069440"/>
           </a:xfrm>
           <a:prstGeom prst="rect">
             <a:avLst/>
@@ -10100,7 +10100,7 @@
         <p:spPr>
           <a:xfrm>
             <a:off x="1393200" y="106920"/>
-            <a:ext cx="8409960" cy="638280"/>
+            <a:ext cx="8409600" cy="638280"/>
           </a:xfrm>
           <a:prstGeom prst="rect">
             <a:avLst/>
@@ -10152,7 +10152,7 @@
         <p:spPr>
           <a:xfrm>
             <a:off x="602280" y="1181880"/>
-            <a:ext cx="9556920" cy="336240"/>
+            <a:ext cx="9556560" cy="336240"/>
           </a:xfrm>
           <a:prstGeom prst="rect">
             <a:avLst/>
@@ -10211,7 +10211,7 @@
         <p:spPr>
           <a:xfrm>
             <a:off x="9780120" y="1440"/>
-            <a:ext cx="2249280" cy="1061640"/>
+            <a:ext cx="2248920" cy="1061280"/>
           </a:xfrm>
           <a:prstGeom prst="rect">
             <a:avLst/>
